--- a/engenharia-software/software-corporativo/boas-praticas/aula-07-JWT/spring-security.pptx
+++ b/engenharia-software/software-corporativo/boas-praticas/aula-07-JWT/spring-security.pptx
@@ -4,10 +4,26 @@
   <p:sldMasterIdLst>
     <p:sldMasterId id="2147483677" r:id="rId1"/>
   </p:sldMasterIdLst>
+  <p:notesMasterIdLst>
+    <p:notesMasterId r:id="rId18"/>
+  </p:notesMasterIdLst>
   <p:sldIdLst>
     <p:sldId id="256" r:id="rId2"/>
     <p:sldId id="278" r:id="rId3"/>
     <p:sldId id="297" r:id="rId4"/>
+    <p:sldId id="298" r:id="rId5"/>
+    <p:sldId id="301" r:id="rId6"/>
+    <p:sldId id="302" r:id="rId7"/>
+    <p:sldId id="303" r:id="rId8"/>
+    <p:sldId id="304" r:id="rId9"/>
+    <p:sldId id="259" r:id="rId10"/>
+    <p:sldId id="260" r:id="rId11"/>
+    <p:sldId id="261" r:id="rId12"/>
+    <p:sldId id="262" r:id="rId13"/>
+    <p:sldId id="263" r:id="rId14"/>
+    <p:sldId id="264" r:id="rId15"/>
+    <p:sldId id="265" r:id="rId16"/>
+    <p:sldId id="266" r:id="rId17"/>
   </p:sldIdLst>
   <p:sldSz cx="12192000" cy="6858000"/>
   <p:notesSz cx="6858000" cy="9144000"/>
@@ -114,6 +130,19 @@
             <p14:sldId id="256"/>
             <p14:sldId id="278"/>
             <p14:sldId id="297"/>
+            <p14:sldId id="298"/>
+            <p14:sldId id="301"/>
+            <p14:sldId id="302"/>
+            <p14:sldId id="303"/>
+            <p14:sldId id="304"/>
+            <p14:sldId id="259"/>
+            <p14:sldId id="260"/>
+            <p14:sldId id="261"/>
+            <p14:sldId id="262"/>
+            <p14:sldId id="263"/>
+            <p14:sldId id="264"/>
+            <p14:sldId id="265"/>
+            <p14:sldId id="266"/>
           </p14:sldIdLst>
         </p14:section>
       </p14:sectionLst>
@@ -134,6 +163,1011 @@
     </p:ext>
   </p:extLst>
 </p:presentation>
+</file>
+
+<file path=ppt/notesMasters/notesMaster1.xml><?xml version="1.0" encoding="utf-8"?>
+<p:notesMaster xmlns:a="http://schemas.openxmlformats.org/drawingml/2006/main" xmlns:r="http://schemas.openxmlformats.org/officeDocument/2006/relationships" xmlns:p="http://schemas.openxmlformats.org/presentationml/2006/main">
+  <p:cSld>
+    <p:bg>
+      <p:bgRef idx="1001">
+        <a:schemeClr val="bg1"/>
+      </p:bgRef>
+    </p:bg>
+    <p:spTree>
+      <p:nvGrpSpPr>
+        <p:cNvPr id="1" name=""/>
+        <p:cNvGrpSpPr/>
+        <p:nvPr/>
+      </p:nvGrpSpPr>
+      <p:grpSpPr>
+        <a:xfrm>
+          <a:off x="0" y="0"/>
+          <a:ext cx="0" cy="0"/>
+          <a:chOff x="0" y="0"/>
+          <a:chExt cx="0" cy="0"/>
+        </a:xfrm>
+      </p:grpSpPr>
+      <p:sp>
+        <p:nvSpPr>
+          <p:cNvPr id="2" name="Espaço Reservado para Cabeçalho 1"/>
+          <p:cNvSpPr>
+            <a:spLocks noGrp="1"/>
+          </p:cNvSpPr>
+          <p:nvPr>
+            <p:ph type="hdr" sz="quarter"/>
+          </p:nvPr>
+        </p:nvSpPr>
+        <p:spPr>
+          <a:xfrm>
+            <a:off x="0" y="0"/>
+            <a:ext cx="2971800" cy="458788"/>
+          </a:xfrm>
+          <a:prstGeom prst="rect">
+            <a:avLst/>
+          </a:prstGeom>
+        </p:spPr>
+        <p:txBody>
+          <a:bodyPr vert="horz" lIns="91440" tIns="45720" rIns="91440" bIns="45720" rtlCol="0"/>
+          <a:lstStyle>
+            <a:lvl1pPr algn="l">
+              <a:defRPr sz="1200"/>
+            </a:lvl1pPr>
+          </a:lstStyle>
+          <a:p>
+            <a:endParaRPr lang="pt-BR"/>
+          </a:p>
+        </p:txBody>
+      </p:sp>
+      <p:sp>
+        <p:nvSpPr>
+          <p:cNvPr id="3" name="Espaço Reservado para Data 2"/>
+          <p:cNvSpPr>
+            <a:spLocks noGrp="1"/>
+          </p:cNvSpPr>
+          <p:nvPr>
+            <p:ph type="dt" idx="1"/>
+          </p:nvPr>
+        </p:nvSpPr>
+        <p:spPr>
+          <a:xfrm>
+            <a:off x="3884613" y="0"/>
+            <a:ext cx="2971800" cy="458788"/>
+          </a:xfrm>
+          <a:prstGeom prst="rect">
+            <a:avLst/>
+          </a:prstGeom>
+        </p:spPr>
+        <p:txBody>
+          <a:bodyPr vert="horz" lIns="91440" tIns="45720" rIns="91440" bIns="45720" rtlCol="0"/>
+          <a:lstStyle>
+            <a:lvl1pPr algn="r">
+              <a:defRPr sz="1200"/>
+            </a:lvl1pPr>
+          </a:lstStyle>
+          <a:p>
+            <a:fld id="{87C27BCA-F434-4017-9BD8-33CEB0219D72}" type="datetimeFigureOut">
+              <a:rPr lang="pt-BR" smtClean="0"/>
+              <a:t>28/09/2026</a:t>
+            </a:fld>
+            <a:endParaRPr lang="pt-BR"/>
+          </a:p>
+        </p:txBody>
+      </p:sp>
+      <p:sp>
+        <p:nvSpPr>
+          <p:cNvPr id="4" name="Espaço Reservado para Imagem de Slide 3"/>
+          <p:cNvSpPr>
+            <a:spLocks noGrp="1" noRot="1" noChangeAspect="1"/>
+          </p:cNvSpPr>
+          <p:nvPr>
+            <p:ph type="sldImg" idx="2"/>
+          </p:nvPr>
+        </p:nvSpPr>
+        <p:spPr>
+          <a:xfrm>
+            <a:off x="685800" y="1143000"/>
+            <a:ext cx="5486400" cy="3086100"/>
+          </a:xfrm>
+          <a:prstGeom prst="rect">
+            <a:avLst/>
+          </a:prstGeom>
+          <a:noFill/>
+          <a:ln w="12700">
+            <a:solidFill>
+              <a:prstClr val="black"/>
+            </a:solidFill>
+          </a:ln>
+        </p:spPr>
+        <p:txBody>
+          <a:bodyPr vert="horz" lIns="91440" tIns="45720" rIns="91440" bIns="45720" rtlCol="0" anchor="ctr"/>
+          <a:lstStyle/>
+          <a:p>
+            <a:endParaRPr lang="pt-BR"/>
+          </a:p>
+        </p:txBody>
+      </p:sp>
+      <p:sp>
+        <p:nvSpPr>
+          <p:cNvPr id="5" name="Espaço Reservado para Anotações 4"/>
+          <p:cNvSpPr>
+            <a:spLocks noGrp="1"/>
+          </p:cNvSpPr>
+          <p:nvPr>
+            <p:ph type="body" sz="quarter" idx="3"/>
+          </p:nvPr>
+        </p:nvSpPr>
+        <p:spPr>
+          <a:xfrm>
+            <a:off x="685800" y="4400550"/>
+            <a:ext cx="5486400" cy="3600450"/>
+          </a:xfrm>
+          <a:prstGeom prst="rect">
+            <a:avLst/>
+          </a:prstGeom>
+        </p:spPr>
+        <p:txBody>
+          <a:bodyPr vert="horz" lIns="91440" tIns="45720" rIns="91440" bIns="45720" rtlCol="0"/>
+          <a:lstStyle/>
+          <a:p>
+            <a:pPr lvl="0"/>
+            <a:r>
+              <a:rPr lang="pt-BR"/>
+              <a:t>Clique para editar os estilos de texto Mestres</a:t>
+            </a:r>
+          </a:p>
+          <a:p>
+            <a:pPr lvl="1"/>
+            <a:r>
+              <a:rPr lang="pt-BR"/>
+              <a:t>Segundo nível</a:t>
+            </a:r>
+          </a:p>
+          <a:p>
+            <a:pPr lvl="2"/>
+            <a:r>
+              <a:rPr lang="pt-BR"/>
+              <a:t>Terceiro nível</a:t>
+            </a:r>
+          </a:p>
+          <a:p>
+            <a:pPr lvl="3"/>
+            <a:r>
+              <a:rPr lang="pt-BR"/>
+              <a:t>Quarto nível</a:t>
+            </a:r>
+          </a:p>
+          <a:p>
+            <a:pPr lvl="4"/>
+            <a:r>
+              <a:rPr lang="pt-BR"/>
+              <a:t>Quinto nível</a:t>
+            </a:r>
+          </a:p>
+        </p:txBody>
+      </p:sp>
+      <p:sp>
+        <p:nvSpPr>
+          <p:cNvPr id="6" name="Espaço Reservado para Rodapé 5"/>
+          <p:cNvSpPr>
+            <a:spLocks noGrp="1"/>
+          </p:cNvSpPr>
+          <p:nvPr>
+            <p:ph type="ftr" sz="quarter" idx="4"/>
+          </p:nvPr>
+        </p:nvSpPr>
+        <p:spPr>
+          <a:xfrm>
+            <a:off x="0" y="8685213"/>
+            <a:ext cx="2971800" cy="458787"/>
+          </a:xfrm>
+          <a:prstGeom prst="rect">
+            <a:avLst/>
+          </a:prstGeom>
+        </p:spPr>
+        <p:txBody>
+          <a:bodyPr vert="horz" lIns="91440" tIns="45720" rIns="91440" bIns="45720" rtlCol="0" anchor="b"/>
+          <a:lstStyle>
+            <a:lvl1pPr algn="l">
+              <a:defRPr sz="1200"/>
+            </a:lvl1pPr>
+          </a:lstStyle>
+          <a:p>
+            <a:endParaRPr lang="pt-BR"/>
+          </a:p>
+        </p:txBody>
+      </p:sp>
+      <p:sp>
+        <p:nvSpPr>
+          <p:cNvPr id="7" name="Espaço Reservado para Número de Slide 6"/>
+          <p:cNvSpPr>
+            <a:spLocks noGrp="1"/>
+          </p:cNvSpPr>
+          <p:nvPr>
+            <p:ph type="sldNum" sz="quarter" idx="5"/>
+          </p:nvPr>
+        </p:nvSpPr>
+        <p:spPr>
+          <a:xfrm>
+            <a:off x="3884613" y="8685213"/>
+            <a:ext cx="2971800" cy="458787"/>
+          </a:xfrm>
+          <a:prstGeom prst="rect">
+            <a:avLst/>
+          </a:prstGeom>
+        </p:spPr>
+        <p:txBody>
+          <a:bodyPr vert="horz" lIns="91440" tIns="45720" rIns="91440" bIns="45720" rtlCol="0" anchor="b"/>
+          <a:lstStyle>
+            <a:lvl1pPr algn="r">
+              <a:defRPr sz="1200"/>
+            </a:lvl1pPr>
+          </a:lstStyle>
+          <a:p>
+            <a:fld id="{8F32E6D2-070F-4BF4-86C0-53D883C4AF43}" type="slidenum">
+              <a:rPr lang="pt-BR" smtClean="0"/>
+              <a:t>‹nº›</a:t>
+            </a:fld>
+            <a:endParaRPr lang="pt-BR"/>
+          </a:p>
+        </p:txBody>
+      </p:sp>
+    </p:spTree>
+    <p:extLst>
+      <p:ext uri="{BB962C8B-B14F-4D97-AF65-F5344CB8AC3E}">
+        <p14:creationId xmlns:p14="http://schemas.microsoft.com/office/powerpoint/2010/main" val="1103752011"/>
+      </p:ext>
+    </p:extLst>
+  </p:cSld>
+  <p:clrMap bg1="lt1" tx1="dk1" bg2="lt2" tx2="dk2" accent1="accent1" accent2="accent2" accent3="accent3" accent4="accent4" accent5="accent5" accent6="accent6" hlink="hlink" folHlink="folHlink"/>
+  <p:notesStyle>
+    <a:lvl1pPr marL="0" algn="l" defTabSz="914400" rtl="0" eaLnBrk="1" latinLnBrk="0" hangingPunct="1">
+      <a:defRPr sz="1200" kern="1200">
+        <a:solidFill>
+          <a:schemeClr val="tx1"/>
+        </a:solidFill>
+        <a:latin typeface="+mn-lt"/>
+        <a:ea typeface="+mn-ea"/>
+        <a:cs typeface="+mn-cs"/>
+      </a:defRPr>
+    </a:lvl1pPr>
+    <a:lvl2pPr marL="457200" algn="l" defTabSz="914400" rtl="0" eaLnBrk="1" latinLnBrk="0" hangingPunct="1">
+      <a:defRPr sz="1200" kern="1200">
+        <a:solidFill>
+          <a:schemeClr val="tx1"/>
+        </a:solidFill>
+        <a:latin typeface="+mn-lt"/>
+        <a:ea typeface="+mn-ea"/>
+        <a:cs typeface="+mn-cs"/>
+      </a:defRPr>
+    </a:lvl2pPr>
+    <a:lvl3pPr marL="914400" algn="l" defTabSz="914400" rtl="0" eaLnBrk="1" latinLnBrk="0" hangingPunct="1">
+      <a:defRPr sz="1200" kern="1200">
+        <a:solidFill>
+          <a:schemeClr val="tx1"/>
+        </a:solidFill>
+        <a:latin typeface="+mn-lt"/>
+        <a:ea typeface="+mn-ea"/>
+        <a:cs typeface="+mn-cs"/>
+      </a:defRPr>
+    </a:lvl3pPr>
+    <a:lvl4pPr marL="1371600" algn="l" defTabSz="914400" rtl="0" eaLnBrk="1" latinLnBrk="0" hangingPunct="1">
+      <a:defRPr sz="1200" kern="1200">
+        <a:solidFill>
+          <a:schemeClr val="tx1"/>
+        </a:solidFill>
+        <a:latin typeface="+mn-lt"/>
+        <a:ea typeface="+mn-ea"/>
+        <a:cs typeface="+mn-cs"/>
+      </a:defRPr>
+    </a:lvl4pPr>
+    <a:lvl5pPr marL="1828800" algn="l" defTabSz="914400" rtl="0" eaLnBrk="1" latinLnBrk="0" hangingPunct="1">
+      <a:defRPr sz="1200" kern="1200">
+        <a:solidFill>
+          <a:schemeClr val="tx1"/>
+        </a:solidFill>
+        <a:latin typeface="+mn-lt"/>
+        <a:ea typeface="+mn-ea"/>
+        <a:cs typeface="+mn-cs"/>
+      </a:defRPr>
+    </a:lvl5pPr>
+    <a:lvl6pPr marL="2286000" algn="l" defTabSz="914400" rtl="0" eaLnBrk="1" latinLnBrk="0" hangingPunct="1">
+      <a:defRPr sz="1200" kern="1200">
+        <a:solidFill>
+          <a:schemeClr val="tx1"/>
+        </a:solidFill>
+        <a:latin typeface="+mn-lt"/>
+        <a:ea typeface="+mn-ea"/>
+        <a:cs typeface="+mn-cs"/>
+      </a:defRPr>
+    </a:lvl6pPr>
+    <a:lvl7pPr marL="2743200" algn="l" defTabSz="914400" rtl="0" eaLnBrk="1" latinLnBrk="0" hangingPunct="1">
+      <a:defRPr sz="1200" kern="1200">
+        <a:solidFill>
+          <a:schemeClr val="tx1"/>
+        </a:solidFill>
+        <a:latin typeface="+mn-lt"/>
+        <a:ea typeface="+mn-ea"/>
+        <a:cs typeface="+mn-cs"/>
+      </a:defRPr>
+    </a:lvl7pPr>
+    <a:lvl8pPr marL="3200400" algn="l" defTabSz="914400" rtl="0" eaLnBrk="1" latinLnBrk="0" hangingPunct="1">
+      <a:defRPr sz="1200" kern="1200">
+        <a:solidFill>
+          <a:schemeClr val="tx1"/>
+        </a:solidFill>
+        <a:latin typeface="+mn-lt"/>
+        <a:ea typeface="+mn-ea"/>
+        <a:cs typeface="+mn-cs"/>
+      </a:defRPr>
+    </a:lvl8pPr>
+    <a:lvl9pPr marL="3657600" algn="l" defTabSz="914400" rtl="0" eaLnBrk="1" latinLnBrk="0" hangingPunct="1">
+      <a:defRPr sz="1200" kern="1200">
+        <a:solidFill>
+          <a:schemeClr val="tx1"/>
+        </a:solidFill>
+        <a:latin typeface="+mn-lt"/>
+        <a:ea typeface="+mn-ea"/>
+        <a:cs typeface="+mn-cs"/>
+      </a:defRPr>
+    </a:lvl9pPr>
+  </p:notesStyle>
+</p:notesMaster>
+</file>
+
+<file path=ppt/notesSlides/notesSlide1.xml><?xml version="1.0" encoding="utf-8"?>
+<p:notes xmlns:a="http://schemas.openxmlformats.org/drawingml/2006/main" xmlns:r="http://schemas.openxmlformats.org/officeDocument/2006/relationships" xmlns:p="http://schemas.openxmlformats.org/presentationml/2006/main">
+  <p:cSld>
+    <p:spTree>
+      <p:nvGrpSpPr>
+        <p:cNvPr id="1" name=""/>
+        <p:cNvGrpSpPr/>
+        <p:nvPr/>
+      </p:nvGrpSpPr>
+      <p:grpSpPr>
+        <a:xfrm>
+          <a:off x="0" y="0"/>
+          <a:ext cx="0" cy="0"/>
+          <a:chOff x="0" y="0"/>
+          <a:chExt cx="0" cy="0"/>
+        </a:xfrm>
+      </p:grpSpPr>
+      <p:sp>
+        <p:nvSpPr>
+          <p:cNvPr id="2" name="Slide Image Placeholder 1"/>
+          <p:cNvSpPr>
+            <a:spLocks noGrp="1" noRot="1" noChangeAspect="1"/>
+          </p:cNvSpPr>
+          <p:nvPr>
+            <p:ph type="sldImg"/>
+          </p:nvPr>
+        </p:nvSpPr>
+        <p:spPr/>
+      </p:sp>
+      <p:sp>
+        <p:nvSpPr>
+          <p:cNvPr id="3" name="Notes Placeholder 2"/>
+          <p:cNvSpPr>
+            <a:spLocks noGrp="1"/>
+          </p:cNvSpPr>
+          <p:nvPr>
+            <p:ph type="body" idx="1"/>
+          </p:nvPr>
+        </p:nvSpPr>
+        <p:spPr/>
+        <p:txBody>
+          <a:bodyPr/>
+          <a:lstStyle/>
+          <a:p>
+            <a:r>
+              <a:t>Exemplo baseado no código do professor. Biblioteca Auth0 java-jwt. Referências: https://github.com/auth0/java-jwt e https://github.com/auth0/java-jwt/blob/master/lib/src/main/java/com/auth0/jwt/JWTCreator.java</a:t>
+            </a:r>
+          </a:p>
+          <a:p>
+            <a:r>
+              <a:t>A autenticação deve ocorrer antes da emissão. Gerar um token não configura sua validação nas próximas requisições.</a:t>
+            </a:r>
+          </a:p>
+        </p:txBody>
+      </p:sp>
+      <p:sp>
+        <p:nvSpPr>
+          <p:cNvPr id="4" name="Slide Number Placeholder 3"/>
+          <p:cNvSpPr>
+            <a:spLocks noGrp="1"/>
+          </p:cNvSpPr>
+          <p:nvPr>
+            <p:ph type="sldNum" idx="5"/>
+          </p:nvPr>
+        </p:nvSpPr>
+        <p:spPr/>
+        <p:txBody>
+          <a:bodyPr/>
+          <a:lstStyle/>
+          <a:p>
+            <a:endParaRPr/>
+          </a:p>
+        </p:txBody>
+      </p:sp>
+    </p:spTree>
+  </p:cSld>
+  <p:clrMapOvr>
+    <a:masterClrMapping/>
+  </p:clrMapOvr>
+</p:notes>
+</file>
+
+<file path=ppt/notesSlides/notesSlide2.xml><?xml version="1.0" encoding="utf-8"?>
+<p:notes xmlns:a="http://schemas.openxmlformats.org/drawingml/2006/main" xmlns:r="http://schemas.openxmlformats.org/officeDocument/2006/relationships" xmlns:p="http://schemas.openxmlformats.org/presentationml/2006/main">
+  <p:cSld>
+    <p:spTree>
+      <p:nvGrpSpPr>
+        <p:cNvPr id="1" name=""/>
+        <p:cNvGrpSpPr/>
+        <p:nvPr/>
+      </p:nvGrpSpPr>
+      <p:grpSpPr>
+        <a:xfrm>
+          <a:off x="0" y="0"/>
+          <a:ext cx="0" cy="0"/>
+          <a:chOff x="0" y="0"/>
+          <a:chExt cx="0" cy="0"/>
+        </a:xfrm>
+      </p:grpSpPr>
+      <p:sp>
+        <p:nvSpPr>
+          <p:cNvPr id="2" name="Slide Image Placeholder 1"/>
+          <p:cNvSpPr>
+            <a:spLocks noGrp="1" noRot="1" noChangeAspect="1"/>
+          </p:cNvSpPr>
+          <p:nvPr>
+            <p:ph type="sldImg"/>
+          </p:nvPr>
+        </p:nvSpPr>
+        <p:spPr/>
+      </p:sp>
+      <p:sp>
+        <p:nvSpPr>
+          <p:cNvPr id="3" name="Notes Placeholder 2"/>
+          <p:cNvSpPr>
+            <a:spLocks noGrp="1"/>
+          </p:cNvSpPr>
+          <p:nvPr>
+            <p:ph type="body" idx="1"/>
+          </p:nvPr>
+        </p:nvSpPr>
+        <p:spPr/>
+        <p:txBody>
+          <a:bodyPr/>
+          <a:lstStyle/>
+          <a:p>
+            <a:r>
+              <a:t>Exemplo baseado no código do professor. Biblioteca Auth0 java-jwt. Referências: https://github.com/auth0/java-jwt e https://github.com/auth0/java-jwt/blob/master/lib/src/main/java/com/auth0/jwt/JWTCreator.java</a:t>
+            </a:r>
+          </a:p>
+          <a:p>
+            <a:r>
+              <a:t>A autenticação deve ocorrer antes da emissão. Gerar um token não configura sua validação nas próximas requisições.</a:t>
+            </a:r>
+          </a:p>
+        </p:txBody>
+      </p:sp>
+      <p:sp>
+        <p:nvSpPr>
+          <p:cNvPr id="4" name="Slide Number Placeholder 3"/>
+          <p:cNvSpPr>
+            <a:spLocks noGrp="1"/>
+          </p:cNvSpPr>
+          <p:nvPr>
+            <p:ph type="sldNum" idx="5"/>
+          </p:nvPr>
+        </p:nvSpPr>
+        <p:spPr/>
+        <p:txBody>
+          <a:bodyPr/>
+          <a:lstStyle/>
+          <a:p>
+            <a:endParaRPr/>
+          </a:p>
+        </p:txBody>
+      </p:sp>
+    </p:spTree>
+  </p:cSld>
+  <p:clrMapOvr>
+    <a:masterClrMapping/>
+  </p:clrMapOvr>
+</p:notes>
+</file>
+
+<file path=ppt/notesSlides/notesSlide3.xml><?xml version="1.0" encoding="utf-8"?>
+<p:notes xmlns:a="http://schemas.openxmlformats.org/drawingml/2006/main" xmlns:r="http://schemas.openxmlformats.org/officeDocument/2006/relationships" xmlns:p="http://schemas.openxmlformats.org/presentationml/2006/main">
+  <p:cSld>
+    <p:spTree>
+      <p:nvGrpSpPr>
+        <p:cNvPr id="1" name=""/>
+        <p:cNvGrpSpPr/>
+        <p:nvPr/>
+      </p:nvGrpSpPr>
+      <p:grpSpPr>
+        <a:xfrm>
+          <a:off x="0" y="0"/>
+          <a:ext cx="0" cy="0"/>
+          <a:chOff x="0" y="0"/>
+          <a:chExt cx="0" cy="0"/>
+        </a:xfrm>
+      </p:grpSpPr>
+      <p:sp>
+        <p:nvSpPr>
+          <p:cNvPr id="2" name="Slide Image Placeholder 1"/>
+          <p:cNvSpPr>
+            <a:spLocks noGrp="1" noRot="1" noChangeAspect="1"/>
+          </p:cNvSpPr>
+          <p:nvPr>
+            <p:ph type="sldImg"/>
+          </p:nvPr>
+        </p:nvSpPr>
+        <p:spPr/>
+      </p:sp>
+      <p:sp>
+        <p:nvSpPr>
+          <p:cNvPr id="3" name="Notes Placeholder 2"/>
+          <p:cNvSpPr>
+            <a:spLocks noGrp="1"/>
+          </p:cNvSpPr>
+          <p:nvPr>
+            <p:ph type="body" idx="1"/>
+          </p:nvPr>
+        </p:nvSpPr>
+        <p:spPr/>
+        <p:txBody>
+          <a:bodyPr/>
+          <a:lstStyle/>
+          <a:p>
+            <a:r>
+              <a:t>Exemplo baseado no código do professor. Biblioteca Auth0 java-jwt. Referências: https://github.com/auth0/java-jwt e https://github.com/auth0/java-jwt/blob/master/lib/src/main/java/com/auth0/jwt/JWTCreator.java</a:t>
+            </a:r>
+          </a:p>
+          <a:p>
+            <a:r>
+              <a:t>A autenticação deve ocorrer antes da emissão. Gerar um token não configura sua validação nas próximas requisições.</a:t>
+            </a:r>
+          </a:p>
+        </p:txBody>
+      </p:sp>
+      <p:sp>
+        <p:nvSpPr>
+          <p:cNvPr id="4" name="Slide Number Placeholder 3"/>
+          <p:cNvSpPr>
+            <a:spLocks noGrp="1"/>
+          </p:cNvSpPr>
+          <p:nvPr>
+            <p:ph type="sldNum" idx="5"/>
+          </p:nvPr>
+        </p:nvSpPr>
+        <p:spPr/>
+        <p:txBody>
+          <a:bodyPr/>
+          <a:lstStyle/>
+          <a:p>
+            <a:endParaRPr/>
+          </a:p>
+        </p:txBody>
+      </p:sp>
+    </p:spTree>
+  </p:cSld>
+  <p:clrMapOvr>
+    <a:masterClrMapping/>
+  </p:clrMapOvr>
+</p:notes>
+</file>
+
+<file path=ppt/notesSlides/notesSlide4.xml><?xml version="1.0" encoding="utf-8"?>
+<p:notes xmlns:a="http://schemas.openxmlformats.org/drawingml/2006/main" xmlns:r="http://schemas.openxmlformats.org/officeDocument/2006/relationships" xmlns:p="http://schemas.openxmlformats.org/presentationml/2006/main">
+  <p:cSld>
+    <p:spTree>
+      <p:nvGrpSpPr>
+        <p:cNvPr id="1" name=""/>
+        <p:cNvGrpSpPr/>
+        <p:nvPr/>
+      </p:nvGrpSpPr>
+      <p:grpSpPr>
+        <a:xfrm>
+          <a:off x="0" y="0"/>
+          <a:ext cx="0" cy="0"/>
+          <a:chOff x="0" y="0"/>
+          <a:chExt cx="0" cy="0"/>
+        </a:xfrm>
+      </p:grpSpPr>
+      <p:sp>
+        <p:nvSpPr>
+          <p:cNvPr id="2" name="Slide Image Placeholder 1"/>
+          <p:cNvSpPr>
+            <a:spLocks noGrp="1" noRot="1" noChangeAspect="1"/>
+          </p:cNvSpPr>
+          <p:nvPr>
+            <p:ph type="sldImg"/>
+          </p:nvPr>
+        </p:nvSpPr>
+        <p:spPr/>
+      </p:sp>
+      <p:sp>
+        <p:nvSpPr>
+          <p:cNvPr id="3" name="Notes Placeholder 2"/>
+          <p:cNvSpPr>
+            <a:spLocks noGrp="1"/>
+          </p:cNvSpPr>
+          <p:nvPr>
+            <p:ph type="body" idx="1"/>
+          </p:nvPr>
+        </p:nvSpPr>
+        <p:spPr/>
+        <p:txBody>
+          <a:bodyPr/>
+          <a:lstStyle/>
+          <a:p>
+            <a:r>
+              <a:t>Exemplo baseado no código do professor. Biblioteca Auth0 java-jwt. Referências: https://github.com/auth0/java-jwt e https://github.com/auth0/java-jwt/blob/master/lib/src/main/java/com/auth0/jwt/JWTCreator.java</a:t>
+            </a:r>
+          </a:p>
+          <a:p>
+            <a:r>
+              <a:t>A autenticação deve ocorrer antes da emissão. Gerar um token não configura sua validação nas próximas requisições.</a:t>
+            </a:r>
+          </a:p>
+        </p:txBody>
+      </p:sp>
+      <p:sp>
+        <p:nvSpPr>
+          <p:cNvPr id="4" name="Slide Number Placeholder 3"/>
+          <p:cNvSpPr>
+            <a:spLocks noGrp="1"/>
+          </p:cNvSpPr>
+          <p:nvPr>
+            <p:ph type="sldNum" idx="5"/>
+          </p:nvPr>
+        </p:nvSpPr>
+        <p:spPr/>
+        <p:txBody>
+          <a:bodyPr/>
+          <a:lstStyle/>
+          <a:p>
+            <a:endParaRPr/>
+          </a:p>
+        </p:txBody>
+      </p:sp>
+    </p:spTree>
+  </p:cSld>
+  <p:clrMapOvr>
+    <a:masterClrMapping/>
+  </p:clrMapOvr>
+</p:notes>
+</file>
+
+<file path=ppt/notesSlides/notesSlide5.xml><?xml version="1.0" encoding="utf-8"?>
+<p:notes xmlns:a="http://schemas.openxmlformats.org/drawingml/2006/main" xmlns:r="http://schemas.openxmlformats.org/officeDocument/2006/relationships" xmlns:p="http://schemas.openxmlformats.org/presentationml/2006/main">
+  <p:cSld>
+    <p:spTree>
+      <p:nvGrpSpPr>
+        <p:cNvPr id="1" name=""/>
+        <p:cNvGrpSpPr/>
+        <p:nvPr/>
+      </p:nvGrpSpPr>
+      <p:grpSpPr>
+        <a:xfrm>
+          <a:off x="0" y="0"/>
+          <a:ext cx="0" cy="0"/>
+          <a:chOff x="0" y="0"/>
+          <a:chExt cx="0" cy="0"/>
+        </a:xfrm>
+      </p:grpSpPr>
+      <p:sp>
+        <p:nvSpPr>
+          <p:cNvPr id="2" name="Slide Image Placeholder 1"/>
+          <p:cNvSpPr>
+            <a:spLocks noGrp="1" noRot="1" noChangeAspect="1"/>
+          </p:cNvSpPr>
+          <p:nvPr>
+            <p:ph type="sldImg"/>
+          </p:nvPr>
+        </p:nvSpPr>
+        <p:spPr/>
+      </p:sp>
+      <p:sp>
+        <p:nvSpPr>
+          <p:cNvPr id="3" name="Notes Placeholder 2"/>
+          <p:cNvSpPr>
+            <a:spLocks noGrp="1"/>
+          </p:cNvSpPr>
+          <p:nvPr>
+            <p:ph type="body" idx="1"/>
+          </p:nvPr>
+        </p:nvSpPr>
+        <p:spPr/>
+        <p:txBody>
+          <a:bodyPr/>
+          <a:lstStyle/>
+          <a:p>
+            <a:r>
+              <a:t>Exemplo baseado no código do professor. Biblioteca Auth0 java-jwt. Referências: https://github.com/auth0/java-jwt e https://github.com/auth0/java-jwt/blob/master/lib/src/main/java/com/auth0/jwt/JWTCreator.java</a:t>
+            </a:r>
+          </a:p>
+          <a:p>
+            <a:r>
+              <a:t>A autenticação deve ocorrer antes da emissão. Gerar um token não configura sua validação nas próximas requisições.</a:t>
+            </a:r>
+          </a:p>
+        </p:txBody>
+      </p:sp>
+      <p:sp>
+        <p:nvSpPr>
+          <p:cNvPr id="4" name="Slide Number Placeholder 3"/>
+          <p:cNvSpPr>
+            <a:spLocks noGrp="1"/>
+          </p:cNvSpPr>
+          <p:nvPr>
+            <p:ph type="sldNum" idx="5"/>
+          </p:nvPr>
+        </p:nvSpPr>
+        <p:spPr/>
+        <p:txBody>
+          <a:bodyPr/>
+          <a:lstStyle/>
+          <a:p>
+            <a:endParaRPr/>
+          </a:p>
+        </p:txBody>
+      </p:sp>
+    </p:spTree>
+  </p:cSld>
+  <p:clrMapOvr>
+    <a:masterClrMapping/>
+  </p:clrMapOvr>
+</p:notes>
+</file>
+
+<file path=ppt/notesSlides/notesSlide6.xml><?xml version="1.0" encoding="utf-8"?>
+<p:notes xmlns:a="http://schemas.openxmlformats.org/drawingml/2006/main" xmlns:r="http://schemas.openxmlformats.org/officeDocument/2006/relationships" xmlns:p="http://schemas.openxmlformats.org/presentationml/2006/main">
+  <p:cSld>
+    <p:spTree>
+      <p:nvGrpSpPr>
+        <p:cNvPr id="1" name=""/>
+        <p:cNvGrpSpPr/>
+        <p:nvPr/>
+      </p:nvGrpSpPr>
+      <p:grpSpPr>
+        <a:xfrm>
+          <a:off x="0" y="0"/>
+          <a:ext cx="0" cy="0"/>
+          <a:chOff x="0" y="0"/>
+          <a:chExt cx="0" cy="0"/>
+        </a:xfrm>
+      </p:grpSpPr>
+      <p:sp>
+        <p:nvSpPr>
+          <p:cNvPr id="2" name="Slide Image Placeholder 1"/>
+          <p:cNvSpPr>
+            <a:spLocks noGrp="1" noRot="1" noChangeAspect="1"/>
+          </p:cNvSpPr>
+          <p:nvPr>
+            <p:ph type="sldImg"/>
+          </p:nvPr>
+        </p:nvSpPr>
+        <p:spPr/>
+      </p:sp>
+      <p:sp>
+        <p:nvSpPr>
+          <p:cNvPr id="3" name="Notes Placeholder 2"/>
+          <p:cNvSpPr>
+            <a:spLocks noGrp="1"/>
+          </p:cNvSpPr>
+          <p:nvPr>
+            <p:ph type="body" idx="1"/>
+          </p:nvPr>
+        </p:nvSpPr>
+        <p:spPr/>
+        <p:txBody>
+          <a:bodyPr/>
+          <a:lstStyle/>
+          <a:p>
+            <a:r>
+              <a:t>Exemplo baseado no código do professor. Biblioteca Auth0 java-jwt. Referências: https://github.com/auth0/java-jwt e https://github.com/auth0/java-jwt/blob/master/lib/src/main/java/com/auth0/jwt/JWTCreator.java</a:t>
+            </a:r>
+          </a:p>
+          <a:p>
+            <a:r>
+              <a:t>A autenticação deve ocorrer antes da emissão. Gerar um token não configura sua validação nas próximas requisições.</a:t>
+            </a:r>
+          </a:p>
+        </p:txBody>
+      </p:sp>
+      <p:sp>
+        <p:nvSpPr>
+          <p:cNvPr id="4" name="Slide Number Placeholder 3"/>
+          <p:cNvSpPr>
+            <a:spLocks noGrp="1"/>
+          </p:cNvSpPr>
+          <p:nvPr>
+            <p:ph type="sldNum" idx="5"/>
+          </p:nvPr>
+        </p:nvSpPr>
+        <p:spPr/>
+        <p:txBody>
+          <a:bodyPr/>
+          <a:lstStyle/>
+          <a:p>
+            <a:endParaRPr/>
+          </a:p>
+        </p:txBody>
+      </p:sp>
+    </p:spTree>
+  </p:cSld>
+  <p:clrMapOvr>
+    <a:masterClrMapping/>
+  </p:clrMapOvr>
+</p:notes>
+</file>
+
+<file path=ppt/notesSlides/notesSlide7.xml><?xml version="1.0" encoding="utf-8"?>
+<p:notes xmlns:a="http://schemas.openxmlformats.org/drawingml/2006/main" xmlns:r="http://schemas.openxmlformats.org/officeDocument/2006/relationships" xmlns:p="http://schemas.openxmlformats.org/presentationml/2006/main">
+  <p:cSld>
+    <p:spTree>
+      <p:nvGrpSpPr>
+        <p:cNvPr id="1" name=""/>
+        <p:cNvGrpSpPr/>
+        <p:nvPr/>
+      </p:nvGrpSpPr>
+      <p:grpSpPr>
+        <a:xfrm>
+          <a:off x="0" y="0"/>
+          <a:ext cx="0" cy="0"/>
+          <a:chOff x="0" y="0"/>
+          <a:chExt cx="0" cy="0"/>
+        </a:xfrm>
+      </p:grpSpPr>
+      <p:sp>
+        <p:nvSpPr>
+          <p:cNvPr id="2" name="Slide Image Placeholder 1"/>
+          <p:cNvSpPr>
+            <a:spLocks noGrp="1" noRot="1" noChangeAspect="1"/>
+          </p:cNvSpPr>
+          <p:nvPr>
+            <p:ph type="sldImg"/>
+          </p:nvPr>
+        </p:nvSpPr>
+        <p:spPr/>
+      </p:sp>
+      <p:sp>
+        <p:nvSpPr>
+          <p:cNvPr id="3" name="Notes Placeholder 2"/>
+          <p:cNvSpPr>
+            <a:spLocks noGrp="1"/>
+          </p:cNvSpPr>
+          <p:nvPr>
+            <p:ph type="body" idx="1"/>
+          </p:nvPr>
+        </p:nvSpPr>
+        <p:spPr/>
+        <p:txBody>
+          <a:bodyPr/>
+          <a:lstStyle/>
+          <a:p>
+            <a:r>
+              <a:t>Exemplo baseado no código do professor. Biblioteca Auth0 java-jwt. Referências: https://github.com/auth0/java-jwt e https://github.com/auth0/java-jwt/blob/master/lib/src/main/java/com/auth0/jwt/JWTCreator.java</a:t>
+            </a:r>
+          </a:p>
+          <a:p>
+            <a:r>
+              <a:t>A autenticação deve ocorrer antes da emissão. Gerar um token não configura sua validação nas próximas requisições.</a:t>
+            </a:r>
+          </a:p>
+        </p:txBody>
+      </p:sp>
+      <p:sp>
+        <p:nvSpPr>
+          <p:cNvPr id="4" name="Slide Number Placeholder 3"/>
+          <p:cNvSpPr>
+            <a:spLocks noGrp="1"/>
+          </p:cNvSpPr>
+          <p:nvPr>
+            <p:ph type="sldNum" idx="5"/>
+          </p:nvPr>
+        </p:nvSpPr>
+        <p:spPr/>
+        <p:txBody>
+          <a:bodyPr/>
+          <a:lstStyle/>
+          <a:p>
+            <a:endParaRPr/>
+          </a:p>
+        </p:txBody>
+      </p:sp>
+    </p:spTree>
+  </p:cSld>
+  <p:clrMapOvr>
+    <a:masterClrMapping/>
+  </p:clrMapOvr>
+</p:notes>
+</file>
+
+<file path=ppt/notesSlides/notesSlide8.xml><?xml version="1.0" encoding="utf-8"?>
+<p:notes xmlns:a="http://schemas.openxmlformats.org/drawingml/2006/main" xmlns:r="http://schemas.openxmlformats.org/officeDocument/2006/relationships" xmlns:p="http://schemas.openxmlformats.org/presentationml/2006/main">
+  <p:cSld>
+    <p:spTree>
+      <p:nvGrpSpPr>
+        <p:cNvPr id="1" name=""/>
+        <p:cNvGrpSpPr/>
+        <p:nvPr/>
+      </p:nvGrpSpPr>
+      <p:grpSpPr>
+        <a:xfrm>
+          <a:off x="0" y="0"/>
+          <a:ext cx="0" cy="0"/>
+          <a:chOff x="0" y="0"/>
+          <a:chExt cx="0" cy="0"/>
+        </a:xfrm>
+      </p:grpSpPr>
+      <p:sp>
+        <p:nvSpPr>
+          <p:cNvPr id="2" name="Slide Image Placeholder 1"/>
+          <p:cNvSpPr>
+            <a:spLocks noGrp="1" noRot="1" noChangeAspect="1"/>
+          </p:cNvSpPr>
+          <p:nvPr>
+            <p:ph type="sldImg"/>
+          </p:nvPr>
+        </p:nvSpPr>
+        <p:spPr/>
+      </p:sp>
+      <p:sp>
+        <p:nvSpPr>
+          <p:cNvPr id="3" name="Notes Placeholder 2"/>
+          <p:cNvSpPr>
+            <a:spLocks noGrp="1"/>
+          </p:cNvSpPr>
+          <p:nvPr>
+            <p:ph type="body" idx="1"/>
+          </p:nvPr>
+        </p:nvSpPr>
+        <p:spPr/>
+        <p:txBody>
+          <a:bodyPr/>
+          <a:lstStyle/>
+          <a:p>
+            <a:r>
+              <a:t>Exemplo baseado no código do professor. Biblioteca Auth0 java-jwt. Referências: https://github.com/auth0/java-jwt e https://github.com/auth0/java-jwt/blob/master/lib/src/main/java/com/auth0/jwt/JWTCreator.java</a:t>
+            </a:r>
+          </a:p>
+          <a:p>
+            <a:r>
+              <a:t>A autenticação deve ocorrer antes da emissão. Gerar um token não configura sua validação nas próximas requisições.</a:t>
+            </a:r>
+          </a:p>
+        </p:txBody>
+      </p:sp>
+      <p:sp>
+        <p:nvSpPr>
+          <p:cNvPr id="4" name="Slide Number Placeholder 3"/>
+          <p:cNvSpPr>
+            <a:spLocks noGrp="1"/>
+          </p:cNvSpPr>
+          <p:nvPr>
+            <p:ph type="sldNum" idx="5"/>
+          </p:nvPr>
+        </p:nvSpPr>
+        <p:spPr/>
+        <p:txBody>
+          <a:bodyPr/>
+          <a:lstStyle/>
+          <a:p>
+            <a:endParaRPr/>
+          </a:p>
+        </p:txBody>
+      </p:sp>
+    </p:spTree>
+  </p:cSld>
+  <p:clrMapOvr>
+    <a:masterClrMapping/>
+  </p:clrMapOvr>
+</p:notes>
 </file>
 
 <file path=ppt/slideLayouts/slideLayout1.xml><?xml version="1.0" encoding="utf-8"?>
@@ -705,7 +1739,7 @@
           <a:p>
             <a:fld id="{CDD55C27-F8C6-4481-8569-CAC50CAE9F1F}" type="datetimeFigureOut">
               <a:rPr lang="pt-BR" smtClean="0"/>
-              <a:t>27/09/2026</a:t>
+              <a:t>28/09/2026</a:t>
             </a:fld>
             <a:endParaRPr lang="pt-BR"/>
           </a:p>
@@ -842,7 +1876,7 @@
           <a:p>
             <a:fld id="{CDD55C27-F8C6-4481-8569-CAC50CAE9F1F}" type="datetimeFigureOut">
               <a:rPr lang="pt-BR" smtClean="0"/>
-              <a:t>27/09/2026</a:t>
+              <a:t>28/09/2026</a:t>
             </a:fld>
             <a:endParaRPr lang="pt-BR"/>
           </a:p>
@@ -1562,7 +2596,7 @@
           <a:p>
             <a:fld id="{CDD55C27-F8C6-4481-8569-CAC50CAE9F1F}" type="datetimeFigureOut">
               <a:rPr lang="pt-BR" smtClean="0"/>
-              <a:t>27/09/2026</a:t>
+              <a:t>28/09/2026</a:t>
             </a:fld>
             <a:endParaRPr lang="pt-BR"/>
           </a:p>
@@ -1742,7 +2776,7 @@
           <a:p>
             <a:fld id="{CDD55C27-F8C6-4481-8569-CAC50CAE9F1F}" type="datetimeFigureOut">
               <a:rPr lang="pt-BR" smtClean="0"/>
-              <a:t>27/09/2026</a:t>
+              <a:t>28/09/2026</a:t>
             </a:fld>
             <a:endParaRPr lang="pt-BR"/>
           </a:p>
@@ -1922,7 +2956,7 @@
           <a:p>
             <a:fld id="{CDD55C27-F8C6-4481-8569-CAC50CAE9F1F}" type="datetimeFigureOut">
               <a:rPr lang="pt-BR" smtClean="0"/>
-              <a:t>27/09/2026</a:t>
+              <a:t>28/09/2026</a:t>
             </a:fld>
             <a:endParaRPr lang="pt-BR"/>
           </a:p>
@@ -2133,7 +3167,7 @@
           <a:p>
             <a:fld id="{CDD55C27-F8C6-4481-8569-CAC50CAE9F1F}" type="datetimeFigureOut">
               <a:rPr lang="pt-BR" smtClean="0"/>
-              <a:t>27/09/2026</a:t>
+              <a:t>28/09/2026</a:t>
             </a:fld>
             <a:endParaRPr lang="pt-BR"/>
           </a:p>
@@ -2588,7 +3622,7 @@
           <a:p>
             <a:fld id="{CDD55C27-F8C6-4481-8569-CAC50CAE9F1F}" type="datetimeFigureOut">
               <a:rPr lang="pt-BR" smtClean="0"/>
-              <a:t>27/09/2026</a:t>
+              <a:t>28/09/2026</a:t>
             </a:fld>
             <a:endParaRPr lang="pt-BR"/>
           </a:p>
@@ -3241,6 +4275,3344 @@
 </p:sld>
 </file>
 
+<file path=ppt/slides/slide10.xml><?xml version="1.0" encoding="utf-8"?>
+<p:sld xmlns:a="http://schemas.openxmlformats.org/drawingml/2006/main" xmlns:r="http://schemas.openxmlformats.org/officeDocument/2006/relationships" xmlns:p="http://schemas.openxmlformats.org/presentationml/2006/main">
+  <p:cSld>
+    <p:spTree>
+      <p:nvGrpSpPr>
+        <p:cNvPr id="1" name=""/>
+        <p:cNvGrpSpPr/>
+        <p:nvPr/>
+      </p:nvGrpSpPr>
+      <p:grpSpPr>
+        <a:xfrm>
+          <a:off x="0" y="0"/>
+          <a:ext cx="0" cy="0"/>
+          <a:chOff x="0" y="0"/>
+          <a:chExt cx="0" cy="0"/>
+        </a:xfrm>
+      </p:grpSpPr>
+      <p:sp>
+        <p:nvSpPr>
+          <p:cNvPr id="2" name="Título 1">
+            <a:extLst>
+              <a:ext uri="{FF2B5EF4-FFF2-40B4-BE49-F238E27FC236}">
+                <a16:creationId xmlns:a16="http://schemas.microsoft.com/office/drawing/2014/main" id="{8738858E-69E2-8A32-4D8D-61A4750C2960}"/>
+              </a:ext>
+            </a:extLst>
+          </p:cNvPr>
+          <p:cNvSpPr>
+            <a:spLocks noGrp="1"/>
+          </p:cNvSpPr>
+          <p:nvPr>
+            <p:ph type="title"/>
+          </p:nvPr>
+        </p:nvSpPr>
+        <p:spPr/>
+        <p:txBody>
+          <a:bodyPr>
+            <a:noAutofit/>
+          </a:bodyPr>
+          <a:lstStyle/>
+          <a:p>
+            <a:pPr>
+              <a:defRPr sz="3000">
+                <a:solidFill>
+                  <a:srgbClr val="000000"/>
+                </a:solidFill>
+                <a:latin typeface="Calibri Light"/>
+                <a:ea typeface="Calibri Light"/>
+                <a:cs typeface="Calibri Light"/>
+              </a:defRPr>
+            </a:pPr>
+            <a:r>
+              <a:rPr sz="3000">
+                <a:solidFill>
+                  <a:srgbClr val="000000"/>
+                </a:solidFill>
+                <a:latin typeface="Calibri Light"/>
+                <a:ea typeface="Calibri Light"/>
+                <a:cs typeface="Calibri Light"/>
+              </a:rPr>
+              <a:t>Início da construção do token</a:t>
+            </a:r>
+          </a:p>
+        </p:txBody>
+      </p:sp>
+      <p:sp>
+        <p:nvSpPr>
+          <p:cNvPr id="6" name="Espaço Reservado para Conteúdo 5">
+            <a:extLst>
+              <a:ext uri="{FF2B5EF4-FFF2-40B4-BE49-F238E27FC236}">
+                <a16:creationId xmlns:a16="http://schemas.microsoft.com/office/drawing/2014/main" id="{B24F9431-18D8-4DC9-B9CC-1BCF1A71C18D}"/>
+              </a:ext>
+            </a:extLst>
+          </p:cNvPr>
+          <p:cNvSpPr>
+            <a:spLocks noGrp="1"/>
+          </p:cNvSpPr>
+          <p:nvPr/>
+        </p:nvSpPr>
+        <p:spPr>
+          <a:xfrm>
+            <a:off x="685800" y="1809750"/>
+            <a:ext cx="10820400" cy="809625"/>
+          </a:xfrm>
+          <a:prstGeom prst="rect">
+            <a:avLst/>
+          </a:prstGeom>
+        </p:spPr>
+        <p:txBody>
+          <a:bodyPr>
+            <a:noAutofit/>
+          </a:bodyPr>
+          <a:lstStyle>
+            <a:lvl1pPr marL="0" indent="0" algn="just" defTabSz="914400">
+              <a:lnSpc>
+                <a:spcPct val="150000"/>
+              </a:lnSpc>
+              <a:spcBef>
+                <a:spcPts val="0"/>
+              </a:spcBef>
+              <a:buFont typeface="Arial"/>
+              <a:buNone/>
+              <a:defRPr sz="2000" kern="1200">
+                <a:solidFill>
+                  <a:schemeClr val="tx1"/>
+                </a:solidFill>
+                <a:latin typeface="Times New Roman"/>
+                <a:ea typeface="Times New Roman"/>
+                <a:cs typeface="Times New Roman"/>
+              </a:defRPr>
+            </a:lvl1pPr>
+            <a:lvl2pPr marL="457200" indent="0" algn="just" defTabSz="914400">
+              <a:lnSpc>
+                <a:spcPct val="150000"/>
+              </a:lnSpc>
+              <a:spcBef>
+                <a:spcPts val="0"/>
+              </a:spcBef>
+              <a:buFont typeface="Arial"/>
+              <a:buNone/>
+              <a:defRPr sz="1600" kern="1200">
+                <a:solidFill>
+                  <a:schemeClr val="tx1"/>
+                </a:solidFill>
+                <a:latin typeface="Times New Roman"/>
+                <a:ea typeface="Times New Roman"/>
+                <a:cs typeface="Times New Roman"/>
+              </a:defRPr>
+            </a:lvl2pPr>
+            <a:lvl3pPr marL="914400" indent="0" algn="just" defTabSz="914400">
+              <a:lnSpc>
+                <a:spcPct val="150000"/>
+              </a:lnSpc>
+              <a:spcBef>
+                <a:spcPts val="0"/>
+              </a:spcBef>
+              <a:buFont typeface="Arial"/>
+              <a:buNone/>
+              <a:defRPr sz="1400" kern="1200">
+                <a:solidFill>
+                  <a:schemeClr val="tx1"/>
+                </a:solidFill>
+                <a:latin typeface="Times New Roman"/>
+                <a:ea typeface="Times New Roman"/>
+                <a:cs typeface="Times New Roman"/>
+              </a:defRPr>
+            </a:lvl3pPr>
+            <a:lvl4pPr marL="1371600" indent="0" algn="just" defTabSz="914400">
+              <a:lnSpc>
+                <a:spcPct val="150000"/>
+              </a:lnSpc>
+              <a:spcBef>
+                <a:spcPts val="0"/>
+              </a:spcBef>
+              <a:buFont typeface="Arial"/>
+              <a:buNone/>
+              <a:defRPr sz="1200" kern="1200">
+                <a:solidFill>
+                  <a:schemeClr val="tx1"/>
+                </a:solidFill>
+                <a:latin typeface="Times New Roman"/>
+                <a:ea typeface="Times New Roman"/>
+                <a:cs typeface="Times New Roman"/>
+              </a:defRPr>
+            </a:lvl4pPr>
+            <a:lvl5pPr marL="1828800" indent="0" algn="just" defTabSz="914400">
+              <a:lnSpc>
+                <a:spcPct val="150000"/>
+              </a:lnSpc>
+              <a:spcBef>
+                <a:spcPts val="0"/>
+              </a:spcBef>
+              <a:buFont typeface="Arial"/>
+              <a:buNone/>
+              <a:defRPr sz="1000" kern="1200">
+                <a:solidFill>
+                  <a:schemeClr val="tx1"/>
+                </a:solidFill>
+                <a:latin typeface="Times New Roman"/>
+                <a:ea typeface="Times New Roman"/>
+                <a:cs typeface="Times New Roman"/>
+              </a:defRPr>
+            </a:lvl5pPr>
+            <a:lvl6pPr marL="2514600" indent="-228600" algn="l" defTabSz="914400">
+              <a:lnSpc>
+                <a:spcPct val="90000"/>
+              </a:lnSpc>
+              <a:spcBef>
+                <a:spcPts val="500"/>
+              </a:spcBef>
+              <a:buFont typeface="Arial"/>
+              <a:buChar char="•"/>
+              <a:defRPr sz="1800" kern="1200">
+                <a:solidFill>
+                  <a:schemeClr val="tx1"/>
+                </a:solidFill>
+                <a:latin typeface="+mn-lt"/>
+                <a:ea typeface="+mn-lt"/>
+                <a:cs typeface="+mn-lt"/>
+              </a:defRPr>
+            </a:lvl6pPr>
+            <a:lvl7pPr marL="2971800" indent="-228600" algn="l" defTabSz="914400">
+              <a:lnSpc>
+                <a:spcPct val="90000"/>
+              </a:lnSpc>
+              <a:spcBef>
+                <a:spcPts val="500"/>
+              </a:spcBef>
+              <a:buFont typeface="Arial"/>
+              <a:buChar char="•"/>
+              <a:defRPr sz="1800" kern="1200">
+                <a:solidFill>
+                  <a:schemeClr val="tx1"/>
+                </a:solidFill>
+                <a:latin typeface="+mn-lt"/>
+                <a:ea typeface="+mn-lt"/>
+                <a:cs typeface="+mn-lt"/>
+              </a:defRPr>
+            </a:lvl7pPr>
+            <a:lvl8pPr marL="3429000" indent="-228600" algn="l" defTabSz="914400">
+              <a:lnSpc>
+                <a:spcPct val="90000"/>
+              </a:lnSpc>
+              <a:spcBef>
+                <a:spcPts val="500"/>
+              </a:spcBef>
+              <a:buFont typeface="Arial"/>
+              <a:buChar char="•"/>
+              <a:defRPr sz="1800" kern="1200">
+                <a:solidFill>
+                  <a:schemeClr val="tx1"/>
+                </a:solidFill>
+                <a:latin typeface="+mn-lt"/>
+                <a:ea typeface="+mn-lt"/>
+                <a:cs typeface="+mn-lt"/>
+              </a:defRPr>
+            </a:lvl8pPr>
+            <a:lvl9pPr marL="3886200" indent="-228600" algn="l" defTabSz="914400">
+              <a:lnSpc>
+                <a:spcPct val="90000"/>
+              </a:lnSpc>
+              <a:spcBef>
+                <a:spcPts val="500"/>
+              </a:spcBef>
+              <a:buFont typeface="Arial"/>
+              <a:buChar char="•"/>
+              <a:defRPr sz="1800" kern="1200">
+                <a:solidFill>
+                  <a:schemeClr val="tx1"/>
+                </a:solidFill>
+                <a:latin typeface="+mn-lt"/>
+                <a:ea typeface="+mn-lt"/>
+                <a:cs typeface="+mn-lt"/>
+              </a:defRPr>
+            </a:lvl9pPr>
+          </a:lstStyle>
+          <a:p>
+            <a:pPr algn="l">
+              <a:defRPr sz="2175">
+                <a:solidFill>
+                  <a:srgbClr val="000000"/>
+                </a:solidFill>
+                <a:latin typeface="Calibri"/>
+                <a:ea typeface="Calibri"/>
+                <a:cs typeface="Calibri"/>
+              </a:defRPr>
+            </a:pPr>
+            <a:r>
+              <a:rPr sz="2175">
+                <a:solidFill>
+                  <a:srgbClr val="000000"/>
+                </a:solidFill>
+                <a:latin typeface="Calibri"/>
+                <a:ea typeface="Calibri"/>
+                <a:cs typeface="Calibri"/>
+              </a:rPr>
+              <a:t>JWT.create() inicia a construção de um novo JWT.</a:t>
+            </a:r>
+          </a:p>
+        </p:txBody>
+      </p:sp>
+      <p:sp>
+        <p:nvSpPr>
+          <p:cNvPr id="11" name="Shape 20">
+            <a:extLst>
+              <a:ext uri="{FF2B5EF4-FFF2-40B4-BE49-F238E27FC236}">
+                <a16:creationId xmlns:a16="http://schemas.microsoft.com/office/drawing/2014/main" id="{EE383B37-7310-4563-9BC8-B173B5286B0D}"/>
+              </a:ext>
+            </a:extLst>
+          </p:cNvPr>
+          <p:cNvSpPr>
+            <a:spLocks noGrp="1"/>
+          </p:cNvSpPr>
+          <p:nvPr/>
+        </p:nvSpPr>
+        <p:spPr>
+          <a:xfrm>
+            <a:off x="857250" y="2762250"/>
+            <a:ext cx="10477500" cy="1809750"/>
+          </a:xfrm>
+          <a:prstGeom prst="roundRect">
+            <a:avLst>
+              <a:gd name="adj" fmla="val 8081"/>
+            </a:avLst>
+          </a:prstGeom>
+          <a:solidFill>
+            <a:srgbClr val="1E1E1E"/>
+          </a:solidFill>
+          <a:ln>
+            <a:solidFill>
+              <a:srgbClr val="1E1E1E"/>
+            </a:solidFill>
+          </a:ln>
+        </p:spPr>
+        <p:txBody>
+          <a:bodyPr/>
+          <a:lstStyle/>
+          <a:p>
+            <a:endParaRPr/>
+          </a:p>
+        </p:txBody>
+      </p:sp>
+      <p:sp>
+        <p:nvSpPr>
+          <p:cNvPr id="4" name="Retângulo 3">
+            <a:extLst>
+              <a:ext uri="{FF2B5EF4-FFF2-40B4-BE49-F238E27FC236}">
+                <a16:creationId xmlns:a16="http://schemas.microsoft.com/office/drawing/2014/main" id="{3CE8AC7A-3364-4E97-BC2E-25CF018F1E04}"/>
+              </a:ext>
+            </a:extLst>
+          </p:cNvPr>
+          <p:cNvSpPr>
+            <a:spLocks noGrp="1"/>
+          </p:cNvSpPr>
+          <p:nvPr/>
+        </p:nvSpPr>
+        <p:spPr>
+          <a:xfrm>
+            <a:off x="1143000" y="3190875"/>
+            <a:ext cx="10001250" cy="2865120"/>
+          </a:xfrm>
+          <a:prstGeom prst="rect">
+            <a:avLst/>
+          </a:prstGeom>
+        </p:spPr>
+        <p:txBody>
+          <a:bodyPr wrap="square">
+            <a:noAutofit/>
+          </a:bodyPr>
+          <a:lstStyle/>
+          <a:p>
+            <a:pPr algn="l">
+              <a:defRPr sz="2400">
+                <a:solidFill>
+                  <a:srgbClr val="D4D4D4"/>
+                </a:solidFill>
+                <a:latin typeface="Consolas"/>
+                <a:ea typeface="Consolas"/>
+                <a:cs typeface="Consolas"/>
+              </a:defRPr>
+            </a:pPr>
+            <a:r>
+              <a:rPr sz="2400">
+                <a:solidFill>
+                  <a:srgbClr val="D4D4D4"/>
+                </a:solidFill>
+                <a:latin typeface="Consolas"/>
+                <a:ea typeface="Consolas"/>
+                <a:cs typeface="Consolas"/>
+              </a:rPr>
+              <a:t>return JWT.create()</a:t>
+            </a:r>
+          </a:p>
+        </p:txBody>
+      </p:sp>
+      <p:sp>
+        <p:nvSpPr>
+          <p:cNvPr id="12" name="Retângulo 11">
+            <a:extLst>
+              <a:ext uri="{FF2B5EF4-FFF2-40B4-BE49-F238E27FC236}">
+                <a16:creationId xmlns:a16="http://schemas.microsoft.com/office/drawing/2014/main" id="{330C5A26-7753-4D50-BCEF-4E3BB0EFA7A0}"/>
+              </a:ext>
+            </a:extLst>
+          </p:cNvPr>
+          <p:cNvSpPr>
+            <a:spLocks noGrp="1"/>
+          </p:cNvSpPr>
+          <p:nvPr/>
+        </p:nvSpPr>
+        <p:spPr>
+          <a:xfrm>
+            <a:off x="685800" y="4905375"/>
+            <a:ext cx="10820400" cy="1333500"/>
+          </a:xfrm>
+          <a:prstGeom prst="rect">
+            <a:avLst/>
+          </a:prstGeom>
+          <a:noFill/>
+          <a:ln w="0">
+            <a:noFill/>
+          </a:ln>
+        </p:spPr>
+        <p:txBody>
+          <a:bodyPr>
+            <a:noAutofit/>
+          </a:bodyPr>
+          <a:lstStyle/>
+          <a:p>
+            <a:pPr algn="l">
+              <a:defRPr sz="2100">
+                <a:solidFill>
+                  <a:srgbClr val="000000"/>
+                </a:solidFill>
+                <a:latin typeface="Calibri"/>
+                <a:ea typeface="Calibri"/>
+                <a:cs typeface="Calibri"/>
+              </a:defRPr>
+            </a:pPr>
+            <a:r>
+              <a:rPr sz="2100">
+                <a:solidFill>
+                  <a:srgbClr val="000000"/>
+                </a:solidFill>
+                <a:latin typeface="Calibri"/>
+                <a:ea typeface="Calibri"/>
+                <a:cs typeface="Calibri"/>
+              </a:rPr>
+              <a:t>Os métodos seguintes adicionam informações ao token.</a:t>
+            </a:r>
+          </a:p>
+          <a:p>
+            <a:pPr algn="l">
+              <a:defRPr sz="2100">
+                <a:solidFill>
+                  <a:srgbClr val="000000"/>
+                </a:solidFill>
+                <a:latin typeface="Calibri"/>
+                <a:ea typeface="Calibri"/>
+                <a:cs typeface="Calibri"/>
+              </a:defRPr>
+            </a:pPr>
+            <a:r>
+              <a:rPr sz="2100">
+                <a:solidFill>
+                  <a:srgbClr val="000000"/>
+                </a:solidFill>
+                <a:latin typeface="Calibri"/>
+                <a:ea typeface="Calibri"/>
+                <a:cs typeface="Calibri"/>
+              </a:rPr>
+              <a:t>O return devolverá a String produzida por sign().</a:t>
+            </a:r>
+          </a:p>
+        </p:txBody>
+      </p:sp>
+    </p:spTree>
+    <p:extLst>
+      <p:ext uri="{BB962C8B-B14F-4D97-AF65-F5344CB8AC3E}">
+        <p14:creationId xmlns:p14="http://schemas.microsoft.com/office/powerpoint/2010/main" val="3265046005"/>
+      </p:ext>
+    </p:extLst>
+  </p:cSld>
+  <p:clrMapOvr>
+    <a:masterClrMapping/>
+  </p:clrMapOvr>
+</p:sld>
+</file>
+
+<file path=ppt/slides/slide11.xml><?xml version="1.0" encoding="utf-8"?>
+<p:sld xmlns:a="http://schemas.openxmlformats.org/drawingml/2006/main" xmlns:r="http://schemas.openxmlformats.org/officeDocument/2006/relationships" xmlns:p="http://schemas.openxmlformats.org/presentationml/2006/main">
+  <p:cSld>
+    <p:spTree>
+      <p:nvGrpSpPr>
+        <p:cNvPr id="1" name=""/>
+        <p:cNvGrpSpPr/>
+        <p:nvPr/>
+      </p:nvGrpSpPr>
+      <p:grpSpPr>
+        <a:xfrm>
+          <a:off x="0" y="0"/>
+          <a:ext cx="0" cy="0"/>
+          <a:chOff x="0" y="0"/>
+          <a:chExt cx="0" cy="0"/>
+        </a:xfrm>
+      </p:grpSpPr>
+      <p:sp>
+        <p:nvSpPr>
+          <p:cNvPr id="2" name="Título 1">
+            <a:extLst>
+              <a:ext uri="{FF2B5EF4-FFF2-40B4-BE49-F238E27FC236}">
+                <a16:creationId xmlns:a16="http://schemas.microsoft.com/office/drawing/2014/main" id="{8738858E-69E2-8A32-4D8D-61A4750C2960}"/>
+              </a:ext>
+            </a:extLst>
+          </p:cNvPr>
+          <p:cNvSpPr>
+            <a:spLocks noGrp="1"/>
+          </p:cNvSpPr>
+          <p:nvPr>
+            <p:ph type="title"/>
+          </p:nvPr>
+        </p:nvSpPr>
+        <p:spPr/>
+        <p:txBody>
+          <a:bodyPr>
+            <a:noAutofit/>
+          </a:bodyPr>
+          <a:lstStyle/>
+          <a:p>
+            <a:pPr>
+              <a:defRPr sz="3000">
+                <a:solidFill>
+                  <a:srgbClr val="000000"/>
+                </a:solidFill>
+                <a:latin typeface="Calibri Light"/>
+                <a:ea typeface="Calibri Light"/>
+                <a:cs typeface="Calibri Light"/>
+              </a:defRPr>
+            </a:pPr>
+            <a:r>
+              <a:rPr sz="3000">
+                <a:solidFill>
+                  <a:srgbClr val="000000"/>
+                </a:solidFill>
+                <a:latin typeface="Calibri Light"/>
+                <a:ea typeface="Calibri Light"/>
+                <a:cs typeface="Calibri Light"/>
+              </a:rPr>
+              <a:t>Emissor do token</a:t>
+            </a:r>
+          </a:p>
+        </p:txBody>
+      </p:sp>
+      <p:sp>
+        <p:nvSpPr>
+          <p:cNvPr id="6" name="Espaço Reservado para Conteúdo 5">
+            <a:extLst>
+              <a:ext uri="{FF2B5EF4-FFF2-40B4-BE49-F238E27FC236}">
+                <a16:creationId xmlns:a16="http://schemas.microsoft.com/office/drawing/2014/main" id="{B24F9431-18D8-4DC9-B9CC-1BCF1A71C18D}"/>
+              </a:ext>
+            </a:extLst>
+          </p:cNvPr>
+          <p:cNvSpPr>
+            <a:spLocks noGrp="1"/>
+          </p:cNvSpPr>
+          <p:nvPr/>
+        </p:nvSpPr>
+        <p:spPr>
+          <a:xfrm>
+            <a:off x="685800" y="1809750"/>
+            <a:ext cx="10820400" cy="809625"/>
+          </a:xfrm>
+          <a:prstGeom prst="rect">
+            <a:avLst/>
+          </a:prstGeom>
+        </p:spPr>
+        <p:txBody>
+          <a:bodyPr>
+            <a:noAutofit/>
+          </a:bodyPr>
+          <a:lstStyle>
+            <a:lvl1pPr marL="0" indent="0" algn="just" defTabSz="914400">
+              <a:lnSpc>
+                <a:spcPct val="150000"/>
+              </a:lnSpc>
+              <a:spcBef>
+                <a:spcPts val="0"/>
+              </a:spcBef>
+              <a:buFont typeface="Arial"/>
+              <a:buNone/>
+              <a:defRPr sz="2000" kern="1200">
+                <a:solidFill>
+                  <a:schemeClr val="tx1"/>
+                </a:solidFill>
+                <a:latin typeface="Times New Roman"/>
+                <a:ea typeface="Times New Roman"/>
+                <a:cs typeface="Times New Roman"/>
+              </a:defRPr>
+            </a:lvl1pPr>
+            <a:lvl2pPr marL="457200" indent="0" algn="just" defTabSz="914400">
+              <a:lnSpc>
+                <a:spcPct val="150000"/>
+              </a:lnSpc>
+              <a:spcBef>
+                <a:spcPts val="0"/>
+              </a:spcBef>
+              <a:buFont typeface="Arial"/>
+              <a:buNone/>
+              <a:defRPr sz="1600" kern="1200">
+                <a:solidFill>
+                  <a:schemeClr val="tx1"/>
+                </a:solidFill>
+                <a:latin typeface="Times New Roman"/>
+                <a:ea typeface="Times New Roman"/>
+                <a:cs typeface="Times New Roman"/>
+              </a:defRPr>
+            </a:lvl2pPr>
+            <a:lvl3pPr marL="914400" indent="0" algn="just" defTabSz="914400">
+              <a:lnSpc>
+                <a:spcPct val="150000"/>
+              </a:lnSpc>
+              <a:spcBef>
+                <a:spcPts val="0"/>
+              </a:spcBef>
+              <a:buFont typeface="Arial"/>
+              <a:buNone/>
+              <a:defRPr sz="1400" kern="1200">
+                <a:solidFill>
+                  <a:schemeClr val="tx1"/>
+                </a:solidFill>
+                <a:latin typeface="Times New Roman"/>
+                <a:ea typeface="Times New Roman"/>
+                <a:cs typeface="Times New Roman"/>
+              </a:defRPr>
+            </a:lvl3pPr>
+            <a:lvl4pPr marL="1371600" indent="0" algn="just" defTabSz="914400">
+              <a:lnSpc>
+                <a:spcPct val="150000"/>
+              </a:lnSpc>
+              <a:spcBef>
+                <a:spcPts val="0"/>
+              </a:spcBef>
+              <a:buFont typeface="Arial"/>
+              <a:buNone/>
+              <a:defRPr sz="1200" kern="1200">
+                <a:solidFill>
+                  <a:schemeClr val="tx1"/>
+                </a:solidFill>
+                <a:latin typeface="Times New Roman"/>
+                <a:ea typeface="Times New Roman"/>
+                <a:cs typeface="Times New Roman"/>
+              </a:defRPr>
+            </a:lvl4pPr>
+            <a:lvl5pPr marL="1828800" indent="0" algn="just" defTabSz="914400">
+              <a:lnSpc>
+                <a:spcPct val="150000"/>
+              </a:lnSpc>
+              <a:spcBef>
+                <a:spcPts val="0"/>
+              </a:spcBef>
+              <a:buFont typeface="Arial"/>
+              <a:buNone/>
+              <a:defRPr sz="1000" kern="1200">
+                <a:solidFill>
+                  <a:schemeClr val="tx1"/>
+                </a:solidFill>
+                <a:latin typeface="Times New Roman"/>
+                <a:ea typeface="Times New Roman"/>
+                <a:cs typeface="Times New Roman"/>
+              </a:defRPr>
+            </a:lvl5pPr>
+            <a:lvl6pPr marL="2514600" indent="-228600" algn="l" defTabSz="914400">
+              <a:lnSpc>
+                <a:spcPct val="90000"/>
+              </a:lnSpc>
+              <a:spcBef>
+                <a:spcPts val="500"/>
+              </a:spcBef>
+              <a:buFont typeface="Arial"/>
+              <a:buChar char="•"/>
+              <a:defRPr sz="1800" kern="1200">
+                <a:solidFill>
+                  <a:schemeClr val="tx1"/>
+                </a:solidFill>
+                <a:latin typeface="+mn-lt"/>
+                <a:ea typeface="+mn-lt"/>
+                <a:cs typeface="+mn-lt"/>
+              </a:defRPr>
+            </a:lvl6pPr>
+            <a:lvl7pPr marL="2971800" indent="-228600" algn="l" defTabSz="914400">
+              <a:lnSpc>
+                <a:spcPct val="90000"/>
+              </a:lnSpc>
+              <a:spcBef>
+                <a:spcPts val="500"/>
+              </a:spcBef>
+              <a:buFont typeface="Arial"/>
+              <a:buChar char="•"/>
+              <a:defRPr sz="1800" kern="1200">
+                <a:solidFill>
+                  <a:schemeClr val="tx1"/>
+                </a:solidFill>
+                <a:latin typeface="+mn-lt"/>
+                <a:ea typeface="+mn-lt"/>
+                <a:cs typeface="+mn-lt"/>
+              </a:defRPr>
+            </a:lvl7pPr>
+            <a:lvl8pPr marL="3429000" indent="-228600" algn="l" defTabSz="914400">
+              <a:lnSpc>
+                <a:spcPct val="90000"/>
+              </a:lnSpc>
+              <a:spcBef>
+                <a:spcPts val="500"/>
+              </a:spcBef>
+              <a:buFont typeface="Arial"/>
+              <a:buChar char="•"/>
+              <a:defRPr sz="1800" kern="1200">
+                <a:solidFill>
+                  <a:schemeClr val="tx1"/>
+                </a:solidFill>
+                <a:latin typeface="+mn-lt"/>
+                <a:ea typeface="+mn-lt"/>
+                <a:cs typeface="+mn-lt"/>
+              </a:defRPr>
+            </a:lvl8pPr>
+            <a:lvl9pPr marL="3886200" indent="-228600" algn="l" defTabSz="914400">
+              <a:lnSpc>
+                <a:spcPct val="90000"/>
+              </a:lnSpc>
+              <a:spcBef>
+                <a:spcPts val="500"/>
+              </a:spcBef>
+              <a:buFont typeface="Arial"/>
+              <a:buChar char="•"/>
+              <a:defRPr sz="1800" kern="1200">
+                <a:solidFill>
+                  <a:schemeClr val="tx1"/>
+                </a:solidFill>
+                <a:latin typeface="+mn-lt"/>
+                <a:ea typeface="+mn-lt"/>
+                <a:cs typeface="+mn-lt"/>
+              </a:defRPr>
+            </a:lvl9pPr>
+          </a:lstStyle>
+          <a:p>
+            <a:pPr algn="l">
+              <a:defRPr sz="2175">
+                <a:solidFill>
+                  <a:srgbClr val="000000"/>
+                </a:solidFill>
+                <a:latin typeface="Calibri"/>
+                <a:ea typeface="Calibri"/>
+                <a:cs typeface="Calibri"/>
+              </a:defRPr>
+            </a:pPr>
+            <a:r>
+              <a:rPr sz="2175">
+                <a:solidFill>
+                  <a:srgbClr val="000000"/>
+                </a:solidFill>
+                <a:latin typeface="Calibri"/>
+                <a:ea typeface="Calibri"/>
+                <a:cs typeface="Calibri"/>
+              </a:rPr>
+              <a:t>withIssuer() informa qual aplicação emitiu o token.</a:t>
+            </a:r>
+          </a:p>
+        </p:txBody>
+      </p:sp>
+      <p:sp>
+        <p:nvSpPr>
+          <p:cNvPr id="11" name="Shape 20">
+            <a:extLst>
+              <a:ext uri="{FF2B5EF4-FFF2-40B4-BE49-F238E27FC236}">
+                <a16:creationId xmlns:a16="http://schemas.microsoft.com/office/drawing/2014/main" id="{EE383B37-7310-4563-9BC8-B173B5286B0D}"/>
+              </a:ext>
+            </a:extLst>
+          </p:cNvPr>
+          <p:cNvSpPr>
+            <a:spLocks noGrp="1"/>
+          </p:cNvSpPr>
+          <p:nvPr/>
+        </p:nvSpPr>
+        <p:spPr>
+          <a:xfrm>
+            <a:off x="857250" y="2762250"/>
+            <a:ext cx="10477500" cy="1809750"/>
+          </a:xfrm>
+          <a:prstGeom prst="roundRect">
+            <a:avLst>
+              <a:gd name="adj" fmla="val 8081"/>
+            </a:avLst>
+          </a:prstGeom>
+          <a:solidFill>
+            <a:srgbClr val="1E1E1E"/>
+          </a:solidFill>
+          <a:ln>
+            <a:solidFill>
+              <a:srgbClr val="1E1E1E"/>
+            </a:solidFill>
+          </a:ln>
+        </p:spPr>
+        <p:txBody>
+          <a:bodyPr/>
+          <a:lstStyle/>
+          <a:p>
+            <a:endParaRPr/>
+          </a:p>
+        </p:txBody>
+      </p:sp>
+      <p:sp>
+        <p:nvSpPr>
+          <p:cNvPr id="4" name="Retângulo 3">
+            <a:extLst>
+              <a:ext uri="{FF2B5EF4-FFF2-40B4-BE49-F238E27FC236}">
+                <a16:creationId xmlns:a16="http://schemas.microsoft.com/office/drawing/2014/main" id="{3CE8AC7A-3364-4E97-BC2E-25CF018F1E04}"/>
+              </a:ext>
+            </a:extLst>
+          </p:cNvPr>
+          <p:cNvSpPr>
+            <a:spLocks noGrp="1"/>
+          </p:cNvSpPr>
+          <p:nvPr/>
+        </p:nvSpPr>
+        <p:spPr>
+          <a:xfrm>
+            <a:off x="1143000" y="3190875"/>
+            <a:ext cx="10001250" cy="2865120"/>
+          </a:xfrm>
+          <a:prstGeom prst="rect">
+            <a:avLst/>
+          </a:prstGeom>
+        </p:spPr>
+        <p:txBody>
+          <a:bodyPr wrap="square">
+            <a:noAutofit/>
+          </a:bodyPr>
+          <a:lstStyle/>
+          <a:p>
+            <a:pPr algn="l">
+              <a:defRPr sz="2400">
+                <a:solidFill>
+                  <a:srgbClr val="D4D4D4"/>
+                </a:solidFill>
+                <a:latin typeface="Consolas"/>
+                <a:ea typeface="Consolas"/>
+                <a:cs typeface="Consolas"/>
+              </a:defRPr>
+            </a:pPr>
+            <a:r>
+              <a:rPr sz="2400">
+                <a:solidFill>
+                  <a:srgbClr val="D4D4D4"/>
+                </a:solidFill>
+                <a:latin typeface="Consolas"/>
+                <a:ea typeface="Consolas"/>
+                <a:cs typeface="Consolas"/>
+              </a:rPr>
+              <a:t>.withIssuer("API Dentista")</a:t>
+            </a:r>
+          </a:p>
+        </p:txBody>
+      </p:sp>
+      <p:sp>
+        <p:nvSpPr>
+          <p:cNvPr id="12" name="Retângulo 11">
+            <a:extLst>
+              <a:ext uri="{FF2B5EF4-FFF2-40B4-BE49-F238E27FC236}">
+                <a16:creationId xmlns:a16="http://schemas.microsoft.com/office/drawing/2014/main" id="{08150B8E-0180-493E-A1C9-2DA4ED1F47D4}"/>
+              </a:ext>
+            </a:extLst>
+          </p:cNvPr>
+          <p:cNvSpPr>
+            <a:spLocks noGrp="1"/>
+          </p:cNvSpPr>
+          <p:nvPr/>
+        </p:nvSpPr>
+        <p:spPr>
+          <a:xfrm>
+            <a:off x="685800" y="4905375"/>
+            <a:ext cx="10820400" cy="1333500"/>
+          </a:xfrm>
+          <a:prstGeom prst="rect">
+            <a:avLst/>
+          </a:prstGeom>
+          <a:noFill/>
+          <a:ln w="0">
+            <a:noFill/>
+          </a:ln>
+        </p:spPr>
+        <p:txBody>
+          <a:bodyPr>
+            <a:noAutofit/>
+          </a:bodyPr>
+          <a:lstStyle/>
+          <a:p>
+            <a:pPr algn="l">
+              <a:defRPr sz="2100">
+                <a:solidFill>
+                  <a:srgbClr val="000000"/>
+                </a:solidFill>
+                <a:latin typeface="Calibri"/>
+                <a:ea typeface="Calibri"/>
+                <a:cs typeface="Calibri"/>
+              </a:defRPr>
+            </a:pPr>
+            <a:r>
+              <a:rPr sz="2100">
+                <a:solidFill>
+                  <a:srgbClr val="000000"/>
+                </a:solidFill>
+                <a:latin typeface="Calibri"/>
+                <a:ea typeface="Calibri"/>
+                <a:cs typeface="Calibri"/>
+              </a:rPr>
+              <a:t>Neste exemplo, o emissor é “API Dentista”.</a:t>
+            </a:r>
+          </a:p>
+          <a:p>
+            <a:pPr algn="l">
+              <a:defRPr sz="2100">
+                <a:solidFill>
+                  <a:srgbClr val="000000"/>
+                </a:solidFill>
+                <a:latin typeface="Calibri"/>
+                <a:ea typeface="Calibri"/>
+                <a:cs typeface="Calibri"/>
+              </a:defRPr>
+            </a:pPr>
+            <a:r>
+              <a:rPr sz="2100">
+                <a:solidFill>
+                  <a:srgbClr val="000000"/>
+                </a:solidFill>
+                <a:latin typeface="Calibri"/>
+                <a:ea typeface="Calibri"/>
+                <a:cs typeface="Calibri"/>
+              </a:rPr>
+              <a:t>Essa informação fica no campo iss do payload.</a:t>
+            </a:r>
+          </a:p>
+        </p:txBody>
+      </p:sp>
+    </p:spTree>
+    <p:extLst>
+      <p:ext uri="{BB962C8B-B14F-4D97-AF65-F5344CB8AC3E}">
+        <p14:creationId xmlns:p14="http://schemas.microsoft.com/office/powerpoint/2010/main" val="3203962773"/>
+      </p:ext>
+    </p:extLst>
+  </p:cSld>
+  <p:clrMapOvr>
+    <a:masterClrMapping/>
+  </p:clrMapOvr>
+</p:sld>
+</file>
+
+<file path=ppt/slides/slide12.xml><?xml version="1.0" encoding="utf-8"?>
+<p:sld xmlns:a="http://schemas.openxmlformats.org/drawingml/2006/main" xmlns:r="http://schemas.openxmlformats.org/officeDocument/2006/relationships" xmlns:p="http://schemas.openxmlformats.org/presentationml/2006/main">
+  <p:cSld>
+    <p:spTree>
+      <p:nvGrpSpPr>
+        <p:cNvPr id="1" name=""/>
+        <p:cNvGrpSpPr/>
+        <p:nvPr/>
+      </p:nvGrpSpPr>
+      <p:grpSpPr>
+        <a:xfrm>
+          <a:off x="0" y="0"/>
+          <a:ext cx="0" cy="0"/>
+          <a:chOff x="0" y="0"/>
+          <a:chExt cx="0" cy="0"/>
+        </a:xfrm>
+      </p:grpSpPr>
+      <p:sp>
+        <p:nvSpPr>
+          <p:cNvPr id="2" name="Título 1">
+            <a:extLst>
+              <a:ext uri="{FF2B5EF4-FFF2-40B4-BE49-F238E27FC236}">
+                <a16:creationId xmlns:a16="http://schemas.microsoft.com/office/drawing/2014/main" id="{8738858E-69E2-8A32-4D8D-61A4750C2960}"/>
+              </a:ext>
+            </a:extLst>
+          </p:cNvPr>
+          <p:cNvSpPr>
+            <a:spLocks noGrp="1"/>
+          </p:cNvSpPr>
+          <p:nvPr>
+            <p:ph type="title"/>
+          </p:nvPr>
+        </p:nvSpPr>
+        <p:spPr/>
+        <p:txBody>
+          <a:bodyPr>
+            <a:noAutofit/>
+          </a:bodyPr>
+          <a:lstStyle/>
+          <a:p>
+            <a:pPr>
+              <a:defRPr sz="3000">
+                <a:solidFill>
+                  <a:srgbClr val="000000"/>
+                </a:solidFill>
+                <a:latin typeface="Calibri Light"/>
+                <a:ea typeface="Calibri Light"/>
+                <a:cs typeface="Calibri Light"/>
+              </a:defRPr>
+            </a:pPr>
+            <a:r>
+              <a:rPr sz="3000">
+                <a:solidFill>
+                  <a:srgbClr val="000000"/>
+                </a:solidFill>
+                <a:latin typeface="Calibri Light"/>
+                <a:ea typeface="Calibri Light"/>
+                <a:cs typeface="Calibri Light"/>
+              </a:rPr>
+              <a:t>Identificação do usuário</a:t>
+            </a:r>
+          </a:p>
+        </p:txBody>
+      </p:sp>
+      <p:sp>
+        <p:nvSpPr>
+          <p:cNvPr id="6" name="Espaço Reservado para Conteúdo 5">
+            <a:extLst>
+              <a:ext uri="{FF2B5EF4-FFF2-40B4-BE49-F238E27FC236}">
+                <a16:creationId xmlns:a16="http://schemas.microsoft.com/office/drawing/2014/main" id="{B24F9431-18D8-4DC9-B9CC-1BCF1A71C18D}"/>
+              </a:ext>
+            </a:extLst>
+          </p:cNvPr>
+          <p:cNvSpPr>
+            <a:spLocks noGrp="1"/>
+          </p:cNvSpPr>
+          <p:nvPr/>
+        </p:nvSpPr>
+        <p:spPr>
+          <a:xfrm>
+            <a:off x="685800" y="1809750"/>
+            <a:ext cx="10820400" cy="809625"/>
+          </a:xfrm>
+          <a:prstGeom prst="rect">
+            <a:avLst/>
+          </a:prstGeom>
+        </p:spPr>
+        <p:txBody>
+          <a:bodyPr>
+            <a:noAutofit/>
+          </a:bodyPr>
+          <a:lstStyle>
+            <a:lvl1pPr marL="0" indent="0" algn="just" defTabSz="914400">
+              <a:lnSpc>
+                <a:spcPct val="150000"/>
+              </a:lnSpc>
+              <a:spcBef>
+                <a:spcPts val="0"/>
+              </a:spcBef>
+              <a:buFont typeface="Arial"/>
+              <a:buNone/>
+              <a:defRPr sz="2000" kern="1200">
+                <a:solidFill>
+                  <a:schemeClr val="tx1"/>
+                </a:solidFill>
+                <a:latin typeface="Times New Roman"/>
+                <a:ea typeface="Times New Roman"/>
+                <a:cs typeface="Times New Roman"/>
+              </a:defRPr>
+            </a:lvl1pPr>
+            <a:lvl2pPr marL="457200" indent="0" algn="just" defTabSz="914400">
+              <a:lnSpc>
+                <a:spcPct val="150000"/>
+              </a:lnSpc>
+              <a:spcBef>
+                <a:spcPts val="0"/>
+              </a:spcBef>
+              <a:buFont typeface="Arial"/>
+              <a:buNone/>
+              <a:defRPr sz="1600" kern="1200">
+                <a:solidFill>
+                  <a:schemeClr val="tx1"/>
+                </a:solidFill>
+                <a:latin typeface="Times New Roman"/>
+                <a:ea typeface="Times New Roman"/>
+                <a:cs typeface="Times New Roman"/>
+              </a:defRPr>
+            </a:lvl2pPr>
+            <a:lvl3pPr marL="914400" indent="0" algn="just" defTabSz="914400">
+              <a:lnSpc>
+                <a:spcPct val="150000"/>
+              </a:lnSpc>
+              <a:spcBef>
+                <a:spcPts val="0"/>
+              </a:spcBef>
+              <a:buFont typeface="Arial"/>
+              <a:buNone/>
+              <a:defRPr sz="1400" kern="1200">
+                <a:solidFill>
+                  <a:schemeClr val="tx1"/>
+                </a:solidFill>
+                <a:latin typeface="Times New Roman"/>
+                <a:ea typeface="Times New Roman"/>
+                <a:cs typeface="Times New Roman"/>
+              </a:defRPr>
+            </a:lvl3pPr>
+            <a:lvl4pPr marL="1371600" indent="0" algn="just" defTabSz="914400">
+              <a:lnSpc>
+                <a:spcPct val="150000"/>
+              </a:lnSpc>
+              <a:spcBef>
+                <a:spcPts val="0"/>
+              </a:spcBef>
+              <a:buFont typeface="Arial"/>
+              <a:buNone/>
+              <a:defRPr sz="1200" kern="1200">
+                <a:solidFill>
+                  <a:schemeClr val="tx1"/>
+                </a:solidFill>
+                <a:latin typeface="Times New Roman"/>
+                <a:ea typeface="Times New Roman"/>
+                <a:cs typeface="Times New Roman"/>
+              </a:defRPr>
+            </a:lvl4pPr>
+            <a:lvl5pPr marL="1828800" indent="0" algn="just" defTabSz="914400">
+              <a:lnSpc>
+                <a:spcPct val="150000"/>
+              </a:lnSpc>
+              <a:spcBef>
+                <a:spcPts val="0"/>
+              </a:spcBef>
+              <a:buFont typeface="Arial"/>
+              <a:buNone/>
+              <a:defRPr sz="1000" kern="1200">
+                <a:solidFill>
+                  <a:schemeClr val="tx1"/>
+                </a:solidFill>
+                <a:latin typeface="Times New Roman"/>
+                <a:ea typeface="Times New Roman"/>
+                <a:cs typeface="Times New Roman"/>
+              </a:defRPr>
+            </a:lvl5pPr>
+            <a:lvl6pPr marL="2514600" indent="-228600" algn="l" defTabSz="914400">
+              <a:lnSpc>
+                <a:spcPct val="90000"/>
+              </a:lnSpc>
+              <a:spcBef>
+                <a:spcPts val="500"/>
+              </a:spcBef>
+              <a:buFont typeface="Arial"/>
+              <a:buChar char="•"/>
+              <a:defRPr sz="1800" kern="1200">
+                <a:solidFill>
+                  <a:schemeClr val="tx1"/>
+                </a:solidFill>
+                <a:latin typeface="+mn-lt"/>
+                <a:ea typeface="+mn-lt"/>
+                <a:cs typeface="+mn-lt"/>
+              </a:defRPr>
+            </a:lvl6pPr>
+            <a:lvl7pPr marL="2971800" indent="-228600" algn="l" defTabSz="914400">
+              <a:lnSpc>
+                <a:spcPct val="90000"/>
+              </a:lnSpc>
+              <a:spcBef>
+                <a:spcPts val="500"/>
+              </a:spcBef>
+              <a:buFont typeface="Arial"/>
+              <a:buChar char="•"/>
+              <a:defRPr sz="1800" kern="1200">
+                <a:solidFill>
+                  <a:schemeClr val="tx1"/>
+                </a:solidFill>
+                <a:latin typeface="+mn-lt"/>
+                <a:ea typeface="+mn-lt"/>
+                <a:cs typeface="+mn-lt"/>
+              </a:defRPr>
+            </a:lvl7pPr>
+            <a:lvl8pPr marL="3429000" indent="-228600" algn="l" defTabSz="914400">
+              <a:lnSpc>
+                <a:spcPct val="90000"/>
+              </a:lnSpc>
+              <a:spcBef>
+                <a:spcPts val="500"/>
+              </a:spcBef>
+              <a:buFont typeface="Arial"/>
+              <a:buChar char="•"/>
+              <a:defRPr sz="1800" kern="1200">
+                <a:solidFill>
+                  <a:schemeClr val="tx1"/>
+                </a:solidFill>
+                <a:latin typeface="+mn-lt"/>
+                <a:ea typeface="+mn-lt"/>
+                <a:cs typeface="+mn-lt"/>
+              </a:defRPr>
+            </a:lvl8pPr>
+            <a:lvl9pPr marL="3886200" indent="-228600" algn="l" defTabSz="914400">
+              <a:lnSpc>
+                <a:spcPct val="90000"/>
+              </a:lnSpc>
+              <a:spcBef>
+                <a:spcPts val="500"/>
+              </a:spcBef>
+              <a:buFont typeface="Arial"/>
+              <a:buChar char="•"/>
+              <a:defRPr sz="1800" kern="1200">
+                <a:solidFill>
+                  <a:schemeClr val="tx1"/>
+                </a:solidFill>
+                <a:latin typeface="+mn-lt"/>
+                <a:ea typeface="+mn-lt"/>
+                <a:cs typeface="+mn-lt"/>
+              </a:defRPr>
+            </a:lvl9pPr>
+          </a:lstStyle>
+          <a:p>
+            <a:pPr algn="l">
+              <a:defRPr sz="2175">
+                <a:solidFill>
+                  <a:srgbClr val="000000"/>
+                </a:solidFill>
+                <a:latin typeface="Calibri"/>
+                <a:ea typeface="Calibri"/>
+                <a:cs typeface="Calibri"/>
+              </a:defRPr>
+            </a:pPr>
+            <a:r>
+              <a:rPr sz="2175">
+                <a:solidFill>
+                  <a:srgbClr val="000000"/>
+                </a:solidFill>
+                <a:latin typeface="Calibri"/>
+                <a:ea typeface="Calibri"/>
+                <a:cs typeface="Calibri"/>
+              </a:rPr>
+              <a:t>withSubject() define a quem o token pertence.</a:t>
+            </a:r>
+          </a:p>
+        </p:txBody>
+      </p:sp>
+      <p:sp>
+        <p:nvSpPr>
+          <p:cNvPr id="11" name="Shape 20">
+            <a:extLst>
+              <a:ext uri="{FF2B5EF4-FFF2-40B4-BE49-F238E27FC236}">
+                <a16:creationId xmlns:a16="http://schemas.microsoft.com/office/drawing/2014/main" id="{EE383B37-7310-4563-9BC8-B173B5286B0D}"/>
+              </a:ext>
+            </a:extLst>
+          </p:cNvPr>
+          <p:cNvSpPr>
+            <a:spLocks noGrp="1"/>
+          </p:cNvSpPr>
+          <p:nvPr/>
+        </p:nvSpPr>
+        <p:spPr>
+          <a:xfrm>
+            <a:off x="857250" y="2762250"/>
+            <a:ext cx="10477500" cy="1809750"/>
+          </a:xfrm>
+          <a:prstGeom prst="roundRect">
+            <a:avLst>
+              <a:gd name="adj" fmla="val 8081"/>
+            </a:avLst>
+          </a:prstGeom>
+          <a:solidFill>
+            <a:srgbClr val="1E1E1E"/>
+          </a:solidFill>
+          <a:ln>
+            <a:solidFill>
+              <a:srgbClr val="1E1E1E"/>
+            </a:solidFill>
+          </a:ln>
+        </p:spPr>
+        <p:txBody>
+          <a:bodyPr/>
+          <a:lstStyle/>
+          <a:p>
+            <a:endParaRPr/>
+          </a:p>
+        </p:txBody>
+      </p:sp>
+      <p:sp>
+        <p:nvSpPr>
+          <p:cNvPr id="4" name="Retângulo 3">
+            <a:extLst>
+              <a:ext uri="{FF2B5EF4-FFF2-40B4-BE49-F238E27FC236}">
+                <a16:creationId xmlns:a16="http://schemas.microsoft.com/office/drawing/2014/main" id="{3CE8AC7A-3364-4E97-BC2E-25CF018F1E04}"/>
+              </a:ext>
+            </a:extLst>
+          </p:cNvPr>
+          <p:cNvSpPr>
+            <a:spLocks noGrp="1"/>
+          </p:cNvSpPr>
+          <p:nvPr/>
+        </p:nvSpPr>
+        <p:spPr>
+          <a:xfrm>
+            <a:off x="1143000" y="3190875"/>
+            <a:ext cx="10001250" cy="2865120"/>
+          </a:xfrm>
+          <a:prstGeom prst="rect">
+            <a:avLst/>
+          </a:prstGeom>
+        </p:spPr>
+        <p:txBody>
+          <a:bodyPr wrap="square">
+            <a:noAutofit/>
+          </a:bodyPr>
+          <a:lstStyle/>
+          <a:p>
+            <a:pPr algn="l">
+              <a:defRPr sz="2400">
+                <a:solidFill>
+                  <a:srgbClr val="D4D4D4"/>
+                </a:solidFill>
+                <a:latin typeface="Consolas"/>
+                <a:ea typeface="Consolas"/>
+                <a:cs typeface="Consolas"/>
+              </a:defRPr>
+            </a:pPr>
+            <a:r>
+              <a:rPr sz="2400">
+                <a:solidFill>
+                  <a:srgbClr val="D4D4D4"/>
+                </a:solidFill>
+                <a:latin typeface="Consolas"/>
+                <a:ea typeface="Consolas"/>
+                <a:cs typeface="Consolas"/>
+              </a:rPr>
+              <a:t>.withSubject(usuario.getLogin())</a:t>
+            </a:r>
+          </a:p>
+        </p:txBody>
+      </p:sp>
+      <p:sp>
+        <p:nvSpPr>
+          <p:cNvPr id="12" name="Retângulo 11">
+            <a:extLst>
+              <a:ext uri="{FF2B5EF4-FFF2-40B4-BE49-F238E27FC236}">
+                <a16:creationId xmlns:a16="http://schemas.microsoft.com/office/drawing/2014/main" id="{11847D07-BDBE-48C0-9AAE-576037B5A37D}"/>
+              </a:ext>
+            </a:extLst>
+          </p:cNvPr>
+          <p:cNvSpPr>
+            <a:spLocks noGrp="1"/>
+          </p:cNvSpPr>
+          <p:nvPr/>
+        </p:nvSpPr>
+        <p:spPr>
+          <a:xfrm>
+            <a:off x="685800" y="4905375"/>
+            <a:ext cx="10820400" cy="1333500"/>
+          </a:xfrm>
+          <a:prstGeom prst="rect">
+            <a:avLst/>
+          </a:prstGeom>
+          <a:noFill/>
+          <a:ln w="0">
+            <a:noFill/>
+          </a:ln>
+        </p:spPr>
+        <p:txBody>
+          <a:bodyPr>
+            <a:noAutofit/>
+          </a:bodyPr>
+          <a:lstStyle/>
+          <a:p>
+            <a:pPr algn="l">
+              <a:defRPr sz="2100">
+                <a:solidFill>
+                  <a:srgbClr val="000000"/>
+                </a:solidFill>
+                <a:latin typeface="Calibri"/>
+                <a:ea typeface="Calibri"/>
+                <a:cs typeface="Calibri"/>
+              </a:defRPr>
+            </a:pPr>
+            <a:r>
+              <a:rPr sz="2100">
+                <a:solidFill>
+                  <a:srgbClr val="000000"/>
+                </a:solidFill>
+                <a:latin typeface="Calibri"/>
+                <a:ea typeface="Calibri"/>
+                <a:cs typeface="Calibri"/>
+              </a:rPr>
+              <a:t>getLogin() obtém o login do usuário recebido.</a:t>
+            </a:r>
+          </a:p>
+          <a:p>
+            <a:pPr algn="l">
+              <a:defRPr sz="2100">
+                <a:solidFill>
+                  <a:srgbClr val="000000"/>
+                </a:solidFill>
+                <a:latin typeface="Calibri"/>
+                <a:ea typeface="Calibri"/>
+                <a:cs typeface="Calibri"/>
+              </a:defRPr>
+            </a:pPr>
+            <a:r>
+              <a:rPr sz="2100">
+                <a:solidFill>
+                  <a:srgbClr val="000000"/>
+                </a:solidFill>
+                <a:latin typeface="Calibri"/>
+                <a:ea typeface="Calibri"/>
+                <a:cs typeface="Calibri"/>
+              </a:rPr>
+              <a:t>O valor fica no campo sub do payload.</a:t>
+            </a:r>
+          </a:p>
+        </p:txBody>
+      </p:sp>
+    </p:spTree>
+    <p:extLst>
+      <p:ext uri="{BB962C8B-B14F-4D97-AF65-F5344CB8AC3E}">
+        <p14:creationId xmlns:p14="http://schemas.microsoft.com/office/powerpoint/2010/main" val="260205575"/>
+      </p:ext>
+    </p:extLst>
+  </p:cSld>
+  <p:clrMapOvr>
+    <a:masterClrMapping/>
+  </p:clrMapOvr>
+</p:sld>
+</file>
+
+<file path=ppt/slides/slide13.xml><?xml version="1.0" encoding="utf-8"?>
+<p:sld xmlns:a="http://schemas.openxmlformats.org/drawingml/2006/main" xmlns:r="http://schemas.openxmlformats.org/officeDocument/2006/relationships" xmlns:p="http://schemas.openxmlformats.org/presentationml/2006/main">
+  <p:cSld>
+    <p:spTree>
+      <p:nvGrpSpPr>
+        <p:cNvPr id="1" name=""/>
+        <p:cNvGrpSpPr/>
+        <p:nvPr/>
+      </p:nvGrpSpPr>
+      <p:grpSpPr>
+        <a:xfrm>
+          <a:off x="0" y="0"/>
+          <a:ext cx="0" cy="0"/>
+          <a:chOff x="0" y="0"/>
+          <a:chExt cx="0" cy="0"/>
+        </a:xfrm>
+      </p:grpSpPr>
+      <p:sp>
+        <p:nvSpPr>
+          <p:cNvPr id="2" name="Título 1">
+            <a:extLst>
+              <a:ext uri="{FF2B5EF4-FFF2-40B4-BE49-F238E27FC236}">
+                <a16:creationId xmlns:a16="http://schemas.microsoft.com/office/drawing/2014/main" id="{8738858E-69E2-8A32-4D8D-61A4750C2960}"/>
+              </a:ext>
+            </a:extLst>
+          </p:cNvPr>
+          <p:cNvSpPr>
+            <a:spLocks noGrp="1"/>
+          </p:cNvSpPr>
+          <p:nvPr>
+            <p:ph type="title"/>
+          </p:nvPr>
+        </p:nvSpPr>
+        <p:spPr/>
+        <p:txBody>
+          <a:bodyPr>
+            <a:noAutofit/>
+          </a:bodyPr>
+          <a:lstStyle/>
+          <a:p>
+            <a:pPr>
+              <a:defRPr sz="3000">
+                <a:solidFill>
+                  <a:srgbClr val="000000"/>
+                </a:solidFill>
+                <a:latin typeface="Calibri Light"/>
+                <a:ea typeface="Calibri Light"/>
+                <a:cs typeface="Calibri Light"/>
+              </a:defRPr>
+            </a:pPr>
+            <a:r>
+              <a:rPr sz="3000">
+                <a:solidFill>
+                  <a:srgbClr val="000000"/>
+                </a:solidFill>
+                <a:latin typeface="Calibri Light"/>
+                <a:ea typeface="Calibri Light"/>
+                <a:cs typeface="Calibri Light"/>
+              </a:rPr>
+              <a:t>Prazo de validade</a:t>
+            </a:r>
+          </a:p>
+        </p:txBody>
+      </p:sp>
+      <p:sp>
+        <p:nvSpPr>
+          <p:cNvPr id="6" name="Espaço Reservado para Conteúdo 5">
+            <a:extLst>
+              <a:ext uri="{FF2B5EF4-FFF2-40B4-BE49-F238E27FC236}">
+                <a16:creationId xmlns:a16="http://schemas.microsoft.com/office/drawing/2014/main" id="{B24F9431-18D8-4DC9-B9CC-1BCF1A71C18D}"/>
+              </a:ext>
+            </a:extLst>
+          </p:cNvPr>
+          <p:cNvSpPr>
+            <a:spLocks noGrp="1"/>
+          </p:cNvSpPr>
+          <p:nvPr/>
+        </p:nvSpPr>
+        <p:spPr>
+          <a:xfrm>
+            <a:off x="685800" y="1809750"/>
+            <a:ext cx="10820400" cy="809625"/>
+          </a:xfrm>
+          <a:prstGeom prst="rect">
+            <a:avLst/>
+          </a:prstGeom>
+        </p:spPr>
+        <p:txBody>
+          <a:bodyPr>
+            <a:noAutofit/>
+          </a:bodyPr>
+          <a:lstStyle>
+            <a:lvl1pPr marL="0" indent="0" algn="just" defTabSz="914400">
+              <a:lnSpc>
+                <a:spcPct val="150000"/>
+              </a:lnSpc>
+              <a:spcBef>
+                <a:spcPts val="0"/>
+              </a:spcBef>
+              <a:buFont typeface="Arial"/>
+              <a:buNone/>
+              <a:defRPr sz="2000" kern="1200">
+                <a:solidFill>
+                  <a:schemeClr val="tx1"/>
+                </a:solidFill>
+                <a:latin typeface="Times New Roman"/>
+                <a:ea typeface="Times New Roman"/>
+                <a:cs typeface="Times New Roman"/>
+              </a:defRPr>
+            </a:lvl1pPr>
+            <a:lvl2pPr marL="457200" indent="0" algn="just" defTabSz="914400">
+              <a:lnSpc>
+                <a:spcPct val="150000"/>
+              </a:lnSpc>
+              <a:spcBef>
+                <a:spcPts val="0"/>
+              </a:spcBef>
+              <a:buFont typeface="Arial"/>
+              <a:buNone/>
+              <a:defRPr sz="1600" kern="1200">
+                <a:solidFill>
+                  <a:schemeClr val="tx1"/>
+                </a:solidFill>
+                <a:latin typeface="Times New Roman"/>
+                <a:ea typeface="Times New Roman"/>
+                <a:cs typeface="Times New Roman"/>
+              </a:defRPr>
+            </a:lvl2pPr>
+            <a:lvl3pPr marL="914400" indent="0" algn="just" defTabSz="914400">
+              <a:lnSpc>
+                <a:spcPct val="150000"/>
+              </a:lnSpc>
+              <a:spcBef>
+                <a:spcPts val="0"/>
+              </a:spcBef>
+              <a:buFont typeface="Arial"/>
+              <a:buNone/>
+              <a:defRPr sz="1400" kern="1200">
+                <a:solidFill>
+                  <a:schemeClr val="tx1"/>
+                </a:solidFill>
+                <a:latin typeface="Times New Roman"/>
+                <a:ea typeface="Times New Roman"/>
+                <a:cs typeface="Times New Roman"/>
+              </a:defRPr>
+            </a:lvl3pPr>
+            <a:lvl4pPr marL="1371600" indent="0" algn="just" defTabSz="914400">
+              <a:lnSpc>
+                <a:spcPct val="150000"/>
+              </a:lnSpc>
+              <a:spcBef>
+                <a:spcPts val="0"/>
+              </a:spcBef>
+              <a:buFont typeface="Arial"/>
+              <a:buNone/>
+              <a:defRPr sz="1200" kern="1200">
+                <a:solidFill>
+                  <a:schemeClr val="tx1"/>
+                </a:solidFill>
+                <a:latin typeface="Times New Roman"/>
+                <a:ea typeface="Times New Roman"/>
+                <a:cs typeface="Times New Roman"/>
+              </a:defRPr>
+            </a:lvl4pPr>
+            <a:lvl5pPr marL="1828800" indent="0" algn="just" defTabSz="914400">
+              <a:lnSpc>
+                <a:spcPct val="150000"/>
+              </a:lnSpc>
+              <a:spcBef>
+                <a:spcPts val="0"/>
+              </a:spcBef>
+              <a:buFont typeface="Arial"/>
+              <a:buNone/>
+              <a:defRPr sz="1000" kern="1200">
+                <a:solidFill>
+                  <a:schemeClr val="tx1"/>
+                </a:solidFill>
+                <a:latin typeface="Times New Roman"/>
+                <a:ea typeface="Times New Roman"/>
+                <a:cs typeface="Times New Roman"/>
+              </a:defRPr>
+            </a:lvl5pPr>
+            <a:lvl6pPr marL="2514600" indent="-228600" algn="l" defTabSz="914400">
+              <a:lnSpc>
+                <a:spcPct val="90000"/>
+              </a:lnSpc>
+              <a:spcBef>
+                <a:spcPts val="500"/>
+              </a:spcBef>
+              <a:buFont typeface="Arial"/>
+              <a:buChar char="•"/>
+              <a:defRPr sz="1800" kern="1200">
+                <a:solidFill>
+                  <a:schemeClr val="tx1"/>
+                </a:solidFill>
+                <a:latin typeface="+mn-lt"/>
+                <a:ea typeface="+mn-lt"/>
+                <a:cs typeface="+mn-lt"/>
+              </a:defRPr>
+            </a:lvl6pPr>
+            <a:lvl7pPr marL="2971800" indent="-228600" algn="l" defTabSz="914400">
+              <a:lnSpc>
+                <a:spcPct val="90000"/>
+              </a:lnSpc>
+              <a:spcBef>
+                <a:spcPts val="500"/>
+              </a:spcBef>
+              <a:buFont typeface="Arial"/>
+              <a:buChar char="•"/>
+              <a:defRPr sz="1800" kern="1200">
+                <a:solidFill>
+                  <a:schemeClr val="tx1"/>
+                </a:solidFill>
+                <a:latin typeface="+mn-lt"/>
+                <a:ea typeface="+mn-lt"/>
+                <a:cs typeface="+mn-lt"/>
+              </a:defRPr>
+            </a:lvl7pPr>
+            <a:lvl8pPr marL="3429000" indent="-228600" algn="l" defTabSz="914400">
+              <a:lnSpc>
+                <a:spcPct val="90000"/>
+              </a:lnSpc>
+              <a:spcBef>
+                <a:spcPts val="500"/>
+              </a:spcBef>
+              <a:buFont typeface="Arial"/>
+              <a:buChar char="•"/>
+              <a:defRPr sz="1800" kern="1200">
+                <a:solidFill>
+                  <a:schemeClr val="tx1"/>
+                </a:solidFill>
+                <a:latin typeface="+mn-lt"/>
+                <a:ea typeface="+mn-lt"/>
+                <a:cs typeface="+mn-lt"/>
+              </a:defRPr>
+            </a:lvl8pPr>
+            <a:lvl9pPr marL="3886200" indent="-228600" algn="l" defTabSz="914400">
+              <a:lnSpc>
+                <a:spcPct val="90000"/>
+              </a:lnSpc>
+              <a:spcBef>
+                <a:spcPts val="500"/>
+              </a:spcBef>
+              <a:buFont typeface="Arial"/>
+              <a:buChar char="•"/>
+              <a:defRPr sz="1800" kern="1200">
+                <a:solidFill>
+                  <a:schemeClr val="tx1"/>
+                </a:solidFill>
+                <a:latin typeface="+mn-lt"/>
+                <a:ea typeface="+mn-lt"/>
+                <a:cs typeface="+mn-lt"/>
+              </a:defRPr>
+            </a:lvl9pPr>
+          </a:lstStyle>
+          <a:p>
+            <a:pPr algn="l">
+              <a:defRPr sz="2175">
+                <a:solidFill>
+                  <a:srgbClr val="000000"/>
+                </a:solidFill>
+                <a:latin typeface="Calibri"/>
+                <a:ea typeface="Calibri"/>
+                <a:cs typeface="Calibri"/>
+              </a:defRPr>
+            </a:pPr>
+            <a:r>
+              <a:rPr sz="2175">
+                <a:solidFill>
+                  <a:srgbClr val="000000"/>
+                </a:solidFill>
+                <a:latin typeface="Calibri"/>
+                <a:ea typeface="Calibri"/>
+                <a:cs typeface="Calibri"/>
+              </a:rPr>
+              <a:t>withExpiresAt() registra o momento de expiração do token.</a:t>
+            </a:r>
+          </a:p>
+        </p:txBody>
+      </p:sp>
+      <p:sp>
+        <p:nvSpPr>
+          <p:cNvPr id="11" name="Shape 20">
+            <a:extLst>
+              <a:ext uri="{FF2B5EF4-FFF2-40B4-BE49-F238E27FC236}">
+                <a16:creationId xmlns:a16="http://schemas.microsoft.com/office/drawing/2014/main" id="{EE383B37-7310-4563-9BC8-B173B5286B0D}"/>
+              </a:ext>
+            </a:extLst>
+          </p:cNvPr>
+          <p:cNvSpPr>
+            <a:spLocks noGrp="1"/>
+          </p:cNvSpPr>
+          <p:nvPr/>
+        </p:nvSpPr>
+        <p:spPr>
+          <a:xfrm>
+            <a:off x="857250" y="2762250"/>
+            <a:ext cx="10477500" cy="1809750"/>
+          </a:xfrm>
+          <a:prstGeom prst="roundRect">
+            <a:avLst>
+              <a:gd name="adj" fmla="val 8081"/>
+            </a:avLst>
+          </a:prstGeom>
+          <a:solidFill>
+            <a:srgbClr val="1E1E1E"/>
+          </a:solidFill>
+          <a:ln>
+            <a:solidFill>
+              <a:srgbClr val="1E1E1E"/>
+            </a:solidFill>
+          </a:ln>
+        </p:spPr>
+        <p:txBody>
+          <a:bodyPr/>
+          <a:lstStyle/>
+          <a:p>
+            <a:endParaRPr/>
+          </a:p>
+        </p:txBody>
+      </p:sp>
+      <p:sp>
+        <p:nvSpPr>
+          <p:cNvPr id="4" name="Retângulo 3">
+            <a:extLst>
+              <a:ext uri="{FF2B5EF4-FFF2-40B4-BE49-F238E27FC236}">
+                <a16:creationId xmlns:a16="http://schemas.microsoft.com/office/drawing/2014/main" id="{3CE8AC7A-3364-4E97-BC2E-25CF018F1E04}"/>
+              </a:ext>
+            </a:extLst>
+          </p:cNvPr>
+          <p:cNvSpPr>
+            <a:spLocks noGrp="1"/>
+          </p:cNvSpPr>
+          <p:nvPr/>
+        </p:nvSpPr>
+        <p:spPr>
+          <a:xfrm>
+            <a:off x="1143000" y="3190875"/>
+            <a:ext cx="10001250" cy="2865120"/>
+          </a:xfrm>
+          <a:prstGeom prst="rect">
+            <a:avLst/>
+          </a:prstGeom>
+        </p:spPr>
+        <p:txBody>
+          <a:bodyPr wrap="square">
+            <a:noAutofit/>
+          </a:bodyPr>
+          <a:lstStyle/>
+          <a:p>
+            <a:pPr algn="l">
+              <a:defRPr sz="2400">
+                <a:solidFill>
+                  <a:srgbClr val="D4D4D4"/>
+                </a:solidFill>
+                <a:latin typeface="Consolas"/>
+                <a:ea typeface="Consolas"/>
+                <a:cs typeface="Consolas"/>
+              </a:defRPr>
+            </a:pPr>
+            <a:r>
+              <a:rPr sz="2400">
+                <a:solidFill>
+                  <a:srgbClr val="D4D4D4"/>
+                </a:solidFill>
+                <a:latin typeface="Consolas"/>
+                <a:ea typeface="Consolas"/>
+                <a:cs typeface="Consolas"/>
+              </a:rPr>
+              <a:t>.withExpiresAt(dataExpiracao())</a:t>
+            </a:r>
+          </a:p>
+        </p:txBody>
+      </p:sp>
+      <p:sp>
+        <p:nvSpPr>
+          <p:cNvPr id="12" name="Retângulo 11">
+            <a:extLst>
+              <a:ext uri="{FF2B5EF4-FFF2-40B4-BE49-F238E27FC236}">
+                <a16:creationId xmlns:a16="http://schemas.microsoft.com/office/drawing/2014/main" id="{7B71F0EF-64D6-450C-8CA3-A9510514A359}"/>
+              </a:ext>
+            </a:extLst>
+          </p:cNvPr>
+          <p:cNvSpPr>
+            <a:spLocks noGrp="1"/>
+          </p:cNvSpPr>
+          <p:nvPr/>
+        </p:nvSpPr>
+        <p:spPr>
+          <a:xfrm>
+            <a:off x="685800" y="4905375"/>
+            <a:ext cx="10820400" cy="1333500"/>
+          </a:xfrm>
+          <a:prstGeom prst="rect">
+            <a:avLst/>
+          </a:prstGeom>
+          <a:noFill/>
+          <a:ln w="0">
+            <a:noFill/>
+          </a:ln>
+        </p:spPr>
+        <p:txBody>
+          <a:bodyPr>
+            <a:noAutofit/>
+          </a:bodyPr>
+          <a:lstStyle/>
+          <a:p>
+            <a:pPr algn="l">
+              <a:defRPr sz="2100">
+                <a:solidFill>
+                  <a:srgbClr val="000000"/>
+                </a:solidFill>
+                <a:latin typeface="Calibri"/>
+                <a:ea typeface="Calibri"/>
+                <a:cs typeface="Calibri"/>
+              </a:defRPr>
+            </a:pPr>
+            <a:r>
+              <a:rPr sz="2100">
+                <a:solidFill>
+                  <a:srgbClr val="000000"/>
+                </a:solidFill>
+                <a:latin typeface="Calibri"/>
+                <a:ea typeface="Calibri"/>
+                <a:cs typeface="Calibri"/>
+              </a:rPr>
+              <a:t>dataExpiracao() é um método criado por nós para calcular esse momento.</a:t>
+            </a:r>
+          </a:p>
+          <a:p>
+            <a:pPr algn="l">
+              <a:defRPr sz="2100">
+                <a:solidFill>
+                  <a:srgbClr val="000000"/>
+                </a:solidFill>
+                <a:latin typeface="Calibri"/>
+                <a:ea typeface="Calibri"/>
+                <a:cs typeface="Calibri"/>
+              </a:defRPr>
+            </a:pPr>
+            <a:r>
+              <a:rPr sz="2100">
+                <a:solidFill>
+                  <a:srgbClr val="000000"/>
+                </a:solidFill>
+                <a:latin typeface="Calibri"/>
+                <a:ea typeface="Calibri"/>
+                <a:cs typeface="Calibri"/>
+              </a:rPr>
+              <a:t>A API deve verificar a expiração ao validar o token.</a:t>
+            </a:r>
+          </a:p>
+        </p:txBody>
+      </p:sp>
+    </p:spTree>
+    <p:extLst>
+      <p:ext uri="{BB962C8B-B14F-4D97-AF65-F5344CB8AC3E}">
+        <p14:creationId xmlns:p14="http://schemas.microsoft.com/office/powerpoint/2010/main" val="679006063"/>
+      </p:ext>
+    </p:extLst>
+  </p:cSld>
+  <p:clrMapOvr>
+    <a:masterClrMapping/>
+  </p:clrMapOvr>
+</p:sld>
+</file>
+
+<file path=ppt/slides/slide14.xml><?xml version="1.0" encoding="utf-8"?>
+<p:sld xmlns:a="http://schemas.openxmlformats.org/drawingml/2006/main" xmlns:r="http://schemas.openxmlformats.org/officeDocument/2006/relationships" xmlns:p="http://schemas.openxmlformats.org/presentationml/2006/main">
+  <p:cSld>
+    <p:spTree>
+      <p:nvGrpSpPr>
+        <p:cNvPr id="1" name=""/>
+        <p:cNvGrpSpPr/>
+        <p:nvPr/>
+      </p:nvGrpSpPr>
+      <p:grpSpPr>
+        <a:xfrm>
+          <a:off x="0" y="0"/>
+          <a:ext cx="0" cy="0"/>
+          <a:chOff x="0" y="0"/>
+          <a:chExt cx="0" cy="0"/>
+        </a:xfrm>
+      </p:grpSpPr>
+      <p:sp>
+        <p:nvSpPr>
+          <p:cNvPr id="2" name="Título 1">
+            <a:extLst>
+              <a:ext uri="{FF2B5EF4-FFF2-40B4-BE49-F238E27FC236}">
+                <a16:creationId xmlns:a16="http://schemas.microsoft.com/office/drawing/2014/main" id="{8738858E-69E2-8A32-4D8D-61A4750C2960}"/>
+              </a:ext>
+            </a:extLst>
+          </p:cNvPr>
+          <p:cNvSpPr>
+            <a:spLocks noGrp="1"/>
+          </p:cNvSpPr>
+          <p:nvPr>
+            <p:ph type="title"/>
+          </p:nvPr>
+        </p:nvSpPr>
+        <p:spPr/>
+        <p:txBody>
+          <a:bodyPr>
+            <a:noAutofit/>
+          </a:bodyPr>
+          <a:lstStyle/>
+          <a:p>
+            <a:pPr>
+              <a:defRPr sz="3000">
+                <a:solidFill>
+                  <a:srgbClr val="000000"/>
+                </a:solidFill>
+                <a:latin typeface="Calibri Light"/>
+                <a:ea typeface="Calibri Light"/>
+                <a:cs typeface="Calibri Light"/>
+              </a:defRPr>
+            </a:pPr>
+            <a:r>
+              <a:rPr sz="3000">
+                <a:solidFill>
+                  <a:srgbClr val="000000"/>
+                </a:solidFill>
+                <a:latin typeface="Calibri Light"/>
+                <a:ea typeface="Calibri Light"/>
+                <a:cs typeface="Calibri Light"/>
+              </a:rPr>
+              <a:t>Assinatura e geração do JWT</a:t>
+            </a:r>
+          </a:p>
+        </p:txBody>
+      </p:sp>
+      <p:sp>
+        <p:nvSpPr>
+          <p:cNvPr id="6" name="Espaço Reservado para Conteúdo 5">
+            <a:extLst>
+              <a:ext uri="{FF2B5EF4-FFF2-40B4-BE49-F238E27FC236}">
+                <a16:creationId xmlns:a16="http://schemas.microsoft.com/office/drawing/2014/main" id="{B24F9431-18D8-4DC9-B9CC-1BCF1A71C18D}"/>
+              </a:ext>
+            </a:extLst>
+          </p:cNvPr>
+          <p:cNvSpPr>
+            <a:spLocks noGrp="1"/>
+          </p:cNvSpPr>
+          <p:nvPr/>
+        </p:nvSpPr>
+        <p:spPr>
+          <a:xfrm>
+            <a:off x="685800" y="1809750"/>
+            <a:ext cx="10820400" cy="809625"/>
+          </a:xfrm>
+          <a:prstGeom prst="rect">
+            <a:avLst/>
+          </a:prstGeom>
+        </p:spPr>
+        <p:txBody>
+          <a:bodyPr>
+            <a:noAutofit/>
+          </a:bodyPr>
+          <a:lstStyle>
+            <a:lvl1pPr marL="0" indent="0" algn="just" defTabSz="914400">
+              <a:lnSpc>
+                <a:spcPct val="150000"/>
+              </a:lnSpc>
+              <a:spcBef>
+                <a:spcPts val="0"/>
+              </a:spcBef>
+              <a:buFont typeface="Arial"/>
+              <a:buNone/>
+              <a:defRPr sz="2000" kern="1200">
+                <a:solidFill>
+                  <a:schemeClr val="tx1"/>
+                </a:solidFill>
+                <a:latin typeface="Times New Roman"/>
+                <a:ea typeface="Times New Roman"/>
+                <a:cs typeface="Times New Roman"/>
+              </a:defRPr>
+            </a:lvl1pPr>
+            <a:lvl2pPr marL="457200" indent="0" algn="just" defTabSz="914400">
+              <a:lnSpc>
+                <a:spcPct val="150000"/>
+              </a:lnSpc>
+              <a:spcBef>
+                <a:spcPts val="0"/>
+              </a:spcBef>
+              <a:buFont typeface="Arial"/>
+              <a:buNone/>
+              <a:defRPr sz="1600" kern="1200">
+                <a:solidFill>
+                  <a:schemeClr val="tx1"/>
+                </a:solidFill>
+                <a:latin typeface="Times New Roman"/>
+                <a:ea typeface="Times New Roman"/>
+                <a:cs typeface="Times New Roman"/>
+              </a:defRPr>
+            </a:lvl2pPr>
+            <a:lvl3pPr marL="914400" indent="0" algn="just" defTabSz="914400">
+              <a:lnSpc>
+                <a:spcPct val="150000"/>
+              </a:lnSpc>
+              <a:spcBef>
+                <a:spcPts val="0"/>
+              </a:spcBef>
+              <a:buFont typeface="Arial"/>
+              <a:buNone/>
+              <a:defRPr sz="1400" kern="1200">
+                <a:solidFill>
+                  <a:schemeClr val="tx1"/>
+                </a:solidFill>
+                <a:latin typeface="Times New Roman"/>
+                <a:ea typeface="Times New Roman"/>
+                <a:cs typeface="Times New Roman"/>
+              </a:defRPr>
+            </a:lvl3pPr>
+            <a:lvl4pPr marL="1371600" indent="0" algn="just" defTabSz="914400">
+              <a:lnSpc>
+                <a:spcPct val="150000"/>
+              </a:lnSpc>
+              <a:spcBef>
+                <a:spcPts val="0"/>
+              </a:spcBef>
+              <a:buFont typeface="Arial"/>
+              <a:buNone/>
+              <a:defRPr sz="1200" kern="1200">
+                <a:solidFill>
+                  <a:schemeClr val="tx1"/>
+                </a:solidFill>
+                <a:latin typeface="Times New Roman"/>
+                <a:ea typeface="Times New Roman"/>
+                <a:cs typeface="Times New Roman"/>
+              </a:defRPr>
+            </a:lvl4pPr>
+            <a:lvl5pPr marL="1828800" indent="0" algn="just" defTabSz="914400">
+              <a:lnSpc>
+                <a:spcPct val="150000"/>
+              </a:lnSpc>
+              <a:spcBef>
+                <a:spcPts val="0"/>
+              </a:spcBef>
+              <a:buFont typeface="Arial"/>
+              <a:buNone/>
+              <a:defRPr sz="1000" kern="1200">
+                <a:solidFill>
+                  <a:schemeClr val="tx1"/>
+                </a:solidFill>
+                <a:latin typeface="Times New Roman"/>
+                <a:ea typeface="Times New Roman"/>
+                <a:cs typeface="Times New Roman"/>
+              </a:defRPr>
+            </a:lvl5pPr>
+            <a:lvl6pPr marL="2514600" indent="-228600" algn="l" defTabSz="914400">
+              <a:lnSpc>
+                <a:spcPct val="90000"/>
+              </a:lnSpc>
+              <a:spcBef>
+                <a:spcPts val="500"/>
+              </a:spcBef>
+              <a:buFont typeface="Arial"/>
+              <a:buChar char="•"/>
+              <a:defRPr sz="1800" kern="1200">
+                <a:solidFill>
+                  <a:schemeClr val="tx1"/>
+                </a:solidFill>
+                <a:latin typeface="+mn-lt"/>
+                <a:ea typeface="+mn-lt"/>
+                <a:cs typeface="+mn-lt"/>
+              </a:defRPr>
+            </a:lvl6pPr>
+            <a:lvl7pPr marL="2971800" indent="-228600" algn="l" defTabSz="914400">
+              <a:lnSpc>
+                <a:spcPct val="90000"/>
+              </a:lnSpc>
+              <a:spcBef>
+                <a:spcPts val="500"/>
+              </a:spcBef>
+              <a:buFont typeface="Arial"/>
+              <a:buChar char="•"/>
+              <a:defRPr sz="1800" kern="1200">
+                <a:solidFill>
+                  <a:schemeClr val="tx1"/>
+                </a:solidFill>
+                <a:latin typeface="+mn-lt"/>
+                <a:ea typeface="+mn-lt"/>
+                <a:cs typeface="+mn-lt"/>
+              </a:defRPr>
+            </a:lvl7pPr>
+            <a:lvl8pPr marL="3429000" indent="-228600" algn="l" defTabSz="914400">
+              <a:lnSpc>
+                <a:spcPct val="90000"/>
+              </a:lnSpc>
+              <a:spcBef>
+                <a:spcPts val="500"/>
+              </a:spcBef>
+              <a:buFont typeface="Arial"/>
+              <a:buChar char="•"/>
+              <a:defRPr sz="1800" kern="1200">
+                <a:solidFill>
+                  <a:schemeClr val="tx1"/>
+                </a:solidFill>
+                <a:latin typeface="+mn-lt"/>
+                <a:ea typeface="+mn-lt"/>
+                <a:cs typeface="+mn-lt"/>
+              </a:defRPr>
+            </a:lvl8pPr>
+            <a:lvl9pPr marL="3886200" indent="-228600" algn="l" defTabSz="914400">
+              <a:lnSpc>
+                <a:spcPct val="90000"/>
+              </a:lnSpc>
+              <a:spcBef>
+                <a:spcPts val="500"/>
+              </a:spcBef>
+              <a:buFont typeface="Arial"/>
+              <a:buChar char="•"/>
+              <a:defRPr sz="1800" kern="1200">
+                <a:solidFill>
+                  <a:schemeClr val="tx1"/>
+                </a:solidFill>
+                <a:latin typeface="+mn-lt"/>
+                <a:ea typeface="+mn-lt"/>
+                <a:cs typeface="+mn-lt"/>
+              </a:defRPr>
+            </a:lvl9pPr>
+          </a:lstStyle>
+          <a:p>
+            <a:pPr algn="l">
+              <a:defRPr sz="2175">
+                <a:solidFill>
+                  <a:srgbClr val="000000"/>
+                </a:solidFill>
+                <a:latin typeface="Calibri"/>
+                <a:ea typeface="Calibri"/>
+                <a:cs typeface="Calibri"/>
+              </a:defRPr>
+            </a:pPr>
+            <a:r>
+              <a:rPr sz="2175">
+                <a:solidFill>
+                  <a:srgbClr val="000000"/>
+                </a:solidFill>
+                <a:latin typeface="Calibri"/>
+                <a:ea typeface="Calibri"/>
+                <a:cs typeface="Calibri"/>
+              </a:rPr>
+              <a:t>sign() usa o algoritmo e a chave definidos para assinar o token.</a:t>
+            </a:r>
+          </a:p>
+        </p:txBody>
+      </p:sp>
+      <p:sp>
+        <p:nvSpPr>
+          <p:cNvPr id="11" name="Shape 20">
+            <a:extLst>
+              <a:ext uri="{FF2B5EF4-FFF2-40B4-BE49-F238E27FC236}">
+                <a16:creationId xmlns:a16="http://schemas.microsoft.com/office/drawing/2014/main" id="{EE383B37-7310-4563-9BC8-B173B5286B0D}"/>
+              </a:ext>
+            </a:extLst>
+          </p:cNvPr>
+          <p:cNvSpPr>
+            <a:spLocks noGrp="1"/>
+          </p:cNvSpPr>
+          <p:nvPr/>
+        </p:nvSpPr>
+        <p:spPr>
+          <a:xfrm>
+            <a:off x="857250" y="2762250"/>
+            <a:ext cx="10477500" cy="1809750"/>
+          </a:xfrm>
+          <a:prstGeom prst="roundRect">
+            <a:avLst>
+              <a:gd name="adj" fmla="val 8081"/>
+            </a:avLst>
+          </a:prstGeom>
+          <a:solidFill>
+            <a:srgbClr val="1E1E1E"/>
+          </a:solidFill>
+          <a:ln>
+            <a:solidFill>
+              <a:srgbClr val="1E1E1E"/>
+            </a:solidFill>
+          </a:ln>
+        </p:spPr>
+        <p:txBody>
+          <a:bodyPr/>
+          <a:lstStyle/>
+          <a:p>
+            <a:endParaRPr/>
+          </a:p>
+        </p:txBody>
+      </p:sp>
+      <p:sp>
+        <p:nvSpPr>
+          <p:cNvPr id="4" name="Retângulo 3">
+            <a:extLst>
+              <a:ext uri="{FF2B5EF4-FFF2-40B4-BE49-F238E27FC236}">
+                <a16:creationId xmlns:a16="http://schemas.microsoft.com/office/drawing/2014/main" id="{3CE8AC7A-3364-4E97-BC2E-25CF018F1E04}"/>
+              </a:ext>
+            </a:extLst>
+          </p:cNvPr>
+          <p:cNvSpPr>
+            <a:spLocks noGrp="1"/>
+          </p:cNvSpPr>
+          <p:nvPr/>
+        </p:nvSpPr>
+        <p:spPr>
+          <a:xfrm>
+            <a:off x="1143000" y="3190875"/>
+            <a:ext cx="10001250" cy="2865120"/>
+          </a:xfrm>
+          <a:prstGeom prst="rect">
+            <a:avLst/>
+          </a:prstGeom>
+        </p:spPr>
+        <p:txBody>
+          <a:bodyPr wrap="square">
+            <a:noAutofit/>
+          </a:bodyPr>
+          <a:lstStyle/>
+          <a:p>
+            <a:pPr algn="l">
+              <a:defRPr sz="2400">
+                <a:solidFill>
+                  <a:srgbClr val="D4D4D4"/>
+                </a:solidFill>
+                <a:latin typeface="Consolas"/>
+                <a:ea typeface="Consolas"/>
+                <a:cs typeface="Consolas"/>
+              </a:defRPr>
+            </a:pPr>
+            <a:r>
+              <a:rPr sz="2400">
+                <a:solidFill>
+                  <a:srgbClr val="D4D4D4"/>
+                </a:solidFill>
+                <a:latin typeface="Consolas"/>
+                <a:ea typeface="Consolas"/>
+                <a:cs typeface="Consolas"/>
+              </a:rPr>
+              <a:t>.sign(algoritmo);</a:t>
+            </a:r>
+          </a:p>
+        </p:txBody>
+      </p:sp>
+      <p:sp>
+        <p:nvSpPr>
+          <p:cNvPr id="12" name="Retângulo 11">
+            <a:extLst>
+              <a:ext uri="{FF2B5EF4-FFF2-40B4-BE49-F238E27FC236}">
+                <a16:creationId xmlns:a16="http://schemas.microsoft.com/office/drawing/2014/main" id="{F61CFA94-872C-4FD1-AE0A-00CFAFC57244}"/>
+              </a:ext>
+            </a:extLst>
+          </p:cNvPr>
+          <p:cNvSpPr>
+            <a:spLocks noGrp="1"/>
+          </p:cNvSpPr>
+          <p:nvPr/>
+        </p:nvSpPr>
+        <p:spPr>
+          <a:xfrm>
+            <a:off x="685800" y="4905375"/>
+            <a:ext cx="10820400" cy="1333500"/>
+          </a:xfrm>
+          <a:prstGeom prst="rect">
+            <a:avLst/>
+          </a:prstGeom>
+          <a:noFill/>
+          <a:ln w="0">
+            <a:noFill/>
+          </a:ln>
+        </p:spPr>
+        <p:txBody>
+          <a:bodyPr>
+            <a:noAutofit/>
+          </a:bodyPr>
+          <a:lstStyle/>
+          <a:p>
+            <a:pPr algn="l">
+              <a:defRPr sz="2100">
+                <a:solidFill>
+                  <a:srgbClr val="000000"/>
+                </a:solidFill>
+                <a:latin typeface="Calibri"/>
+                <a:ea typeface="Calibri"/>
+                <a:cs typeface="Calibri"/>
+              </a:defRPr>
+            </a:pPr>
+            <a:r>
+              <a:rPr sz="2100">
+                <a:solidFill>
+                  <a:srgbClr val="000000"/>
+                </a:solidFill>
+                <a:latin typeface="Calibri"/>
+                <a:ea typeface="Calibri"/>
+                <a:cs typeface="Calibri"/>
+              </a:rPr>
+              <a:t>Esse método gera a String final do JWT.</a:t>
+            </a:r>
+          </a:p>
+          <a:p>
+            <a:pPr algn="l">
+              <a:defRPr sz="2100">
+                <a:solidFill>
+                  <a:srgbClr val="000000"/>
+                </a:solidFill>
+                <a:latin typeface="Calibri"/>
+                <a:ea typeface="Calibri"/>
+                <a:cs typeface="Calibri"/>
+              </a:defRPr>
+            </a:pPr>
+            <a:r>
+              <a:rPr sz="2100">
+                <a:solidFill>
+                  <a:srgbClr val="000000"/>
+                </a:solidFill>
+                <a:latin typeface="Calibri"/>
+                <a:ea typeface="Calibri"/>
+                <a:cs typeface="Calibri"/>
+              </a:rPr>
+              <a:t>A assinatura permite detectar alterações, mas não esconde o conteúdo.</a:t>
+            </a:r>
+          </a:p>
+        </p:txBody>
+      </p:sp>
+    </p:spTree>
+    <p:extLst>
+      <p:ext uri="{BB962C8B-B14F-4D97-AF65-F5344CB8AC3E}">
+        <p14:creationId xmlns:p14="http://schemas.microsoft.com/office/powerpoint/2010/main" val="2376732815"/>
+      </p:ext>
+    </p:extLst>
+  </p:cSld>
+  <p:clrMapOvr>
+    <a:masterClrMapping/>
+  </p:clrMapOvr>
+</p:sld>
+</file>
+
+<file path=ppt/slides/slide15.xml><?xml version="1.0" encoding="utf-8"?>
+<p:sld xmlns:a="http://schemas.openxmlformats.org/drawingml/2006/main" xmlns:r="http://schemas.openxmlformats.org/officeDocument/2006/relationships" xmlns:p="http://schemas.openxmlformats.org/presentationml/2006/main">
+  <p:cSld>
+    <p:spTree>
+      <p:nvGrpSpPr>
+        <p:cNvPr id="1" name=""/>
+        <p:cNvGrpSpPr/>
+        <p:nvPr/>
+      </p:nvGrpSpPr>
+      <p:grpSpPr>
+        <a:xfrm>
+          <a:off x="0" y="0"/>
+          <a:ext cx="0" cy="0"/>
+          <a:chOff x="0" y="0"/>
+          <a:chExt cx="0" cy="0"/>
+        </a:xfrm>
+      </p:grpSpPr>
+      <p:sp>
+        <p:nvSpPr>
+          <p:cNvPr id="2" name="Título 1">
+            <a:extLst>
+              <a:ext uri="{FF2B5EF4-FFF2-40B4-BE49-F238E27FC236}">
+                <a16:creationId xmlns:a16="http://schemas.microsoft.com/office/drawing/2014/main" id="{8738858E-69E2-8A32-4D8D-61A4750C2960}"/>
+              </a:ext>
+            </a:extLst>
+          </p:cNvPr>
+          <p:cNvSpPr>
+            <a:spLocks noGrp="1"/>
+          </p:cNvSpPr>
+          <p:nvPr>
+            <p:ph type="title"/>
+          </p:nvPr>
+        </p:nvSpPr>
+        <p:spPr/>
+        <p:txBody>
+          <a:bodyPr>
+            <a:noAutofit/>
+          </a:bodyPr>
+          <a:lstStyle/>
+          <a:p>
+            <a:pPr>
+              <a:defRPr sz="3000">
+                <a:solidFill>
+                  <a:srgbClr val="000000"/>
+                </a:solidFill>
+                <a:latin typeface="Calibri Light"/>
+                <a:ea typeface="Calibri Light"/>
+                <a:cs typeface="Calibri Light"/>
+              </a:defRPr>
+            </a:pPr>
+            <a:r>
+              <a:rPr sz="3000">
+                <a:solidFill>
+                  <a:srgbClr val="000000"/>
+                </a:solidFill>
+                <a:latin typeface="Calibri Light"/>
+                <a:ea typeface="Calibri Light"/>
+                <a:cs typeface="Calibri Light"/>
+              </a:rPr>
+              <a:t>Tratamento de falhas</a:t>
+            </a:r>
+          </a:p>
+        </p:txBody>
+      </p:sp>
+      <p:sp>
+        <p:nvSpPr>
+          <p:cNvPr id="6" name="Espaço Reservado para Conteúdo 5">
+            <a:extLst>
+              <a:ext uri="{FF2B5EF4-FFF2-40B4-BE49-F238E27FC236}">
+                <a16:creationId xmlns:a16="http://schemas.microsoft.com/office/drawing/2014/main" id="{B24F9431-18D8-4DC9-B9CC-1BCF1A71C18D}"/>
+              </a:ext>
+            </a:extLst>
+          </p:cNvPr>
+          <p:cNvSpPr>
+            <a:spLocks noGrp="1"/>
+          </p:cNvSpPr>
+          <p:nvPr/>
+        </p:nvSpPr>
+        <p:spPr>
+          <a:xfrm>
+            <a:off x="685800" y="1809750"/>
+            <a:ext cx="10820400" cy="809625"/>
+          </a:xfrm>
+          <a:prstGeom prst="rect">
+            <a:avLst/>
+          </a:prstGeom>
+        </p:spPr>
+        <p:txBody>
+          <a:bodyPr>
+            <a:noAutofit/>
+          </a:bodyPr>
+          <a:lstStyle>
+            <a:lvl1pPr marL="0" indent="0" algn="just" defTabSz="914400">
+              <a:lnSpc>
+                <a:spcPct val="150000"/>
+              </a:lnSpc>
+              <a:spcBef>
+                <a:spcPts val="0"/>
+              </a:spcBef>
+              <a:buFont typeface="Arial"/>
+              <a:buNone/>
+              <a:defRPr sz="2000" kern="1200">
+                <a:solidFill>
+                  <a:schemeClr val="tx1"/>
+                </a:solidFill>
+                <a:latin typeface="Times New Roman"/>
+                <a:ea typeface="Times New Roman"/>
+                <a:cs typeface="Times New Roman"/>
+              </a:defRPr>
+            </a:lvl1pPr>
+            <a:lvl2pPr marL="457200" indent="0" algn="just" defTabSz="914400">
+              <a:lnSpc>
+                <a:spcPct val="150000"/>
+              </a:lnSpc>
+              <a:spcBef>
+                <a:spcPts val="0"/>
+              </a:spcBef>
+              <a:buFont typeface="Arial"/>
+              <a:buNone/>
+              <a:defRPr sz="1600" kern="1200">
+                <a:solidFill>
+                  <a:schemeClr val="tx1"/>
+                </a:solidFill>
+                <a:latin typeface="Times New Roman"/>
+                <a:ea typeface="Times New Roman"/>
+                <a:cs typeface="Times New Roman"/>
+              </a:defRPr>
+            </a:lvl2pPr>
+            <a:lvl3pPr marL="914400" indent="0" algn="just" defTabSz="914400">
+              <a:lnSpc>
+                <a:spcPct val="150000"/>
+              </a:lnSpc>
+              <a:spcBef>
+                <a:spcPts val="0"/>
+              </a:spcBef>
+              <a:buFont typeface="Arial"/>
+              <a:buNone/>
+              <a:defRPr sz="1400" kern="1200">
+                <a:solidFill>
+                  <a:schemeClr val="tx1"/>
+                </a:solidFill>
+                <a:latin typeface="Times New Roman"/>
+                <a:ea typeface="Times New Roman"/>
+                <a:cs typeface="Times New Roman"/>
+              </a:defRPr>
+            </a:lvl3pPr>
+            <a:lvl4pPr marL="1371600" indent="0" algn="just" defTabSz="914400">
+              <a:lnSpc>
+                <a:spcPct val="150000"/>
+              </a:lnSpc>
+              <a:spcBef>
+                <a:spcPts val="0"/>
+              </a:spcBef>
+              <a:buFont typeface="Arial"/>
+              <a:buNone/>
+              <a:defRPr sz="1200" kern="1200">
+                <a:solidFill>
+                  <a:schemeClr val="tx1"/>
+                </a:solidFill>
+                <a:latin typeface="Times New Roman"/>
+                <a:ea typeface="Times New Roman"/>
+                <a:cs typeface="Times New Roman"/>
+              </a:defRPr>
+            </a:lvl4pPr>
+            <a:lvl5pPr marL="1828800" indent="0" algn="just" defTabSz="914400">
+              <a:lnSpc>
+                <a:spcPct val="150000"/>
+              </a:lnSpc>
+              <a:spcBef>
+                <a:spcPts val="0"/>
+              </a:spcBef>
+              <a:buFont typeface="Arial"/>
+              <a:buNone/>
+              <a:defRPr sz="1000" kern="1200">
+                <a:solidFill>
+                  <a:schemeClr val="tx1"/>
+                </a:solidFill>
+                <a:latin typeface="Times New Roman"/>
+                <a:ea typeface="Times New Roman"/>
+                <a:cs typeface="Times New Roman"/>
+              </a:defRPr>
+            </a:lvl5pPr>
+            <a:lvl6pPr marL="2514600" indent="-228600" algn="l" defTabSz="914400">
+              <a:lnSpc>
+                <a:spcPct val="90000"/>
+              </a:lnSpc>
+              <a:spcBef>
+                <a:spcPts val="500"/>
+              </a:spcBef>
+              <a:buFont typeface="Arial"/>
+              <a:buChar char="•"/>
+              <a:defRPr sz="1800" kern="1200">
+                <a:solidFill>
+                  <a:schemeClr val="tx1"/>
+                </a:solidFill>
+                <a:latin typeface="+mn-lt"/>
+                <a:ea typeface="+mn-lt"/>
+                <a:cs typeface="+mn-lt"/>
+              </a:defRPr>
+            </a:lvl6pPr>
+            <a:lvl7pPr marL="2971800" indent="-228600" algn="l" defTabSz="914400">
+              <a:lnSpc>
+                <a:spcPct val="90000"/>
+              </a:lnSpc>
+              <a:spcBef>
+                <a:spcPts val="500"/>
+              </a:spcBef>
+              <a:buFont typeface="Arial"/>
+              <a:buChar char="•"/>
+              <a:defRPr sz="1800" kern="1200">
+                <a:solidFill>
+                  <a:schemeClr val="tx1"/>
+                </a:solidFill>
+                <a:latin typeface="+mn-lt"/>
+                <a:ea typeface="+mn-lt"/>
+                <a:cs typeface="+mn-lt"/>
+              </a:defRPr>
+            </a:lvl7pPr>
+            <a:lvl8pPr marL="3429000" indent="-228600" algn="l" defTabSz="914400">
+              <a:lnSpc>
+                <a:spcPct val="90000"/>
+              </a:lnSpc>
+              <a:spcBef>
+                <a:spcPts val="500"/>
+              </a:spcBef>
+              <a:buFont typeface="Arial"/>
+              <a:buChar char="•"/>
+              <a:defRPr sz="1800" kern="1200">
+                <a:solidFill>
+                  <a:schemeClr val="tx1"/>
+                </a:solidFill>
+                <a:latin typeface="+mn-lt"/>
+                <a:ea typeface="+mn-lt"/>
+                <a:cs typeface="+mn-lt"/>
+              </a:defRPr>
+            </a:lvl8pPr>
+            <a:lvl9pPr marL="3886200" indent="-228600" algn="l" defTabSz="914400">
+              <a:lnSpc>
+                <a:spcPct val="90000"/>
+              </a:lnSpc>
+              <a:spcBef>
+                <a:spcPts val="500"/>
+              </a:spcBef>
+              <a:buFont typeface="Arial"/>
+              <a:buChar char="•"/>
+              <a:defRPr sz="1800" kern="1200">
+                <a:solidFill>
+                  <a:schemeClr val="tx1"/>
+                </a:solidFill>
+                <a:latin typeface="+mn-lt"/>
+                <a:ea typeface="+mn-lt"/>
+                <a:cs typeface="+mn-lt"/>
+              </a:defRPr>
+            </a:lvl9pPr>
+          </a:lstStyle>
+          <a:p>
+            <a:pPr algn="l">
+              <a:defRPr sz="2175">
+                <a:solidFill>
+                  <a:srgbClr val="000000"/>
+                </a:solidFill>
+                <a:latin typeface="Calibri"/>
+                <a:ea typeface="Calibri"/>
+                <a:cs typeface="Calibri"/>
+              </a:defRPr>
+            </a:pPr>
+            <a:r>
+              <a:rPr sz="2175">
+                <a:solidFill>
+                  <a:srgbClr val="000000"/>
+                </a:solidFill>
+                <a:latin typeface="Calibri"/>
+                <a:ea typeface="Calibri"/>
+                <a:cs typeface="Calibri"/>
+              </a:rPr>
+              <a:t>O catch captura JWTCreationException durante a criação do token.</a:t>
+            </a:r>
+          </a:p>
+        </p:txBody>
+      </p:sp>
+      <p:sp>
+        <p:nvSpPr>
+          <p:cNvPr id="11" name="Shape 20">
+            <a:extLst>
+              <a:ext uri="{FF2B5EF4-FFF2-40B4-BE49-F238E27FC236}">
+                <a16:creationId xmlns:a16="http://schemas.microsoft.com/office/drawing/2014/main" id="{EE383B37-7310-4563-9BC8-B173B5286B0D}"/>
+              </a:ext>
+            </a:extLst>
+          </p:cNvPr>
+          <p:cNvSpPr>
+            <a:spLocks noGrp="1"/>
+          </p:cNvSpPr>
+          <p:nvPr/>
+        </p:nvSpPr>
+        <p:spPr>
+          <a:xfrm>
+            <a:off x="857250" y="2762250"/>
+            <a:ext cx="10477500" cy="1809750"/>
+          </a:xfrm>
+          <a:prstGeom prst="roundRect">
+            <a:avLst>
+              <a:gd name="adj" fmla="val 8081"/>
+            </a:avLst>
+          </a:prstGeom>
+          <a:solidFill>
+            <a:srgbClr val="1E1E1E"/>
+          </a:solidFill>
+          <a:ln>
+            <a:solidFill>
+              <a:srgbClr val="1E1E1E"/>
+            </a:solidFill>
+          </a:ln>
+        </p:spPr>
+        <p:txBody>
+          <a:bodyPr/>
+          <a:lstStyle/>
+          <a:p>
+            <a:endParaRPr/>
+          </a:p>
+        </p:txBody>
+      </p:sp>
+      <p:sp>
+        <p:nvSpPr>
+          <p:cNvPr id="4" name="Retângulo 3">
+            <a:extLst>
+              <a:ext uri="{FF2B5EF4-FFF2-40B4-BE49-F238E27FC236}">
+                <a16:creationId xmlns:a16="http://schemas.microsoft.com/office/drawing/2014/main" id="{3CE8AC7A-3364-4E97-BC2E-25CF018F1E04}"/>
+              </a:ext>
+            </a:extLst>
+          </p:cNvPr>
+          <p:cNvSpPr>
+            <a:spLocks noGrp="1"/>
+          </p:cNvSpPr>
+          <p:nvPr/>
+        </p:nvSpPr>
+        <p:spPr>
+          <a:xfrm>
+            <a:off x="1143000" y="3000375"/>
+            <a:ext cx="10001250" cy="2865120"/>
+          </a:xfrm>
+          <a:prstGeom prst="rect">
+            <a:avLst/>
+          </a:prstGeom>
+        </p:spPr>
+        <p:txBody>
+          <a:bodyPr wrap="square">
+            <a:noAutofit/>
+          </a:bodyPr>
+          <a:lstStyle/>
+          <a:p>
+            <a:pPr algn="l">
+              <a:defRPr sz="2025">
+                <a:solidFill>
+                  <a:srgbClr val="D4D4D4"/>
+                </a:solidFill>
+                <a:latin typeface="Consolas"/>
+                <a:ea typeface="Consolas"/>
+                <a:cs typeface="Consolas"/>
+              </a:defRPr>
+            </a:pPr>
+            <a:r>
+              <a:rPr sz="2025">
+                <a:solidFill>
+                  <a:srgbClr val="D4D4D4"/>
+                </a:solidFill>
+                <a:latin typeface="Consolas"/>
+                <a:ea typeface="Consolas"/>
+                <a:cs typeface="Consolas"/>
+              </a:rPr>
+              <a:t>catch (JWTCreationException exception) {</a:t>
+            </a:r>
+          </a:p>
+          <a:p>
+            <a:pPr algn="l">
+              <a:defRPr sz="2025">
+                <a:solidFill>
+                  <a:srgbClr val="D4D4D4"/>
+                </a:solidFill>
+                <a:latin typeface="Consolas"/>
+                <a:ea typeface="Consolas"/>
+                <a:cs typeface="Consolas"/>
+              </a:defRPr>
+            </a:pPr>
+            <a:r>
+              <a:rPr sz="2025">
+                <a:solidFill>
+                  <a:srgbClr val="D4D4D4"/>
+                </a:solidFill>
+                <a:latin typeface="Consolas"/>
+                <a:ea typeface="Consolas"/>
+                <a:cs typeface="Consolas"/>
+              </a:rPr>
+              <a:t>    throw new RuntimeException(</a:t>
+            </a:r>
+          </a:p>
+          <a:p>
+            <a:pPr algn="l">
+              <a:defRPr sz="2025">
+                <a:solidFill>
+                  <a:srgbClr val="D4D4D4"/>
+                </a:solidFill>
+                <a:latin typeface="Consolas"/>
+                <a:ea typeface="Consolas"/>
+                <a:cs typeface="Consolas"/>
+              </a:defRPr>
+            </a:pPr>
+            <a:r>
+              <a:rPr sz="2025">
+                <a:solidFill>
+                  <a:srgbClr val="D4D4D4"/>
+                </a:solidFill>
+                <a:latin typeface="Consolas"/>
+                <a:ea typeface="Consolas"/>
+                <a:cs typeface="Consolas"/>
+              </a:rPr>
+              <a:t>        "Erro ao gerar o token", exception);</a:t>
+            </a:r>
+          </a:p>
+          <a:p>
+            <a:pPr algn="l">
+              <a:defRPr sz="2025">
+                <a:solidFill>
+                  <a:srgbClr val="D4D4D4"/>
+                </a:solidFill>
+                <a:latin typeface="Consolas"/>
+                <a:ea typeface="Consolas"/>
+                <a:cs typeface="Consolas"/>
+              </a:defRPr>
+            </a:pPr>
+            <a:r>
+              <a:rPr sz="2025">
+                <a:solidFill>
+                  <a:srgbClr val="D4D4D4"/>
+                </a:solidFill>
+                <a:latin typeface="Consolas"/>
+                <a:ea typeface="Consolas"/>
+                <a:cs typeface="Consolas"/>
+              </a:rPr>
+              <a:t>}</a:t>
+            </a:r>
+          </a:p>
+        </p:txBody>
+      </p:sp>
+      <p:sp>
+        <p:nvSpPr>
+          <p:cNvPr id="12" name="Retângulo 11">
+            <a:extLst>
+              <a:ext uri="{FF2B5EF4-FFF2-40B4-BE49-F238E27FC236}">
+                <a16:creationId xmlns:a16="http://schemas.microsoft.com/office/drawing/2014/main" id="{C8AD5881-C2D8-42B9-B25B-797E0EEAD040}"/>
+              </a:ext>
+            </a:extLst>
+          </p:cNvPr>
+          <p:cNvSpPr>
+            <a:spLocks noGrp="1"/>
+          </p:cNvSpPr>
+          <p:nvPr/>
+        </p:nvSpPr>
+        <p:spPr>
+          <a:xfrm>
+            <a:off x="685800" y="4905375"/>
+            <a:ext cx="10820400" cy="1333500"/>
+          </a:xfrm>
+          <a:prstGeom prst="rect">
+            <a:avLst/>
+          </a:prstGeom>
+          <a:noFill/>
+          <a:ln w="0">
+            <a:noFill/>
+          </a:ln>
+        </p:spPr>
+        <p:txBody>
+          <a:bodyPr>
+            <a:noAutofit/>
+          </a:bodyPr>
+          <a:lstStyle/>
+          <a:p>
+            <a:pPr algn="l">
+              <a:defRPr sz="2100">
+                <a:solidFill>
+                  <a:srgbClr val="000000"/>
+                </a:solidFill>
+                <a:latin typeface="Calibri"/>
+                <a:ea typeface="Calibri"/>
+                <a:cs typeface="Calibri"/>
+              </a:defRPr>
+            </a:pPr>
+            <a:r>
+              <a:rPr sz="2100">
+                <a:solidFill>
+                  <a:srgbClr val="000000"/>
+                </a:solidFill>
+                <a:latin typeface="Calibri"/>
+                <a:ea typeface="Calibri"/>
+                <a:cs typeface="Calibri"/>
+              </a:rPr>
+              <a:t>RuntimeException informa a falha ao código que chamou o método.</a:t>
+            </a:r>
+          </a:p>
+          <a:p>
+            <a:pPr algn="l">
+              <a:defRPr sz="2100">
+                <a:solidFill>
+                  <a:srgbClr val="000000"/>
+                </a:solidFill>
+                <a:latin typeface="Calibri"/>
+                <a:ea typeface="Calibri"/>
+                <a:cs typeface="Calibri"/>
+              </a:defRPr>
+            </a:pPr>
+            <a:r>
+              <a:rPr sz="2100">
+                <a:solidFill>
+                  <a:srgbClr val="000000"/>
+                </a:solidFill>
+                <a:latin typeface="Calibri"/>
+                <a:ea typeface="Calibri"/>
+                <a:cs typeface="Calibri"/>
+              </a:rPr>
+              <a:t>exception preserva a causa original do erro.</a:t>
+            </a:r>
+          </a:p>
+        </p:txBody>
+      </p:sp>
+    </p:spTree>
+    <p:extLst>
+      <p:ext uri="{BB962C8B-B14F-4D97-AF65-F5344CB8AC3E}">
+        <p14:creationId xmlns:p14="http://schemas.microsoft.com/office/powerpoint/2010/main" val="2946787222"/>
+      </p:ext>
+    </p:extLst>
+  </p:cSld>
+  <p:clrMapOvr>
+    <a:masterClrMapping/>
+  </p:clrMapOvr>
+</p:sld>
+</file>
+
+<file path=ppt/slides/slide16.xml><?xml version="1.0" encoding="utf-8"?>
+<p:sld xmlns:a="http://schemas.openxmlformats.org/drawingml/2006/main" xmlns:r="http://schemas.openxmlformats.org/officeDocument/2006/relationships" xmlns:p="http://schemas.openxmlformats.org/presentationml/2006/main">
+  <p:cSld>
+    <p:spTree>
+      <p:nvGrpSpPr>
+        <p:cNvPr id="1" name=""/>
+        <p:cNvGrpSpPr/>
+        <p:nvPr/>
+      </p:nvGrpSpPr>
+      <p:grpSpPr>
+        <a:xfrm>
+          <a:off x="0" y="0"/>
+          <a:ext cx="0" cy="0"/>
+          <a:chOff x="0" y="0"/>
+          <a:chExt cx="0" cy="0"/>
+        </a:xfrm>
+      </p:grpSpPr>
+      <p:sp>
+        <p:nvSpPr>
+          <p:cNvPr id="2" name="Título 1">
+            <a:extLst>
+              <a:ext uri="{FF2B5EF4-FFF2-40B4-BE49-F238E27FC236}">
+                <a16:creationId xmlns:a16="http://schemas.microsoft.com/office/drawing/2014/main" id="{8738858E-69E2-8A32-4D8D-61A4750C2960}"/>
+              </a:ext>
+            </a:extLst>
+          </p:cNvPr>
+          <p:cNvSpPr>
+            <a:spLocks noGrp="1"/>
+          </p:cNvSpPr>
+          <p:nvPr>
+            <p:ph type="title"/>
+          </p:nvPr>
+        </p:nvSpPr>
+        <p:spPr/>
+        <p:txBody>
+          <a:bodyPr>
+            <a:noAutofit/>
+          </a:bodyPr>
+          <a:lstStyle/>
+          <a:p>
+            <a:pPr>
+              <a:defRPr sz="3000">
+                <a:solidFill>
+                  <a:srgbClr val="000000"/>
+                </a:solidFill>
+                <a:latin typeface="Calibri Light"/>
+                <a:ea typeface="Calibri Light"/>
+                <a:cs typeface="Calibri Light"/>
+              </a:defRPr>
+            </a:pPr>
+            <a:r>
+              <a:rPr sz="3000">
+                <a:solidFill>
+                  <a:srgbClr val="000000"/>
+                </a:solidFill>
+                <a:latin typeface="Calibri Light"/>
+                <a:ea typeface="Calibri Light"/>
+                <a:cs typeface="Calibri Light"/>
+              </a:rPr>
+              <a:t>Resultado da geração</a:t>
+            </a:r>
+          </a:p>
+        </p:txBody>
+      </p:sp>
+      <p:sp>
+        <p:nvSpPr>
+          <p:cNvPr id="6" name="Espaço Reservado para Conteúdo 5">
+            <a:extLst>
+              <a:ext uri="{FF2B5EF4-FFF2-40B4-BE49-F238E27FC236}">
+                <a16:creationId xmlns:a16="http://schemas.microsoft.com/office/drawing/2014/main" id="{B24F9431-18D8-4DC9-B9CC-1BCF1A71C18D}"/>
+              </a:ext>
+            </a:extLst>
+          </p:cNvPr>
+          <p:cNvSpPr>
+            <a:spLocks noGrp="1"/>
+          </p:cNvSpPr>
+          <p:nvPr/>
+        </p:nvSpPr>
+        <p:spPr>
+          <a:xfrm>
+            <a:off x="685800" y="1809750"/>
+            <a:ext cx="10820400" cy="809625"/>
+          </a:xfrm>
+          <a:prstGeom prst="rect">
+            <a:avLst/>
+          </a:prstGeom>
+        </p:spPr>
+        <p:txBody>
+          <a:bodyPr>
+            <a:noAutofit/>
+          </a:bodyPr>
+          <a:lstStyle>
+            <a:lvl1pPr marL="0" indent="0" algn="just" defTabSz="914400">
+              <a:lnSpc>
+                <a:spcPct val="150000"/>
+              </a:lnSpc>
+              <a:spcBef>
+                <a:spcPts val="0"/>
+              </a:spcBef>
+              <a:buFont typeface="Arial"/>
+              <a:buNone/>
+              <a:defRPr sz="2000" kern="1200">
+                <a:solidFill>
+                  <a:schemeClr val="tx1"/>
+                </a:solidFill>
+                <a:latin typeface="Times New Roman"/>
+                <a:ea typeface="Times New Roman"/>
+                <a:cs typeface="Times New Roman"/>
+              </a:defRPr>
+            </a:lvl1pPr>
+            <a:lvl2pPr marL="457200" indent="0" algn="just" defTabSz="914400">
+              <a:lnSpc>
+                <a:spcPct val="150000"/>
+              </a:lnSpc>
+              <a:spcBef>
+                <a:spcPts val="0"/>
+              </a:spcBef>
+              <a:buFont typeface="Arial"/>
+              <a:buNone/>
+              <a:defRPr sz="1600" kern="1200">
+                <a:solidFill>
+                  <a:schemeClr val="tx1"/>
+                </a:solidFill>
+                <a:latin typeface="Times New Roman"/>
+                <a:ea typeface="Times New Roman"/>
+                <a:cs typeface="Times New Roman"/>
+              </a:defRPr>
+            </a:lvl2pPr>
+            <a:lvl3pPr marL="914400" indent="0" algn="just" defTabSz="914400">
+              <a:lnSpc>
+                <a:spcPct val="150000"/>
+              </a:lnSpc>
+              <a:spcBef>
+                <a:spcPts val="0"/>
+              </a:spcBef>
+              <a:buFont typeface="Arial"/>
+              <a:buNone/>
+              <a:defRPr sz="1400" kern="1200">
+                <a:solidFill>
+                  <a:schemeClr val="tx1"/>
+                </a:solidFill>
+                <a:latin typeface="Times New Roman"/>
+                <a:ea typeface="Times New Roman"/>
+                <a:cs typeface="Times New Roman"/>
+              </a:defRPr>
+            </a:lvl3pPr>
+            <a:lvl4pPr marL="1371600" indent="0" algn="just" defTabSz="914400">
+              <a:lnSpc>
+                <a:spcPct val="150000"/>
+              </a:lnSpc>
+              <a:spcBef>
+                <a:spcPts val="0"/>
+              </a:spcBef>
+              <a:buFont typeface="Arial"/>
+              <a:buNone/>
+              <a:defRPr sz="1200" kern="1200">
+                <a:solidFill>
+                  <a:schemeClr val="tx1"/>
+                </a:solidFill>
+                <a:latin typeface="Times New Roman"/>
+                <a:ea typeface="Times New Roman"/>
+                <a:cs typeface="Times New Roman"/>
+              </a:defRPr>
+            </a:lvl4pPr>
+            <a:lvl5pPr marL="1828800" indent="0" algn="just" defTabSz="914400">
+              <a:lnSpc>
+                <a:spcPct val="150000"/>
+              </a:lnSpc>
+              <a:spcBef>
+                <a:spcPts val="0"/>
+              </a:spcBef>
+              <a:buFont typeface="Arial"/>
+              <a:buNone/>
+              <a:defRPr sz="1000" kern="1200">
+                <a:solidFill>
+                  <a:schemeClr val="tx1"/>
+                </a:solidFill>
+                <a:latin typeface="Times New Roman"/>
+                <a:ea typeface="Times New Roman"/>
+                <a:cs typeface="Times New Roman"/>
+              </a:defRPr>
+            </a:lvl5pPr>
+            <a:lvl6pPr marL="2514600" indent="-228600" algn="l" defTabSz="914400">
+              <a:lnSpc>
+                <a:spcPct val="90000"/>
+              </a:lnSpc>
+              <a:spcBef>
+                <a:spcPts val="500"/>
+              </a:spcBef>
+              <a:buFont typeface="Arial"/>
+              <a:buChar char="•"/>
+              <a:defRPr sz="1800" kern="1200">
+                <a:solidFill>
+                  <a:schemeClr val="tx1"/>
+                </a:solidFill>
+                <a:latin typeface="+mn-lt"/>
+                <a:ea typeface="+mn-lt"/>
+                <a:cs typeface="+mn-lt"/>
+              </a:defRPr>
+            </a:lvl6pPr>
+            <a:lvl7pPr marL="2971800" indent="-228600" algn="l" defTabSz="914400">
+              <a:lnSpc>
+                <a:spcPct val="90000"/>
+              </a:lnSpc>
+              <a:spcBef>
+                <a:spcPts val="500"/>
+              </a:spcBef>
+              <a:buFont typeface="Arial"/>
+              <a:buChar char="•"/>
+              <a:defRPr sz="1800" kern="1200">
+                <a:solidFill>
+                  <a:schemeClr val="tx1"/>
+                </a:solidFill>
+                <a:latin typeface="+mn-lt"/>
+                <a:ea typeface="+mn-lt"/>
+                <a:cs typeface="+mn-lt"/>
+              </a:defRPr>
+            </a:lvl7pPr>
+            <a:lvl8pPr marL="3429000" indent="-228600" algn="l" defTabSz="914400">
+              <a:lnSpc>
+                <a:spcPct val="90000"/>
+              </a:lnSpc>
+              <a:spcBef>
+                <a:spcPts val="500"/>
+              </a:spcBef>
+              <a:buFont typeface="Arial"/>
+              <a:buChar char="•"/>
+              <a:defRPr sz="1800" kern="1200">
+                <a:solidFill>
+                  <a:schemeClr val="tx1"/>
+                </a:solidFill>
+                <a:latin typeface="+mn-lt"/>
+                <a:ea typeface="+mn-lt"/>
+                <a:cs typeface="+mn-lt"/>
+              </a:defRPr>
+            </a:lvl8pPr>
+            <a:lvl9pPr marL="3886200" indent="-228600" algn="l" defTabSz="914400">
+              <a:lnSpc>
+                <a:spcPct val="90000"/>
+              </a:lnSpc>
+              <a:spcBef>
+                <a:spcPts val="500"/>
+              </a:spcBef>
+              <a:buFont typeface="Arial"/>
+              <a:buChar char="•"/>
+              <a:defRPr sz="1800" kern="1200">
+                <a:solidFill>
+                  <a:schemeClr val="tx1"/>
+                </a:solidFill>
+                <a:latin typeface="+mn-lt"/>
+                <a:ea typeface="+mn-lt"/>
+                <a:cs typeface="+mn-lt"/>
+              </a:defRPr>
+            </a:lvl9pPr>
+          </a:lstStyle>
+          <a:p>
+            <a:pPr algn="l">
+              <a:defRPr sz="2175">
+                <a:solidFill>
+                  <a:srgbClr val="000000"/>
+                </a:solidFill>
+                <a:latin typeface="Calibri"/>
+                <a:ea typeface="Calibri"/>
+                <a:cs typeface="Calibri"/>
+              </a:defRPr>
+            </a:pPr>
+            <a:r>
+              <a:rPr sz="2175">
+                <a:solidFill>
+                  <a:srgbClr val="000000"/>
+                </a:solidFill>
+                <a:latin typeface="Calibri"/>
+                <a:ea typeface="Calibri"/>
+                <a:cs typeface="Calibri"/>
+              </a:rPr>
+              <a:t>Ao final, gerarToken() retorna uma String com três partes.</a:t>
+            </a:r>
+          </a:p>
+        </p:txBody>
+      </p:sp>
+      <p:sp>
+        <p:nvSpPr>
+          <p:cNvPr id="11" name="Shape 20">
+            <a:extLst>
+              <a:ext uri="{FF2B5EF4-FFF2-40B4-BE49-F238E27FC236}">
+                <a16:creationId xmlns:a16="http://schemas.microsoft.com/office/drawing/2014/main" id="{EE383B37-7310-4563-9BC8-B173B5286B0D}"/>
+              </a:ext>
+            </a:extLst>
+          </p:cNvPr>
+          <p:cNvSpPr>
+            <a:spLocks noGrp="1"/>
+          </p:cNvSpPr>
+          <p:nvPr/>
+        </p:nvSpPr>
+        <p:spPr>
+          <a:xfrm>
+            <a:off x="857250" y="2762250"/>
+            <a:ext cx="10477500" cy="1809750"/>
+          </a:xfrm>
+          <a:prstGeom prst="roundRect">
+            <a:avLst>
+              <a:gd name="adj" fmla="val 8081"/>
+            </a:avLst>
+          </a:prstGeom>
+          <a:solidFill>
+            <a:srgbClr val="1E1E1E"/>
+          </a:solidFill>
+          <a:ln>
+            <a:solidFill>
+              <a:srgbClr val="1E1E1E"/>
+            </a:solidFill>
+          </a:ln>
+        </p:spPr>
+        <p:txBody>
+          <a:bodyPr/>
+          <a:lstStyle/>
+          <a:p>
+            <a:endParaRPr/>
+          </a:p>
+        </p:txBody>
+      </p:sp>
+      <p:sp>
+        <p:nvSpPr>
+          <p:cNvPr id="4" name="Retângulo 3">
+            <a:extLst>
+              <a:ext uri="{FF2B5EF4-FFF2-40B4-BE49-F238E27FC236}">
+                <a16:creationId xmlns:a16="http://schemas.microsoft.com/office/drawing/2014/main" id="{3CE8AC7A-3364-4E97-BC2E-25CF018F1E04}"/>
+              </a:ext>
+            </a:extLst>
+          </p:cNvPr>
+          <p:cNvSpPr>
+            <a:spLocks noGrp="1"/>
+          </p:cNvSpPr>
+          <p:nvPr/>
+        </p:nvSpPr>
+        <p:spPr>
+          <a:xfrm>
+            <a:off x="1143000" y="3190875"/>
+            <a:ext cx="10001250" cy="2865120"/>
+          </a:xfrm>
+          <a:prstGeom prst="rect">
+            <a:avLst/>
+          </a:prstGeom>
+        </p:spPr>
+        <p:txBody>
+          <a:bodyPr wrap="square">
+            <a:noAutofit/>
+          </a:bodyPr>
+          <a:lstStyle/>
+          <a:p>
+            <a:pPr algn="l">
+              <a:defRPr sz="2400">
+                <a:solidFill>
+                  <a:srgbClr val="D4D4D4"/>
+                </a:solidFill>
+                <a:latin typeface="Consolas"/>
+                <a:ea typeface="Consolas"/>
+                <a:cs typeface="Consolas"/>
+              </a:defRPr>
+            </a:pPr>
+            <a:r>
+              <a:rPr sz="2400">
+                <a:solidFill>
+                  <a:srgbClr val="D4D4D4"/>
+                </a:solidFill>
+                <a:latin typeface="Consolas"/>
+                <a:ea typeface="Consolas"/>
+                <a:cs typeface="Consolas"/>
+              </a:rPr>
+              <a:t>header.payload.assinatura</a:t>
+            </a:r>
+          </a:p>
+        </p:txBody>
+      </p:sp>
+      <p:sp>
+        <p:nvSpPr>
+          <p:cNvPr id="12" name="Retângulo 11">
+            <a:extLst>
+              <a:ext uri="{FF2B5EF4-FFF2-40B4-BE49-F238E27FC236}">
+                <a16:creationId xmlns:a16="http://schemas.microsoft.com/office/drawing/2014/main" id="{B99E4F5A-80B5-4FCC-A324-04FBF17B8E3C}"/>
+              </a:ext>
+            </a:extLst>
+          </p:cNvPr>
+          <p:cNvSpPr>
+            <a:spLocks noGrp="1"/>
+          </p:cNvSpPr>
+          <p:nvPr/>
+        </p:nvSpPr>
+        <p:spPr>
+          <a:xfrm>
+            <a:off x="685800" y="4905375"/>
+            <a:ext cx="10820400" cy="1333500"/>
+          </a:xfrm>
+          <a:prstGeom prst="rect">
+            <a:avLst/>
+          </a:prstGeom>
+          <a:noFill/>
+          <a:ln w="0">
+            <a:noFill/>
+          </a:ln>
+        </p:spPr>
+        <p:txBody>
+          <a:bodyPr>
+            <a:noAutofit/>
+          </a:bodyPr>
+          <a:lstStyle/>
+          <a:p>
+            <a:pPr algn="l">
+              <a:defRPr sz="2100">
+                <a:solidFill>
+                  <a:srgbClr val="000000"/>
+                </a:solidFill>
+                <a:latin typeface="Calibri"/>
+                <a:ea typeface="Calibri"/>
+                <a:cs typeface="Calibri"/>
+              </a:defRPr>
+            </a:pPr>
+            <a:r>
+              <a:rPr sz="2100">
+                <a:solidFill>
+                  <a:srgbClr val="000000"/>
+                </a:solidFill>
+                <a:latin typeface="Calibri"/>
+                <a:ea typeface="Calibri"/>
+                <a:cs typeface="Calibri"/>
+              </a:rPr>
+              <a:t>O controller recebe essa String e pode devolvê-la na resposta do login.</a:t>
+            </a:r>
+          </a:p>
+          <a:p>
+            <a:pPr algn="l">
+              <a:defRPr sz="2100">
+                <a:solidFill>
+                  <a:srgbClr val="000000"/>
+                </a:solidFill>
+                <a:latin typeface="Calibri"/>
+                <a:ea typeface="Calibri"/>
+                <a:cs typeface="Calibri"/>
+              </a:defRPr>
+            </a:pPr>
+            <a:r>
+              <a:rPr sz="2100">
+                <a:solidFill>
+                  <a:srgbClr val="000000"/>
+                </a:solidFill>
+                <a:latin typeface="Calibri"/>
+                <a:ea typeface="Calibri"/>
+                <a:cs typeface="Calibri"/>
+              </a:rPr>
+              <a:t>Nas próximas requisições, a API precisará validar o token.</a:t>
+            </a:r>
+          </a:p>
+        </p:txBody>
+      </p:sp>
+    </p:spTree>
+    <p:extLst>
+      <p:ext uri="{BB962C8B-B14F-4D97-AF65-F5344CB8AC3E}">
+        <p14:creationId xmlns:p14="http://schemas.microsoft.com/office/powerpoint/2010/main" val="3254454883"/>
+      </p:ext>
+    </p:extLst>
+  </p:cSld>
+  <p:clrMapOvr>
+    <a:masterClrMapping/>
+  </p:clrMapOvr>
+</p:sld>
+</file>
+
 <file path=ppt/slides/slide2.xml><?xml version="1.0" encoding="utf-8"?>
 <p:sld xmlns:a="http://schemas.openxmlformats.org/drawingml/2006/main" xmlns:r="http://schemas.openxmlformats.org/officeDocument/2006/relationships" xmlns:p="http://schemas.openxmlformats.org/presentationml/2006/main">
   <p:cSld>
@@ -3487,12 +7859,8 @@
               </a:lnSpc>
             </a:pPr>
             <a:r>
-              <a:rPr lang="pt-BR" sz="2400" b="1" dirty="0"/>
-              <a:t>JWT (JSON Web Token)</a:t>
-            </a:r>
-            <a:r>
               <a:rPr lang="pt-BR" sz="2400" dirty="0"/>
-              <a:t> </a:t>
+              <a:t>JWT (JSON Web Token) </a:t>
             </a:r>
             <a:endParaRPr lang="pt-BR" sz="3600" dirty="0"/>
           </a:p>
@@ -3597,6 +7965,3543 @@
     <p:extLst>
       <p:ext uri="{BB962C8B-B14F-4D97-AF65-F5344CB8AC3E}">
         <p14:creationId xmlns:p14="http://schemas.microsoft.com/office/powerpoint/2010/main" val="1168420541"/>
+      </p:ext>
+    </p:extLst>
+  </p:cSld>
+  <p:clrMapOvr>
+    <a:masterClrMapping/>
+  </p:clrMapOvr>
+</p:sld>
+</file>
+
+<file path=ppt/slides/slide4.xml><?xml version="1.0" encoding="utf-8"?>
+<p:sld xmlns:a="http://schemas.openxmlformats.org/drawingml/2006/main" xmlns:r="http://schemas.openxmlformats.org/officeDocument/2006/relationships" xmlns:p="http://schemas.openxmlformats.org/presentationml/2006/main">
+  <p:cSld>
+    <p:spTree>
+      <p:nvGrpSpPr>
+        <p:cNvPr id="1" name=""/>
+        <p:cNvGrpSpPr/>
+        <p:nvPr/>
+      </p:nvGrpSpPr>
+      <p:grpSpPr>
+        <a:xfrm>
+          <a:off x="0" y="0"/>
+          <a:ext cx="0" cy="0"/>
+          <a:chOff x="0" y="0"/>
+          <a:chExt cx="0" cy="0"/>
+        </a:xfrm>
+      </p:grpSpPr>
+      <p:sp>
+        <p:nvSpPr>
+          <p:cNvPr id="2" name="Título 1">
+            <a:extLst>
+              <a:ext uri="{FF2B5EF4-FFF2-40B4-BE49-F238E27FC236}">
+                <a16:creationId xmlns:a16="http://schemas.microsoft.com/office/drawing/2014/main" id="{87650BF0-2C44-C5F0-9056-D4A72A29802F}"/>
+              </a:ext>
+            </a:extLst>
+          </p:cNvPr>
+          <p:cNvSpPr>
+            <a:spLocks noGrp="1"/>
+          </p:cNvSpPr>
+          <p:nvPr>
+            <p:ph type="title"/>
+          </p:nvPr>
+        </p:nvSpPr>
+        <p:spPr/>
+        <p:txBody>
+          <a:bodyPr/>
+          <a:lstStyle/>
+          <a:p>
+            <a:r>
+              <a:rPr lang="pt-BR" dirty="0"/>
+              <a:t>JSON Web Token (JWT) </a:t>
+            </a:r>
+            <a:r>
+              <a:rPr lang="pt-BR" dirty="0" err="1"/>
+              <a:t>Debugger</a:t>
+            </a:r>
+            <a:br>
+              <a:rPr lang="pt-BR" dirty="0"/>
+            </a:br>
+            <a:endParaRPr lang="pt-BR" dirty="0"/>
+          </a:p>
+        </p:txBody>
+      </p:sp>
+      <p:sp>
+        <p:nvSpPr>
+          <p:cNvPr id="4" name="Shape 20">
+            <a:extLst>
+              <a:ext uri="{FF2B5EF4-FFF2-40B4-BE49-F238E27FC236}">
+                <a16:creationId xmlns:a16="http://schemas.microsoft.com/office/drawing/2014/main" id="{8266CC90-0DAD-400A-8CC5-546ACF88C87C}"/>
+              </a:ext>
+            </a:extLst>
+          </p:cNvPr>
+          <p:cNvSpPr>
+            <a:spLocks noGrp="1"/>
+          </p:cNvSpPr>
+          <p:nvPr/>
+        </p:nvSpPr>
+        <p:spPr>
+          <a:xfrm>
+            <a:off x="749185" y="2115485"/>
+            <a:ext cx="5021695" cy="2604796"/>
+          </a:xfrm>
+          <a:prstGeom prst="roundRect">
+            <a:avLst>
+              <a:gd name="adj" fmla="val 8081"/>
+            </a:avLst>
+          </a:prstGeom>
+          <a:solidFill>
+            <a:srgbClr val="F1F1F1"/>
+          </a:solidFill>
+          <a:ln>
+            <a:noFill/>
+          </a:ln>
+          <a:effectLst/>
+        </p:spPr>
+        <p:txBody>
+          <a:bodyPr/>
+          <a:lstStyle/>
+          <a:p>
+            <a:endParaRPr/>
+          </a:p>
+        </p:txBody>
+      </p:sp>
+      <p:sp>
+        <p:nvSpPr>
+          <p:cNvPr id="5" name="Retângulo 4">
+            <a:extLst>
+              <a:ext uri="{FF2B5EF4-FFF2-40B4-BE49-F238E27FC236}">
+                <a16:creationId xmlns:a16="http://schemas.microsoft.com/office/drawing/2014/main" id="{6900A6DD-5EB2-33E4-5530-115078229CA4}"/>
+              </a:ext>
+            </a:extLst>
+          </p:cNvPr>
+          <p:cNvSpPr>
+            <a:spLocks noGrp="1"/>
+          </p:cNvSpPr>
+          <p:nvPr/>
+        </p:nvSpPr>
+        <p:spPr>
+          <a:xfrm>
+            <a:off x="1556492" y="2297737"/>
+            <a:ext cx="3407081" cy="404274"/>
+          </a:xfrm>
+          <a:prstGeom prst="rect">
+            <a:avLst/>
+          </a:prstGeom>
+        </p:spPr>
+        <p:txBody>
+          <a:bodyPr wrap="square">
+            <a:noAutofit/>
+          </a:bodyPr>
+          <a:lstStyle/>
+          <a:p>
+            <a:pPr algn="l">
+              <a:defRPr sz="2250">
+                <a:solidFill>
+                  <a:srgbClr val="D4D4D4"/>
+                </a:solidFill>
+                <a:latin typeface="Consolas"/>
+                <a:ea typeface="Consolas"/>
+                <a:cs typeface="Consolas"/>
+              </a:defRPr>
+            </a:pPr>
+            <a:r>
+              <a:rPr lang="pt-BR" sz="2250" b="1" dirty="0">
+                <a:solidFill>
+                  <a:srgbClr val="757575"/>
+                </a:solidFill>
+                <a:latin typeface="Consolas"/>
+                <a:ea typeface="Consolas"/>
+                <a:cs typeface="Consolas"/>
+              </a:rPr>
+              <a:t>JSON Web Token (JWT)</a:t>
+            </a:r>
+            <a:endParaRPr sz="2250" b="1" dirty="0">
+              <a:solidFill>
+                <a:srgbClr val="757575"/>
+              </a:solidFill>
+              <a:latin typeface="Consolas"/>
+              <a:ea typeface="Consolas"/>
+              <a:cs typeface="Consolas"/>
+            </a:endParaRPr>
+          </a:p>
+        </p:txBody>
+      </p:sp>
+      <p:sp>
+        <p:nvSpPr>
+          <p:cNvPr id="8" name="Shape 20">
+            <a:extLst>
+              <a:ext uri="{FF2B5EF4-FFF2-40B4-BE49-F238E27FC236}">
+                <a16:creationId xmlns:a16="http://schemas.microsoft.com/office/drawing/2014/main" id="{67C2ACCC-A0C7-62BA-485E-D7BD9ADE6E0A}"/>
+              </a:ext>
+            </a:extLst>
+          </p:cNvPr>
+          <p:cNvSpPr>
+            <a:spLocks noGrp="1"/>
+          </p:cNvSpPr>
+          <p:nvPr/>
+        </p:nvSpPr>
+        <p:spPr>
+          <a:xfrm>
+            <a:off x="917733" y="2895225"/>
+            <a:ext cx="4734403" cy="1693251"/>
+          </a:xfrm>
+          <a:prstGeom prst="roundRect">
+            <a:avLst>
+              <a:gd name="adj" fmla="val 8081"/>
+            </a:avLst>
+          </a:prstGeom>
+          <a:solidFill>
+            <a:schemeClr val="bg1"/>
+          </a:solidFill>
+          <a:ln>
+            <a:noFill/>
+          </a:ln>
+          <a:effectLst/>
+        </p:spPr>
+        <p:txBody>
+          <a:bodyPr/>
+          <a:lstStyle/>
+          <a:p>
+            <a:r>
+              <a:rPr lang="pt-BR" b="1" dirty="0">
+                <a:solidFill>
+                  <a:srgbClr val="E8823E"/>
+                </a:solidFill>
+                <a:latin typeface="Consolas" panose="020B0609020204030204" pitchFamily="49" charset="0"/>
+              </a:rPr>
+              <a:t>eyJhbGciOiJIUzI1NiIsInR5cCI6IkpXVCJ9</a:t>
+            </a:r>
+            <a:r>
+              <a:rPr lang="pt-BR" dirty="0">
+                <a:latin typeface="Consolas" panose="020B0609020204030204" pitchFamily="49" charset="0"/>
+              </a:rPr>
+              <a:t>.</a:t>
+            </a:r>
+            <a:r>
+              <a:rPr lang="pt-BR" b="1" dirty="0">
+                <a:solidFill>
+                  <a:srgbClr val="968BF9"/>
+                </a:solidFill>
+                <a:latin typeface="Consolas" panose="020B0609020204030204" pitchFamily="49" charset="0"/>
+              </a:rPr>
+              <a:t>eyJpc3MiOiJBUEkgRGVudGlzdGEiLCJzdWIiOiJwZWRyb0BnbWFpbC5jb20iLCJleHAiOjE3OTA2NDYzMzR9</a:t>
+            </a:r>
+            <a:r>
+              <a:rPr lang="pt-BR" dirty="0">
+                <a:latin typeface="Consolas" panose="020B0609020204030204" pitchFamily="49" charset="0"/>
+              </a:rPr>
+              <a:t>.</a:t>
+            </a:r>
+            <a:r>
+              <a:rPr lang="pt-BR" b="1" dirty="0">
+                <a:solidFill>
+                  <a:srgbClr val="0C945D"/>
+                </a:solidFill>
+                <a:latin typeface="Consolas" panose="020B0609020204030204" pitchFamily="49" charset="0"/>
+              </a:rPr>
+              <a:t>M_EYnADTjDNKXJj7RJTpyyQRxQ5fRBp3bMJj6nT0xsk</a:t>
+            </a:r>
+            <a:endParaRPr b="1" dirty="0">
+              <a:solidFill>
+                <a:srgbClr val="0C945D"/>
+              </a:solidFill>
+              <a:latin typeface="Consolas" panose="020B0609020204030204" pitchFamily="49" charset="0"/>
+            </a:endParaRPr>
+          </a:p>
+        </p:txBody>
+      </p:sp>
+      <p:sp>
+        <p:nvSpPr>
+          <p:cNvPr id="11" name="Shape 20">
+            <a:extLst>
+              <a:ext uri="{FF2B5EF4-FFF2-40B4-BE49-F238E27FC236}">
+                <a16:creationId xmlns:a16="http://schemas.microsoft.com/office/drawing/2014/main" id="{48007F21-3F63-8F13-C876-63881DF3AA8C}"/>
+              </a:ext>
+            </a:extLst>
+          </p:cNvPr>
+          <p:cNvSpPr>
+            <a:spLocks noGrp="1"/>
+          </p:cNvSpPr>
+          <p:nvPr/>
+        </p:nvSpPr>
+        <p:spPr>
+          <a:xfrm>
+            <a:off x="6371316" y="2104524"/>
+            <a:ext cx="5021695" cy="2604796"/>
+          </a:xfrm>
+          <a:prstGeom prst="roundRect">
+            <a:avLst>
+              <a:gd name="adj" fmla="val 8081"/>
+            </a:avLst>
+          </a:prstGeom>
+          <a:solidFill>
+            <a:srgbClr val="F1F1F1"/>
+          </a:solidFill>
+          <a:ln>
+            <a:noFill/>
+          </a:ln>
+          <a:effectLst/>
+        </p:spPr>
+        <p:txBody>
+          <a:bodyPr/>
+          <a:lstStyle/>
+          <a:p>
+            <a:endParaRPr/>
+          </a:p>
+        </p:txBody>
+      </p:sp>
+      <p:sp>
+        <p:nvSpPr>
+          <p:cNvPr id="12" name="Retângulo 11">
+            <a:extLst>
+              <a:ext uri="{FF2B5EF4-FFF2-40B4-BE49-F238E27FC236}">
+                <a16:creationId xmlns:a16="http://schemas.microsoft.com/office/drawing/2014/main" id="{7E59C0F0-D10A-C5A8-6DE5-0ADFC48E6F35}"/>
+              </a:ext>
+            </a:extLst>
+          </p:cNvPr>
+          <p:cNvSpPr>
+            <a:spLocks noGrp="1"/>
+          </p:cNvSpPr>
+          <p:nvPr/>
+        </p:nvSpPr>
+        <p:spPr>
+          <a:xfrm>
+            <a:off x="8270315" y="2297737"/>
+            <a:ext cx="1223697" cy="404274"/>
+          </a:xfrm>
+          <a:prstGeom prst="rect">
+            <a:avLst/>
+          </a:prstGeom>
+        </p:spPr>
+        <p:txBody>
+          <a:bodyPr wrap="square">
+            <a:noAutofit/>
+          </a:bodyPr>
+          <a:lstStyle/>
+          <a:p>
+            <a:pPr algn="l">
+              <a:defRPr sz="2250">
+                <a:solidFill>
+                  <a:srgbClr val="D4D4D4"/>
+                </a:solidFill>
+                <a:latin typeface="Consolas"/>
+                <a:ea typeface="Consolas"/>
+                <a:cs typeface="Consolas"/>
+              </a:defRPr>
+            </a:pPr>
+            <a:r>
+              <a:rPr lang="pt-BR" b="1" dirty="0">
+                <a:solidFill>
+                  <a:srgbClr val="E8823E"/>
+                </a:solidFill>
+                <a:latin typeface="Consolas" panose="020B0609020204030204" pitchFamily="49" charset="0"/>
+              </a:rPr>
+              <a:t>Header</a:t>
+            </a:r>
+            <a:endParaRPr b="1" dirty="0">
+              <a:solidFill>
+                <a:srgbClr val="E8823E"/>
+              </a:solidFill>
+              <a:latin typeface="Consolas" panose="020B0609020204030204" pitchFamily="49" charset="0"/>
+            </a:endParaRPr>
+          </a:p>
+        </p:txBody>
+      </p:sp>
+      <p:sp>
+        <p:nvSpPr>
+          <p:cNvPr id="13" name="Shape 20">
+            <a:extLst>
+              <a:ext uri="{FF2B5EF4-FFF2-40B4-BE49-F238E27FC236}">
+                <a16:creationId xmlns:a16="http://schemas.microsoft.com/office/drawing/2014/main" id="{0DDCD626-A080-C1D9-3226-69D224FF1AC4}"/>
+              </a:ext>
+            </a:extLst>
+          </p:cNvPr>
+          <p:cNvSpPr>
+            <a:spLocks noGrp="1"/>
+          </p:cNvSpPr>
+          <p:nvPr/>
+        </p:nvSpPr>
+        <p:spPr>
+          <a:xfrm>
+            <a:off x="6539864" y="2895226"/>
+            <a:ext cx="4734403" cy="1693250"/>
+          </a:xfrm>
+          <a:prstGeom prst="roundRect">
+            <a:avLst>
+              <a:gd name="adj" fmla="val 8081"/>
+            </a:avLst>
+          </a:prstGeom>
+          <a:solidFill>
+            <a:schemeClr val="bg1"/>
+          </a:solidFill>
+          <a:ln>
+            <a:noFill/>
+          </a:ln>
+          <a:effectLst/>
+        </p:spPr>
+        <p:txBody>
+          <a:bodyPr/>
+          <a:lstStyle/>
+          <a:p>
+            <a:r>
+              <a:rPr lang="pt-BR" b="1" dirty="0">
+                <a:latin typeface="Consolas" panose="020B0609020204030204" pitchFamily="49" charset="0"/>
+              </a:rPr>
+              <a:t>{</a:t>
+            </a:r>
+          </a:p>
+          <a:p>
+            <a:r>
+              <a:rPr lang="pt-BR" b="1" dirty="0">
+                <a:latin typeface="Consolas" panose="020B0609020204030204" pitchFamily="49" charset="0"/>
+              </a:rPr>
+              <a:t>  "</a:t>
+            </a:r>
+            <a:r>
+              <a:rPr lang="pt-BR" b="1" dirty="0" err="1">
+                <a:latin typeface="Consolas" panose="020B0609020204030204" pitchFamily="49" charset="0"/>
+              </a:rPr>
+              <a:t>alg</a:t>
+            </a:r>
+            <a:r>
+              <a:rPr lang="pt-BR" b="1" dirty="0">
+                <a:latin typeface="Consolas" panose="020B0609020204030204" pitchFamily="49" charset="0"/>
+              </a:rPr>
+              <a:t>": </a:t>
+            </a:r>
+            <a:r>
+              <a:rPr lang="pt-BR" b="1" dirty="0">
+                <a:solidFill>
+                  <a:srgbClr val="0C945D"/>
+                </a:solidFill>
+                <a:latin typeface="Consolas" panose="020B0609020204030204" pitchFamily="49" charset="0"/>
+              </a:rPr>
+              <a:t>"HS256"</a:t>
+            </a:r>
+            <a:r>
+              <a:rPr lang="pt-BR" b="1" dirty="0">
+                <a:latin typeface="Consolas" panose="020B0609020204030204" pitchFamily="49" charset="0"/>
+              </a:rPr>
+              <a:t>,</a:t>
+            </a:r>
+          </a:p>
+          <a:p>
+            <a:r>
+              <a:rPr lang="pt-BR" b="1" dirty="0">
+                <a:solidFill>
+                  <a:srgbClr val="0C945D"/>
+                </a:solidFill>
+                <a:latin typeface="Consolas" panose="020B0609020204030204" pitchFamily="49" charset="0"/>
+              </a:rPr>
+              <a:t>  </a:t>
+            </a:r>
+            <a:r>
+              <a:rPr lang="pt-BR" b="1" dirty="0">
+                <a:latin typeface="Consolas" panose="020B0609020204030204" pitchFamily="49" charset="0"/>
+              </a:rPr>
+              <a:t>"</a:t>
+            </a:r>
+            <a:r>
+              <a:rPr lang="pt-BR" b="1" dirty="0" err="1">
+                <a:latin typeface="Consolas" panose="020B0609020204030204" pitchFamily="49" charset="0"/>
+              </a:rPr>
+              <a:t>typ</a:t>
+            </a:r>
+            <a:r>
+              <a:rPr lang="pt-BR" b="1" dirty="0">
+                <a:latin typeface="Consolas" panose="020B0609020204030204" pitchFamily="49" charset="0"/>
+              </a:rPr>
+              <a:t>": </a:t>
+            </a:r>
+            <a:r>
+              <a:rPr lang="pt-BR" b="1" dirty="0">
+                <a:solidFill>
+                  <a:srgbClr val="0C945D"/>
+                </a:solidFill>
+                <a:latin typeface="Consolas" panose="020B0609020204030204" pitchFamily="49" charset="0"/>
+              </a:rPr>
+              <a:t>"JWT"</a:t>
+            </a:r>
+          </a:p>
+          <a:p>
+            <a:r>
+              <a:rPr lang="pt-BR" b="1" dirty="0">
+                <a:latin typeface="Consolas" panose="020B0609020204030204" pitchFamily="49" charset="0"/>
+              </a:rPr>
+              <a:t>}</a:t>
+            </a:r>
+            <a:endParaRPr b="1" dirty="0">
+              <a:latin typeface="Consolas" panose="020B0609020204030204" pitchFamily="49" charset="0"/>
+            </a:endParaRPr>
+          </a:p>
+        </p:txBody>
+      </p:sp>
+      <p:sp>
+        <p:nvSpPr>
+          <p:cNvPr id="18" name="CaixaDeTexto 17">
+            <a:extLst>
+              <a:ext uri="{FF2B5EF4-FFF2-40B4-BE49-F238E27FC236}">
+                <a16:creationId xmlns:a16="http://schemas.microsoft.com/office/drawing/2014/main" id="{0521DA90-EE58-D051-0A5D-03B31B96D164}"/>
+              </a:ext>
+            </a:extLst>
+          </p:cNvPr>
+          <p:cNvSpPr txBox="1"/>
+          <p:nvPr/>
+        </p:nvSpPr>
+        <p:spPr>
+          <a:xfrm>
+            <a:off x="917733" y="4992130"/>
+            <a:ext cx="10475278" cy="1200329"/>
+          </a:xfrm>
+          <a:prstGeom prst="rect">
+            <a:avLst/>
+          </a:prstGeom>
+          <a:noFill/>
+        </p:spPr>
+        <p:txBody>
+          <a:bodyPr wrap="square" rtlCol="0">
+            <a:spAutoFit/>
+          </a:bodyPr>
+          <a:lstStyle/>
+          <a:p>
+            <a:pPr algn="just"/>
+            <a:r>
+              <a:rPr lang="pt-BR" b="1" dirty="0" err="1">
+                <a:latin typeface="Times New Roman" panose="02020603050405020304" pitchFamily="18" charset="0"/>
+                <a:cs typeface="Times New Roman" panose="02020603050405020304" pitchFamily="18" charset="0"/>
+              </a:rPr>
+              <a:t>alg</a:t>
+            </a:r>
+            <a:r>
+              <a:rPr lang="pt-BR" b="1" dirty="0">
+                <a:latin typeface="Times New Roman" panose="02020603050405020304" pitchFamily="18" charset="0"/>
+                <a:cs typeface="Times New Roman" panose="02020603050405020304" pitchFamily="18" charset="0"/>
+              </a:rPr>
+              <a:t> - </a:t>
+            </a:r>
+            <a:r>
+              <a:rPr lang="pt-BR" dirty="0">
+                <a:latin typeface="Times New Roman" panose="02020603050405020304" pitchFamily="18" charset="0"/>
+                <a:cs typeface="Times New Roman" panose="02020603050405020304" pitchFamily="18" charset="0"/>
+              </a:rPr>
+              <a:t>Indica o algoritmo usado na assinatura. HS256 significa </a:t>
+            </a:r>
+            <a:r>
+              <a:rPr lang="pt-BR" b="1" dirty="0">
+                <a:latin typeface="Times New Roman" panose="02020603050405020304" pitchFamily="18" charset="0"/>
+                <a:cs typeface="Times New Roman" panose="02020603050405020304" pitchFamily="18" charset="0"/>
+              </a:rPr>
+              <a:t>HMAC com SHA-256</a:t>
+            </a:r>
+            <a:r>
+              <a:rPr lang="pt-BR" dirty="0">
+                <a:latin typeface="Times New Roman" panose="02020603050405020304" pitchFamily="18" charset="0"/>
+                <a:cs typeface="Times New Roman" panose="02020603050405020304" pitchFamily="18" charset="0"/>
+              </a:rPr>
+              <a:t>, que utiliza uma chave secreta.</a:t>
+            </a:r>
+          </a:p>
+          <a:p>
+            <a:pPr algn="just"/>
+            <a:endParaRPr lang="pt-BR" dirty="0">
+              <a:latin typeface="Times New Roman" panose="02020603050405020304" pitchFamily="18" charset="0"/>
+              <a:cs typeface="Times New Roman" panose="02020603050405020304" pitchFamily="18" charset="0"/>
+            </a:endParaRPr>
+          </a:p>
+          <a:p>
+            <a:pPr algn="just"/>
+            <a:r>
+              <a:rPr lang="pt-BR" b="1" dirty="0" err="1">
+                <a:latin typeface="Times New Roman" panose="02020603050405020304" pitchFamily="18" charset="0"/>
+                <a:cs typeface="Times New Roman" panose="02020603050405020304" pitchFamily="18" charset="0"/>
+              </a:rPr>
+              <a:t>typ</a:t>
+            </a:r>
+            <a:r>
+              <a:rPr lang="pt-BR" b="1" dirty="0">
+                <a:latin typeface="Times New Roman" panose="02020603050405020304" pitchFamily="18" charset="0"/>
+                <a:cs typeface="Times New Roman" panose="02020603050405020304" pitchFamily="18" charset="0"/>
+              </a:rPr>
+              <a:t> - </a:t>
+            </a:r>
+            <a:r>
+              <a:rPr lang="pt-BR" dirty="0">
+                <a:latin typeface="Times New Roman" panose="02020603050405020304" pitchFamily="18" charset="0"/>
+                <a:cs typeface="Times New Roman" panose="02020603050405020304" pitchFamily="18" charset="0"/>
+              </a:rPr>
+              <a:t>Indica o tipo do token. Nesse caso, </a:t>
+            </a:r>
+            <a:r>
+              <a:rPr lang="pt-BR" b="1" dirty="0">
+                <a:latin typeface="Times New Roman" panose="02020603050405020304" pitchFamily="18" charset="0"/>
+                <a:cs typeface="Times New Roman" panose="02020603050405020304" pitchFamily="18" charset="0"/>
+              </a:rPr>
+              <a:t>JWT</a:t>
+            </a:r>
+            <a:r>
+              <a:rPr lang="pt-BR" dirty="0">
+                <a:latin typeface="Times New Roman" panose="02020603050405020304" pitchFamily="18" charset="0"/>
+                <a:cs typeface="Times New Roman" panose="02020603050405020304" pitchFamily="18" charset="0"/>
+              </a:rPr>
+              <a:t> (</a:t>
+            </a:r>
+            <a:r>
+              <a:rPr lang="pt-BR" i="1" dirty="0">
+                <a:latin typeface="Times New Roman" panose="02020603050405020304" pitchFamily="18" charset="0"/>
+                <a:cs typeface="Times New Roman" panose="02020603050405020304" pitchFamily="18" charset="0"/>
+              </a:rPr>
+              <a:t>JSON Web Token</a:t>
+            </a:r>
+            <a:r>
+              <a:rPr lang="pt-BR" dirty="0">
+                <a:latin typeface="Times New Roman" panose="02020603050405020304" pitchFamily="18" charset="0"/>
+                <a:cs typeface="Times New Roman" panose="02020603050405020304" pitchFamily="18" charset="0"/>
+              </a:rPr>
+              <a:t>).</a:t>
+            </a:r>
+          </a:p>
+        </p:txBody>
+      </p:sp>
+    </p:spTree>
+    <p:extLst>
+      <p:ext uri="{BB962C8B-B14F-4D97-AF65-F5344CB8AC3E}">
+        <p14:creationId xmlns:p14="http://schemas.microsoft.com/office/powerpoint/2010/main" val="1619611297"/>
+      </p:ext>
+    </p:extLst>
+  </p:cSld>
+  <p:clrMapOvr>
+    <a:masterClrMapping/>
+  </p:clrMapOvr>
+</p:sld>
+</file>
+
+<file path=ppt/slides/slide5.xml><?xml version="1.0" encoding="utf-8"?>
+<p:sld xmlns:a="http://schemas.openxmlformats.org/drawingml/2006/main" xmlns:r="http://schemas.openxmlformats.org/officeDocument/2006/relationships" xmlns:p="http://schemas.openxmlformats.org/presentationml/2006/main">
+  <p:cSld>
+    <p:spTree>
+      <p:nvGrpSpPr>
+        <p:cNvPr id="1" name="">
+          <a:extLst>
+            <a:ext uri="{FF2B5EF4-FFF2-40B4-BE49-F238E27FC236}">
+              <a16:creationId xmlns:a16="http://schemas.microsoft.com/office/drawing/2014/main" id="{3BAC7725-D9EB-EAF0-B1AA-B6F3A5435BD2}"/>
+            </a:ext>
+          </a:extLst>
+        </p:cNvPr>
+        <p:cNvGrpSpPr/>
+        <p:nvPr/>
+      </p:nvGrpSpPr>
+      <p:grpSpPr>
+        <a:xfrm>
+          <a:off x="0" y="0"/>
+          <a:ext cx="0" cy="0"/>
+          <a:chOff x="0" y="0"/>
+          <a:chExt cx="0" cy="0"/>
+        </a:xfrm>
+      </p:grpSpPr>
+      <p:sp>
+        <p:nvSpPr>
+          <p:cNvPr id="2" name="Título 1">
+            <a:extLst>
+              <a:ext uri="{FF2B5EF4-FFF2-40B4-BE49-F238E27FC236}">
+                <a16:creationId xmlns:a16="http://schemas.microsoft.com/office/drawing/2014/main" id="{3164B7B9-516B-31A9-45BE-FCE5F9CE2CE4}"/>
+              </a:ext>
+            </a:extLst>
+          </p:cNvPr>
+          <p:cNvSpPr>
+            <a:spLocks noGrp="1"/>
+          </p:cNvSpPr>
+          <p:nvPr>
+            <p:ph type="title"/>
+          </p:nvPr>
+        </p:nvSpPr>
+        <p:spPr/>
+        <p:txBody>
+          <a:bodyPr/>
+          <a:lstStyle/>
+          <a:p>
+            <a:r>
+              <a:rPr lang="pt-BR" dirty="0"/>
+              <a:t>JSON Web Token (JWT) </a:t>
+            </a:r>
+            <a:r>
+              <a:rPr lang="pt-BR" dirty="0" err="1"/>
+              <a:t>Debugger</a:t>
+            </a:r>
+            <a:br>
+              <a:rPr lang="pt-BR" dirty="0"/>
+            </a:br>
+            <a:endParaRPr lang="pt-BR" dirty="0"/>
+          </a:p>
+        </p:txBody>
+      </p:sp>
+      <p:sp>
+        <p:nvSpPr>
+          <p:cNvPr id="4" name="Shape 20">
+            <a:extLst>
+              <a:ext uri="{FF2B5EF4-FFF2-40B4-BE49-F238E27FC236}">
+                <a16:creationId xmlns:a16="http://schemas.microsoft.com/office/drawing/2014/main" id="{631EF554-D61C-53C4-EE38-1409A6463D91}"/>
+              </a:ext>
+            </a:extLst>
+          </p:cNvPr>
+          <p:cNvSpPr>
+            <a:spLocks noGrp="1"/>
+          </p:cNvSpPr>
+          <p:nvPr/>
+        </p:nvSpPr>
+        <p:spPr>
+          <a:xfrm>
+            <a:off x="749185" y="2115485"/>
+            <a:ext cx="5021695" cy="2604796"/>
+          </a:xfrm>
+          <a:prstGeom prst="roundRect">
+            <a:avLst>
+              <a:gd name="adj" fmla="val 8081"/>
+            </a:avLst>
+          </a:prstGeom>
+          <a:solidFill>
+            <a:srgbClr val="F1F1F1"/>
+          </a:solidFill>
+          <a:ln>
+            <a:noFill/>
+          </a:ln>
+          <a:effectLst/>
+        </p:spPr>
+        <p:txBody>
+          <a:bodyPr/>
+          <a:lstStyle/>
+          <a:p>
+            <a:endParaRPr/>
+          </a:p>
+        </p:txBody>
+      </p:sp>
+      <p:sp>
+        <p:nvSpPr>
+          <p:cNvPr id="5" name="Retângulo 4">
+            <a:extLst>
+              <a:ext uri="{FF2B5EF4-FFF2-40B4-BE49-F238E27FC236}">
+                <a16:creationId xmlns:a16="http://schemas.microsoft.com/office/drawing/2014/main" id="{9A466D11-1E46-FCCA-9B84-D89E1CF19917}"/>
+              </a:ext>
+            </a:extLst>
+          </p:cNvPr>
+          <p:cNvSpPr>
+            <a:spLocks noGrp="1"/>
+          </p:cNvSpPr>
+          <p:nvPr/>
+        </p:nvSpPr>
+        <p:spPr>
+          <a:xfrm>
+            <a:off x="1556492" y="2297737"/>
+            <a:ext cx="3407081" cy="404274"/>
+          </a:xfrm>
+          <a:prstGeom prst="rect">
+            <a:avLst/>
+          </a:prstGeom>
+        </p:spPr>
+        <p:txBody>
+          <a:bodyPr wrap="square">
+            <a:noAutofit/>
+          </a:bodyPr>
+          <a:lstStyle/>
+          <a:p>
+            <a:pPr algn="l">
+              <a:defRPr sz="2250">
+                <a:solidFill>
+                  <a:srgbClr val="D4D4D4"/>
+                </a:solidFill>
+                <a:latin typeface="Consolas"/>
+                <a:ea typeface="Consolas"/>
+                <a:cs typeface="Consolas"/>
+              </a:defRPr>
+            </a:pPr>
+            <a:r>
+              <a:rPr lang="pt-BR" sz="2250" b="1" dirty="0">
+                <a:solidFill>
+                  <a:srgbClr val="757575"/>
+                </a:solidFill>
+                <a:latin typeface="Consolas"/>
+                <a:ea typeface="Consolas"/>
+                <a:cs typeface="Consolas"/>
+              </a:rPr>
+              <a:t>JSON Web Token (JWT)</a:t>
+            </a:r>
+            <a:endParaRPr sz="2250" b="1" dirty="0">
+              <a:solidFill>
+                <a:srgbClr val="757575"/>
+              </a:solidFill>
+              <a:latin typeface="Consolas"/>
+              <a:ea typeface="Consolas"/>
+              <a:cs typeface="Consolas"/>
+            </a:endParaRPr>
+          </a:p>
+        </p:txBody>
+      </p:sp>
+      <p:sp>
+        <p:nvSpPr>
+          <p:cNvPr id="8" name="Shape 20">
+            <a:extLst>
+              <a:ext uri="{FF2B5EF4-FFF2-40B4-BE49-F238E27FC236}">
+                <a16:creationId xmlns:a16="http://schemas.microsoft.com/office/drawing/2014/main" id="{CB0A537A-D74F-B308-53A8-5E7622C3DCFF}"/>
+              </a:ext>
+            </a:extLst>
+          </p:cNvPr>
+          <p:cNvSpPr>
+            <a:spLocks noGrp="1"/>
+          </p:cNvSpPr>
+          <p:nvPr/>
+        </p:nvSpPr>
+        <p:spPr>
+          <a:xfrm>
+            <a:off x="917733" y="2895225"/>
+            <a:ext cx="4734403" cy="1693251"/>
+          </a:xfrm>
+          <a:prstGeom prst="roundRect">
+            <a:avLst>
+              <a:gd name="adj" fmla="val 8081"/>
+            </a:avLst>
+          </a:prstGeom>
+          <a:solidFill>
+            <a:schemeClr val="bg1"/>
+          </a:solidFill>
+          <a:ln>
+            <a:noFill/>
+          </a:ln>
+          <a:effectLst/>
+        </p:spPr>
+        <p:txBody>
+          <a:bodyPr/>
+          <a:lstStyle/>
+          <a:p>
+            <a:r>
+              <a:rPr lang="pt-BR" b="1" dirty="0">
+                <a:solidFill>
+                  <a:srgbClr val="E8823E"/>
+                </a:solidFill>
+                <a:latin typeface="Consolas" panose="020B0609020204030204" pitchFamily="49" charset="0"/>
+              </a:rPr>
+              <a:t>eyJhbGciOiJIUzI1NiIsInR5cCI6IkpXVCJ9</a:t>
+            </a:r>
+            <a:r>
+              <a:rPr lang="pt-BR" dirty="0">
+                <a:latin typeface="Consolas" panose="020B0609020204030204" pitchFamily="49" charset="0"/>
+              </a:rPr>
+              <a:t>.</a:t>
+            </a:r>
+            <a:r>
+              <a:rPr lang="pt-BR" b="1" dirty="0">
+                <a:solidFill>
+                  <a:srgbClr val="968BF9"/>
+                </a:solidFill>
+                <a:latin typeface="Consolas" panose="020B0609020204030204" pitchFamily="49" charset="0"/>
+              </a:rPr>
+              <a:t>eyJpc3MiOiJBUEkgRGVudGlzdGEiLCJzdWIiOiJwZWRyb0BnbWFpbC5jb20iLCJleHAiOjE3OTA2NDYzMzR9</a:t>
+            </a:r>
+            <a:r>
+              <a:rPr lang="pt-BR" dirty="0">
+                <a:latin typeface="Consolas" panose="020B0609020204030204" pitchFamily="49" charset="0"/>
+              </a:rPr>
+              <a:t>.</a:t>
+            </a:r>
+            <a:r>
+              <a:rPr lang="pt-BR" b="1" dirty="0">
+                <a:solidFill>
+                  <a:srgbClr val="0C945D"/>
+                </a:solidFill>
+                <a:latin typeface="Consolas" panose="020B0609020204030204" pitchFamily="49" charset="0"/>
+              </a:rPr>
+              <a:t>M_EYnADTjDNKXJj7RJTpyyQRxQ5fRBp3bMJj6nT0xsk</a:t>
+            </a:r>
+            <a:endParaRPr b="1" dirty="0">
+              <a:solidFill>
+                <a:srgbClr val="0C945D"/>
+              </a:solidFill>
+              <a:latin typeface="Consolas" panose="020B0609020204030204" pitchFamily="49" charset="0"/>
+            </a:endParaRPr>
+          </a:p>
+        </p:txBody>
+      </p:sp>
+      <p:sp>
+        <p:nvSpPr>
+          <p:cNvPr id="11" name="Shape 20">
+            <a:extLst>
+              <a:ext uri="{FF2B5EF4-FFF2-40B4-BE49-F238E27FC236}">
+                <a16:creationId xmlns:a16="http://schemas.microsoft.com/office/drawing/2014/main" id="{4F105558-920F-2A8A-A46B-980836D8F19D}"/>
+              </a:ext>
+            </a:extLst>
+          </p:cNvPr>
+          <p:cNvSpPr>
+            <a:spLocks noGrp="1"/>
+          </p:cNvSpPr>
+          <p:nvPr/>
+        </p:nvSpPr>
+        <p:spPr>
+          <a:xfrm>
+            <a:off x="6371316" y="2104524"/>
+            <a:ext cx="5021695" cy="2604796"/>
+          </a:xfrm>
+          <a:prstGeom prst="roundRect">
+            <a:avLst>
+              <a:gd name="adj" fmla="val 8081"/>
+            </a:avLst>
+          </a:prstGeom>
+          <a:solidFill>
+            <a:srgbClr val="F1F1F1"/>
+          </a:solidFill>
+          <a:ln>
+            <a:noFill/>
+          </a:ln>
+          <a:effectLst/>
+        </p:spPr>
+        <p:txBody>
+          <a:bodyPr/>
+          <a:lstStyle/>
+          <a:p>
+            <a:endParaRPr/>
+          </a:p>
+        </p:txBody>
+      </p:sp>
+      <p:sp>
+        <p:nvSpPr>
+          <p:cNvPr id="12" name="Retângulo 11">
+            <a:extLst>
+              <a:ext uri="{FF2B5EF4-FFF2-40B4-BE49-F238E27FC236}">
+                <a16:creationId xmlns:a16="http://schemas.microsoft.com/office/drawing/2014/main" id="{4242527F-E8D4-62D3-24EE-8647DC280F6A}"/>
+              </a:ext>
+            </a:extLst>
+          </p:cNvPr>
+          <p:cNvSpPr>
+            <a:spLocks noGrp="1"/>
+          </p:cNvSpPr>
+          <p:nvPr/>
+        </p:nvSpPr>
+        <p:spPr>
+          <a:xfrm>
+            <a:off x="8224742" y="2297737"/>
+            <a:ext cx="1314843" cy="404274"/>
+          </a:xfrm>
+          <a:prstGeom prst="rect">
+            <a:avLst/>
+          </a:prstGeom>
+        </p:spPr>
+        <p:txBody>
+          <a:bodyPr wrap="square">
+            <a:noAutofit/>
+          </a:bodyPr>
+          <a:lstStyle/>
+          <a:p>
+            <a:pPr algn="l">
+              <a:defRPr sz="2250">
+                <a:solidFill>
+                  <a:srgbClr val="D4D4D4"/>
+                </a:solidFill>
+                <a:latin typeface="Consolas"/>
+                <a:ea typeface="Consolas"/>
+                <a:cs typeface="Consolas"/>
+              </a:defRPr>
+            </a:pPr>
+            <a:r>
+              <a:rPr lang="pt-BR" b="1" dirty="0" err="1">
+                <a:solidFill>
+                  <a:srgbClr val="968BF9"/>
+                </a:solidFill>
+                <a:latin typeface="Consolas" panose="020B0609020204030204" pitchFamily="49" charset="0"/>
+              </a:rPr>
+              <a:t>Payload</a:t>
+            </a:r>
+            <a:endParaRPr b="1" dirty="0">
+              <a:solidFill>
+                <a:srgbClr val="968BF9"/>
+              </a:solidFill>
+              <a:latin typeface="Consolas" panose="020B0609020204030204" pitchFamily="49" charset="0"/>
+            </a:endParaRPr>
+          </a:p>
+        </p:txBody>
+      </p:sp>
+      <p:sp>
+        <p:nvSpPr>
+          <p:cNvPr id="13" name="Shape 20">
+            <a:extLst>
+              <a:ext uri="{FF2B5EF4-FFF2-40B4-BE49-F238E27FC236}">
+                <a16:creationId xmlns:a16="http://schemas.microsoft.com/office/drawing/2014/main" id="{34E81E43-2BCB-45E5-87AE-28AEF19CBB28}"/>
+              </a:ext>
+            </a:extLst>
+          </p:cNvPr>
+          <p:cNvSpPr>
+            <a:spLocks noGrp="1"/>
+          </p:cNvSpPr>
+          <p:nvPr/>
+        </p:nvSpPr>
+        <p:spPr>
+          <a:xfrm>
+            <a:off x="6539864" y="2895226"/>
+            <a:ext cx="4734403" cy="1693250"/>
+          </a:xfrm>
+          <a:prstGeom prst="roundRect">
+            <a:avLst>
+              <a:gd name="adj" fmla="val 8081"/>
+            </a:avLst>
+          </a:prstGeom>
+          <a:solidFill>
+            <a:schemeClr val="bg1"/>
+          </a:solidFill>
+          <a:ln>
+            <a:noFill/>
+          </a:ln>
+          <a:effectLst/>
+        </p:spPr>
+        <p:txBody>
+          <a:bodyPr/>
+          <a:lstStyle/>
+          <a:p>
+            <a:r>
+              <a:rPr lang="pt-BR" b="1" dirty="0">
+                <a:latin typeface="Consolas" panose="020B0609020204030204" pitchFamily="49" charset="0"/>
+              </a:rPr>
+              <a:t>{</a:t>
+            </a:r>
+          </a:p>
+          <a:p>
+            <a:r>
+              <a:rPr lang="pt-BR" b="1" dirty="0">
+                <a:latin typeface="Consolas" panose="020B0609020204030204" pitchFamily="49" charset="0"/>
+              </a:rPr>
+              <a:t>  "</a:t>
+            </a:r>
+            <a:r>
+              <a:rPr lang="pt-BR" b="1" dirty="0" err="1">
+                <a:latin typeface="Consolas" panose="020B0609020204030204" pitchFamily="49" charset="0"/>
+              </a:rPr>
+              <a:t>iss</a:t>
+            </a:r>
+            <a:r>
+              <a:rPr lang="pt-BR" b="1" dirty="0">
+                <a:latin typeface="Consolas" panose="020B0609020204030204" pitchFamily="49" charset="0"/>
+              </a:rPr>
+              <a:t>": </a:t>
+            </a:r>
+            <a:r>
+              <a:rPr lang="pt-BR" b="1" dirty="0">
+                <a:solidFill>
+                  <a:srgbClr val="0C945D"/>
+                </a:solidFill>
+                <a:latin typeface="Consolas" panose="020B0609020204030204" pitchFamily="49" charset="0"/>
+              </a:rPr>
+              <a:t>"API Dentista"</a:t>
+            </a:r>
+            <a:r>
+              <a:rPr lang="pt-BR" b="1" dirty="0">
+                <a:latin typeface="Consolas" panose="020B0609020204030204" pitchFamily="49" charset="0"/>
+              </a:rPr>
+              <a:t>,</a:t>
+            </a:r>
+          </a:p>
+          <a:p>
+            <a:r>
+              <a:rPr lang="pt-BR" b="1" dirty="0">
+                <a:latin typeface="Consolas" panose="020B0609020204030204" pitchFamily="49" charset="0"/>
+              </a:rPr>
+              <a:t>  "sub": </a:t>
+            </a:r>
+            <a:r>
+              <a:rPr lang="pt-BR" b="1" dirty="0">
+                <a:solidFill>
+                  <a:srgbClr val="0C945D"/>
+                </a:solidFill>
+                <a:latin typeface="Consolas" panose="020B0609020204030204" pitchFamily="49" charset="0"/>
+              </a:rPr>
+              <a:t>"pedro@gmail.com"</a:t>
+            </a:r>
+            <a:r>
+              <a:rPr lang="pt-BR" b="1" dirty="0">
+                <a:latin typeface="Consolas" panose="020B0609020204030204" pitchFamily="49" charset="0"/>
+              </a:rPr>
+              <a:t>,</a:t>
+            </a:r>
+          </a:p>
+          <a:p>
+            <a:r>
+              <a:rPr lang="pt-BR" b="1" dirty="0">
+                <a:latin typeface="Consolas" panose="020B0609020204030204" pitchFamily="49" charset="0"/>
+              </a:rPr>
+              <a:t>  "</a:t>
+            </a:r>
+            <a:r>
+              <a:rPr lang="pt-BR" b="1" dirty="0" err="1">
+                <a:latin typeface="Consolas" panose="020B0609020204030204" pitchFamily="49" charset="0"/>
+              </a:rPr>
+              <a:t>exp</a:t>
+            </a:r>
+            <a:r>
+              <a:rPr lang="pt-BR" b="1" dirty="0">
+                <a:latin typeface="Consolas" panose="020B0609020204030204" pitchFamily="49" charset="0"/>
+              </a:rPr>
+              <a:t>": </a:t>
+            </a:r>
+            <a:r>
+              <a:rPr lang="pt-BR" b="1" dirty="0">
+                <a:solidFill>
+                  <a:srgbClr val="0C945D"/>
+                </a:solidFill>
+                <a:latin typeface="Consolas" panose="020B0609020204030204" pitchFamily="49" charset="0"/>
+              </a:rPr>
+              <a:t>1790646334</a:t>
+            </a:r>
+          </a:p>
+          <a:p>
+            <a:r>
+              <a:rPr lang="pt-BR" b="1" dirty="0">
+                <a:latin typeface="Consolas" panose="020B0609020204030204" pitchFamily="49" charset="0"/>
+              </a:rPr>
+              <a:t>}</a:t>
+            </a:r>
+            <a:endParaRPr b="1" dirty="0">
+              <a:latin typeface="Consolas" panose="020B0609020204030204" pitchFamily="49" charset="0"/>
+            </a:endParaRPr>
+          </a:p>
+        </p:txBody>
+      </p:sp>
+      <p:sp>
+        <p:nvSpPr>
+          <p:cNvPr id="18" name="CaixaDeTexto 17">
+            <a:extLst>
+              <a:ext uri="{FF2B5EF4-FFF2-40B4-BE49-F238E27FC236}">
+                <a16:creationId xmlns:a16="http://schemas.microsoft.com/office/drawing/2014/main" id="{8B044A3A-DE76-EC67-ADB2-F1B47093E9D9}"/>
+              </a:ext>
+            </a:extLst>
+          </p:cNvPr>
+          <p:cNvSpPr txBox="1"/>
+          <p:nvPr/>
+        </p:nvSpPr>
+        <p:spPr>
+          <a:xfrm>
+            <a:off x="917733" y="4992130"/>
+            <a:ext cx="10475278" cy="1477328"/>
+          </a:xfrm>
+          <a:prstGeom prst="rect">
+            <a:avLst/>
+          </a:prstGeom>
+          <a:noFill/>
+        </p:spPr>
+        <p:txBody>
+          <a:bodyPr wrap="square" rtlCol="0">
+            <a:spAutoFit/>
+          </a:bodyPr>
+          <a:lstStyle/>
+          <a:p>
+            <a:pPr algn="just"/>
+            <a:r>
+              <a:rPr lang="pt-BR" b="1" dirty="0" err="1">
+                <a:latin typeface="Times New Roman" panose="02020603050405020304" pitchFamily="18" charset="0"/>
+                <a:cs typeface="Times New Roman" panose="02020603050405020304" pitchFamily="18" charset="0"/>
+              </a:rPr>
+              <a:t>iss</a:t>
+            </a:r>
+            <a:r>
+              <a:rPr lang="pt-BR" b="1" dirty="0">
+                <a:latin typeface="Times New Roman" panose="02020603050405020304" pitchFamily="18" charset="0"/>
+                <a:cs typeface="Times New Roman" panose="02020603050405020304" pitchFamily="18" charset="0"/>
+              </a:rPr>
+              <a:t> (</a:t>
+            </a:r>
+            <a:r>
+              <a:rPr lang="pt-BR" b="1" dirty="0" err="1">
+                <a:latin typeface="Times New Roman" panose="02020603050405020304" pitchFamily="18" charset="0"/>
+                <a:cs typeface="Times New Roman" panose="02020603050405020304" pitchFamily="18" charset="0"/>
+              </a:rPr>
+              <a:t>Issuer</a:t>
+            </a:r>
+            <a:r>
+              <a:rPr lang="pt-BR" b="1" dirty="0">
+                <a:latin typeface="Times New Roman" panose="02020603050405020304" pitchFamily="18" charset="0"/>
+                <a:cs typeface="Times New Roman" panose="02020603050405020304" pitchFamily="18" charset="0"/>
+              </a:rPr>
+              <a:t>) — </a:t>
+            </a:r>
+            <a:r>
+              <a:rPr lang="pt-BR" dirty="0">
+                <a:latin typeface="Times New Roman" panose="02020603050405020304" pitchFamily="18" charset="0"/>
+                <a:cs typeface="Times New Roman" panose="02020603050405020304" pitchFamily="18" charset="0"/>
+              </a:rPr>
+              <a:t>Identifica quem emitiu o token: “API Dentista”.</a:t>
+            </a:r>
+          </a:p>
+          <a:p>
+            <a:pPr algn="just"/>
+            <a:endParaRPr lang="pt-BR" dirty="0">
+              <a:latin typeface="Times New Roman" panose="02020603050405020304" pitchFamily="18" charset="0"/>
+              <a:cs typeface="Times New Roman" panose="02020603050405020304" pitchFamily="18" charset="0"/>
+            </a:endParaRPr>
+          </a:p>
+          <a:p>
+            <a:pPr algn="just"/>
+            <a:r>
+              <a:rPr lang="pt-BR" b="1" dirty="0">
+                <a:latin typeface="Times New Roman" panose="02020603050405020304" pitchFamily="18" charset="0"/>
+                <a:cs typeface="Times New Roman" panose="02020603050405020304" pitchFamily="18" charset="0"/>
+              </a:rPr>
+              <a:t>sub (</a:t>
+            </a:r>
+            <a:r>
+              <a:rPr lang="pt-BR" b="1" dirty="0" err="1">
+                <a:latin typeface="Times New Roman" panose="02020603050405020304" pitchFamily="18" charset="0"/>
+                <a:cs typeface="Times New Roman" panose="02020603050405020304" pitchFamily="18" charset="0"/>
+              </a:rPr>
+              <a:t>Subject</a:t>
+            </a:r>
+            <a:r>
+              <a:rPr lang="pt-BR" b="1" dirty="0">
+                <a:latin typeface="Times New Roman" panose="02020603050405020304" pitchFamily="18" charset="0"/>
+                <a:cs typeface="Times New Roman" panose="02020603050405020304" pitchFamily="18" charset="0"/>
+              </a:rPr>
+              <a:t>) — </a:t>
+            </a:r>
+            <a:r>
+              <a:rPr lang="pt-BR" dirty="0">
+                <a:latin typeface="Times New Roman" panose="02020603050405020304" pitchFamily="18" charset="0"/>
+                <a:cs typeface="Times New Roman" panose="02020603050405020304" pitchFamily="18" charset="0"/>
+              </a:rPr>
+              <a:t>Identifica o usuário: “pedro@gmail.com”.</a:t>
+            </a:r>
+          </a:p>
+          <a:p>
+            <a:pPr algn="just"/>
+            <a:endParaRPr lang="pt-BR" b="1" dirty="0">
+              <a:latin typeface="Times New Roman" panose="02020603050405020304" pitchFamily="18" charset="0"/>
+              <a:cs typeface="Times New Roman" panose="02020603050405020304" pitchFamily="18" charset="0"/>
+            </a:endParaRPr>
+          </a:p>
+          <a:p>
+            <a:pPr algn="just"/>
+            <a:r>
+              <a:rPr lang="pt-BR" b="1" dirty="0" err="1">
+                <a:latin typeface="Times New Roman" panose="02020603050405020304" pitchFamily="18" charset="0"/>
+                <a:cs typeface="Times New Roman" panose="02020603050405020304" pitchFamily="18" charset="0"/>
+              </a:rPr>
+              <a:t>exp</a:t>
+            </a:r>
+            <a:r>
+              <a:rPr lang="pt-BR" b="1" dirty="0">
+                <a:latin typeface="Times New Roman" panose="02020603050405020304" pitchFamily="18" charset="0"/>
+                <a:cs typeface="Times New Roman" panose="02020603050405020304" pitchFamily="18" charset="0"/>
+              </a:rPr>
+              <a:t> (</a:t>
+            </a:r>
+            <a:r>
+              <a:rPr lang="pt-BR" b="1" dirty="0" err="1">
+                <a:latin typeface="Times New Roman" panose="02020603050405020304" pitchFamily="18" charset="0"/>
+                <a:cs typeface="Times New Roman" panose="02020603050405020304" pitchFamily="18" charset="0"/>
+              </a:rPr>
+              <a:t>Expiration</a:t>
+            </a:r>
+            <a:r>
+              <a:rPr lang="pt-BR" b="1" dirty="0">
+                <a:latin typeface="Times New Roman" panose="02020603050405020304" pitchFamily="18" charset="0"/>
+                <a:cs typeface="Times New Roman" panose="02020603050405020304" pitchFamily="18" charset="0"/>
+              </a:rPr>
+              <a:t>) — </a:t>
+            </a:r>
+            <a:r>
+              <a:rPr lang="pt-BR" dirty="0">
+                <a:latin typeface="Times New Roman" panose="02020603050405020304" pitchFamily="18" charset="0"/>
+                <a:cs typeface="Times New Roman" panose="02020603050405020304" pitchFamily="18" charset="0"/>
+              </a:rPr>
+              <a:t>Indica quando o token perde a validade.</a:t>
+            </a:r>
+          </a:p>
+        </p:txBody>
+      </p:sp>
+    </p:spTree>
+    <p:extLst>
+      <p:ext uri="{BB962C8B-B14F-4D97-AF65-F5344CB8AC3E}">
+        <p14:creationId xmlns:p14="http://schemas.microsoft.com/office/powerpoint/2010/main" val="61838619"/>
+      </p:ext>
+    </p:extLst>
+  </p:cSld>
+  <p:clrMapOvr>
+    <a:masterClrMapping/>
+  </p:clrMapOvr>
+</p:sld>
+</file>
+
+<file path=ppt/slides/slide6.xml><?xml version="1.0" encoding="utf-8"?>
+<p:sld xmlns:a="http://schemas.openxmlformats.org/drawingml/2006/main" xmlns:r="http://schemas.openxmlformats.org/officeDocument/2006/relationships" xmlns:p="http://schemas.openxmlformats.org/presentationml/2006/main">
+  <p:cSld>
+    <p:spTree>
+      <p:nvGrpSpPr>
+        <p:cNvPr id="1" name="">
+          <a:extLst>
+            <a:ext uri="{FF2B5EF4-FFF2-40B4-BE49-F238E27FC236}">
+              <a16:creationId xmlns:a16="http://schemas.microsoft.com/office/drawing/2014/main" id="{15D256D2-7388-109F-0715-A3AFF351DFB4}"/>
+            </a:ext>
+          </a:extLst>
+        </p:cNvPr>
+        <p:cNvGrpSpPr/>
+        <p:nvPr/>
+      </p:nvGrpSpPr>
+      <p:grpSpPr>
+        <a:xfrm>
+          <a:off x="0" y="0"/>
+          <a:ext cx="0" cy="0"/>
+          <a:chOff x="0" y="0"/>
+          <a:chExt cx="0" cy="0"/>
+        </a:xfrm>
+      </p:grpSpPr>
+      <p:sp>
+        <p:nvSpPr>
+          <p:cNvPr id="2" name="Título 1">
+            <a:extLst>
+              <a:ext uri="{FF2B5EF4-FFF2-40B4-BE49-F238E27FC236}">
+                <a16:creationId xmlns:a16="http://schemas.microsoft.com/office/drawing/2014/main" id="{CB956C3D-6761-60B9-83E8-85ACAAE77009}"/>
+              </a:ext>
+            </a:extLst>
+          </p:cNvPr>
+          <p:cNvSpPr>
+            <a:spLocks noGrp="1"/>
+          </p:cNvSpPr>
+          <p:nvPr>
+            <p:ph type="title"/>
+          </p:nvPr>
+        </p:nvSpPr>
+        <p:spPr/>
+        <p:txBody>
+          <a:bodyPr/>
+          <a:lstStyle/>
+          <a:p>
+            <a:r>
+              <a:rPr lang="pt-BR" dirty="0"/>
+              <a:t>JSON Web Token (JWT) </a:t>
+            </a:r>
+            <a:r>
+              <a:rPr lang="pt-BR" dirty="0" err="1"/>
+              <a:t>Debugger</a:t>
+            </a:r>
+            <a:br>
+              <a:rPr lang="pt-BR" dirty="0"/>
+            </a:br>
+            <a:endParaRPr lang="pt-BR" dirty="0"/>
+          </a:p>
+        </p:txBody>
+      </p:sp>
+      <p:sp>
+        <p:nvSpPr>
+          <p:cNvPr id="4" name="Shape 20">
+            <a:extLst>
+              <a:ext uri="{FF2B5EF4-FFF2-40B4-BE49-F238E27FC236}">
+                <a16:creationId xmlns:a16="http://schemas.microsoft.com/office/drawing/2014/main" id="{F8049104-872F-6B30-4940-880D33DA9BBF}"/>
+              </a:ext>
+            </a:extLst>
+          </p:cNvPr>
+          <p:cNvSpPr>
+            <a:spLocks noGrp="1"/>
+          </p:cNvSpPr>
+          <p:nvPr/>
+        </p:nvSpPr>
+        <p:spPr>
+          <a:xfrm>
+            <a:off x="749185" y="2115485"/>
+            <a:ext cx="5021695" cy="2604796"/>
+          </a:xfrm>
+          <a:prstGeom prst="roundRect">
+            <a:avLst>
+              <a:gd name="adj" fmla="val 8081"/>
+            </a:avLst>
+          </a:prstGeom>
+          <a:solidFill>
+            <a:srgbClr val="F1F1F1"/>
+          </a:solidFill>
+          <a:ln>
+            <a:noFill/>
+          </a:ln>
+          <a:effectLst/>
+        </p:spPr>
+        <p:txBody>
+          <a:bodyPr/>
+          <a:lstStyle/>
+          <a:p>
+            <a:endParaRPr/>
+          </a:p>
+        </p:txBody>
+      </p:sp>
+      <p:sp>
+        <p:nvSpPr>
+          <p:cNvPr id="5" name="Retângulo 4">
+            <a:extLst>
+              <a:ext uri="{FF2B5EF4-FFF2-40B4-BE49-F238E27FC236}">
+                <a16:creationId xmlns:a16="http://schemas.microsoft.com/office/drawing/2014/main" id="{92FF584A-B2C0-D36B-DD46-4B9BE5049D74}"/>
+              </a:ext>
+            </a:extLst>
+          </p:cNvPr>
+          <p:cNvSpPr>
+            <a:spLocks noGrp="1"/>
+          </p:cNvSpPr>
+          <p:nvPr/>
+        </p:nvSpPr>
+        <p:spPr>
+          <a:xfrm>
+            <a:off x="1556492" y="2297737"/>
+            <a:ext cx="3407081" cy="404274"/>
+          </a:xfrm>
+          <a:prstGeom prst="rect">
+            <a:avLst/>
+          </a:prstGeom>
+        </p:spPr>
+        <p:txBody>
+          <a:bodyPr wrap="square">
+            <a:noAutofit/>
+          </a:bodyPr>
+          <a:lstStyle/>
+          <a:p>
+            <a:pPr algn="l">
+              <a:defRPr sz="2250">
+                <a:solidFill>
+                  <a:srgbClr val="D4D4D4"/>
+                </a:solidFill>
+                <a:latin typeface="Consolas"/>
+                <a:ea typeface="Consolas"/>
+                <a:cs typeface="Consolas"/>
+              </a:defRPr>
+            </a:pPr>
+            <a:r>
+              <a:rPr lang="pt-BR" sz="2250" dirty="0">
+                <a:solidFill>
+                  <a:srgbClr val="757575"/>
+                </a:solidFill>
+                <a:latin typeface="Consolas"/>
+                <a:ea typeface="Consolas"/>
+                <a:cs typeface="Consolas"/>
+              </a:rPr>
+              <a:t>JSON Web Token (JWT)</a:t>
+            </a:r>
+            <a:endParaRPr sz="2250" dirty="0">
+              <a:solidFill>
+                <a:srgbClr val="757575"/>
+              </a:solidFill>
+              <a:latin typeface="Consolas"/>
+              <a:ea typeface="Consolas"/>
+              <a:cs typeface="Consolas"/>
+            </a:endParaRPr>
+          </a:p>
+        </p:txBody>
+      </p:sp>
+      <p:sp>
+        <p:nvSpPr>
+          <p:cNvPr id="8" name="Shape 20">
+            <a:extLst>
+              <a:ext uri="{FF2B5EF4-FFF2-40B4-BE49-F238E27FC236}">
+                <a16:creationId xmlns:a16="http://schemas.microsoft.com/office/drawing/2014/main" id="{853A0386-2DD7-7678-F4A2-8B61496BBA47}"/>
+              </a:ext>
+            </a:extLst>
+          </p:cNvPr>
+          <p:cNvSpPr>
+            <a:spLocks noGrp="1"/>
+          </p:cNvSpPr>
+          <p:nvPr/>
+        </p:nvSpPr>
+        <p:spPr>
+          <a:xfrm>
+            <a:off x="917733" y="2895225"/>
+            <a:ext cx="4734403" cy="1693251"/>
+          </a:xfrm>
+          <a:prstGeom prst="roundRect">
+            <a:avLst>
+              <a:gd name="adj" fmla="val 8081"/>
+            </a:avLst>
+          </a:prstGeom>
+          <a:solidFill>
+            <a:schemeClr val="bg1"/>
+          </a:solidFill>
+          <a:ln>
+            <a:noFill/>
+          </a:ln>
+          <a:effectLst/>
+        </p:spPr>
+        <p:txBody>
+          <a:bodyPr/>
+          <a:lstStyle/>
+          <a:p>
+            <a:r>
+              <a:rPr lang="pt-BR" b="1" dirty="0">
+                <a:solidFill>
+                  <a:srgbClr val="E8823E"/>
+                </a:solidFill>
+                <a:latin typeface="Consolas" panose="020B0609020204030204" pitchFamily="49" charset="0"/>
+              </a:rPr>
+              <a:t>eyJhbGciOiJIUzI1NiIsInR5cCI6IkpXVCJ9</a:t>
+            </a:r>
+            <a:r>
+              <a:rPr lang="pt-BR" dirty="0">
+                <a:latin typeface="Consolas" panose="020B0609020204030204" pitchFamily="49" charset="0"/>
+              </a:rPr>
+              <a:t>.</a:t>
+            </a:r>
+            <a:r>
+              <a:rPr lang="pt-BR" b="1" dirty="0">
+                <a:solidFill>
+                  <a:srgbClr val="968BF9"/>
+                </a:solidFill>
+                <a:latin typeface="Consolas" panose="020B0609020204030204" pitchFamily="49" charset="0"/>
+              </a:rPr>
+              <a:t>eyJpc3MiOiJBUEkgRGVudGlzdGEiLCJzdWIiOiJwZWRyb0BnbWFpbC5jb20iLCJleHAiOjE3OTA2NDYzMzR9</a:t>
+            </a:r>
+            <a:r>
+              <a:rPr lang="pt-BR" dirty="0">
+                <a:latin typeface="Consolas" panose="020B0609020204030204" pitchFamily="49" charset="0"/>
+              </a:rPr>
+              <a:t>.</a:t>
+            </a:r>
+            <a:r>
+              <a:rPr lang="pt-BR" b="1" dirty="0">
+                <a:solidFill>
+                  <a:srgbClr val="0C945D"/>
+                </a:solidFill>
+                <a:latin typeface="Consolas" panose="020B0609020204030204" pitchFamily="49" charset="0"/>
+              </a:rPr>
+              <a:t>M_EYnADTjDNKXJj7RJTpyyQRxQ5fRBp3bMJj6nT0xsk</a:t>
+            </a:r>
+            <a:endParaRPr b="1" dirty="0">
+              <a:solidFill>
+                <a:srgbClr val="0C945D"/>
+              </a:solidFill>
+              <a:latin typeface="Consolas" panose="020B0609020204030204" pitchFamily="49" charset="0"/>
+            </a:endParaRPr>
+          </a:p>
+        </p:txBody>
+      </p:sp>
+      <p:sp>
+        <p:nvSpPr>
+          <p:cNvPr id="11" name="Shape 20">
+            <a:extLst>
+              <a:ext uri="{FF2B5EF4-FFF2-40B4-BE49-F238E27FC236}">
+                <a16:creationId xmlns:a16="http://schemas.microsoft.com/office/drawing/2014/main" id="{37613147-D678-CD73-22BB-B848A7BCDF67}"/>
+              </a:ext>
+            </a:extLst>
+          </p:cNvPr>
+          <p:cNvSpPr>
+            <a:spLocks noGrp="1"/>
+          </p:cNvSpPr>
+          <p:nvPr/>
+        </p:nvSpPr>
+        <p:spPr>
+          <a:xfrm>
+            <a:off x="6371316" y="2104524"/>
+            <a:ext cx="5021695" cy="2604796"/>
+          </a:xfrm>
+          <a:prstGeom prst="roundRect">
+            <a:avLst>
+              <a:gd name="adj" fmla="val 8081"/>
+            </a:avLst>
+          </a:prstGeom>
+          <a:solidFill>
+            <a:srgbClr val="F1F1F1"/>
+          </a:solidFill>
+          <a:ln>
+            <a:noFill/>
+          </a:ln>
+          <a:effectLst/>
+        </p:spPr>
+        <p:txBody>
+          <a:bodyPr/>
+          <a:lstStyle/>
+          <a:p>
+            <a:endParaRPr/>
+          </a:p>
+        </p:txBody>
+      </p:sp>
+      <p:sp>
+        <p:nvSpPr>
+          <p:cNvPr id="12" name="Retângulo 11">
+            <a:extLst>
+              <a:ext uri="{FF2B5EF4-FFF2-40B4-BE49-F238E27FC236}">
+                <a16:creationId xmlns:a16="http://schemas.microsoft.com/office/drawing/2014/main" id="{333F8872-6018-111A-15DB-ED3E28106B15}"/>
+              </a:ext>
+            </a:extLst>
+          </p:cNvPr>
+          <p:cNvSpPr>
+            <a:spLocks noGrp="1"/>
+          </p:cNvSpPr>
+          <p:nvPr/>
+        </p:nvSpPr>
+        <p:spPr>
+          <a:xfrm>
+            <a:off x="8270315" y="2297737"/>
+            <a:ext cx="1223697" cy="404274"/>
+          </a:xfrm>
+          <a:prstGeom prst="rect">
+            <a:avLst/>
+          </a:prstGeom>
+        </p:spPr>
+        <p:txBody>
+          <a:bodyPr wrap="square">
+            <a:noAutofit/>
+          </a:bodyPr>
+          <a:lstStyle/>
+          <a:p>
+            <a:pPr algn="l">
+              <a:defRPr sz="2250">
+                <a:solidFill>
+                  <a:srgbClr val="D4D4D4"/>
+                </a:solidFill>
+                <a:latin typeface="Consolas"/>
+                <a:ea typeface="Consolas"/>
+                <a:cs typeface="Consolas"/>
+              </a:defRPr>
+            </a:pPr>
+            <a:r>
+              <a:rPr lang="pt-BR" b="1" dirty="0" err="1">
+                <a:solidFill>
+                  <a:srgbClr val="0C945D"/>
+                </a:solidFill>
+                <a:latin typeface="Consolas" panose="020B0609020204030204" pitchFamily="49" charset="0"/>
+              </a:rPr>
+              <a:t>Secret</a:t>
+            </a:r>
+            <a:endParaRPr b="1" dirty="0">
+              <a:solidFill>
+                <a:srgbClr val="0C945D"/>
+              </a:solidFill>
+              <a:latin typeface="Consolas" panose="020B0609020204030204" pitchFamily="49" charset="0"/>
+            </a:endParaRPr>
+          </a:p>
+        </p:txBody>
+      </p:sp>
+      <p:sp>
+        <p:nvSpPr>
+          <p:cNvPr id="13" name="Shape 20">
+            <a:extLst>
+              <a:ext uri="{FF2B5EF4-FFF2-40B4-BE49-F238E27FC236}">
+                <a16:creationId xmlns:a16="http://schemas.microsoft.com/office/drawing/2014/main" id="{F9064ED9-4E07-E54B-1078-5258C486C98C}"/>
+              </a:ext>
+            </a:extLst>
+          </p:cNvPr>
+          <p:cNvSpPr>
+            <a:spLocks noGrp="1"/>
+          </p:cNvSpPr>
+          <p:nvPr/>
+        </p:nvSpPr>
+        <p:spPr>
+          <a:xfrm>
+            <a:off x="6539864" y="2895226"/>
+            <a:ext cx="4734403" cy="1446115"/>
+          </a:xfrm>
+          <a:prstGeom prst="roundRect">
+            <a:avLst>
+              <a:gd name="adj" fmla="val 8081"/>
+            </a:avLst>
+          </a:prstGeom>
+          <a:solidFill>
+            <a:schemeClr val="bg1"/>
+          </a:solidFill>
+          <a:ln>
+            <a:noFill/>
+          </a:ln>
+          <a:effectLst/>
+        </p:spPr>
+        <p:txBody>
+          <a:bodyPr/>
+          <a:lstStyle/>
+          <a:p>
+            <a:r>
+              <a:rPr lang="pt-BR" b="1" dirty="0">
+                <a:latin typeface="Consolas" panose="020B0609020204030204" pitchFamily="49" charset="0"/>
+              </a:rPr>
+              <a:t>a-string-secret-at-least-256-bits-long</a:t>
+            </a:r>
+            <a:endParaRPr b="1" dirty="0">
+              <a:latin typeface="Consolas" panose="020B0609020204030204" pitchFamily="49" charset="0"/>
+            </a:endParaRPr>
+          </a:p>
+        </p:txBody>
+      </p:sp>
+      <p:sp>
+        <p:nvSpPr>
+          <p:cNvPr id="18" name="CaixaDeTexto 17">
+            <a:extLst>
+              <a:ext uri="{FF2B5EF4-FFF2-40B4-BE49-F238E27FC236}">
+                <a16:creationId xmlns:a16="http://schemas.microsoft.com/office/drawing/2014/main" id="{E7A17316-03FF-4294-C321-8FC88FAF50A3}"/>
+              </a:ext>
+            </a:extLst>
+          </p:cNvPr>
+          <p:cNvSpPr txBox="1"/>
+          <p:nvPr/>
+        </p:nvSpPr>
+        <p:spPr>
+          <a:xfrm>
+            <a:off x="917733" y="4992130"/>
+            <a:ext cx="10475278" cy="1289071"/>
+          </a:xfrm>
+          <a:prstGeom prst="rect">
+            <a:avLst/>
+          </a:prstGeom>
+          <a:noFill/>
+        </p:spPr>
+        <p:txBody>
+          <a:bodyPr wrap="square" rtlCol="0">
+            <a:spAutoFit/>
+          </a:bodyPr>
+          <a:lstStyle/>
+          <a:p>
+            <a:pPr algn="just">
+              <a:lnSpc>
+                <a:spcPct val="150000"/>
+              </a:lnSpc>
+            </a:pPr>
+            <a:r>
+              <a:rPr lang="pt-BR" b="1" dirty="0" err="1">
+                <a:latin typeface="Times New Roman" panose="02020603050405020304" pitchFamily="18" charset="0"/>
+                <a:cs typeface="Times New Roman" panose="02020603050405020304" pitchFamily="18" charset="0"/>
+              </a:rPr>
+              <a:t>secret</a:t>
+            </a:r>
+            <a:r>
+              <a:rPr lang="pt-BR" b="1" dirty="0">
+                <a:latin typeface="Times New Roman" panose="02020603050405020304" pitchFamily="18" charset="0"/>
+                <a:cs typeface="Times New Roman" panose="02020603050405020304" pitchFamily="18" charset="0"/>
+              </a:rPr>
+              <a:t> —</a:t>
+            </a:r>
+            <a:r>
+              <a:rPr lang="pt-BR" dirty="0">
+                <a:latin typeface="Times New Roman" panose="02020603050405020304" pitchFamily="18" charset="0"/>
+                <a:cs typeface="Times New Roman" panose="02020603050405020304" pitchFamily="18" charset="0"/>
+              </a:rPr>
+              <a:t> É gerada pelo HMAC-SHA256 usando o header, o </a:t>
+            </a:r>
+            <a:r>
+              <a:rPr lang="pt-BR" dirty="0" err="1">
+                <a:latin typeface="Times New Roman" panose="02020603050405020304" pitchFamily="18" charset="0"/>
+                <a:cs typeface="Times New Roman" panose="02020603050405020304" pitchFamily="18" charset="0"/>
+              </a:rPr>
+              <a:t>payload</a:t>
+            </a:r>
+            <a:r>
+              <a:rPr lang="pt-BR" dirty="0">
+                <a:latin typeface="Times New Roman" panose="02020603050405020304" pitchFamily="18" charset="0"/>
+                <a:cs typeface="Times New Roman" panose="02020603050405020304" pitchFamily="18" charset="0"/>
+              </a:rPr>
+              <a:t> e a chave secreta. Ao receber o token, o servidor recalcula a assinatura e compara com a recebida para verificar se houve alterações. A chave secreta permanece no servidor e não é enviada no JWT.</a:t>
+            </a:r>
+          </a:p>
+        </p:txBody>
+      </p:sp>
+    </p:spTree>
+    <p:extLst>
+      <p:ext uri="{BB962C8B-B14F-4D97-AF65-F5344CB8AC3E}">
+        <p14:creationId xmlns:p14="http://schemas.microsoft.com/office/powerpoint/2010/main" val="3941131795"/>
+      </p:ext>
+    </p:extLst>
+  </p:cSld>
+  <p:clrMapOvr>
+    <a:masterClrMapping/>
+  </p:clrMapOvr>
+</p:sld>
+</file>
+
+<file path=ppt/slides/slide7.xml><?xml version="1.0" encoding="utf-8"?>
+<p:sld xmlns:a="http://schemas.openxmlformats.org/drawingml/2006/main" xmlns:r="http://schemas.openxmlformats.org/officeDocument/2006/relationships" xmlns:p="http://schemas.openxmlformats.org/presentationml/2006/main">
+  <p:cSld>
+    <p:spTree>
+      <p:nvGrpSpPr>
+        <p:cNvPr id="1" name=""/>
+        <p:cNvGrpSpPr/>
+        <p:nvPr/>
+      </p:nvGrpSpPr>
+      <p:grpSpPr>
+        <a:xfrm>
+          <a:off x="0" y="0"/>
+          <a:ext cx="0" cy="0"/>
+          <a:chOff x="0" y="0"/>
+          <a:chExt cx="0" cy="0"/>
+        </a:xfrm>
+      </p:grpSpPr>
+      <p:sp>
+        <p:nvSpPr>
+          <p:cNvPr id="2" name="Título 1">
+            <a:extLst>
+              <a:ext uri="{FF2B5EF4-FFF2-40B4-BE49-F238E27FC236}">
+                <a16:creationId xmlns:a16="http://schemas.microsoft.com/office/drawing/2014/main" id="{84CCB3AB-D229-A2CB-E462-173E92DADA0D}"/>
+              </a:ext>
+            </a:extLst>
+          </p:cNvPr>
+          <p:cNvSpPr>
+            <a:spLocks noGrp="1"/>
+          </p:cNvSpPr>
+          <p:nvPr>
+            <p:ph type="title"/>
+          </p:nvPr>
+        </p:nvSpPr>
+        <p:spPr/>
+        <p:txBody>
+          <a:bodyPr/>
+          <a:lstStyle/>
+          <a:p>
+            <a:r>
+              <a:rPr lang="pt-BR" dirty="0">
+                <a:solidFill>
+                  <a:srgbClr val="000000"/>
+                </a:solidFill>
+                <a:ea typeface="Calibri Light"/>
+              </a:rPr>
+              <a:t>O método </a:t>
+            </a:r>
+            <a:r>
+              <a:rPr lang="pt-BR" dirty="0" err="1">
+                <a:solidFill>
+                  <a:srgbClr val="000000"/>
+                </a:solidFill>
+                <a:ea typeface="Calibri Light"/>
+              </a:rPr>
+              <a:t>gerarToken</a:t>
+            </a:r>
+            <a:endParaRPr lang="pt-BR" dirty="0"/>
+          </a:p>
+        </p:txBody>
+      </p:sp>
+      <p:sp>
+        <p:nvSpPr>
+          <p:cNvPr id="3" name="Espaço Reservado para Conteúdo 2">
+            <a:extLst>
+              <a:ext uri="{FF2B5EF4-FFF2-40B4-BE49-F238E27FC236}">
+                <a16:creationId xmlns:a16="http://schemas.microsoft.com/office/drawing/2014/main" id="{6BF717CB-1FFB-F67B-C594-0DE83D800CC7}"/>
+              </a:ext>
+            </a:extLst>
+          </p:cNvPr>
+          <p:cNvSpPr>
+            <a:spLocks noGrp="1"/>
+          </p:cNvSpPr>
+          <p:nvPr>
+            <p:ph idx="1"/>
+          </p:nvPr>
+        </p:nvSpPr>
+        <p:spPr>
+          <a:xfrm>
+            <a:off x="592347" y="1634540"/>
+            <a:ext cx="11007306" cy="633830"/>
+          </a:xfrm>
+        </p:spPr>
+        <p:txBody>
+          <a:bodyPr/>
+          <a:lstStyle/>
+          <a:p>
+            <a:r>
+              <a:rPr lang="pt-BR" dirty="0"/>
+              <a:t>Recebe o usuário autenticado e devolve o JWT como texto.</a:t>
+            </a:r>
+          </a:p>
+          <a:p>
+            <a:endParaRPr lang="pt-BR" dirty="0"/>
+          </a:p>
+        </p:txBody>
+      </p:sp>
+      <p:sp>
+        <p:nvSpPr>
+          <p:cNvPr id="11" name="Shape 20">
+            <a:extLst>
+              <a:ext uri="{FF2B5EF4-FFF2-40B4-BE49-F238E27FC236}">
+                <a16:creationId xmlns:a16="http://schemas.microsoft.com/office/drawing/2014/main" id="{EE383B37-7310-4563-9BC8-B173B5286B0D}"/>
+              </a:ext>
+            </a:extLst>
+          </p:cNvPr>
+          <p:cNvSpPr>
+            <a:spLocks noGrp="1"/>
+          </p:cNvSpPr>
+          <p:nvPr/>
+        </p:nvSpPr>
+        <p:spPr>
+          <a:xfrm>
+            <a:off x="857250" y="2268370"/>
+            <a:ext cx="10477500" cy="3603040"/>
+          </a:xfrm>
+          <a:prstGeom prst="roundRect">
+            <a:avLst>
+              <a:gd name="adj" fmla="val 8081"/>
+            </a:avLst>
+          </a:prstGeom>
+          <a:solidFill>
+            <a:srgbClr val="1E1E1E"/>
+          </a:solidFill>
+          <a:ln>
+            <a:solidFill>
+              <a:srgbClr val="1E1E1E"/>
+            </a:solidFill>
+          </a:ln>
+        </p:spPr>
+        <p:txBody>
+          <a:bodyPr/>
+          <a:lstStyle/>
+          <a:p>
+            <a:endParaRPr/>
+          </a:p>
+        </p:txBody>
+      </p:sp>
+      <p:sp>
+        <p:nvSpPr>
+          <p:cNvPr id="4" name="Retângulo 3">
+            <a:extLst>
+              <a:ext uri="{FF2B5EF4-FFF2-40B4-BE49-F238E27FC236}">
+                <a16:creationId xmlns:a16="http://schemas.microsoft.com/office/drawing/2014/main" id="{3CE8AC7A-3364-4E97-BC2E-25CF018F1E04}"/>
+              </a:ext>
+            </a:extLst>
+          </p:cNvPr>
+          <p:cNvSpPr>
+            <a:spLocks noGrp="1"/>
+          </p:cNvSpPr>
+          <p:nvPr/>
+        </p:nvSpPr>
+        <p:spPr>
+          <a:xfrm>
+            <a:off x="1095375" y="2498265"/>
+            <a:ext cx="10001250" cy="3143250"/>
+          </a:xfrm>
+          <a:prstGeom prst="rect">
+            <a:avLst/>
+          </a:prstGeom>
+        </p:spPr>
+        <p:txBody>
+          <a:bodyPr wrap="square">
+            <a:noAutofit/>
+          </a:bodyPr>
+          <a:lstStyle/>
+          <a:p>
+            <a:pPr algn="l">
+              <a:defRPr sz="1650">
+                <a:solidFill>
+                  <a:srgbClr val="D4D4D4"/>
+                </a:solidFill>
+                <a:latin typeface="Consolas"/>
+                <a:ea typeface="Consolas"/>
+                <a:cs typeface="Consolas"/>
+              </a:defRPr>
+            </a:pPr>
+            <a:r>
+              <a:rPr sz="1650" dirty="0">
+                <a:solidFill>
+                  <a:srgbClr val="D4D4D4"/>
+                </a:solidFill>
+                <a:latin typeface="Consolas"/>
+                <a:ea typeface="Consolas"/>
+                <a:cs typeface="Consolas"/>
+              </a:rPr>
+              <a:t>public String </a:t>
+            </a:r>
+            <a:r>
+              <a:rPr sz="1650" dirty="0" err="1">
+                <a:solidFill>
+                  <a:srgbClr val="D4D4D4"/>
+                </a:solidFill>
+                <a:latin typeface="Consolas"/>
+                <a:ea typeface="Consolas"/>
+                <a:cs typeface="Consolas"/>
+              </a:rPr>
+              <a:t>gerarToken</a:t>
+            </a:r>
+            <a:r>
+              <a:rPr sz="1650" dirty="0">
+                <a:solidFill>
+                  <a:srgbClr val="D4D4D4"/>
+                </a:solidFill>
+                <a:latin typeface="Consolas"/>
+                <a:ea typeface="Consolas"/>
+                <a:cs typeface="Consolas"/>
+              </a:rPr>
+              <a:t>(Usuario usuario) {</a:t>
+            </a:r>
+          </a:p>
+          <a:p>
+            <a:pPr algn="l">
+              <a:defRPr sz="1650">
+                <a:solidFill>
+                  <a:srgbClr val="D4D4D4"/>
+                </a:solidFill>
+                <a:latin typeface="Consolas"/>
+                <a:ea typeface="Consolas"/>
+                <a:cs typeface="Consolas"/>
+              </a:defRPr>
+            </a:pPr>
+            <a:r>
+              <a:rPr sz="1650" dirty="0">
+                <a:solidFill>
+                  <a:srgbClr val="D4D4D4"/>
+                </a:solidFill>
+                <a:latin typeface="Consolas"/>
+                <a:ea typeface="Consolas"/>
+                <a:cs typeface="Consolas"/>
+              </a:rPr>
+              <a:t>    try {</a:t>
+            </a:r>
+          </a:p>
+          <a:p>
+            <a:pPr algn="l">
+              <a:defRPr sz="1650">
+                <a:solidFill>
+                  <a:srgbClr val="D4D4D4"/>
+                </a:solidFill>
+                <a:latin typeface="Consolas"/>
+                <a:ea typeface="Consolas"/>
+                <a:cs typeface="Consolas"/>
+              </a:defRPr>
+            </a:pPr>
+            <a:r>
+              <a:rPr sz="1650" dirty="0">
+                <a:solidFill>
+                  <a:srgbClr val="D4D4D4"/>
+                </a:solidFill>
+                <a:latin typeface="Consolas"/>
+                <a:ea typeface="Consolas"/>
+                <a:cs typeface="Consolas"/>
+              </a:rPr>
+              <a:t>        var </a:t>
+            </a:r>
+            <a:r>
+              <a:rPr sz="1650" dirty="0" err="1">
+                <a:solidFill>
+                  <a:srgbClr val="D4D4D4"/>
+                </a:solidFill>
+                <a:latin typeface="Consolas"/>
+                <a:ea typeface="Consolas"/>
+                <a:cs typeface="Consolas"/>
+              </a:rPr>
+              <a:t>algoritmo</a:t>
+            </a:r>
+            <a:r>
+              <a:rPr sz="1650" dirty="0">
+                <a:solidFill>
+                  <a:srgbClr val="D4D4D4"/>
+                </a:solidFill>
+                <a:latin typeface="Consolas"/>
+                <a:ea typeface="Consolas"/>
+                <a:cs typeface="Consolas"/>
+              </a:rPr>
+              <a:t> = Algorithm.HMAC256("12345678");</a:t>
+            </a:r>
+          </a:p>
+          <a:p>
+            <a:pPr algn="l">
+              <a:defRPr sz="1650">
+                <a:solidFill>
+                  <a:srgbClr val="D4D4D4"/>
+                </a:solidFill>
+                <a:latin typeface="Consolas"/>
+                <a:ea typeface="Consolas"/>
+                <a:cs typeface="Consolas"/>
+              </a:defRPr>
+            </a:pPr>
+            <a:r>
+              <a:rPr sz="1650" dirty="0">
+                <a:solidFill>
+                  <a:srgbClr val="D4D4D4"/>
+                </a:solidFill>
+                <a:latin typeface="Consolas"/>
+                <a:ea typeface="Consolas"/>
+                <a:cs typeface="Consolas"/>
+              </a:rPr>
+              <a:t>        return </a:t>
+            </a:r>
+            <a:r>
+              <a:rPr sz="1650" dirty="0" err="1">
+                <a:solidFill>
+                  <a:srgbClr val="D4D4D4"/>
+                </a:solidFill>
+                <a:latin typeface="Consolas"/>
+                <a:ea typeface="Consolas"/>
+                <a:cs typeface="Consolas"/>
+              </a:rPr>
+              <a:t>JWT.create</a:t>
+            </a:r>
+            <a:r>
+              <a:rPr sz="1650" dirty="0">
+                <a:solidFill>
+                  <a:srgbClr val="D4D4D4"/>
+                </a:solidFill>
+                <a:latin typeface="Consolas"/>
+                <a:ea typeface="Consolas"/>
+                <a:cs typeface="Consolas"/>
+              </a:rPr>
+              <a:t>()</a:t>
+            </a:r>
+          </a:p>
+          <a:p>
+            <a:pPr algn="l">
+              <a:defRPr sz="1650">
+                <a:solidFill>
+                  <a:srgbClr val="D4D4D4"/>
+                </a:solidFill>
+                <a:latin typeface="Consolas"/>
+                <a:ea typeface="Consolas"/>
+                <a:cs typeface="Consolas"/>
+              </a:defRPr>
+            </a:pPr>
+            <a:r>
+              <a:rPr sz="1650" dirty="0">
+                <a:solidFill>
+                  <a:srgbClr val="D4D4D4"/>
+                </a:solidFill>
+                <a:latin typeface="Consolas"/>
+                <a:ea typeface="Consolas"/>
+                <a:cs typeface="Consolas"/>
+              </a:rPr>
+              <a:t>                .</a:t>
+            </a:r>
+            <a:r>
+              <a:rPr sz="1650" dirty="0" err="1">
+                <a:solidFill>
+                  <a:srgbClr val="D4D4D4"/>
+                </a:solidFill>
+                <a:latin typeface="Consolas"/>
+                <a:ea typeface="Consolas"/>
+                <a:cs typeface="Consolas"/>
+              </a:rPr>
+              <a:t>withIssuer</a:t>
+            </a:r>
+            <a:r>
+              <a:rPr sz="1650" dirty="0">
+                <a:solidFill>
+                  <a:srgbClr val="D4D4D4"/>
+                </a:solidFill>
+                <a:latin typeface="Consolas"/>
+                <a:ea typeface="Consolas"/>
+                <a:cs typeface="Consolas"/>
+              </a:rPr>
+              <a:t>("API </a:t>
+            </a:r>
+            <a:r>
+              <a:rPr sz="1650" dirty="0" err="1">
+                <a:solidFill>
+                  <a:srgbClr val="D4D4D4"/>
+                </a:solidFill>
+                <a:latin typeface="Consolas"/>
+                <a:ea typeface="Consolas"/>
+                <a:cs typeface="Consolas"/>
+              </a:rPr>
+              <a:t>Dentista</a:t>
+            </a:r>
+            <a:r>
+              <a:rPr sz="1650" dirty="0">
+                <a:solidFill>
+                  <a:srgbClr val="D4D4D4"/>
+                </a:solidFill>
+                <a:latin typeface="Consolas"/>
+                <a:ea typeface="Consolas"/>
+                <a:cs typeface="Consolas"/>
+              </a:rPr>
+              <a:t>")</a:t>
+            </a:r>
+          </a:p>
+          <a:p>
+            <a:pPr algn="l">
+              <a:defRPr sz="1650">
+                <a:solidFill>
+                  <a:srgbClr val="D4D4D4"/>
+                </a:solidFill>
+                <a:latin typeface="Consolas"/>
+                <a:ea typeface="Consolas"/>
+                <a:cs typeface="Consolas"/>
+              </a:defRPr>
+            </a:pPr>
+            <a:r>
+              <a:rPr sz="1650" dirty="0">
+                <a:solidFill>
+                  <a:srgbClr val="D4D4D4"/>
+                </a:solidFill>
+                <a:latin typeface="Consolas"/>
+                <a:ea typeface="Consolas"/>
+                <a:cs typeface="Consolas"/>
+              </a:rPr>
+              <a:t>                .</a:t>
+            </a:r>
+            <a:r>
+              <a:rPr sz="1650" dirty="0" err="1">
+                <a:solidFill>
+                  <a:srgbClr val="D4D4D4"/>
+                </a:solidFill>
+                <a:latin typeface="Consolas"/>
+                <a:ea typeface="Consolas"/>
+                <a:cs typeface="Consolas"/>
+              </a:rPr>
+              <a:t>withSubject</a:t>
+            </a:r>
+            <a:r>
+              <a:rPr sz="1650" dirty="0">
+                <a:solidFill>
+                  <a:srgbClr val="D4D4D4"/>
+                </a:solidFill>
+                <a:latin typeface="Consolas"/>
+                <a:ea typeface="Consolas"/>
+                <a:cs typeface="Consolas"/>
+              </a:rPr>
+              <a:t>(</a:t>
+            </a:r>
+            <a:r>
+              <a:rPr sz="1650" dirty="0" err="1">
+                <a:solidFill>
+                  <a:srgbClr val="D4D4D4"/>
+                </a:solidFill>
+                <a:latin typeface="Consolas"/>
+                <a:ea typeface="Consolas"/>
+                <a:cs typeface="Consolas"/>
+              </a:rPr>
+              <a:t>usuario.getLogin</a:t>
+            </a:r>
+            <a:r>
+              <a:rPr sz="1650" dirty="0">
+                <a:solidFill>
+                  <a:srgbClr val="D4D4D4"/>
+                </a:solidFill>
+                <a:latin typeface="Consolas"/>
+                <a:ea typeface="Consolas"/>
+                <a:cs typeface="Consolas"/>
+              </a:rPr>
+              <a:t>())</a:t>
+            </a:r>
+          </a:p>
+          <a:p>
+            <a:pPr algn="l">
+              <a:defRPr sz="1650">
+                <a:solidFill>
+                  <a:srgbClr val="D4D4D4"/>
+                </a:solidFill>
+                <a:latin typeface="Consolas"/>
+                <a:ea typeface="Consolas"/>
+                <a:cs typeface="Consolas"/>
+              </a:defRPr>
+            </a:pPr>
+            <a:r>
+              <a:rPr sz="1650" dirty="0">
+                <a:solidFill>
+                  <a:srgbClr val="D4D4D4"/>
+                </a:solidFill>
+                <a:latin typeface="Consolas"/>
+                <a:ea typeface="Consolas"/>
+                <a:cs typeface="Consolas"/>
+              </a:rPr>
+              <a:t>                .</a:t>
+            </a:r>
+            <a:r>
+              <a:rPr sz="1650" dirty="0" err="1">
+                <a:solidFill>
+                  <a:srgbClr val="D4D4D4"/>
+                </a:solidFill>
+                <a:latin typeface="Consolas"/>
+                <a:ea typeface="Consolas"/>
+                <a:cs typeface="Consolas"/>
+              </a:rPr>
+              <a:t>withExpiresAt</a:t>
+            </a:r>
+            <a:r>
+              <a:rPr sz="1650" dirty="0">
+                <a:solidFill>
+                  <a:srgbClr val="D4D4D4"/>
+                </a:solidFill>
+                <a:latin typeface="Consolas"/>
+                <a:ea typeface="Consolas"/>
+                <a:cs typeface="Consolas"/>
+              </a:rPr>
+              <a:t>(</a:t>
+            </a:r>
+            <a:r>
+              <a:rPr sz="1650" dirty="0" err="1">
+                <a:solidFill>
+                  <a:srgbClr val="D4D4D4"/>
+                </a:solidFill>
+                <a:latin typeface="Consolas"/>
+                <a:ea typeface="Consolas"/>
+                <a:cs typeface="Consolas"/>
+              </a:rPr>
+              <a:t>dataExpiracao</a:t>
+            </a:r>
+            <a:r>
+              <a:rPr sz="1650" dirty="0">
+                <a:solidFill>
+                  <a:srgbClr val="D4D4D4"/>
+                </a:solidFill>
+                <a:latin typeface="Consolas"/>
+                <a:ea typeface="Consolas"/>
+                <a:cs typeface="Consolas"/>
+              </a:rPr>
+              <a:t>())</a:t>
+            </a:r>
+          </a:p>
+          <a:p>
+            <a:pPr algn="l">
+              <a:defRPr sz="1650">
+                <a:solidFill>
+                  <a:srgbClr val="D4D4D4"/>
+                </a:solidFill>
+                <a:latin typeface="Consolas"/>
+                <a:ea typeface="Consolas"/>
+                <a:cs typeface="Consolas"/>
+              </a:defRPr>
+            </a:pPr>
+            <a:r>
+              <a:rPr sz="1650" dirty="0">
+                <a:solidFill>
+                  <a:srgbClr val="D4D4D4"/>
+                </a:solidFill>
+                <a:latin typeface="Consolas"/>
+                <a:ea typeface="Consolas"/>
+                <a:cs typeface="Consolas"/>
+              </a:rPr>
+              <a:t>                .sign(</a:t>
+            </a:r>
+            <a:r>
+              <a:rPr sz="1650" dirty="0" err="1">
+                <a:solidFill>
+                  <a:srgbClr val="D4D4D4"/>
+                </a:solidFill>
+                <a:latin typeface="Consolas"/>
+                <a:ea typeface="Consolas"/>
+                <a:cs typeface="Consolas"/>
+              </a:rPr>
+              <a:t>algoritmo</a:t>
+            </a:r>
+            <a:r>
+              <a:rPr sz="1650" dirty="0">
+                <a:solidFill>
+                  <a:srgbClr val="D4D4D4"/>
+                </a:solidFill>
+                <a:latin typeface="Consolas"/>
+                <a:ea typeface="Consolas"/>
+                <a:cs typeface="Consolas"/>
+              </a:rPr>
+              <a:t>);</a:t>
+            </a:r>
+          </a:p>
+          <a:p>
+            <a:pPr algn="l">
+              <a:defRPr sz="1650">
+                <a:solidFill>
+                  <a:srgbClr val="D4D4D4"/>
+                </a:solidFill>
+                <a:latin typeface="Consolas"/>
+                <a:ea typeface="Consolas"/>
+                <a:cs typeface="Consolas"/>
+              </a:defRPr>
+            </a:pPr>
+            <a:r>
+              <a:rPr sz="1650" dirty="0">
+                <a:solidFill>
+                  <a:srgbClr val="D4D4D4"/>
+                </a:solidFill>
+                <a:latin typeface="Consolas"/>
+                <a:ea typeface="Consolas"/>
+                <a:cs typeface="Consolas"/>
+              </a:rPr>
+              <a:t>    } catch (</a:t>
+            </a:r>
+            <a:r>
+              <a:rPr sz="1650" dirty="0" err="1">
+                <a:solidFill>
+                  <a:srgbClr val="D4D4D4"/>
+                </a:solidFill>
+                <a:latin typeface="Consolas"/>
+                <a:ea typeface="Consolas"/>
+                <a:cs typeface="Consolas"/>
+              </a:rPr>
+              <a:t>JWTCreationException</a:t>
+            </a:r>
+            <a:r>
+              <a:rPr sz="1650" dirty="0">
+                <a:solidFill>
+                  <a:srgbClr val="D4D4D4"/>
+                </a:solidFill>
+                <a:latin typeface="Consolas"/>
+                <a:ea typeface="Consolas"/>
+                <a:cs typeface="Consolas"/>
+              </a:rPr>
+              <a:t> exception) {</a:t>
+            </a:r>
+          </a:p>
+          <a:p>
+            <a:pPr algn="l">
+              <a:defRPr sz="1650">
+                <a:solidFill>
+                  <a:srgbClr val="D4D4D4"/>
+                </a:solidFill>
+                <a:latin typeface="Consolas"/>
+                <a:ea typeface="Consolas"/>
+                <a:cs typeface="Consolas"/>
+              </a:defRPr>
+            </a:pPr>
+            <a:r>
+              <a:rPr sz="1650" dirty="0">
+                <a:solidFill>
+                  <a:srgbClr val="D4D4D4"/>
+                </a:solidFill>
+                <a:latin typeface="Consolas"/>
+                <a:ea typeface="Consolas"/>
+                <a:cs typeface="Consolas"/>
+              </a:rPr>
+              <a:t>        throw new </a:t>
+            </a:r>
+            <a:r>
+              <a:rPr sz="1650" dirty="0" err="1">
+                <a:solidFill>
+                  <a:srgbClr val="D4D4D4"/>
+                </a:solidFill>
+                <a:latin typeface="Consolas"/>
+                <a:ea typeface="Consolas"/>
+                <a:cs typeface="Consolas"/>
+              </a:rPr>
+              <a:t>RuntimeException</a:t>
+            </a:r>
+            <a:r>
+              <a:rPr sz="1650" dirty="0">
+                <a:solidFill>
+                  <a:srgbClr val="D4D4D4"/>
+                </a:solidFill>
+                <a:latin typeface="Consolas"/>
+                <a:ea typeface="Consolas"/>
+                <a:cs typeface="Consolas"/>
+              </a:rPr>
+              <a:t>("Erro </a:t>
+            </a:r>
+            <a:r>
+              <a:rPr sz="1650" dirty="0" err="1">
+                <a:solidFill>
+                  <a:srgbClr val="D4D4D4"/>
+                </a:solidFill>
+                <a:latin typeface="Consolas"/>
+                <a:ea typeface="Consolas"/>
+                <a:cs typeface="Consolas"/>
+              </a:rPr>
+              <a:t>ao</a:t>
+            </a:r>
+            <a:r>
+              <a:rPr sz="1650" dirty="0">
+                <a:solidFill>
+                  <a:srgbClr val="D4D4D4"/>
+                </a:solidFill>
+                <a:latin typeface="Consolas"/>
+                <a:ea typeface="Consolas"/>
+                <a:cs typeface="Consolas"/>
+              </a:rPr>
+              <a:t> </a:t>
+            </a:r>
+            <a:r>
+              <a:rPr sz="1650" dirty="0" err="1">
+                <a:solidFill>
+                  <a:srgbClr val="D4D4D4"/>
+                </a:solidFill>
+                <a:latin typeface="Consolas"/>
+                <a:ea typeface="Consolas"/>
+                <a:cs typeface="Consolas"/>
+              </a:rPr>
+              <a:t>gerar</a:t>
+            </a:r>
+            <a:r>
+              <a:rPr sz="1650" dirty="0">
+                <a:solidFill>
+                  <a:srgbClr val="D4D4D4"/>
+                </a:solidFill>
+                <a:latin typeface="Consolas"/>
+                <a:ea typeface="Consolas"/>
+                <a:cs typeface="Consolas"/>
+              </a:rPr>
+              <a:t> o token", exception);</a:t>
+            </a:r>
+          </a:p>
+          <a:p>
+            <a:pPr algn="l">
+              <a:defRPr sz="1650">
+                <a:solidFill>
+                  <a:srgbClr val="D4D4D4"/>
+                </a:solidFill>
+                <a:latin typeface="Consolas"/>
+                <a:ea typeface="Consolas"/>
+                <a:cs typeface="Consolas"/>
+              </a:defRPr>
+            </a:pPr>
+            <a:r>
+              <a:rPr sz="1650" dirty="0">
+                <a:solidFill>
+                  <a:srgbClr val="D4D4D4"/>
+                </a:solidFill>
+                <a:latin typeface="Consolas"/>
+                <a:ea typeface="Consolas"/>
+                <a:cs typeface="Consolas"/>
+              </a:rPr>
+              <a:t>    }</a:t>
+            </a:r>
+          </a:p>
+          <a:p>
+            <a:pPr algn="l">
+              <a:defRPr sz="1650">
+                <a:solidFill>
+                  <a:srgbClr val="D4D4D4"/>
+                </a:solidFill>
+                <a:latin typeface="Consolas"/>
+                <a:ea typeface="Consolas"/>
+                <a:cs typeface="Consolas"/>
+              </a:defRPr>
+            </a:pPr>
+            <a:r>
+              <a:rPr sz="1650" dirty="0">
+                <a:solidFill>
+                  <a:srgbClr val="D4D4D4"/>
+                </a:solidFill>
+                <a:latin typeface="Consolas"/>
+                <a:ea typeface="Consolas"/>
+                <a:cs typeface="Consolas"/>
+              </a:rPr>
+              <a:t>}</a:t>
+            </a:r>
+            <a:endParaRPr sz="1400" b="0" dirty="0">
+              <a:solidFill>
+                <a:srgbClr val="D4D4D4"/>
+              </a:solidFill>
+              <a:latin typeface="Consolas"/>
+              <a:ea typeface="Consolas"/>
+              <a:cs typeface="Consolas"/>
+            </a:endParaRPr>
+          </a:p>
+        </p:txBody>
+      </p:sp>
+      <p:sp>
+        <p:nvSpPr>
+          <p:cNvPr id="6" name="CaixaDeTexto 5">
+            <a:extLst>
+              <a:ext uri="{FF2B5EF4-FFF2-40B4-BE49-F238E27FC236}">
+                <a16:creationId xmlns:a16="http://schemas.microsoft.com/office/drawing/2014/main" id="{B0C7FB90-4681-B1A0-3A2A-86C35AAB7B23}"/>
+              </a:ext>
+            </a:extLst>
+          </p:cNvPr>
+          <p:cNvSpPr txBox="1"/>
+          <p:nvPr/>
+        </p:nvSpPr>
+        <p:spPr>
+          <a:xfrm>
+            <a:off x="592347" y="6147955"/>
+            <a:ext cx="6112042" cy="369332"/>
+          </a:xfrm>
+          <a:prstGeom prst="rect">
+            <a:avLst/>
+          </a:prstGeom>
+          <a:noFill/>
+        </p:spPr>
+        <p:txBody>
+          <a:bodyPr wrap="square">
+            <a:spAutoFit/>
+          </a:bodyPr>
+          <a:lstStyle/>
+          <a:p>
+            <a:pPr algn="l">
+              <a:defRPr sz="1800">
+                <a:solidFill>
+                  <a:srgbClr val="000000"/>
+                </a:solidFill>
+                <a:latin typeface="Calibri"/>
+                <a:ea typeface="Calibri"/>
+                <a:cs typeface="Calibri"/>
+              </a:defRPr>
+            </a:pPr>
+            <a:r>
+              <a:rPr lang="pt-BR" sz="1800" dirty="0">
+                <a:solidFill>
+                  <a:srgbClr val="000000"/>
+                </a:solidFill>
+                <a:latin typeface="Times New Roman" panose="02020603050405020304" pitchFamily="18" charset="0"/>
+                <a:ea typeface="Calibri"/>
+                <a:cs typeface="Times New Roman" panose="02020603050405020304" pitchFamily="18" charset="0"/>
+              </a:rPr>
+              <a:t>Visão geral: configurar, preencher as informações e assinar.</a:t>
+            </a:r>
+          </a:p>
+        </p:txBody>
+      </p:sp>
+    </p:spTree>
+    <p:extLst>
+      <p:ext uri="{BB962C8B-B14F-4D97-AF65-F5344CB8AC3E}">
+        <p14:creationId xmlns:p14="http://schemas.microsoft.com/office/powerpoint/2010/main" val="4152361628"/>
+      </p:ext>
+    </p:extLst>
+  </p:cSld>
+  <p:clrMapOvr>
+    <a:masterClrMapping/>
+  </p:clrMapOvr>
+</p:sld>
+</file>
+
+<file path=ppt/slides/slide8.xml><?xml version="1.0" encoding="utf-8"?>
+<p:sld xmlns:a="http://schemas.openxmlformats.org/drawingml/2006/main" xmlns:r="http://schemas.openxmlformats.org/officeDocument/2006/relationships" xmlns:p="http://schemas.openxmlformats.org/presentationml/2006/main">
+  <p:cSld>
+    <p:spTree>
+      <p:nvGrpSpPr>
+        <p:cNvPr id="1" name=""/>
+        <p:cNvGrpSpPr/>
+        <p:nvPr/>
+      </p:nvGrpSpPr>
+      <p:grpSpPr>
+        <a:xfrm>
+          <a:off x="0" y="0"/>
+          <a:ext cx="0" cy="0"/>
+          <a:chOff x="0" y="0"/>
+          <a:chExt cx="0" cy="0"/>
+        </a:xfrm>
+      </p:grpSpPr>
+      <p:sp>
+        <p:nvSpPr>
+          <p:cNvPr id="2" name="Título 1">
+            <a:extLst>
+              <a:ext uri="{FF2B5EF4-FFF2-40B4-BE49-F238E27FC236}">
+                <a16:creationId xmlns:a16="http://schemas.microsoft.com/office/drawing/2014/main" id="{9F21BCB6-ABC5-FFF3-ABBA-068DA6F83378}"/>
+              </a:ext>
+            </a:extLst>
+          </p:cNvPr>
+          <p:cNvSpPr>
+            <a:spLocks noGrp="1"/>
+          </p:cNvSpPr>
+          <p:nvPr>
+            <p:ph type="title"/>
+          </p:nvPr>
+        </p:nvSpPr>
+        <p:spPr/>
+        <p:txBody>
+          <a:bodyPr/>
+          <a:lstStyle/>
+          <a:p>
+            <a:r>
+              <a:rPr lang="pt-BR" dirty="0"/>
+              <a:t>Entrada e retorno do método</a:t>
+            </a:r>
+          </a:p>
+        </p:txBody>
+      </p:sp>
+      <p:sp>
+        <p:nvSpPr>
+          <p:cNvPr id="3" name="Espaço Reservado para Conteúdo 2">
+            <a:extLst>
+              <a:ext uri="{FF2B5EF4-FFF2-40B4-BE49-F238E27FC236}">
+                <a16:creationId xmlns:a16="http://schemas.microsoft.com/office/drawing/2014/main" id="{5E2F937E-4CCE-8FBC-AF07-8E087A74A18D}"/>
+              </a:ext>
+            </a:extLst>
+          </p:cNvPr>
+          <p:cNvSpPr>
+            <a:spLocks noGrp="1"/>
+          </p:cNvSpPr>
+          <p:nvPr>
+            <p:ph idx="1"/>
+          </p:nvPr>
+        </p:nvSpPr>
+        <p:spPr>
+          <a:xfrm>
+            <a:off x="592347" y="1844675"/>
+            <a:ext cx="11007306" cy="818314"/>
+          </a:xfrm>
+        </p:spPr>
+        <p:txBody>
+          <a:bodyPr/>
+          <a:lstStyle/>
+          <a:p>
+            <a:r>
+              <a:rPr lang="pt-BR" dirty="0"/>
+              <a:t>O parâmetro usuario fornece os dados de quem acabou de fazer login.</a:t>
+            </a:r>
+          </a:p>
+        </p:txBody>
+      </p:sp>
+      <p:sp>
+        <p:nvSpPr>
+          <p:cNvPr id="11" name="Shape 20">
+            <a:extLst>
+              <a:ext uri="{FF2B5EF4-FFF2-40B4-BE49-F238E27FC236}">
+                <a16:creationId xmlns:a16="http://schemas.microsoft.com/office/drawing/2014/main" id="{EE383B37-7310-4563-9BC8-B173B5286B0D}"/>
+              </a:ext>
+            </a:extLst>
+          </p:cNvPr>
+          <p:cNvSpPr>
+            <a:spLocks noGrp="1"/>
+          </p:cNvSpPr>
+          <p:nvPr/>
+        </p:nvSpPr>
+        <p:spPr>
+          <a:xfrm>
+            <a:off x="2120294" y="2994862"/>
+            <a:ext cx="7951412" cy="1200150"/>
+          </a:xfrm>
+          <a:prstGeom prst="roundRect">
+            <a:avLst>
+              <a:gd name="adj" fmla="val 8081"/>
+            </a:avLst>
+          </a:prstGeom>
+          <a:solidFill>
+            <a:srgbClr val="1E1E1E"/>
+          </a:solidFill>
+          <a:ln>
+            <a:solidFill>
+              <a:srgbClr val="1E1E1E"/>
+            </a:solidFill>
+          </a:ln>
+        </p:spPr>
+        <p:txBody>
+          <a:bodyPr/>
+          <a:lstStyle/>
+          <a:p>
+            <a:endParaRPr/>
+          </a:p>
+        </p:txBody>
+      </p:sp>
+      <p:sp>
+        <p:nvSpPr>
+          <p:cNvPr id="4" name="Retângulo 3">
+            <a:extLst>
+              <a:ext uri="{FF2B5EF4-FFF2-40B4-BE49-F238E27FC236}">
+                <a16:creationId xmlns:a16="http://schemas.microsoft.com/office/drawing/2014/main" id="{3CE8AC7A-3364-4E97-BC2E-25CF018F1E04}"/>
+              </a:ext>
+            </a:extLst>
+          </p:cNvPr>
+          <p:cNvSpPr>
+            <a:spLocks noGrp="1"/>
+          </p:cNvSpPr>
+          <p:nvPr/>
+        </p:nvSpPr>
+        <p:spPr>
+          <a:xfrm>
+            <a:off x="2777290" y="3370527"/>
+            <a:ext cx="6637421" cy="436117"/>
+          </a:xfrm>
+          <a:prstGeom prst="rect">
+            <a:avLst/>
+          </a:prstGeom>
+        </p:spPr>
+        <p:txBody>
+          <a:bodyPr wrap="square">
+            <a:noAutofit/>
+          </a:bodyPr>
+          <a:lstStyle/>
+          <a:p>
+            <a:pPr algn="l">
+              <a:defRPr sz="2250">
+                <a:solidFill>
+                  <a:srgbClr val="D4D4D4"/>
+                </a:solidFill>
+                <a:latin typeface="Consolas"/>
+                <a:ea typeface="Consolas"/>
+                <a:cs typeface="Consolas"/>
+              </a:defRPr>
+            </a:pPr>
+            <a:r>
+              <a:rPr sz="2250" dirty="0">
+                <a:solidFill>
+                  <a:srgbClr val="D4D4D4"/>
+                </a:solidFill>
+                <a:latin typeface="Consolas"/>
+                <a:ea typeface="Consolas"/>
+                <a:cs typeface="Consolas"/>
+              </a:rPr>
+              <a:t>public String </a:t>
+            </a:r>
+            <a:r>
+              <a:rPr sz="2250" dirty="0" err="1">
+                <a:solidFill>
+                  <a:srgbClr val="D4D4D4"/>
+                </a:solidFill>
+                <a:latin typeface="Consolas"/>
+                <a:ea typeface="Consolas"/>
+                <a:cs typeface="Consolas"/>
+              </a:rPr>
+              <a:t>gerarToken</a:t>
+            </a:r>
+            <a:r>
+              <a:rPr sz="2250" dirty="0">
+                <a:solidFill>
+                  <a:srgbClr val="D4D4D4"/>
+                </a:solidFill>
+                <a:latin typeface="Consolas"/>
+                <a:ea typeface="Consolas"/>
+                <a:cs typeface="Consolas"/>
+              </a:rPr>
+              <a:t>(Usuario usuario)</a:t>
+            </a:r>
+          </a:p>
+        </p:txBody>
+      </p:sp>
+      <p:sp>
+        <p:nvSpPr>
+          <p:cNvPr id="6" name="CaixaDeTexto 5">
+            <a:extLst>
+              <a:ext uri="{FF2B5EF4-FFF2-40B4-BE49-F238E27FC236}">
+                <a16:creationId xmlns:a16="http://schemas.microsoft.com/office/drawing/2014/main" id="{FAC7D119-8438-9E7D-368E-5849E4072D73}"/>
+              </a:ext>
+            </a:extLst>
+          </p:cNvPr>
+          <p:cNvSpPr txBox="1"/>
+          <p:nvPr/>
+        </p:nvSpPr>
+        <p:spPr>
+          <a:xfrm>
+            <a:off x="592347" y="4998804"/>
+            <a:ext cx="6112042" cy="873572"/>
+          </a:xfrm>
+          <a:prstGeom prst="rect">
+            <a:avLst/>
+          </a:prstGeom>
+          <a:noFill/>
+        </p:spPr>
+        <p:txBody>
+          <a:bodyPr wrap="square">
+            <a:spAutoFit/>
+          </a:bodyPr>
+          <a:lstStyle/>
+          <a:p>
+            <a:pPr algn="l">
+              <a:lnSpc>
+                <a:spcPct val="150000"/>
+              </a:lnSpc>
+              <a:defRPr sz="2100">
+                <a:solidFill>
+                  <a:srgbClr val="000000"/>
+                </a:solidFill>
+                <a:latin typeface="Calibri"/>
+                <a:ea typeface="Calibri"/>
+                <a:cs typeface="Calibri"/>
+              </a:defRPr>
+            </a:pPr>
+            <a:r>
+              <a:rPr lang="pt-BR" sz="1800" dirty="0">
+                <a:solidFill>
+                  <a:srgbClr val="000000"/>
+                </a:solidFill>
+                <a:latin typeface="Times New Roman" panose="02020603050405020304" pitchFamily="18" charset="0"/>
+                <a:ea typeface="Calibri"/>
+                <a:cs typeface="Times New Roman" panose="02020603050405020304" pitchFamily="18" charset="0"/>
+              </a:rPr>
+              <a:t>Usuario </a:t>
+            </a:r>
+            <a:r>
+              <a:rPr lang="pt-BR" sz="1800" dirty="0" err="1">
+                <a:solidFill>
+                  <a:srgbClr val="000000"/>
+                </a:solidFill>
+                <a:latin typeface="Times New Roman" panose="02020603050405020304" pitchFamily="18" charset="0"/>
+                <a:ea typeface="Calibri"/>
+                <a:cs typeface="Times New Roman" panose="02020603050405020304" pitchFamily="18" charset="0"/>
+              </a:rPr>
+              <a:t>usuario</a:t>
+            </a:r>
+            <a:r>
+              <a:rPr lang="pt-BR" sz="1800" dirty="0">
+                <a:solidFill>
+                  <a:srgbClr val="000000"/>
+                </a:solidFill>
+                <a:latin typeface="Times New Roman" panose="02020603050405020304" pitchFamily="18" charset="0"/>
+                <a:ea typeface="Calibri"/>
+                <a:cs typeface="Times New Roman" panose="02020603050405020304" pitchFamily="18" charset="0"/>
+              </a:rPr>
+              <a:t>: objeto recebido.</a:t>
+            </a:r>
+          </a:p>
+          <a:p>
+            <a:pPr algn="l">
+              <a:lnSpc>
+                <a:spcPct val="150000"/>
+              </a:lnSpc>
+              <a:defRPr sz="2100">
+                <a:solidFill>
+                  <a:srgbClr val="000000"/>
+                </a:solidFill>
+                <a:latin typeface="Calibri"/>
+                <a:ea typeface="Calibri"/>
+                <a:cs typeface="Calibri"/>
+              </a:defRPr>
+            </a:pPr>
+            <a:r>
+              <a:rPr lang="pt-BR" sz="1800" dirty="0" err="1">
+                <a:solidFill>
+                  <a:srgbClr val="000000"/>
+                </a:solidFill>
+                <a:latin typeface="Times New Roman" panose="02020603050405020304" pitchFamily="18" charset="0"/>
+                <a:ea typeface="Calibri"/>
+                <a:cs typeface="Times New Roman" panose="02020603050405020304" pitchFamily="18" charset="0"/>
+              </a:rPr>
+              <a:t>String</a:t>
+            </a:r>
+            <a:r>
+              <a:rPr lang="pt-BR" sz="1800" dirty="0">
+                <a:solidFill>
+                  <a:srgbClr val="000000"/>
+                </a:solidFill>
+                <a:latin typeface="Times New Roman" panose="02020603050405020304" pitchFamily="18" charset="0"/>
+                <a:ea typeface="Calibri"/>
+                <a:cs typeface="Times New Roman" panose="02020603050405020304" pitchFamily="18" charset="0"/>
+              </a:rPr>
+              <a:t>: tipo do token devolvido pelo método</a:t>
+            </a:r>
+            <a:endParaRPr lang="pt-BR" dirty="0">
+              <a:latin typeface="Times New Roman" panose="02020603050405020304" pitchFamily="18" charset="0"/>
+              <a:cs typeface="Times New Roman" panose="02020603050405020304" pitchFamily="18" charset="0"/>
+            </a:endParaRPr>
+          </a:p>
+        </p:txBody>
+      </p:sp>
+    </p:spTree>
+    <p:extLst>
+      <p:ext uri="{BB962C8B-B14F-4D97-AF65-F5344CB8AC3E}">
+        <p14:creationId xmlns:p14="http://schemas.microsoft.com/office/powerpoint/2010/main" val="884196848"/>
+      </p:ext>
+    </p:extLst>
+  </p:cSld>
+  <p:clrMapOvr>
+    <a:masterClrMapping/>
+  </p:clrMapOvr>
+</p:sld>
+</file>
+
+<file path=ppt/slides/slide9.xml><?xml version="1.0" encoding="utf-8"?>
+<p:sld xmlns:a="http://schemas.openxmlformats.org/drawingml/2006/main" xmlns:r="http://schemas.openxmlformats.org/officeDocument/2006/relationships" xmlns:p="http://schemas.openxmlformats.org/presentationml/2006/main">
+  <p:cSld>
+    <p:spTree>
+      <p:nvGrpSpPr>
+        <p:cNvPr id="1" name=""/>
+        <p:cNvGrpSpPr/>
+        <p:nvPr/>
+      </p:nvGrpSpPr>
+      <p:grpSpPr>
+        <a:xfrm>
+          <a:off x="0" y="0"/>
+          <a:ext cx="0" cy="0"/>
+          <a:chOff x="0" y="0"/>
+          <a:chExt cx="0" cy="0"/>
+        </a:xfrm>
+      </p:grpSpPr>
+      <p:sp>
+        <p:nvSpPr>
+          <p:cNvPr id="2" name="Título 1">
+            <a:extLst>
+              <a:ext uri="{FF2B5EF4-FFF2-40B4-BE49-F238E27FC236}">
+                <a16:creationId xmlns:a16="http://schemas.microsoft.com/office/drawing/2014/main" id="{8738858E-69E2-8A32-4D8D-61A4750C2960}"/>
+              </a:ext>
+            </a:extLst>
+          </p:cNvPr>
+          <p:cNvSpPr>
+            <a:spLocks noGrp="1"/>
+          </p:cNvSpPr>
+          <p:nvPr>
+            <p:ph type="title"/>
+          </p:nvPr>
+        </p:nvSpPr>
+        <p:spPr/>
+        <p:txBody>
+          <a:bodyPr>
+            <a:noAutofit/>
+          </a:bodyPr>
+          <a:lstStyle/>
+          <a:p>
+            <a:pPr>
+              <a:defRPr sz="3000">
+                <a:solidFill>
+                  <a:srgbClr val="000000"/>
+                </a:solidFill>
+                <a:latin typeface="Calibri Light"/>
+                <a:ea typeface="Calibri Light"/>
+                <a:cs typeface="Calibri Light"/>
+              </a:defRPr>
+            </a:pPr>
+            <a:r>
+              <a:rPr sz="3000">
+                <a:solidFill>
+                  <a:srgbClr val="000000"/>
+                </a:solidFill>
+                <a:latin typeface="Calibri Light"/>
+                <a:ea typeface="Calibri Light"/>
+                <a:cs typeface="Calibri Light"/>
+              </a:rPr>
+              <a:t>Algoritmo e chave secreta</a:t>
+            </a:r>
+          </a:p>
+        </p:txBody>
+      </p:sp>
+      <p:sp>
+        <p:nvSpPr>
+          <p:cNvPr id="6" name="Espaço Reservado para Conteúdo 5">
+            <a:extLst>
+              <a:ext uri="{FF2B5EF4-FFF2-40B4-BE49-F238E27FC236}">
+                <a16:creationId xmlns:a16="http://schemas.microsoft.com/office/drawing/2014/main" id="{B24F9431-18D8-4DC9-B9CC-1BCF1A71C18D}"/>
+              </a:ext>
+            </a:extLst>
+          </p:cNvPr>
+          <p:cNvSpPr>
+            <a:spLocks noGrp="1"/>
+          </p:cNvSpPr>
+          <p:nvPr/>
+        </p:nvSpPr>
+        <p:spPr>
+          <a:xfrm>
+            <a:off x="685800" y="1809750"/>
+            <a:ext cx="10820400" cy="809625"/>
+          </a:xfrm>
+          <a:prstGeom prst="rect">
+            <a:avLst/>
+          </a:prstGeom>
+        </p:spPr>
+        <p:txBody>
+          <a:bodyPr>
+            <a:noAutofit/>
+          </a:bodyPr>
+          <a:lstStyle>
+            <a:lvl1pPr marL="0" indent="0" algn="just" defTabSz="914400">
+              <a:lnSpc>
+                <a:spcPct val="150000"/>
+              </a:lnSpc>
+              <a:spcBef>
+                <a:spcPts val="0"/>
+              </a:spcBef>
+              <a:buFont typeface="Arial"/>
+              <a:buNone/>
+              <a:defRPr sz="2000" kern="1200">
+                <a:solidFill>
+                  <a:schemeClr val="tx1"/>
+                </a:solidFill>
+                <a:latin typeface="Times New Roman"/>
+                <a:ea typeface="Times New Roman"/>
+                <a:cs typeface="Times New Roman"/>
+              </a:defRPr>
+            </a:lvl1pPr>
+            <a:lvl2pPr marL="457200" indent="0" algn="just" defTabSz="914400">
+              <a:lnSpc>
+                <a:spcPct val="150000"/>
+              </a:lnSpc>
+              <a:spcBef>
+                <a:spcPts val="0"/>
+              </a:spcBef>
+              <a:buFont typeface="Arial"/>
+              <a:buNone/>
+              <a:defRPr sz="1600" kern="1200">
+                <a:solidFill>
+                  <a:schemeClr val="tx1"/>
+                </a:solidFill>
+                <a:latin typeface="Times New Roman"/>
+                <a:ea typeface="Times New Roman"/>
+                <a:cs typeface="Times New Roman"/>
+              </a:defRPr>
+            </a:lvl2pPr>
+            <a:lvl3pPr marL="914400" indent="0" algn="just" defTabSz="914400">
+              <a:lnSpc>
+                <a:spcPct val="150000"/>
+              </a:lnSpc>
+              <a:spcBef>
+                <a:spcPts val="0"/>
+              </a:spcBef>
+              <a:buFont typeface="Arial"/>
+              <a:buNone/>
+              <a:defRPr sz="1400" kern="1200">
+                <a:solidFill>
+                  <a:schemeClr val="tx1"/>
+                </a:solidFill>
+                <a:latin typeface="Times New Roman"/>
+                <a:ea typeface="Times New Roman"/>
+                <a:cs typeface="Times New Roman"/>
+              </a:defRPr>
+            </a:lvl3pPr>
+            <a:lvl4pPr marL="1371600" indent="0" algn="just" defTabSz="914400">
+              <a:lnSpc>
+                <a:spcPct val="150000"/>
+              </a:lnSpc>
+              <a:spcBef>
+                <a:spcPts val="0"/>
+              </a:spcBef>
+              <a:buFont typeface="Arial"/>
+              <a:buNone/>
+              <a:defRPr sz="1200" kern="1200">
+                <a:solidFill>
+                  <a:schemeClr val="tx1"/>
+                </a:solidFill>
+                <a:latin typeface="Times New Roman"/>
+                <a:ea typeface="Times New Roman"/>
+                <a:cs typeface="Times New Roman"/>
+              </a:defRPr>
+            </a:lvl4pPr>
+            <a:lvl5pPr marL="1828800" indent="0" algn="just" defTabSz="914400">
+              <a:lnSpc>
+                <a:spcPct val="150000"/>
+              </a:lnSpc>
+              <a:spcBef>
+                <a:spcPts val="0"/>
+              </a:spcBef>
+              <a:buFont typeface="Arial"/>
+              <a:buNone/>
+              <a:defRPr sz="1000" kern="1200">
+                <a:solidFill>
+                  <a:schemeClr val="tx1"/>
+                </a:solidFill>
+                <a:latin typeface="Times New Roman"/>
+                <a:ea typeface="Times New Roman"/>
+                <a:cs typeface="Times New Roman"/>
+              </a:defRPr>
+            </a:lvl5pPr>
+            <a:lvl6pPr marL="2514600" indent="-228600" algn="l" defTabSz="914400">
+              <a:lnSpc>
+                <a:spcPct val="90000"/>
+              </a:lnSpc>
+              <a:spcBef>
+                <a:spcPts val="500"/>
+              </a:spcBef>
+              <a:buFont typeface="Arial"/>
+              <a:buChar char="•"/>
+              <a:defRPr sz="1800" kern="1200">
+                <a:solidFill>
+                  <a:schemeClr val="tx1"/>
+                </a:solidFill>
+                <a:latin typeface="+mn-lt"/>
+                <a:ea typeface="+mn-lt"/>
+                <a:cs typeface="+mn-lt"/>
+              </a:defRPr>
+            </a:lvl6pPr>
+            <a:lvl7pPr marL="2971800" indent="-228600" algn="l" defTabSz="914400">
+              <a:lnSpc>
+                <a:spcPct val="90000"/>
+              </a:lnSpc>
+              <a:spcBef>
+                <a:spcPts val="500"/>
+              </a:spcBef>
+              <a:buFont typeface="Arial"/>
+              <a:buChar char="•"/>
+              <a:defRPr sz="1800" kern="1200">
+                <a:solidFill>
+                  <a:schemeClr val="tx1"/>
+                </a:solidFill>
+                <a:latin typeface="+mn-lt"/>
+                <a:ea typeface="+mn-lt"/>
+                <a:cs typeface="+mn-lt"/>
+              </a:defRPr>
+            </a:lvl7pPr>
+            <a:lvl8pPr marL="3429000" indent="-228600" algn="l" defTabSz="914400">
+              <a:lnSpc>
+                <a:spcPct val="90000"/>
+              </a:lnSpc>
+              <a:spcBef>
+                <a:spcPts val="500"/>
+              </a:spcBef>
+              <a:buFont typeface="Arial"/>
+              <a:buChar char="•"/>
+              <a:defRPr sz="1800" kern="1200">
+                <a:solidFill>
+                  <a:schemeClr val="tx1"/>
+                </a:solidFill>
+                <a:latin typeface="+mn-lt"/>
+                <a:ea typeface="+mn-lt"/>
+                <a:cs typeface="+mn-lt"/>
+              </a:defRPr>
+            </a:lvl8pPr>
+            <a:lvl9pPr marL="3886200" indent="-228600" algn="l" defTabSz="914400">
+              <a:lnSpc>
+                <a:spcPct val="90000"/>
+              </a:lnSpc>
+              <a:spcBef>
+                <a:spcPts val="500"/>
+              </a:spcBef>
+              <a:buFont typeface="Arial"/>
+              <a:buChar char="•"/>
+              <a:defRPr sz="1800" kern="1200">
+                <a:solidFill>
+                  <a:schemeClr val="tx1"/>
+                </a:solidFill>
+                <a:latin typeface="+mn-lt"/>
+                <a:ea typeface="+mn-lt"/>
+                <a:cs typeface="+mn-lt"/>
+              </a:defRPr>
+            </a:lvl9pPr>
+          </a:lstStyle>
+          <a:p>
+            <a:pPr algn="l">
+              <a:defRPr sz="2175">
+                <a:solidFill>
+                  <a:srgbClr val="000000"/>
+                </a:solidFill>
+                <a:latin typeface="Calibri"/>
+                <a:ea typeface="Calibri"/>
+                <a:cs typeface="Calibri"/>
+              </a:defRPr>
+            </a:pPr>
+            <a:r>
+              <a:rPr sz="2175">
+                <a:solidFill>
+                  <a:srgbClr val="000000"/>
+                </a:solidFill>
+                <a:latin typeface="Calibri"/>
+                <a:ea typeface="Calibri"/>
+                <a:cs typeface="Calibri"/>
+              </a:rPr>
+              <a:t>HMAC256 define a assinatura HMAC com SHA-256.</a:t>
+            </a:r>
+          </a:p>
+        </p:txBody>
+      </p:sp>
+      <p:sp>
+        <p:nvSpPr>
+          <p:cNvPr id="11" name="Shape 20">
+            <a:extLst>
+              <a:ext uri="{FF2B5EF4-FFF2-40B4-BE49-F238E27FC236}">
+                <a16:creationId xmlns:a16="http://schemas.microsoft.com/office/drawing/2014/main" id="{EE383B37-7310-4563-9BC8-B173B5286B0D}"/>
+              </a:ext>
+            </a:extLst>
+          </p:cNvPr>
+          <p:cNvSpPr>
+            <a:spLocks noGrp="1"/>
+          </p:cNvSpPr>
+          <p:nvPr/>
+        </p:nvSpPr>
+        <p:spPr>
+          <a:xfrm>
+            <a:off x="857250" y="2762250"/>
+            <a:ext cx="10477500" cy="1809750"/>
+          </a:xfrm>
+          <a:prstGeom prst="roundRect">
+            <a:avLst>
+              <a:gd name="adj" fmla="val 8081"/>
+            </a:avLst>
+          </a:prstGeom>
+          <a:solidFill>
+            <a:srgbClr val="1E1E1E"/>
+          </a:solidFill>
+          <a:ln>
+            <a:solidFill>
+              <a:srgbClr val="1E1E1E"/>
+            </a:solidFill>
+          </a:ln>
+        </p:spPr>
+        <p:txBody>
+          <a:bodyPr/>
+          <a:lstStyle/>
+          <a:p>
+            <a:endParaRPr/>
+          </a:p>
+        </p:txBody>
+      </p:sp>
+      <p:sp>
+        <p:nvSpPr>
+          <p:cNvPr id="4" name="Retângulo 3">
+            <a:extLst>
+              <a:ext uri="{FF2B5EF4-FFF2-40B4-BE49-F238E27FC236}">
+                <a16:creationId xmlns:a16="http://schemas.microsoft.com/office/drawing/2014/main" id="{3CE8AC7A-3364-4E97-BC2E-25CF018F1E04}"/>
+              </a:ext>
+            </a:extLst>
+          </p:cNvPr>
+          <p:cNvSpPr>
+            <a:spLocks noGrp="1"/>
+          </p:cNvSpPr>
+          <p:nvPr/>
+        </p:nvSpPr>
+        <p:spPr>
+          <a:xfrm>
+            <a:off x="1143000" y="3190875"/>
+            <a:ext cx="10001250" cy="2865120"/>
+          </a:xfrm>
+          <a:prstGeom prst="rect">
+            <a:avLst/>
+          </a:prstGeom>
+        </p:spPr>
+        <p:txBody>
+          <a:bodyPr wrap="square">
+            <a:noAutofit/>
+          </a:bodyPr>
+          <a:lstStyle/>
+          <a:p>
+            <a:pPr algn="l">
+              <a:defRPr sz="2100">
+                <a:solidFill>
+                  <a:srgbClr val="D4D4D4"/>
+                </a:solidFill>
+                <a:latin typeface="Consolas"/>
+                <a:ea typeface="Consolas"/>
+                <a:cs typeface="Consolas"/>
+              </a:defRPr>
+            </a:pPr>
+            <a:r>
+              <a:rPr sz="2100">
+                <a:solidFill>
+                  <a:srgbClr val="D4D4D4"/>
+                </a:solidFill>
+                <a:latin typeface="Consolas"/>
+                <a:ea typeface="Consolas"/>
+                <a:cs typeface="Consolas"/>
+              </a:rPr>
+              <a:t>var algoritmo = Algorithm.HMAC256("12345678");</a:t>
+            </a:r>
+          </a:p>
+        </p:txBody>
+      </p:sp>
+      <p:sp>
+        <p:nvSpPr>
+          <p:cNvPr id="12" name="Retângulo 11">
+            <a:extLst>
+              <a:ext uri="{FF2B5EF4-FFF2-40B4-BE49-F238E27FC236}">
+                <a16:creationId xmlns:a16="http://schemas.microsoft.com/office/drawing/2014/main" id="{EC256F9A-320F-4308-970B-73CC74DE163B}"/>
+              </a:ext>
+            </a:extLst>
+          </p:cNvPr>
+          <p:cNvSpPr>
+            <a:spLocks noGrp="1"/>
+          </p:cNvSpPr>
+          <p:nvPr/>
+        </p:nvSpPr>
+        <p:spPr>
+          <a:xfrm>
+            <a:off x="685800" y="4905375"/>
+            <a:ext cx="10820400" cy="1333500"/>
+          </a:xfrm>
+          <a:prstGeom prst="rect">
+            <a:avLst/>
+          </a:prstGeom>
+          <a:noFill/>
+          <a:ln w="0">
+            <a:noFill/>
+          </a:ln>
+        </p:spPr>
+        <p:txBody>
+          <a:bodyPr>
+            <a:noAutofit/>
+          </a:bodyPr>
+          <a:lstStyle/>
+          <a:p>
+            <a:pPr algn="l">
+              <a:defRPr sz="2100">
+                <a:solidFill>
+                  <a:srgbClr val="000000"/>
+                </a:solidFill>
+                <a:latin typeface="Calibri"/>
+                <a:ea typeface="Calibri"/>
+                <a:cs typeface="Calibri"/>
+              </a:defRPr>
+            </a:pPr>
+            <a:r>
+              <a:rPr sz="2100" dirty="0">
+                <a:solidFill>
+                  <a:srgbClr val="000000"/>
+                </a:solidFill>
+                <a:latin typeface="Calibri"/>
+                <a:ea typeface="Calibri"/>
+                <a:cs typeface="Calibri"/>
+              </a:rPr>
+              <a:t>A </a:t>
+            </a:r>
+            <a:r>
+              <a:rPr sz="2100" dirty="0" err="1">
+                <a:solidFill>
+                  <a:srgbClr val="000000"/>
+                </a:solidFill>
+                <a:latin typeface="Calibri"/>
+                <a:ea typeface="Calibri"/>
+                <a:cs typeface="Calibri"/>
+              </a:rPr>
+              <a:t>chave</a:t>
+            </a:r>
+            <a:r>
+              <a:rPr sz="2100" dirty="0">
+                <a:solidFill>
+                  <a:srgbClr val="000000"/>
+                </a:solidFill>
+                <a:latin typeface="Calibri"/>
+                <a:ea typeface="Calibri"/>
+                <a:cs typeface="Calibri"/>
+              </a:rPr>
+              <a:t> secreta </a:t>
+            </a:r>
+            <a:r>
+              <a:rPr sz="2100" dirty="0" err="1">
+                <a:solidFill>
+                  <a:srgbClr val="000000"/>
+                </a:solidFill>
+                <a:latin typeface="Calibri"/>
+                <a:ea typeface="Calibri"/>
+                <a:cs typeface="Calibri"/>
+              </a:rPr>
+              <a:t>participa</a:t>
+            </a:r>
+            <a:r>
+              <a:rPr sz="2100" dirty="0">
+                <a:solidFill>
+                  <a:srgbClr val="000000"/>
+                </a:solidFill>
+                <a:latin typeface="Calibri"/>
+                <a:ea typeface="Calibri"/>
+                <a:cs typeface="Calibri"/>
+              </a:rPr>
+              <a:t> da </a:t>
+            </a:r>
+            <a:r>
+              <a:rPr sz="2100" dirty="0" err="1">
+                <a:solidFill>
+                  <a:srgbClr val="000000"/>
+                </a:solidFill>
+                <a:latin typeface="Calibri"/>
+                <a:ea typeface="Calibri"/>
+                <a:cs typeface="Calibri"/>
+              </a:rPr>
+              <a:t>assinatura</a:t>
+            </a:r>
+            <a:r>
+              <a:rPr sz="2100" dirty="0">
+                <a:solidFill>
+                  <a:srgbClr val="000000"/>
+                </a:solidFill>
+                <a:latin typeface="Calibri"/>
+                <a:ea typeface="Calibri"/>
+                <a:cs typeface="Calibri"/>
+              </a:rPr>
+              <a:t> e da </a:t>
+            </a:r>
+            <a:r>
+              <a:rPr sz="2100" dirty="0" err="1">
+                <a:solidFill>
+                  <a:srgbClr val="000000"/>
+                </a:solidFill>
+                <a:latin typeface="Calibri"/>
+                <a:ea typeface="Calibri"/>
+                <a:cs typeface="Calibri"/>
+              </a:rPr>
+              <a:t>verificação</a:t>
+            </a:r>
+            <a:r>
+              <a:rPr sz="2100" dirty="0">
+                <a:solidFill>
+                  <a:srgbClr val="000000"/>
+                </a:solidFill>
+                <a:latin typeface="Calibri"/>
+                <a:ea typeface="Calibri"/>
+                <a:cs typeface="Calibri"/>
+              </a:rPr>
+              <a:t>.</a:t>
+            </a:r>
+          </a:p>
+          <a:p>
+            <a:pPr algn="l">
+              <a:defRPr sz="2100">
+                <a:solidFill>
+                  <a:srgbClr val="000000"/>
+                </a:solidFill>
+                <a:latin typeface="Calibri"/>
+                <a:ea typeface="Calibri"/>
+                <a:cs typeface="Calibri"/>
+              </a:defRPr>
+            </a:pPr>
+            <a:r>
+              <a:rPr sz="2100" dirty="0">
+                <a:solidFill>
+                  <a:srgbClr val="000000"/>
+                </a:solidFill>
+                <a:latin typeface="Calibri"/>
+                <a:ea typeface="Calibri"/>
+                <a:cs typeface="Calibri"/>
+              </a:rPr>
+              <a:t>“12345678” é </a:t>
+            </a:r>
+            <a:r>
+              <a:rPr sz="2100" dirty="0" err="1">
+                <a:solidFill>
+                  <a:srgbClr val="000000"/>
+                </a:solidFill>
+                <a:latin typeface="Calibri"/>
+                <a:ea typeface="Calibri"/>
+                <a:cs typeface="Calibri"/>
+              </a:rPr>
+              <a:t>didática</a:t>
+            </a:r>
+            <a:r>
+              <a:rPr sz="2100" dirty="0">
+                <a:solidFill>
+                  <a:srgbClr val="000000"/>
+                </a:solidFill>
+                <a:latin typeface="Calibri"/>
+                <a:ea typeface="Calibri"/>
+                <a:cs typeface="Calibri"/>
+              </a:rPr>
+              <a:t>. Em </a:t>
+            </a:r>
+            <a:r>
+              <a:rPr sz="2100" dirty="0" err="1">
+                <a:solidFill>
+                  <a:srgbClr val="000000"/>
+                </a:solidFill>
+                <a:latin typeface="Calibri"/>
+                <a:ea typeface="Calibri"/>
+                <a:cs typeface="Calibri"/>
+              </a:rPr>
+              <a:t>produção</a:t>
+            </a:r>
+            <a:r>
+              <a:rPr sz="2100" dirty="0">
+                <a:solidFill>
+                  <a:srgbClr val="000000"/>
+                </a:solidFill>
+                <a:latin typeface="Calibri"/>
+                <a:ea typeface="Calibri"/>
+                <a:cs typeface="Calibri"/>
+              </a:rPr>
+              <a:t>, use </a:t>
+            </a:r>
+            <a:r>
+              <a:rPr sz="2100" dirty="0" err="1">
+                <a:solidFill>
+                  <a:srgbClr val="000000"/>
+                </a:solidFill>
+                <a:latin typeface="Calibri"/>
+                <a:ea typeface="Calibri"/>
+                <a:cs typeface="Calibri"/>
+              </a:rPr>
+              <a:t>uma</a:t>
+            </a:r>
+            <a:r>
+              <a:rPr sz="2100" dirty="0">
+                <a:solidFill>
+                  <a:srgbClr val="000000"/>
+                </a:solidFill>
+                <a:latin typeface="Calibri"/>
+                <a:ea typeface="Calibri"/>
+                <a:cs typeface="Calibri"/>
+              </a:rPr>
+              <a:t> </a:t>
+            </a:r>
+            <a:r>
+              <a:rPr sz="2100" dirty="0" err="1">
+                <a:solidFill>
+                  <a:srgbClr val="000000"/>
+                </a:solidFill>
+                <a:latin typeface="Calibri"/>
+                <a:ea typeface="Calibri"/>
+                <a:cs typeface="Calibri"/>
+              </a:rPr>
+              <a:t>chave</a:t>
+            </a:r>
+            <a:r>
+              <a:rPr sz="2100" dirty="0">
+                <a:solidFill>
+                  <a:srgbClr val="000000"/>
+                </a:solidFill>
+                <a:latin typeface="Calibri"/>
+                <a:ea typeface="Calibri"/>
+                <a:cs typeface="Calibri"/>
+              </a:rPr>
+              <a:t> forte fora do </a:t>
+            </a:r>
+            <a:r>
+              <a:rPr sz="2100" dirty="0" err="1">
+                <a:solidFill>
+                  <a:srgbClr val="000000"/>
+                </a:solidFill>
+                <a:latin typeface="Calibri"/>
+                <a:ea typeface="Calibri"/>
+                <a:cs typeface="Calibri"/>
+              </a:rPr>
+              <a:t>código</a:t>
+            </a:r>
+            <a:r>
+              <a:rPr sz="2100" dirty="0">
+                <a:solidFill>
+                  <a:srgbClr val="000000"/>
+                </a:solidFill>
+                <a:latin typeface="Calibri"/>
+                <a:ea typeface="Calibri"/>
+                <a:cs typeface="Calibri"/>
+              </a:rPr>
+              <a:t>.</a:t>
+            </a:r>
+          </a:p>
+        </p:txBody>
+      </p:sp>
+    </p:spTree>
+    <p:extLst>
+      <p:ext uri="{BB962C8B-B14F-4D97-AF65-F5344CB8AC3E}">
+        <p14:creationId xmlns:p14="http://schemas.microsoft.com/office/powerpoint/2010/main" val="760294497"/>
       </p:ext>
     </p:extLst>
   </p:cSld>
@@ -3899,4 +11804,319 @@
     </a:ext>
   </a:extLst>
 </a:theme>
+</file>
+
+<file path=ppt/theme/theme2.xml><?xml version="1.0" encoding="utf-8"?>
+<a:theme xmlns:a="http://schemas.openxmlformats.org/drawingml/2006/main" name="Tema do Office">
+  <a:themeElements>
+    <a:clrScheme name="Office">
+      <a:dk1>
+        <a:sysClr val="windowText" lastClr="000000"/>
+      </a:dk1>
+      <a:lt1>
+        <a:sysClr val="window" lastClr="FFFFFF"/>
+      </a:lt1>
+      <a:dk2>
+        <a:srgbClr val="0E2841"/>
+      </a:dk2>
+      <a:lt2>
+        <a:srgbClr val="E8E8E8"/>
+      </a:lt2>
+      <a:accent1>
+        <a:srgbClr val="156082"/>
+      </a:accent1>
+      <a:accent2>
+        <a:srgbClr val="E97132"/>
+      </a:accent2>
+      <a:accent3>
+        <a:srgbClr val="196B24"/>
+      </a:accent3>
+      <a:accent4>
+        <a:srgbClr val="0F9ED5"/>
+      </a:accent4>
+      <a:accent5>
+        <a:srgbClr val="A02B93"/>
+      </a:accent5>
+      <a:accent6>
+        <a:srgbClr val="4EA72E"/>
+      </a:accent6>
+      <a:hlink>
+        <a:srgbClr val="467886"/>
+      </a:hlink>
+      <a:folHlink>
+        <a:srgbClr val="96607D"/>
+      </a:folHlink>
+    </a:clrScheme>
+    <a:fontScheme name="Office">
+      <a:majorFont>
+        <a:latin typeface="Aptos Display" panose="02110004020202020204"/>
+        <a:ea typeface=""/>
+        <a:cs typeface=""/>
+        <a:font script="Jpan" typeface="游ゴシック Light"/>
+        <a:font script="Hang" typeface="맑은 고딕"/>
+        <a:font script="Hans" typeface="等线 Light"/>
+        <a:font script="Hant" typeface="新細明體"/>
+        <a:font script="Arab" typeface="Times New Roman"/>
+        <a:font script="Hebr" typeface="Times New Roman"/>
+        <a:font script="Thai" typeface="Angsana New"/>
+        <a:font script="Ethi" typeface="Nyala"/>
+        <a:font script="Beng" typeface="Vrinda"/>
+        <a:font script="Gujr" typeface="Shruti"/>
+        <a:font script="Khmr" typeface="MoolBoran"/>
+        <a:font script="Knda" typeface="Tunga"/>
+        <a:font script="Guru" typeface="Raavi"/>
+        <a:font script="Cans" typeface="Euphemia"/>
+        <a:font script="Cher" typeface="Plantagenet Cherokee"/>
+        <a:font script="Yiii" typeface="Microsoft Yi Baiti"/>
+        <a:font script="Tibt" typeface="Microsoft Himalaya"/>
+        <a:font script="Thaa" typeface="MV Boli"/>
+        <a:font script="Deva" typeface="Mangal"/>
+        <a:font script="Telu" typeface="Gautami"/>
+        <a:font script="Taml" typeface="Latha"/>
+        <a:font script="Syrc" typeface="Estrangelo Edessa"/>
+        <a:font script="Orya" typeface="Kalinga"/>
+        <a:font script="Mlym" typeface="Kartika"/>
+        <a:font script="Laoo" typeface="DokChampa"/>
+        <a:font script="Sinh" typeface="Iskoola Pota"/>
+        <a:font script="Mong" typeface="Mongolian Baiti"/>
+        <a:font script="Viet" typeface="Times New Roman"/>
+        <a:font script="Uigh" typeface="Microsoft Uighur"/>
+        <a:font script="Geor" typeface="Sylfaen"/>
+        <a:font script="Armn" typeface="Arial"/>
+        <a:font script="Bugi" typeface="Leelawadee UI"/>
+        <a:font script="Bopo" typeface="Microsoft JhengHei"/>
+        <a:font script="Java" typeface="Javanese Text"/>
+        <a:font script="Lisu" typeface="Segoe UI"/>
+        <a:font script="Mymr" typeface="Myanmar Text"/>
+        <a:font script="Nkoo" typeface="Ebrima"/>
+        <a:font script="Olck" typeface="Nirmala UI"/>
+        <a:font script="Osma" typeface="Ebrima"/>
+        <a:font script="Phag" typeface="Phagspa"/>
+        <a:font script="Syrn" typeface="Estrangelo Edessa"/>
+        <a:font script="Syrj" typeface="Estrangelo Edessa"/>
+        <a:font script="Syre" typeface="Estrangelo Edessa"/>
+        <a:font script="Sora" typeface="Nirmala UI"/>
+        <a:font script="Tale" typeface="Microsoft Tai Le"/>
+        <a:font script="Talu" typeface="Microsoft New Tai Lue"/>
+        <a:font script="Tfng" typeface="Ebrima"/>
+      </a:majorFont>
+      <a:minorFont>
+        <a:latin typeface="Aptos" panose="02110004020202020204"/>
+        <a:ea typeface=""/>
+        <a:cs typeface=""/>
+        <a:font script="Jpan" typeface="游ゴシック"/>
+        <a:font script="Hang" typeface="맑은 고딕"/>
+        <a:font script="Hans" typeface="等线"/>
+        <a:font script="Hant" typeface="新細明體"/>
+        <a:font script="Arab" typeface="Arial"/>
+        <a:font script="Hebr" typeface="Arial"/>
+        <a:font script="Thai" typeface="Cordia New"/>
+        <a:font script="Ethi" typeface="Nyala"/>
+        <a:font script="Beng" typeface="Vrinda"/>
+        <a:font script="Gujr" typeface="Shruti"/>
+        <a:font script="Khmr" typeface="DaunPenh"/>
+        <a:font script="Knda" typeface="Tunga"/>
+        <a:font script="Guru" typeface="Raavi"/>
+        <a:font script="Cans" typeface="Euphemia"/>
+        <a:font script="Cher" typeface="Plantagenet Cherokee"/>
+        <a:font script="Yiii" typeface="Microsoft Yi Baiti"/>
+        <a:font script="Tibt" typeface="Microsoft Himalaya"/>
+        <a:font script="Thaa" typeface="MV Boli"/>
+        <a:font script="Deva" typeface="Mangal"/>
+        <a:font script="Telu" typeface="Gautami"/>
+        <a:font script="Taml" typeface="Latha"/>
+        <a:font script="Syrc" typeface="Estrangelo Edessa"/>
+        <a:font script="Orya" typeface="Kalinga"/>
+        <a:font script="Mlym" typeface="Kartika"/>
+        <a:font script="Laoo" typeface="DokChampa"/>
+        <a:font script="Sinh" typeface="Iskoola Pota"/>
+        <a:font script="Mong" typeface="Mongolian Baiti"/>
+        <a:font script="Viet" typeface="Arial"/>
+        <a:font script="Uigh" typeface="Microsoft Uighur"/>
+        <a:font script="Geor" typeface="Sylfaen"/>
+        <a:font script="Armn" typeface="Arial"/>
+        <a:font script="Bugi" typeface="Leelawadee UI"/>
+        <a:font script="Bopo" typeface="Microsoft JhengHei"/>
+        <a:font script="Java" typeface="Javanese Text"/>
+        <a:font script="Lisu" typeface="Segoe UI"/>
+        <a:font script="Mymr" typeface="Myanmar Text"/>
+        <a:font script="Nkoo" typeface="Ebrima"/>
+        <a:font script="Olck" typeface="Nirmala UI"/>
+        <a:font script="Osma" typeface="Ebrima"/>
+        <a:font script="Phag" typeface="Phagspa"/>
+        <a:font script="Syrn" typeface="Estrangelo Edessa"/>
+        <a:font script="Syrj" typeface="Estrangelo Edessa"/>
+        <a:font script="Syre" typeface="Estrangelo Edessa"/>
+        <a:font script="Sora" typeface="Nirmala UI"/>
+        <a:font script="Tale" typeface="Microsoft Tai Le"/>
+        <a:font script="Talu" typeface="Microsoft New Tai Lue"/>
+        <a:font script="Tfng" typeface="Ebrima"/>
+      </a:minorFont>
+    </a:fontScheme>
+    <a:fmtScheme name="Office">
+      <a:fillStyleLst>
+        <a:solidFill>
+          <a:schemeClr val="phClr"/>
+        </a:solidFill>
+        <a:gradFill rotWithShape="1">
+          <a:gsLst>
+            <a:gs pos="0">
+              <a:schemeClr val="phClr">
+                <a:lumMod val="110000"/>
+                <a:satMod val="105000"/>
+                <a:tint val="67000"/>
+              </a:schemeClr>
+            </a:gs>
+            <a:gs pos="50000">
+              <a:schemeClr val="phClr">
+                <a:lumMod val="105000"/>
+                <a:satMod val="103000"/>
+                <a:tint val="73000"/>
+              </a:schemeClr>
+            </a:gs>
+            <a:gs pos="100000">
+              <a:schemeClr val="phClr">
+                <a:lumMod val="105000"/>
+                <a:satMod val="109000"/>
+                <a:tint val="81000"/>
+              </a:schemeClr>
+            </a:gs>
+          </a:gsLst>
+          <a:lin ang="5400000" scaled="0"/>
+        </a:gradFill>
+        <a:gradFill rotWithShape="1">
+          <a:gsLst>
+            <a:gs pos="0">
+              <a:schemeClr val="phClr">
+                <a:satMod val="103000"/>
+                <a:lumMod val="102000"/>
+                <a:tint val="94000"/>
+              </a:schemeClr>
+            </a:gs>
+            <a:gs pos="50000">
+              <a:schemeClr val="phClr">
+                <a:satMod val="110000"/>
+                <a:lumMod val="100000"/>
+                <a:shade val="100000"/>
+              </a:schemeClr>
+            </a:gs>
+            <a:gs pos="100000">
+              <a:schemeClr val="phClr">
+                <a:lumMod val="99000"/>
+                <a:satMod val="120000"/>
+                <a:shade val="78000"/>
+              </a:schemeClr>
+            </a:gs>
+          </a:gsLst>
+          <a:lin ang="5400000" scaled="0"/>
+        </a:gradFill>
+      </a:fillStyleLst>
+      <a:lnStyleLst>
+        <a:ln w="12700" cap="flat" cmpd="sng" algn="ctr">
+          <a:solidFill>
+            <a:schemeClr val="phClr"/>
+          </a:solidFill>
+          <a:prstDash val="solid"/>
+          <a:miter lim="800000"/>
+        </a:ln>
+        <a:ln w="19050" cap="flat" cmpd="sng" algn="ctr">
+          <a:solidFill>
+            <a:schemeClr val="phClr"/>
+          </a:solidFill>
+          <a:prstDash val="solid"/>
+          <a:miter lim="800000"/>
+        </a:ln>
+        <a:ln w="25400" cap="flat" cmpd="sng" algn="ctr">
+          <a:solidFill>
+            <a:schemeClr val="phClr"/>
+          </a:solidFill>
+          <a:prstDash val="solid"/>
+          <a:miter lim="800000"/>
+        </a:ln>
+      </a:lnStyleLst>
+      <a:effectStyleLst>
+        <a:effectStyle>
+          <a:effectLst/>
+        </a:effectStyle>
+        <a:effectStyle>
+          <a:effectLst/>
+        </a:effectStyle>
+        <a:effectStyle>
+          <a:effectLst>
+            <a:outerShdw blurRad="57150" dist="19050" dir="5400000" algn="ctr" rotWithShape="0">
+              <a:srgbClr val="000000">
+                <a:alpha val="63000"/>
+              </a:srgbClr>
+            </a:outerShdw>
+          </a:effectLst>
+        </a:effectStyle>
+      </a:effectStyleLst>
+      <a:bgFillStyleLst>
+        <a:solidFill>
+          <a:schemeClr val="phClr"/>
+        </a:solidFill>
+        <a:solidFill>
+          <a:schemeClr val="phClr">
+            <a:tint val="95000"/>
+            <a:satMod val="170000"/>
+          </a:schemeClr>
+        </a:solidFill>
+        <a:gradFill rotWithShape="1">
+          <a:gsLst>
+            <a:gs pos="0">
+              <a:schemeClr val="phClr">
+                <a:tint val="93000"/>
+                <a:satMod val="150000"/>
+                <a:shade val="98000"/>
+                <a:lumMod val="102000"/>
+              </a:schemeClr>
+            </a:gs>
+            <a:gs pos="50000">
+              <a:schemeClr val="phClr">
+                <a:tint val="98000"/>
+                <a:satMod val="130000"/>
+                <a:shade val="90000"/>
+                <a:lumMod val="103000"/>
+              </a:schemeClr>
+            </a:gs>
+            <a:gs pos="100000">
+              <a:schemeClr val="phClr">
+                <a:shade val="63000"/>
+                <a:satMod val="120000"/>
+              </a:schemeClr>
+            </a:gs>
+          </a:gsLst>
+          <a:lin ang="5400000" scaled="0"/>
+        </a:gradFill>
+      </a:bgFillStyleLst>
+    </a:fmtScheme>
+  </a:themeElements>
+  <a:objectDefaults>
+    <a:lnDef>
+      <a:spPr/>
+      <a:bodyPr/>
+      <a:lstStyle/>
+      <a:style>
+        <a:lnRef idx="2">
+          <a:schemeClr val="accent1"/>
+        </a:lnRef>
+        <a:fillRef idx="0">
+          <a:schemeClr val="accent1"/>
+        </a:fillRef>
+        <a:effectRef idx="1">
+          <a:schemeClr val="accent1"/>
+        </a:effectRef>
+        <a:fontRef idx="minor">
+          <a:schemeClr val="tx1"/>
+        </a:fontRef>
+      </a:style>
+    </a:lnDef>
+  </a:objectDefaults>
+  <a:extraClrSchemeLst/>
+  <a:extLst>
+    <a:ext uri="{05A4C25C-085E-4340-85A3-A5531E510DB2}">
+      <thm15:themeFamily xmlns:thm15="http://schemas.microsoft.com/office/thememl/2012/main" name="Office Theme" id="{2E142A2C-CD16-42D6-873A-C26D2A0506FA}" vid="{1BDDFF52-6CD6-40A5-AB3C-68EB2F1E4D0A}"/>
+    </a:ext>
+  </a:extLst>
+</a:theme>
 </file>
--- a/engenharia-software/software-corporativo/boas-praticas/aula-07-JWT/spring-security.pptx
+++ b/engenharia-software/software-corporativo/boas-praticas/aula-07-JWT/spring-security.pptx
@@ -5,7 +5,7 @@
     <p:sldMasterId id="2147483677" r:id="rId1"/>
   </p:sldMasterIdLst>
   <p:notesMasterIdLst>
-    <p:notesMasterId r:id="rId18"/>
+    <p:notesMasterId r:id="rId22"/>
   </p:notesMasterIdLst>
   <p:sldIdLst>
     <p:sldId id="256" r:id="rId2"/>
@@ -15,15 +15,19 @@
     <p:sldId id="301" r:id="rId6"/>
     <p:sldId id="302" r:id="rId7"/>
     <p:sldId id="303" r:id="rId8"/>
-    <p:sldId id="304" r:id="rId9"/>
-    <p:sldId id="259" r:id="rId10"/>
-    <p:sldId id="260" r:id="rId11"/>
-    <p:sldId id="261" r:id="rId12"/>
-    <p:sldId id="262" r:id="rId13"/>
-    <p:sldId id="263" r:id="rId14"/>
-    <p:sldId id="264" r:id="rId15"/>
-    <p:sldId id="265" r:id="rId16"/>
-    <p:sldId id="266" r:id="rId17"/>
+    <p:sldId id="316" r:id="rId9"/>
+    <p:sldId id="304" r:id="rId10"/>
+    <p:sldId id="305" r:id="rId11"/>
+    <p:sldId id="306" r:id="rId12"/>
+    <p:sldId id="307" r:id="rId13"/>
+    <p:sldId id="308" r:id="rId14"/>
+    <p:sldId id="309" r:id="rId15"/>
+    <p:sldId id="310" r:id="rId16"/>
+    <p:sldId id="311" r:id="rId17"/>
+    <p:sldId id="312" r:id="rId18"/>
+    <p:sldId id="313" r:id="rId19"/>
+    <p:sldId id="315" r:id="rId20"/>
+    <p:sldId id="314" r:id="rId21"/>
   </p:sldIdLst>
   <p:sldSz cx="12192000" cy="6858000"/>
   <p:notesSz cx="6858000" cy="9144000"/>
@@ -134,15 +138,19 @@
             <p14:sldId id="301"/>
             <p14:sldId id="302"/>
             <p14:sldId id="303"/>
+            <p14:sldId id="316"/>
             <p14:sldId id="304"/>
-            <p14:sldId id="259"/>
-            <p14:sldId id="260"/>
-            <p14:sldId id="261"/>
-            <p14:sldId id="262"/>
-            <p14:sldId id="263"/>
-            <p14:sldId id="264"/>
-            <p14:sldId id="265"/>
-            <p14:sldId id="266"/>
+            <p14:sldId id="305"/>
+            <p14:sldId id="306"/>
+            <p14:sldId id="307"/>
+            <p14:sldId id="308"/>
+            <p14:sldId id="309"/>
+            <p14:sldId id="310"/>
+            <p14:sldId id="311"/>
+            <p14:sldId id="312"/>
+            <p14:sldId id="313"/>
+            <p14:sldId id="315"/>
+            <p14:sldId id="314"/>
           </p14:sldIdLst>
         </p14:section>
       </p14:sectionLst>
@@ -247,7 +255,7 @@
           <a:p>
             <a:fld id="{87C27BCA-F434-4017-9BD8-33CEB0219D72}" type="datetimeFigureOut">
               <a:rPr lang="pt-BR" smtClean="0"/>
-              <a:t>28/09/2026</a:t>
+              <a:t>29/09/2026</a:t>
             </a:fld>
             <a:endParaRPr lang="pt-BR"/>
           </a:p>
@@ -514,662 +522,6 @@
 </p:notesMaster>
 </file>
 
-<file path=ppt/notesSlides/notesSlide1.xml><?xml version="1.0" encoding="utf-8"?>
-<p:notes xmlns:a="http://schemas.openxmlformats.org/drawingml/2006/main" xmlns:r="http://schemas.openxmlformats.org/officeDocument/2006/relationships" xmlns:p="http://schemas.openxmlformats.org/presentationml/2006/main">
-  <p:cSld>
-    <p:spTree>
-      <p:nvGrpSpPr>
-        <p:cNvPr id="1" name=""/>
-        <p:cNvGrpSpPr/>
-        <p:nvPr/>
-      </p:nvGrpSpPr>
-      <p:grpSpPr>
-        <a:xfrm>
-          <a:off x="0" y="0"/>
-          <a:ext cx="0" cy="0"/>
-          <a:chOff x="0" y="0"/>
-          <a:chExt cx="0" cy="0"/>
-        </a:xfrm>
-      </p:grpSpPr>
-      <p:sp>
-        <p:nvSpPr>
-          <p:cNvPr id="2" name="Slide Image Placeholder 1"/>
-          <p:cNvSpPr>
-            <a:spLocks noGrp="1" noRot="1" noChangeAspect="1"/>
-          </p:cNvSpPr>
-          <p:nvPr>
-            <p:ph type="sldImg"/>
-          </p:nvPr>
-        </p:nvSpPr>
-        <p:spPr/>
-      </p:sp>
-      <p:sp>
-        <p:nvSpPr>
-          <p:cNvPr id="3" name="Notes Placeholder 2"/>
-          <p:cNvSpPr>
-            <a:spLocks noGrp="1"/>
-          </p:cNvSpPr>
-          <p:nvPr>
-            <p:ph type="body" idx="1"/>
-          </p:nvPr>
-        </p:nvSpPr>
-        <p:spPr/>
-        <p:txBody>
-          <a:bodyPr/>
-          <a:lstStyle/>
-          <a:p>
-            <a:r>
-              <a:t>Exemplo baseado no código do professor. Biblioteca Auth0 java-jwt. Referências: https://github.com/auth0/java-jwt e https://github.com/auth0/java-jwt/blob/master/lib/src/main/java/com/auth0/jwt/JWTCreator.java</a:t>
-            </a:r>
-          </a:p>
-          <a:p>
-            <a:r>
-              <a:t>A autenticação deve ocorrer antes da emissão. Gerar um token não configura sua validação nas próximas requisições.</a:t>
-            </a:r>
-          </a:p>
-        </p:txBody>
-      </p:sp>
-      <p:sp>
-        <p:nvSpPr>
-          <p:cNvPr id="4" name="Slide Number Placeholder 3"/>
-          <p:cNvSpPr>
-            <a:spLocks noGrp="1"/>
-          </p:cNvSpPr>
-          <p:nvPr>
-            <p:ph type="sldNum" idx="5"/>
-          </p:nvPr>
-        </p:nvSpPr>
-        <p:spPr/>
-        <p:txBody>
-          <a:bodyPr/>
-          <a:lstStyle/>
-          <a:p>
-            <a:endParaRPr/>
-          </a:p>
-        </p:txBody>
-      </p:sp>
-    </p:spTree>
-  </p:cSld>
-  <p:clrMapOvr>
-    <a:masterClrMapping/>
-  </p:clrMapOvr>
-</p:notes>
-</file>
-
-<file path=ppt/notesSlides/notesSlide2.xml><?xml version="1.0" encoding="utf-8"?>
-<p:notes xmlns:a="http://schemas.openxmlformats.org/drawingml/2006/main" xmlns:r="http://schemas.openxmlformats.org/officeDocument/2006/relationships" xmlns:p="http://schemas.openxmlformats.org/presentationml/2006/main">
-  <p:cSld>
-    <p:spTree>
-      <p:nvGrpSpPr>
-        <p:cNvPr id="1" name=""/>
-        <p:cNvGrpSpPr/>
-        <p:nvPr/>
-      </p:nvGrpSpPr>
-      <p:grpSpPr>
-        <a:xfrm>
-          <a:off x="0" y="0"/>
-          <a:ext cx="0" cy="0"/>
-          <a:chOff x="0" y="0"/>
-          <a:chExt cx="0" cy="0"/>
-        </a:xfrm>
-      </p:grpSpPr>
-      <p:sp>
-        <p:nvSpPr>
-          <p:cNvPr id="2" name="Slide Image Placeholder 1"/>
-          <p:cNvSpPr>
-            <a:spLocks noGrp="1" noRot="1" noChangeAspect="1"/>
-          </p:cNvSpPr>
-          <p:nvPr>
-            <p:ph type="sldImg"/>
-          </p:nvPr>
-        </p:nvSpPr>
-        <p:spPr/>
-      </p:sp>
-      <p:sp>
-        <p:nvSpPr>
-          <p:cNvPr id="3" name="Notes Placeholder 2"/>
-          <p:cNvSpPr>
-            <a:spLocks noGrp="1"/>
-          </p:cNvSpPr>
-          <p:nvPr>
-            <p:ph type="body" idx="1"/>
-          </p:nvPr>
-        </p:nvSpPr>
-        <p:spPr/>
-        <p:txBody>
-          <a:bodyPr/>
-          <a:lstStyle/>
-          <a:p>
-            <a:r>
-              <a:t>Exemplo baseado no código do professor. Biblioteca Auth0 java-jwt. Referências: https://github.com/auth0/java-jwt e https://github.com/auth0/java-jwt/blob/master/lib/src/main/java/com/auth0/jwt/JWTCreator.java</a:t>
-            </a:r>
-          </a:p>
-          <a:p>
-            <a:r>
-              <a:t>A autenticação deve ocorrer antes da emissão. Gerar um token não configura sua validação nas próximas requisições.</a:t>
-            </a:r>
-          </a:p>
-        </p:txBody>
-      </p:sp>
-      <p:sp>
-        <p:nvSpPr>
-          <p:cNvPr id="4" name="Slide Number Placeholder 3"/>
-          <p:cNvSpPr>
-            <a:spLocks noGrp="1"/>
-          </p:cNvSpPr>
-          <p:nvPr>
-            <p:ph type="sldNum" idx="5"/>
-          </p:nvPr>
-        </p:nvSpPr>
-        <p:spPr/>
-        <p:txBody>
-          <a:bodyPr/>
-          <a:lstStyle/>
-          <a:p>
-            <a:endParaRPr/>
-          </a:p>
-        </p:txBody>
-      </p:sp>
-    </p:spTree>
-  </p:cSld>
-  <p:clrMapOvr>
-    <a:masterClrMapping/>
-  </p:clrMapOvr>
-</p:notes>
-</file>
-
-<file path=ppt/notesSlides/notesSlide3.xml><?xml version="1.0" encoding="utf-8"?>
-<p:notes xmlns:a="http://schemas.openxmlformats.org/drawingml/2006/main" xmlns:r="http://schemas.openxmlformats.org/officeDocument/2006/relationships" xmlns:p="http://schemas.openxmlformats.org/presentationml/2006/main">
-  <p:cSld>
-    <p:spTree>
-      <p:nvGrpSpPr>
-        <p:cNvPr id="1" name=""/>
-        <p:cNvGrpSpPr/>
-        <p:nvPr/>
-      </p:nvGrpSpPr>
-      <p:grpSpPr>
-        <a:xfrm>
-          <a:off x="0" y="0"/>
-          <a:ext cx="0" cy="0"/>
-          <a:chOff x="0" y="0"/>
-          <a:chExt cx="0" cy="0"/>
-        </a:xfrm>
-      </p:grpSpPr>
-      <p:sp>
-        <p:nvSpPr>
-          <p:cNvPr id="2" name="Slide Image Placeholder 1"/>
-          <p:cNvSpPr>
-            <a:spLocks noGrp="1" noRot="1" noChangeAspect="1"/>
-          </p:cNvSpPr>
-          <p:nvPr>
-            <p:ph type="sldImg"/>
-          </p:nvPr>
-        </p:nvSpPr>
-        <p:spPr/>
-      </p:sp>
-      <p:sp>
-        <p:nvSpPr>
-          <p:cNvPr id="3" name="Notes Placeholder 2"/>
-          <p:cNvSpPr>
-            <a:spLocks noGrp="1"/>
-          </p:cNvSpPr>
-          <p:nvPr>
-            <p:ph type="body" idx="1"/>
-          </p:nvPr>
-        </p:nvSpPr>
-        <p:spPr/>
-        <p:txBody>
-          <a:bodyPr/>
-          <a:lstStyle/>
-          <a:p>
-            <a:r>
-              <a:t>Exemplo baseado no código do professor. Biblioteca Auth0 java-jwt. Referências: https://github.com/auth0/java-jwt e https://github.com/auth0/java-jwt/blob/master/lib/src/main/java/com/auth0/jwt/JWTCreator.java</a:t>
-            </a:r>
-          </a:p>
-          <a:p>
-            <a:r>
-              <a:t>A autenticação deve ocorrer antes da emissão. Gerar um token não configura sua validação nas próximas requisições.</a:t>
-            </a:r>
-          </a:p>
-        </p:txBody>
-      </p:sp>
-      <p:sp>
-        <p:nvSpPr>
-          <p:cNvPr id="4" name="Slide Number Placeholder 3"/>
-          <p:cNvSpPr>
-            <a:spLocks noGrp="1"/>
-          </p:cNvSpPr>
-          <p:nvPr>
-            <p:ph type="sldNum" idx="5"/>
-          </p:nvPr>
-        </p:nvSpPr>
-        <p:spPr/>
-        <p:txBody>
-          <a:bodyPr/>
-          <a:lstStyle/>
-          <a:p>
-            <a:endParaRPr/>
-          </a:p>
-        </p:txBody>
-      </p:sp>
-    </p:spTree>
-  </p:cSld>
-  <p:clrMapOvr>
-    <a:masterClrMapping/>
-  </p:clrMapOvr>
-</p:notes>
-</file>
-
-<file path=ppt/notesSlides/notesSlide4.xml><?xml version="1.0" encoding="utf-8"?>
-<p:notes xmlns:a="http://schemas.openxmlformats.org/drawingml/2006/main" xmlns:r="http://schemas.openxmlformats.org/officeDocument/2006/relationships" xmlns:p="http://schemas.openxmlformats.org/presentationml/2006/main">
-  <p:cSld>
-    <p:spTree>
-      <p:nvGrpSpPr>
-        <p:cNvPr id="1" name=""/>
-        <p:cNvGrpSpPr/>
-        <p:nvPr/>
-      </p:nvGrpSpPr>
-      <p:grpSpPr>
-        <a:xfrm>
-          <a:off x="0" y="0"/>
-          <a:ext cx="0" cy="0"/>
-          <a:chOff x="0" y="0"/>
-          <a:chExt cx="0" cy="0"/>
-        </a:xfrm>
-      </p:grpSpPr>
-      <p:sp>
-        <p:nvSpPr>
-          <p:cNvPr id="2" name="Slide Image Placeholder 1"/>
-          <p:cNvSpPr>
-            <a:spLocks noGrp="1" noRot="1" noChangeAspect="1"/>
-          </p:cNvSpPr>
-          <p:nvPr>
-            <p:ph type="sldImg"/>
-          </p:nvPr>
-        </p:nvSpPr>
-        <p:spPr/>
-      </p:sp>
-      <p:sp>
-        <p:nvSpPr>
-          <p:cNvPr id="3" name="Notes Placeholder 2"/>
-          <p:cNvSpPr>
-            <a:spLocks noGrp="1"/>
-          </p:cNvSpPr>
-          <p:nvPr>
-            <p:ph type="body" idx="1"/>
-          </p:nvPr>
-        </p:nvSpPr>
-        <p:spPr/>
-        <p:txBody>
-          <a:bodyPr/>
-          <a:lstStyle/>
-          <a:p>
-            <a:r>
-              <a:t>Exemplo baseado no código do professor. Biblioteca Auth0 java-jwt. Referências: https://github.com/auth0/java-jwt e https://github.com/auth0/java-jwt/blob/master/lib/src/main/java/com/auth0/jwt/JWTCreator.java</a:t>
-            </a:r>
-          </a:p>
-          <a:p>
-            <a:r>
-              <a:t>A autenticação deve ocorrer antes da emissão. Gerar um token não configura sua validação nas próximas requisições.</a:t>
-            </a:r>
-          </a:p>
-        </p:txBody>
-      </p:sp>
-      <p:sp>
-        <p:nvSpPr>
-          <p:cNvPr id="4" name="Slide Number Placeholder 3"/>
-          <p:cNvSpPr>
-            <a:spLocks noGrp="1"/>
-          </p:cNvSpPr>
-          <p:nvPr>
-            <p:ph type="sldNum" idx="5"/>
-          </p:nvPr>
-        </p:nvSpPr>
-        <p:spPr/>
-        <p:txBody>
-          <a:bodyPr/>
-          <a:lstStyle/>
-          <a:p>
-            <a:endParaRPr/>
-          </a:p>
-        </p:txBody>
-      </p:sp>
-    </p:spTree>
-  </p:cSld>
-  <p:clrMapOvr>
-    <a:masterClrMapping/>
-  </p:clrMapOvr>
-</p:notes>
-</file>
-
-<file path=ppt/notesSlides/notesSlide5.xml><?xml version="1.0" encoding="utf-8"?>
-<p:notes xmlns:a="http://schemas.openxmlformats.org/drawingml/2006/main" xmlns:r="http://schemas.openxmlformats.org/officeDocument/2006/relationships" xmlns:p="http://schemas.openxmlformats.org/presentationml/2006/main">
-  <p:cSld>
-    <p:spTree>
-      <p:nvGrpSpPr>
-        <p:cNvPr id="1" name=""/>
-        <p:cNvGrpSpPr/>
-        <p:nvPr/>
-      </p:nvGrpSpPr>
-      <p:grpSpPr>
-        <a:xfrm>
-          <a:off x="0" y="0"/>
-          <a:ext cx="0" cy="0"/>
-          <a:chOff x="0" y="0"/>
-          <a:chExt cx="0" cy="0"/>
-        </a:xfrm>
-      </p:grpSpPr>
-      <p:sp>
-        <p:nvSpPr>
-          <p:cNvPr id="2" name="Slide Image Placeholder 1"/>
-          <p:cNvSpPr>
-            <a:spLocks noGrp="1" noRot="1" noChangeAspect="1"/>
-          </p:cNvSpPr>
-          <p:nvPr>
-            <p:ph type="sldImg"/>
-          </p:nvPr>
-        </p:nvSpPr>
-        <p:spPr/>
-      </p:sp>
-      <p:sp>
-        <p:nvSpPr>
-          <p:cNvPr id="3" name="Notes Placeholder 2"/>
-          <p:cNvSpPr>
-            <a:spLocks noGrp="1"/>
-          </p:cNvSpPr>
-          <p:nvPr>
-            <p:ph type="body" idx="1"/>
-          </p:nvPr>
-        </p:nvSpPr>
-        <p:spPr/>
-        <p:txBody>
-          <a:bodyPr/>
-          <a:lstStyle/>
-          <a:p>
-            <a:r>
-              <a:t>Exemplo baseado no código do professor. Biblioteca Auth0 java-jwt. Referências: https://github.com/auth0/java-jwt e https://github.com/auth0/java-jwt/blob/master/lib/src/main/java/com/auth0/jwt/JWTCreator.java</a:t>
-            </a:r>
-          </a:p>
-          <a:p>
-            <a:r>
-              <a:t>A autenticação deve ocorrer antes da emissão. Gerar um token não configura sua validação nas próximas requisições.</a:t>
-            </a:r>
-          </a:p>
-        </p:txBody>
-      </p:sp>
-      <p:sp>
-        <p:nvSpPr>
-          <p:cNvPr id="4" name="Slide Number Placeholder 3"/>
-          <p:cNvSpPr>
-            <a:spLocks noGrp="1"/>
-          </p:cNvSpPr>
-          <p:nvPr>
-            <p:ph type="sldNum" idx="5"/>
-          </p:nvPr>
-        </p:nvSpPr>
-        <p:spPr/>
-        <p:txBody>
-          <a:bodyPr/>
-          <a:lstStyle/>
-          <a:p>
-            <a:endParaRPr/>
-          </a:p>
-        </p:txBody>
-      </p:sp>
-    </p:spTree>
-  </p:cSld>
-  <p:clrMapOvr>
-    <a:masterClrMapping/>
-  </p:clrMapOvr>
-</p:notes>
-</file>
-
-<file path=ppt/notesSlides/notesSlide6.xml><?xml version="1.0" encoding="utf-8"?>
-<p:notes xmlns:a="http://schemas.openxmlformats.org/drawingml/2006/main" xmlns:r="http://schemas.openxmlformats.org/officeDocument/2006/relationships" xmlns:p="http://schemas.openxmlformats.org/presentationml/2006/main">
-  <p:cSld>
-    <p:spTree>
-      <p:nvGrpSpPr>
-        <p:cNvPr id="1" name=""/>
-        <p:cNvGrpSpPr/>
-        <p:nvPr/>
-      </p:nvGrpSpPr>
-      <p:grpSpPr>
-        <a:xfrm>
-          <a:off x="0" y="0"/>
-          <a:ext cx="0" cy="0"/>
-          <a:chOff x="0" y="0"/>
-          <a:chExt cx="0" cy="0"/>
-        </a:xfrm>
-      </p:grpSpPr>
-      <p:sp>
-        <p:nvSpPr>
-          <p:cNvPr id="2" name="Slide Image Placeholder 1"/>
-          <p:cNvSpPr>
-            <a:spLocks noGrp="1" noRot="1" noChangeAspect="1"/>
-          </p:cNvSpPr>
-          <p:nvPr>
-            <p:ph type="sldImg"/>
-          </p:nvPr>
-        </p:nvSpPr>
-        <p:spPr/>
-      </p:sp>
-      <p:sp>
-        <p:nvSpPr>
-          <p:cNvPr id="3" name="Notes Placeholder 2"/>
-          <p:cNvSpPr>
-            <a:spLocks noGrp="1"/>
-          </p:cNvSpPr>
-          <p:nvPr>
-            <p:ph type="body" idx="1"/>
-          </p:nvPr>
-        </p:nvSpPr>
-        <p:spPr/>
-        <p:txBody>
-          <a:bodyPr/>
-          <a:lstStyle/>
-          <a:p>
-            <a:r>
-              <a:t>Exemplo baseado no código do professor. Biblioteca Auth0 java-jwt. Referências: https://github.com/auth0/java-jwt e https://github.com/auth0/java-jwt/blob/master/lib/src/main/java/com/auth0/jwt/JWTCreator.java</a:t>
-            </a:r>
-          </a:p>
-          <a:p>
-            <a:r>
-              <a:t>A autenticação deve ocorrer antes da emissão. Gerar um token não configura sua validação nas próximas requisições.</a:t>
-            </a:r>
-          </a:p>
-        </p:txBody>
-      </p:sp>
-      <p:sp>
-        <p:nvSpPr>
-          <p:cNvPr id="4" name="Slide Number Placeholder 3"/>
-          <p:cNvSpPr>
-            <a:spLocks noGrp="1"/>
-          </p:cNvSpPr>
-          <p:nvPr>
-            <p:ph type="sldNum" idx="5"/>
-          </p:nvPr>
-        </p:nvSpPr>
-        <p:spPr/>
-        <p:txBody>
-          <a:bodyPr/>
-          <a:lstStyle/>
-          <a:p>
-            <a:endParaRPr/>
-          </a:p>
-        </p:txBody>
-      </p:sp>
-    </p:spTree>
-  </p:cSld>
-  <p:clrMapOvr>
-    <a:masterClrMapping/>
-  </p:clrMapOvr>
-</p:notes>
-</file>
-
-<file path=ppt/notesSlides/notesSlide7.xml><?xml version="1.0" encoding="utf-8"?>
-<p:notes xmlns:a="http://schemas.openxmlformats.org/drawingml/2006/main" xmlns:r="http://schemas.openxmlformats.org/officeDocument/2006/relationships" xmlns:p="http://schemas.openxmlformats.org/presentationml/2006/main">
-  <p:cSld>
-    <p:spTree>
-      <p:nvGrpSpPr>
-        <p:cNvPr id="1" name=""/>
-        <p:cNvGrpSpPr/>
-        <p:nvPr/>
-      </p:nvGrpSpPr>
-      <p:grpSpPr>
-        <a:xfrm>
-          <a:off x="0" y="0"/>
-          <a:ext cx="0" cy="0"/>
-          <a:chOff x="0" y="0"/>
-          <a:chExt cx="0" cy="0"/>
-        </a:xfrm>
-      </p:grpSpPr>
-      <p:sp>
-        <p:nvSpPr>
-          <p:cNvPr id="2" name="Slide Image Placeholder 1"/>
-          <p:cNvSpPr>
-            <a:spLocks noGrp="1" noRot="1" noChangeAspect="1"/>
-          </p:cNvSpPr>
-          <p:nvPr>
-            <p:ph type="sldImg"/>
-          </p:nvPr>
-        </p:nvSpPr>
-        <p:spPr/>
-      </p:sp>
-      <p:sp>
-        <p:nvSpPr>
-          <p:cNvPr id="3" name="Notes Placeholder 2"/>
-          <p:cNvSpPr>
-            <a:spLocks noGrp="1"/>
-          </p:cNvSpPr>
-          <p:nvPr>
-            <p:ph type="body" idx="1"/>
-          </p:nvPr>
-        </p:nvSpPr>
-        <p:spPr/>
-        <p:txBody>
-          <a:bodyPr/>
-          <a:lstStyle/>
-          <a:p>
-            <a:r>
-              <a:t>Exemplo baseado no código do professor. Biblioteca Auth0 java-jwt. Referências: https://github.com/auth0/java-jwt e https://github.com/auth0/java-jwt/blob/master/lib/src/main/java/com/auth0/jwt/JWTCreator.java</a:t>
-            </a:r>
-          </a:p>
-          <a:p>
-            <a:r>
-              <a:t>A autenticação deve ocorrer antes da emissão. Gerar um token não configura sua validação nas próximas requisições.</a:t>
-            </a:r>
-          </a:p>
-        </p:txBody>
-      </p:sp>
-      <p:sp>
-        <p:nvSpPr>
-          <p:cNvPr id="4" name="Slide Number Placeholder 3"/>
-          <p:cNvSpPr>
-            <a:spLocks noGrp="1"/>
-          </p:cNvSpPr>
-          <p:nvPr>
-            <p:ph type="sldNum" idx="5"/>
-          </p:nvPr>
-        </p:nvSpPr>
-        <p:spPr/>
-        <p:txBody>
-          <a:bodyPr/>
-          <a:lstStyle/>
-          <a:p>
-            <a:endParaRPr/>
-          </a:p>
-        </p:txBody>
-      </p:sp>
-    </p:spTree>
-  </p:cSld>
-  <p:clrMapOvr>
-    <a:masterClrMapping/>
-  </p:clrMapOvr>
-</p:notes>
-</file>
-
-<file path=ppt/notesSlides/notesSlide8.xml><?xml version="1.0" encoding="utf-8"?>
-<p:notes xmlns:a="http://schemas.openxmlformats.org/drawingml/2006/main" xmlns:r="http://schemas.openxmlformats.org/officeDocument/2006/relationships" xmlns:p="http://schemas.openxmlformats.org/presentationml/2006/main">
-  <p:cSld>
-    <p:spTree>
-      <p:nvGrpSpPr>
-        <p:cNvPr id="1" name=""/>
-        <p:cNvGrpSpPr/>
-        <p:nvPr/>
-      </p:nvGrpSpPr>
-      <p:grpSpPr>
-        <a:xfrm>
-          <a:off x="0" y="0"/>
-          <a:ext cx="0" cy="0"/>
-          <a:chOff x="0" y="0"/>
-          <a:chExt cx="0" cy="0"/>
-        </a:xfrm>
-      </p:grpSpPr>
-      <p:sp>
-        <p:nvSpPr>
-          <p:cNvPr id="2" name="Slide Image Placeholder 1"/>
-          <p:cNvSpPr>
-            <a:spLocks noGrp="1" noRot="1" noChangeAspect="1"/>
-          </p:cNvSpPr>
-          <p:nvPr>
-            <p:ph type="sldImg"/>
-          </p:nvPr>
-        </p:nvSpPr>
-        <p:spPr/>
-      </p:sp>
-      <p:sp>
-        <p:nvSpPr>
-          <p:cNvPr id="3" name="Notes Placeholder 2"/>
-          <p:cNvSpPr>
-            <a:spLocks noGrp="1"/>
-          </p:cNvSpPr>
-          <p:nvPr>
-            <p:ph type="body" idx="1"/>
-          </p:nvPr>
-        </p:nvSpPr>
-        <p:spPr/>
-        <p:txBody>
-          <a:bodyPr/>
-          <a:lstStyle/>
-          <a:p>
-            <a:r>
-              <a:t>Exemplo baseado no código do professor. Biblioteca Auth0 java-jwt. Referências: https://github.com/auth0/java-jwt e https://github.com/auth0/java-jwt/blob/master/lib/src/main/java/com/auth0/jwt/JWTCreator.java</a:t>
-            </a:r>
-          </a:p>
-          <a:p>
-            <a:r>
-              <a:t>A autenticação deve ocorrer antes da emissão. Gerar um token não configura sua validação nas próximas requisições.</a:t>
-            </a:r>
-          </a:p>
-        </p:txBody>
-      </p:sp>
-      <p:sp>
-        <p:nvSpPr>
-          <p:cNvPr id="4" name="Slide Number Placeholder 3"/>
-          <p:cNvSpPr>
-            <a:spLocks noGrp="1"/>
-          </p:cNvSpPr>
-          <p:nvPr>
-            <p:ph type="sldNum" idx="5"/>
-          </p:nvPr>
-        </p:nvSpPr>
-        <p:spPr/>
-        <p:txBody>
-          <a:bodyPr/>
-          <a:lstStyle/>
-          <a:p>
-            <a:endParaRPr/>
-          </a:p>
-        </p:txBody>
-      </p:sp>
-    </p:spTree>
-  </p:cSld>
-  <p:clrMapOvr>
-    <a:masterClrMapping/>
-  </p:clrMapOvr>
-</p:notes>
-</file>
-
 <file path=ppt/slideLayouts/slideLayout1.xml><?xml version="1.0" encoding="utf-8"?>
 <p:sldLayout xmlns:a="http://schemas.openxmlformats.org/drawingml/2006/main" xmlns:r="http://schemas.openxmlformats.org/officeDocument/2006/relationships" xmlns:p="http://schemas.openxmlformats.org/presentationml/2006/main" type="title" preserve="1">
   <p:cSld name="Slide de Título">
@@ -1739,7 +1091,7 @@
           <a:p>
             <a:fld id="{CDD55C27-F8C6-4481-8569-CAC50CAE9F1F}" type="datetimeFigureOut">
               <a:rPr lang="pt-BR" smtClean="0"/>
-              <a:t>28/09/2026</a:t>
+              <a:t>29/09/2026</a:t>
             </a:fld>
             <a:endParaRPr lang="pt-BR"/>
           </a:p>
@@ -1876,7 +1228,7 @@
           <a:p>
             <a:fld id="{CDD55C27-F8C6-4481-8569-CAC50CAE9F1F}" type="datetimeFigureOut">
               <a:rPr lang="pt-BR" smtClean="0"/>
-              <a:t>28/09/2026</a:t>
+              <a:t>29/09/2026</a:t>
             </a:fld>
             <a:endParaRPr lang="pt-BR"/>
           </a:p>
@@ -2596,7 +1948,7 @@
           <a:p>
             <a:fld id="{CDD55C27-F8C6-4481-8569-CAC50CAE9F1F}" type="datetimeFigureOut">
               <a:rPr lang="pt-BR" smtClean="0"/>
-              <a:t>28/09/2026</a:t>
+              <a:t>29/09/2026</a:t>
             </a:fld>
             <a:endParaRPr lang="pt-BR"/>
           </a:p>
@@ -2776,7 +2128,7 @@
           <a:p>
             <a:fld id="{CDD55C27-F8C6-4481-8569-CAC50CAE9F1F}" type="datetimeFigureOut">
               <a:rPr lang="pt-BR" smtClean="0"/>
-              <a:t>28/09/2026</a:t>
+              <a:t>29/09/2026</a:t>
             </a:fld>
             <a:endParaRPr lang="pt-BR"/>
           </a:p>
@@ -2956,7 +2308,7 @@
           <a:p>
             <a:fld id="{CDD55C27-F8C6-4481-8569-CAC50CAE9F1F}" type="datetimeFigureOut">
               <a:rPr lang="pt-BR" smtClean="0"/>
-              <a:t>28/09/2026</a:t>
+              <a:t>29/09/2026</a:t>
             </a:fld>
             <a:endParaRPr lang="pt-BR"/>
           </a:p>
@@ -3167,7 +2519,7 @@
           <a:p>
             <a:fld id="{CDD55C27-F8C6-4481-8569-CAC50CAE9F1F}" type="datetimeFigureOut">
               <a:rPr lang="pt-BR" smtClean="0"/>
-              <a:t>28/09/2026</a:t>
+              <a:t>29/09/2026</a:t>
             </a:fld>
             <a:endParaRPr lang="pt-BR"/>
           </a:p>
@@ -3622,7 +2974,7 @@
           <a:p>
             <a:fld id="{CDD55C27-F8C6-4481-8569-CAC50CAE9F1F}" type="datetimeFigureOut">
               <a:rPr lang="pt-BR" smtClean="0"/>
-              <a:t>28/09/2026</a:t>
+              <a:t>29/09/2026</a:t>
             </a:fld>
             <a:endParaRPr lang="pt-BR"/>
           </a:p>
@@ -4228,7 +3580,7 @@
           <a:lstStyle/>
           <a:p>
             <a:r>
-              <a:rPr lang="pt-BR" b="1" dirty="0"/>
+              <a:rPr lang="pt-BR" dirty="0"/>
               <a:t>JSON Web Token (JWT)</a:t>
             </a:r>
           </a:p>
@@ -4297,7 +3649,7 @@
           <p:cNvPr id="2" name="Título 1">
             <a:extLst>
               <a:ext uri="{FF2B5EF4-FFF2-40B4-BE49-F238E27FC236}">
-                <a16:creationId xmlns:a16="http://schemas.microsoft.com/office/drawing/2014/main" id="{8738858E-69E2-8A32-4D8D-61A4750C2960}"/>
+                <a16:creationId xmlns:a16="http://schemas.microsoft.com/office/drawing/2014/main" id="{090DD734-2235-25E4-FFF7-171D3E5175D8}"/>
               </a:ext>
             </a:extLst>
           </p:cNvPr>
@@ -4310,248 +3662,49 @@
         </p:nvSpPr>
         <p:spPr/>
         <p:txBody>
-          <a:bodyPr>
-            <a:noAutofit/>
-          </a:bodyPr>
+          <a:bodyPr/>
           <a:lstStyle/>
           <a:p>
-            <a:pPr>
-              <a:defRPr sz="3000">
-                <a:solidFill>
-                  <a:srgbClr val="000000"/>
-                </a:solidFill>
-                <a:latin typeface="Calibri Light"/>
-                <a:ea typeface="Calibri Light"/>
-                <a:cs typeface="Calibri Light"/>
-              </a:defRPr>
-            </a:pPr>
-            <a:r>
-              <a:rPr sz="3000">
-                <a:solidFill>
-                  <a:srgbClr val="000000"/>
-                </a:solidFill>
-                <a:latin typeface="Calibri Light"/>
-                <a:ea typeface="Calibri Light"/>
-                <a:cs typeface="Calibri Light"/>
-              </a:rPr>
-              <a:t>Início da construção do token</a:t>
-            </a:r>
-          </a:p>
-        </p:txBody>
-      </p:sp>
-      <p:sp>
-        <p:nvSpPr>
-          <p:cNvPr id="6" name="Espaço Reservado para Conteúdo 5">
-            <a:extLst>
-              <a:ext uri="{FF2B5EF4-FFF2-40B4-BE49-F238E27FC236}">
-                <a16:creationId xmlns:a16="http://schemas.microsoft.com/office/drawing/2014/main" id="{B24F9431-18D8-4DC9-B9CC-1BCF1A71C18D}"/>
+            <a:r>
+              <a:rPr lang="pt-BR" dirty="0"/>
+              <a:t>Algoritmo e chave secreta</a:t>
+            </a:r>
+          </a:p>
+        </p:txBody>
+      </p:sp>
+      <p:sp>
+        <p:nvSpPr>
+          <p:cNvPr id="3" name="Espaço Reservado para Conteúdo 2">
+            <a:extLst>
+              <a:ext uri="{FF2B5EF4-FFF2-40B4-BE49-F238E27FC236}">
+                <a16:creationId xmlns:a16="http://schemas.microsoft.com/office/drawing/2014/main" id="{00668DE5-E4E8-447F-12B3-12EAB609513B}"/>
               </a:ext>
             </a:extLst>
           </p:cNvPr>
           <p:cNvSpPr>
             <a:spLocks noGrp="1"/>
           </p:cNvSpPr>
-          <p:nvPr/>
+          <p:nvPr>
+            <p:ph idx="1"/>
+          </p:nvPr>
         </p:nvSpPr>
         <p:spPr>
           <a:xfrm>
-            <a:off x="685800" y="1809750"/>
-            <a:ext cx="10820400" cy="809625"/>
+            <a:off x="592347" y="1844675"/>
+            <a:ext cx="11007306" cy="596600"/>
           </a:xfrm>
-          <a:prstGeom prst="rect">
-            <a:avLst/>
-          </a:prstGeom>
         </p:spPr>
         <p:txBody>
-          <a:bodyPr>
-            <a:noAutofit/>
-          </a:bodyPr>
-          <a:lstStyle>
-            <a:lvl1pPr marL="0" indent="0" algn="just" defTabSz="914400">
-              <a:lnSpc>
-                <a:spcPct val="150000"/>
-              </a:lnSpc>
-              <a:spcBef>
-                <a:spcPts val="0"/>
-              </a:spcBef>
-              <a:buFont typeface="Arial"/>
-              <a:buNone/>
-              <a:defRPr sz="2000" kern="1200">
-                <a:solidFill>
-                  <a:schemeClr val="tx1"/>
-                </a:solidFill>
-                <a:latin typeface="Times New Roman"/>
-                <a:ea typeface="Times New Roman"/>
-                <a:cs typeface="Times New Roman"/>
-              </a:defRPr>
-            </a:lvl1pPr>
-            <a:lvl2pPr marL="457200" indent="0" algn="just" defTabSz="914400">
-              <a:lnSpc>
-                <a:spcPct val="150000"/>
-              </a:lnSpc>
-              <a:spcBef>
-                <a:spcPts val="0"/>
-              </a:spcBef>
-              <a:buFont typeface="Arial"/>
-              <a:buNone/>
-              <a:defRPr sz="1600" kern="1200">
-                <a:solidFill>
-                  <a:schemeClr val="tx1"/>
-                </a:solidFill>
-                <a:latin typeface="Times New Roman"/>
-                <a:ea typeface="Times New Roman"/>
-                <a:cs typeface="Times New Roman"/>
-              </a:defRPr>
-            </a:lvl2pPr>
-            <a:lvl3pPr marL="914400" indent="0" algn="just" defTabSz="914400">
-              <a:lnSpc>
-                <a:spcPct val="150000"/>
-              </a:lnSpc>
-              <a:spcBef>
-                <a:spcPts val="0"/>
-              </a:spcBef>
-              <a:buFont typeface="Arial"/>
-              <a:buNone/>
-              <a:defRPr sz="1400" kern="1200">
-                <a:solidFill>
-                  <a:schemeClr val="tx1"/>
-                </a:solidFill>
-                <a:latin typeface="Times New Roman"/>
-                <a:ea typeface="Times New Roman"/>
-                <a:cs typeface="Times New Roman"/>
-              </a:defRPr>
-            </a:lvl3pPr>
-            <a:lvl4pPr marL="1371600" indent="0" algn="just" defTabSz="914400">
-              <a:lnSpc>
-                <a:spcPct val="150000"/>
-              </a:lnSpc>
-              <a:spcBef>
-                <a:spcPts val="0"/>
-              </a:spcBef>
-              <a:buFont typeface="Arial"/>
-              <a:buNone/>
-              <a:defRPr sz="1200" kern="1200">
-                <a:solidFill>
-                  <a:schemeClr val="tx1"/>
-                </a:solidFill>
-                <a:latin typeface="Times New Roman"/>
-                <a:ea typeface="Times New Roman"/>
-                <a:cs typeface="Times New Roman"/>
-              </a:defRPr>
-            </a:lvl4pPr>
-            <a:lvl5pPr marL="1828800" indent="0" algn="just" defTabSz="914400">
-              <a:lnSpc>
-                <a:spcPct val="150000"/>
-              </a:lnSpc>
-              <a:spcBef>
-                <a:spcPts val="0"/>
-              </a:spcBef>
-              <a:buFont typeface="Arial"/>
-              <a:buNone/>
-              <a:defRPr sz="1000" kern="1200">
-                <a:solidFill>
-                  <a:schemeClr val="tx1"/>
-                </a:solidFill>
-                <a:latin typeface="Times New Roman"/>
-                <a:ea typeface="Times New Roman"/>
-                <a:cs typeface="Times New Roman"/>
-              </a:defRPr>
-            </a:lvl5pPr>
-            <a:lvl6pPr marL="2514600" indent="-228600" algn="l" defTabSz="914400">
-              <a:lnSpc>
-                <a:spcPct val="90000"/>
-              </a:lnSpc>
-              <a:spcBef>
-                <a:spcPts val="500"/>
-              </a:spcBef>
-              <a:buFont typeface="Arial"/>
-              <a:buChar char="•"/>
-              <a:defRPr sz="1800" kern="1200">
-                <a:solidFill>
-                  <a:schemeClr val="tx1"/>
-                </a:solidFill>
-                <a:latin typeface="+mn-lt"/>
-                <a:ea typeface="+mn-lt"/>
-                <a:cs typeface="+mn-lt"/>
-              </a:defRPr>
-            </a:lvl6pPr>
-            <a:lvl7pPr marL="2971800" indent="-228600" algn="l" defTabSz="914400">
-              <a:lnSpc>
-                <a:spcPct val="90000"/>
-              </a:lnSpc>
-              <a:spcBef>
-                <a:spcPts val="500"/>
-              </a:spcBef>
-              <a:buFont typeface="Arial"/>
-              <a:buChar char="•"/>
-              <a:defRPr sz="1800" kern="1200">
-                <a:solidFill>
-                  <a:schemeClr val="tx1"/>
-                </a:solidFill>
-                <a:latin typeface="+mn-lt"/>
-                <a:ea typeface="+mn-lt"/>
-                <a:cs typeface="+mn-lt"/>
-              </a:defRPr>
-            </a:lvl7pPr>
-            <a:lvl8pPr marL="3429000" indent="-228600" algn="l" defTabSz="914400">
-              <a:lnSpc>
-                <a:spcPct val="90000"/>
-              </a:lnSpc>
-              <a:spcBef>
-                <a:spcPts val="500"/>
-              </a:spcBef>
-              <a:buFont typeface="Arial"/>
-              <a:buChar char="•"/>
-              <a:defRPr sz="1800" kern="1200">
-                <a:solidFill>
-                  <a:schemeClr val="tx1"/>
-                </a:solidFill>
-                <a:latin typeface="+mn-lt"/>
-                <a:ea typeface="+mn-lt"/>
-                <a:cs typeface="+mn-lt"/>
-              </a:defRPr>
-            </a:lvl8pPr>
-            <a:lvl9pPr marL="3886200" indent="-228600" algn="l" defTabSz="914400">
-              <a:lnSpc>
-                <a:spcPct val="90000"/>
-              </a:lnSpc>
-              <a:spcBef>
-                <a:spcPts val="500"/>
-              </a:spcBef>
-              <a:buFont typeface="Arial"/>
-              <a:buChar char="•"/>
-              <a:defRPr sz="1800" kern="1200">
-                <a:solidFill>
-                  <a:schemeClr val="tx1"/>
-                </a:solidFill>
-                <a:latin typeface="+mn-lt"/>
-                <a:ea typeface="+mn-lt"/>
-                <a:cs typeface="+mn-lt"/>
-              </a:defRPr>
-            </a:lvl9pPr>
-          </a:lstStyle>
-          <a:p>
-            <a:pPr algn="l">
-              <a:defRPr sz="2175">
-                <a:solidFill>
-                  <a:srgbClr val="000000"/>
-                </a:solidFill>
-                <a:latin typeface="Calibri"/>
-                <a:ea typeface="Calibri"/>
-                <a:cs typeface="Calibri"/>
-              </a:defRPr>
-            </a:pPr>
-            <a:r>
-              <a:rPr sz="2175">
-                <a:solidFill>
-                  <a:srgbClr val="000000"/>
-                </a:solidFill>
-                <a:latin typeface="Calibri"/>
-                <a:ea typeface="Calibri"/>
-                <a:cs typeface="Calibri"/>
-              </a:rPr>
-              <a:t>JWT.create() inicia a construção de um novo JWT.</a:t>
-            </a:r>
+          <a:bodyPr/>
+          <a:lstStyle/>
+          <a:p>
+            <a:r>
+              <a:rPr lang="pt-BR" dirty="0"/>
+              <a:t>HMAC256 define a assinatura HMAC com SHA-256.</a:t>
+            </a:r>
+          </a:p>
+          <a:p>
+            <a:endParaRPr lang="pt-BR" dirty="0"/>
           </a:p>
         </p:txBody>
       </p:sp>
@@ -4571,8 +3724,8 @@
         </p:nvSpPr>
         <p:spPr>
           <a:xfrm>
-            <a:off x="857250" y="2762250"/>
-            <a:ext cx="10477500" cy="1809750"/>
+            <a:off x="2136000" y="3242303"/>
+            <a:ext cx="7920000" cy="1041999"/>
           </a:xfrm>
           <a:prstGeom prst="roundRect">
             <a:avLst>
@@ -4612,8 +3765,8 @@
         </p:nvSpPr>
         <p:spPr>
           <a:xfrm>
-            <a:off x="1143000" y="3190875"/>
-            <a:ext cx="10001250" cy="2865120"/>
+            <a:off x="2613085" y="3564243"/>
+            <a:ext cx="6965830" cy="398118"/>
           </a:xfrm>
           <a:prstGeom prst="rect">
             <a:avLst/>
@@ -4626,7 +3779,7 @@
           <a:lstStyle/>
           <a:p>
             <a:pPr algn="l">
-              <a:defRPr sz="2400">
+              <a:defRPr sz="2100">
                 <a:solidFill>
                   <a:srgbClr val="D4D4D4"/>
                 </a:solidFill>
@@ -4636,103 +3789,251 @@
               </a:defRPr>
             </a:pPr>
             <a:r>
-              <a:rPr sz="2400">
-                <a:solidFill>
-                  <a:srgbClr val="D4D4D4"/>
-                </a:solidFill>
-                <a:latin typeface="Consolas"/>
-                <a:ea typeface="Consolas"/>
-                <a:cs typeface="Consolas"/>
-              </a:rPr>
-              <a:t>return JWT.create()</a:t>
-            </a:r>
-          </a:p>
-        </p:txBody>
-      </p:sp>
-      <p:sp>
-        <p:nvSpPr>
-          <p:cNvPr id="12" name="Retângulo 11">
-            <a:extLst>
-              <a:ext uri="{FF2B5EF4-FFF2-40B4-BE49-F238E27FC236}">
-                <a16:creationId xmlns:a16="http://schemas.microsoft.com/office/drawing/2014/main" id="{330C5A26-7753-4D50-BCEF-4E3BB0EFA7A0}"/>
-              </a:ext>
-            </a:extLst>
-          </p:cNvPr>
-          <p:cNvSpPr>
-            <a:spLocks noGrp="1"/>
+              <a:rPr sz="2100" dirty="0">
+                <a:solidFill>
+                  <a:srgbClr val="D4D4D4"/>
+                </a:solidFill>
+                <a:latin typeface="Consolas"/>
+                <a:ea typeface="Consolas"/>
+                <a:cs typeface="Consolas"/>
+              </a:rPr>
+              <a:t>var </a:t>
+            </a:r>
+            <a:r>
+              <a:rPr sz="2100" dirty="0" err="1">
+                <a:solidFill>
+                  <a:srgbClr val="D4D4D4"/>
+                </a:solidFill>
+                <a:latin typeface="Consolas"/>
+                <a:ea typeface="Consolas"/>
+                <a:cs typeface="Consolas"/>
+              </a:rPr>
+              <a:t>algoritmo</a:t>
+            </a:r>
+            <a:r>
+              <a:rPr sz="2100" dirty="0">
+                <a:solidFill>
+                  <a:srgbClr val="D4D4D4"/>
+                </a:solidFill>
+                <a:latin typeface="Consolas"/>
+                <a:ea typeface="Consolas"/>
+                <a:cs typeface="Consolas"/>
+              </a:rPr>
+              <a:t> = Algorithm.HMAC256("12345678");</a:t>
+            </a:r>
+          </a:p>
+        </p:txBody>
+      </p:sp>
+      <p:sp>
+        <p:nvSpPr>
+          <p:cNvPr id="5" name="Espaço Reservado para Conteúdo 2">
+            <a:extLst>
+              <a:ext uri="{FF2B5EF4-FFF2-40B4-BE49-F238E27FC236}">
+                <a16:creationId xmlns:a16="http://schemas.microsoft.com/office/drawing/2014/main" id="{F1C4A8C3-4972-8082-0945-48E2FDC82600}"/>
+              </a:ext>
+            </a:extLst>
+          </p:cNvPr>
+          <p:cNvSpPr txBox="1">
+            <a:spLocks/>
           </p:cNvSpPr>
           <p:nvPr/>
         </p:nvSpPr>
         <p:spPr>
           <a:xfrm>
-            <a:off x="685800" y="4905375"/>
-            <a:ext cx="10820400" cy="1333500"/>
+            <a:off x="592347" y="5085331"/>
+            <a:ext cx="11007306" cy="1041999"/>
           </a:xfrm>
           <a:prstGeom prst="rect">
             <a:avLst/>
           </a:prstGeom>
-          <a:noFill/>
-          <a:ln w="0">
-            <a:noFill/>
-          </a:ln>
         </p:spPr>
         <p:txBody>
-          <a:bodyPr>
-            <a:noAutofit/>
-          </a:bodyPr>
-          <a:lstStyle/>
-          <a:p>
-            <a:pPr algn="l">
-              <a:defRPr sz="2100">
-                <a:solidFill>
-                  <a:srgbClr val="000000"/>
-                </a:solidFill>
-                <a:latin typeface="Calibri"/>
-                <a:ea typeface="Calibri"/>
-                <a:cs typeface="Calibri"/>
-              </a:defRPr>
-            </a:pPr>
-            <a:r>
-              <a:rPr sz="2100">
-                <a:solidFill>
-                  <a:srgbClr val="000000"/>
-                </a:solidFill>
-                <a:latin typeface="Calibri"/>
-                <a:ea typeface="Calibri"/>
-                <a:cs typeface="Calibri"/>
-              </a:rPr>
-              <a:t>Os métodos seguintes adicionam informações ao token.</a:t>
-            </a:r>
-          </a:p>
-          <a:p>
-            <a:pPr algn="l">
-              <a:defRPr sz="2100">
-                <a:solidFill>
-                  <a:srgbClr val="000000"/>
-                </a:solidFill>
-                <a:latin typeface="Calibri"/>
-                <a:ea typeface="Calibri"/>
-                <a:cs typeface="Calibri"/>
-              </a:defRPr>
-            </a:pPr>
-            <a:r>
-              <a:rPr sz="2100">
-                <a:solidFill>
-                  <a:srgbClr val="000000"/>
-                </a:solidFill>
-                <a:latin typeface="Calibri"/>
-                <a:ea typeface="Calibri"/>
-                <a:cs typeface="Calibri"/>
-              </a:rPr>
-              <a:t>O return devolverá a String produzida por sign().</a:t>
-            </a:r>
+          <a:bodyPr/>
+          <a:lstStyle>
+            <a:lvl1pPr marL="0" indent="0" algn="just" defTabSz="914400" rtl="0" eaLnBrk="1" latinLnBrk="0" hangingPunct="1">
+              <a:lnSpc>
+                <a:spcPct val="150000"/>
+              </a:lnSpc>
+              <a:spcBef>
+                <a:spcPts val="0"/>
+              </a:spcBef>
+              <a:buFont typeface="Arial" panose="020B0604020202020204" pitchFamily="34" charset="0"/>
+              <a:buNone/>
+              <a:defRPr sz="2000" kern="1200">
+                <a:solidFill>
+                  <a:schemeClr val="tx1"/>
+                </a:solidFill>
+                <a:latin typeface="Times New Roman" panose="02020603050405020304" pitchFamily="18" charset="0"/>
+                <a:ea typeface="+mn-ea"/>
+                <a:cs typeface="Times New Roman" panose="02020603050405020304" pitchFamily="18" charset="0"/>
+              </a:defRPr>
+            </a:lvl1pPr>
+            <a:lvl2pPr marL="457200" indent="0" algn="just" defTabSz="914400" rtl="0" eaLnBrk="1" latinLnBrk="0" hangingPunct="1">
+              <a:lnSpc>
+                <a:spcPct val="150000"/>
+              </a:lnSpc>
+              <a:spcBef>
+                <a:spcPts val="0"/>
+              </a:spcBef>
+              <a:buFont typeface="Arial" panose="020B0604020202020204" pitchFamily="34" charset="0"/>
+              <a:buNone/>
+              <a:defRPr sz="1600" kern="1200">
+                <a:solidFill>
+                  <a:schemeClr val="tx1"/>
+                </a:solidFill>
+                <a:latin typeface="Times New Roman" panose="02020603050405020304" pitchFamily="18" charset="0"/>
+                <a:ea typeface="+mn-ea"/>
+                <a:cs typeface="Times New Roman" panose="02020603050405020304" pitchFamily="18" charset="0"/>
+              </a:defRPr>
+            </a:lvl2pPr>
+            <a:lvl3pPr marL="914400" indent="0" algn="just" defTabSz="914400" rtl="0" eaLnBrk="1" latinLnBrk="0" hangingPunct="1">
+              <a:lnSpc>
+                <a:spcPct val="150000"/>
+              </a:lnSpc>
+              <a:spcBef>
+                <a:spcPts val="0"/>
+              </a:spcBef>
+              <a:buFont typeface="Arial" panose="020B0604020202020204" pitchFamily="34" charset="0"/>
+              <a:buNone/>
+              <a:defRPr sz="1400" kern="1200">
+                <a:solidFill>
+                  <a:schemeClr val="tx1"/>
+                </a:solidFill>
+                <a:latin typeface="Times New Roman" panose="02020603050405020304" pitchFamily="18" charset="0"/>
+                <a:ea typeface="+mn-ea"/>
+                <a:cs typeface="Times New Roman" panose="02020603050405020304" pitchFamily="18" charset="0"/>
+              </a:defRPr>
+            </a:lvl3pPr>
+            <a:lvl4pPr marL="1371600" indent="0" algn="just" defTabSz="914400" rtl="0" eaLnBrk="1" latinLnBrk="0" hangingPunct="1">
+              <a:lnSpc>
+                <a:spcPct val="150000"/>
+              </a:lnSpc>
+              <a:spcBef>
+                <a:spcPts val="0"/>
+              </a:spcBef>
+              <a:buFont typeface="Arial" panose="020B0604020202020204" pitchFamily="34" charset="0"/>
+              <a:buNone/>
+              <a:defRPr sz="1200" kern="1200">
+                <a:solidFill>
+                  <a:schemeClr val="tx1"/>
+                </a:solidFill>
+                <a:latin typeface="Times New Roman" panose="02020603050405020304" pitchFamily="18" charset="0"/>
+                <a:ea typeface="+mn-ea"/>
+                <a:cs typeface="Times New Roman" panose="02020603050405020304" pitchFamily="18" charset="0"/>
+              </a:defRPr>
+            </a:lvl4pPr>
+            <a:lvl5pPr marL="1828800" indent="0" algn="just" defTabSz="914400" rtl="0" eaLnBrk="1" latinLnBrk="0" hangingPunct="1">
+              <a:lnSpc>
+                <a:spcPct val="150000"/>
+              </a:lnSpc>
+              <a:spcBef>
+                <a:spcPts val="0"/>
+              </a:spcBef>
+              <a:buFont typeface="Arial" panose="020B0604020202020204" pitchFamily="34" charset="0"/>
+              <a:buNone/>
+              <a:defRPr sz="1000" kern="1200">
+                <a:solidFill>
+                  <a:schemeClr val="tx1"/>
+                </a:solidFill>
+                <a:latin typeface="Times New Roman" panose="02020603050405020304" pitchFamily="18" charset="0"/>
+                <a:ea typeface="+mn-ea"/>
+                <a:cs typeface="Times New Roman" panose="02020603050405020304" pitchFamily="18" charset="0"/>
+              </a:defRPr>
+            </a:lvl5pPr>
+            <a:lvl6pPr marL="2514600" indent="-228600" algn="l" defTabSz="914400" rtl="0" eaLnBrk="1" latinLnBrk="0" hangingPunct="1">
+              <a:lnSpc>
+                <a:spcPct val="90000"/>
+              </a:lnSpc>
+              <a:spcBef>
+                <a:spcPts val="500"/>
+              </a:spcBef>
+              <a:buFont typeface="Arial" panose="020B0604020202020204" pitchFamily="34" charset="0"/>
+              <a:buChar char="•"/>
+              <a:defRPr sz="1800" kern="1200">
+                <a:solidFill>
+                  <a:schemeClr val="tx1"/>
+                </a:solidFill>
+                <a:latin typeface="+mn-lt"/>
+                <a:ea typeface="+mn-ea"/>
+                <a:cs typeface="+mn-cs"/>
+              </a:defRPr>
+            </a:lvl6pPr>
+            <a:lvl7pPr marL="2971800" indent="-228600" algn="l" defTabSz="914400" rtl="0" eaLnBrk="1" latinLnBrk="0" hangingPunct="1">
+              <a:lnSpc>
+                <a:spcPct val="90000"/>
+              </a:lnSpc>
+              <a:spcBef>
+                <a:spcPts val="500"/>
+              </a:spcBef>
+              <a:buFont typeface="Arial" panose="020B0604020202020204" pitchFamily="34" charset="0"/>
+              <a:buChar char="•"/>
+              <a:defRPr sz="1800" kern="1200">
+                <a:solidFill>
+                  <a:schemeClr val="tx1"/>
+                </a:solidFill>
+                <a:latin typeface="+mn-lt"/>
+                <a:ea typeface="+mn-ea"/>
+                <a:cs typeface="+mn-cs"/>
+              </a:defRPr>
+            </a:lvl7pPr>
+            <a:lvl8pPr marL="3429000" indent="-228600" algn="l" defTabSz="914400" rtl="0" eaLnBrk="1" latinLnBrk="0" hangingPunct="1">
+              <a:lnSpc>
+                <a:spcPct val="90000"/>
+              </a:lnSpc>
+              <a:spcBef>
+                <a:spcPts val="500"/>
+              </a:spcBef>
+              <a:buFont typeface="Arial" panose="020B0604020202020204" pitchFamily="34" charset="0"/>
+              <a:buChar char="•"/>
+              <a:defRPr sz="1800" kern="1200">
+                <a:solidFill>
+                  <a:schemeClr val="tx1"/>
+                </a:solidFill>
+                <a:latin typeface="+mn-lt"/>
+                <a:ea typeface="+mn-ea"/>
+                <a:cs typeface="+mn-cs"/>
+              </a:defRPr>
+            </a:lvl8pPr>
+            <a:lvl9pPr marL="3886200" indent="-228600" algn="l" defTabSz="914400" rtl="0" eaLnBrk="1" latinLnBrk="0" hangingPunct="1">
+              <a:lnSpc>
+                <a:spcPct val="90000"/>
+              </a:lnSpc>
+              <a:spcBef>
+                <a:spcPts val="500"/>
+              </a:spcBef>
+              <a:buFont typeface="Arial" panose="020B0604020202020204" pitchFamily="34" charset="0"/>
+              <a:buChar char="•"/>
+              <a:defRPr sz="1800" kern="1200">
+                <a:solidFill>
+                  <a:schemeClr val="tx1"/>
+                </a:solidFill>
+                <a:latin typeface="+mn-lt"/>
+                <a:ea typeface="+mn-ea"/>
+                <a:cs typeface="+mn-cs"/>
+              </a:defRPr>
+            </a:lvl9pPr>
+          </a:lstStyle>
+          <a:p>
+            <a:r>
+              <a:rPr lang="pt-BR" dirty="0"/>
+              <a:t>A chave secreta participa da assinatura e da verificação.</a:t>
+            </a:r>
+          </a:p>
+          <a:p>
+            <a:r>
+              <a:rPr lang="pt-BR" dirty="0"/>
+              <a:t>“12345678” é didática. Em produção, use uma chave forte fora do código.</a:t>
+            </a:r>
+          </a:p>
+          <a:p>
+            <a:endParaRPr lang="pt-BR" dirty="0"/>
           </a:p>
         </p:txBody>
       </p:sp>
     </p:spTree>
     <p:extLst>
       <p:ext uri="{BB962C8B-B14F-4D97-AF65-F5344CB8AC3E}">
-        <p14:creationId xmlns:p14="http://schemas.microsoft.com/office/powerpoint/2010/main" val="3265046005"/>
+        <p14:creationId xmlns:p14="http://schemas.microsoft.com/office/powerpoint/2010/main" val="3550031997"/>
       </p:ext>
     </p:extLst>
   </p:cSld>
@@ -4764,7 +4065,7 @@
           <p:cNvPr id="2" name="Título 1">
             <a:extLst>
               <a:ext uri="{FF2B5EF4-FFF2-40B4-BE49-F238E27FC236}">
-                <a16:creationId xmlns:a16="http://schemas.microsoft.com/office/drawing/2014/main" id="{8738858E-69E2-8A32-4D8D-61A4750C2960}"/>
+                <a16:creationId xmlns:a16="http://schemas.microsoft.com/office/drawing/2014/main" id="{64BFDFF7-BA76-E300-808A-1A1E7E4C30CD}"/>
               </a:ext>
             </a:extLst>
           </p:cNvPr>
@@ -4777,248 +4078,53 @@
         </p:nvSpPr>
         <p:spPr/>
         <p:txBody>
-          <a:bodyPr>
-            <a:noAutofit/>
-          </a:bodyPr>
+          <a:bodyPr/>
           <a:lstStyle/>
           <a:p>
-            <a:pPr>
-              <a:defRPr sz="3000">
-                <a:solidFill>
-                  <a:srgbClr val="000000"/>
-                </a:solidFill>
-                <a:latin typeface="Calibri Light"/>
-                <a:ea typeface="Calibri Light"/>
-                <a:cs typeface="Calibri Light"/>
-              </a:defRPr>
-            </a:pPr>
-            <a:r>
-              <a:rPr sz="3000">
-                <a:solidFill>
-                  <a:srgbClr val="000000"/>
-                </a:solidFill>
-                <a:latin typeface="Calibri Light"/>
-                <a:ea typeface="Calibri Light"/>
-                <a:cs typeface="Calibri Light"/>
-              </a:rPr>
-              <a:t>Emissor do token</a:t>
-            </a:r>
-          </a:p>
-        </p:txBody>
-      </p:sp>
-      <p:sp>
-        <p:nvSpPr>
-          <p:cNvPr id="6" name="Espaço Reservado para Conteúdo 5">
-            <a:extLst>
-              <a:ext uri="{FF2B5EF4-FFF2-40B4-BE49-F238E27FC236}">
-                <a16:creationId xmlns:a16="http://schemas.microsoft.com/office/drawing/2014/main" id="{B24F9431-18D8-4DC9-B9CC-1BCF1A71C18D}"/>
+            <a:r>
+              <a:rPr lang="pt-BR" dirty="0"/>
+              <a:t>Início da construção do token</a:t>
+            </a:r>
+          </a:p>
+        </p:txBody>
+      </p:sp>
+      <p:sp>
+        <p:nvSpPr>
+          <p:cNvPr id="3" name="Espaço Reservado para Conteúdo 2">
+            <a:extLst>
+              <a:ext uri="{FF2B5EF4-FFF2-40B4-BE49-F238E27FC236}">
+                <a16:creationId xmlns:a16="http://schemas.microsoft.com/office/drawing/2014/main" id="{CB557825-BE28-F1FA-01D3-270CD2A32731}"/>
               </a:ext>
             </a:extLst>
           </p:cNvPr>
           <p:cNvSpPr>
             <a:spLocks noGrp="1"/>
           </p:cNvSpPr>
-          <p:nvPr/>
+          <p:nvPr>
+            <p:ph idx="1"/>
+          </p:nvPr>
         </p:nvSpPr>
         <p:spPr>
           <a:xfrm>
-            <a:off x="685800" y="1809750"/>
-            <a:ext cx="10820400" cy="809625"/>
+            <a:off x="592347" y="1844675"/>
+            <a:ext cx="11007306" cy="691491"/>
           </a:xfrm>
-          <a:prstGeom prst="rect">
-            <a:avLst/>
-          </a:prstGeom>
         </p:spPr>
         <p:txBody>
-          <a:bodyPr>
-            <a:noAutofit/>
-          </a:bodyPr>
-          <a:lstStyle>
-            <a:lvl1pPr marL="0" indent="0" algn="just" defTabSz="914400">
-              <a:lnSpc>
-                <a:spcPct val="150000"/>
-              </a:lnSpc>
-              <a:spcBef>
-                <a:spcPts val="0"/>
-              </a:spcBef>
-              <a:buFont typeface="Arial"/>
-              <a:buNone/>
-              <a:defRPr sz="2000" kern="1200">
-                <a:solidFill>
-                  <a:schemeClr val="tx1"/>
-                </a:solidFill>
-                <a:latin typeface="Times New Roman"/>
-                <a:ea typeface="Times New Roman"/>
-                <a:cs typeface="Times New Roman"/>
-              </a:defRPr>
-            </a:lvl1pPr>
-            <a:lvl2pPr marL="457200" indent="0" algn="just" defTabSz="914400">
-              <a:lnSpc>
-                <a:spcPct val="150000"/>
-              </a:lnSpc>
-              <a:spcBef>
-                <a:spcPts val="0"/>
-              </a:spcBef>
-              <a:buFont typeface="Arial"/>
-              <a:buNone/>
-              <a:defRPr sz="1600" kern="1200">
-                <a:solidFill>
-                  <a:schemeClr val="tx1"/>
-                </a:solidFill>
-                <a:latin typeface="Times New Roman"/>
-                <a:ea typeface="Times New Roman"/>
-                <a:cs typeface="Times New Roman"/>
-              </a:defRPr>
-            </a:lvl2pPr>
-            <a:lvl3pPr marL="914400" indent="0" algn="just" defTabSz="914400">
-              <a:lnSpc>
-                <a:spcPct val="150000"/>
-              </a:lnSpc>
-              <a:spcBef>
-                <a:spcPts val="0"/>
-              </a:spcBef>
-              <a:buFont typeface="Arial"/>
-              <a:buNone/>
-              <a:defRPr sz="1400" kern="1200">
-                <a:solidFill>
-                  <a:schemeClr val="tx1"/>
-                </a:solidFill>
-                <a:latin typeface="Times New Roman"/>
-                <a:ea typeface="Times New Roman"/>
-                <a:cs typeface="Times New Roman"/>
-              </a:defRPr>
-            </a:lvl3pPr>
-            <a:lvl4pPr marL="1371600" indent="0" algn="just" defTabSz="914400">
-              <a:lnSpc>
-                <a:spcPct val="150000"/>
-              </a:lnSpc>
-              <a:spcBef>
-                <a:spcPts val="0"/>
-              </a:spcBef>
-              <a:buFont typeface="Arial"/>
-              <a:buNone/>
-              <a:defRPr sz="1200" kern="1200">
-                <a:solidFill>
-                  <a:schemeClr val="tx1"/>
-                </a:solidFill>
-                <a:latin typeface="Times New Roman"/>
-                <a:ea typeface="Times New Roman"/>
-                <a:cs typeface="Times New Roman"/>
-              </a:defRPr>
-            </a:lvl4pPr>
-            <a:lvl5pPr marL="1828800" indent="0" algn="just" defTabSz="914400">
-              <a:lnSpc>
-                <a:spcPct val="150000"/>
-              </a:lnSpc>
-              <a:spcBef>
-                <a:spcPts val="0"/>
-              </a:spcBef>
-              <a:buFont typeface="Arial"/>
-              <a:buNone/>
-              <a:defRPr sz="1000" kern="1200">
-                <a:solidFill>
-                  <a:schemeClr val="tx1"/>
-                </a:solidFill>
-                <a:latin typeface="Times New Roman"/>
-                <a:ea typeface="Times New Roman"/>
-                <a:cs typeface="Times New Roman"/>
-              </a:defRPr>
-            </a:lvl5pPr>
-            <a:lvl6pPr marL="2514600" indent="-228600" algn="l" defTabSz="914400">
-              <a:lnSpc>
-                <a:spcPct val="90000"/>
-              </a:lnSpc>
-              <a:spcBef>
-                <a:spcPts val="500"/>
-              </a:spcBef>
-              <a:buFont typeface="Arial"/>
-              <a:buChar char="•"/>
-              <a:defRPr sz="1800" kern="1200">
-                <a:solidFill>
-                  <a:schemeClr val="tx1"/>
-                </a:solidFill>
-                <a:latin typeface="+mn-lt"/>
-                <a:ea typeface="+mn-lt"/>
-                <a:cs typeface="+mn-lt"/>
-              </a:defRPr>
-            </a:lvl6pPr>
-            <a:lvl7pPr marL="2971800" indent="-228600" algn="l" defTabSz="914400">
-              <a:lnSpc>
-                <a:spcPct val="90000"/>
-              </a:lnSpc>
-              <a:spcBef>
-                <a:spcPts val="500"/>
-              </a:spcBef>
-              <a:buFont typeface="Arial"/>
-              <a:buChar char="•"/>
-              <a:defRPr sz="1800" kern="1200">
-                <a:solidFill>
-                  <a:schemeClr val="tx1"/>
-                </a:solidFill>
-                <a:latin typeface="+mn-lt"/>
-                <a:ea typeface="+mn-lt"/>
-                <a:cs typeface="+mn-lt"/>
-              </a:defRPr>
-            </a:lvl7pPr>
-            <a:lvl8pPr marL="3429000" indent="-228600" algn="l" defTabSz="914400">
-              <a:lnSpc>
-                <a:spcPct val="90000"/>
-              </a:lnSpc>
-              <a:spcBef>
-                <a:spcPts val="500"/>
-              </a:spcBef>
-              <a:buFont typeface="Arial"/>
-              <a:buChar char="•"/>
-              <a:defRPr sz="1800" kern="1200">
-                <a:solidFill>
-                  <a:schemeClr val="tx1"/>
-                </a:solidFill>
-                <a:latin typeface="+mn-lt"/>
-                <a:ea typeface="+mn-lt"/>
-                <a:cs typeface="+mn-lt"/>
-              </a:defRPr>
-            </a:lvl8pPr>
-            <a:lvl9pPr marL="3886200" indent="-228600" algn="l" defTabSz="914400">
-              <a:lnSpc>
-                <a:spcPct val="90000"/>
-              </a:lnSpc>
-              <a:spcBef>
-                <a:spcPts val="500"/>
-              </a:spcBef>
-              <a:buFont typeface="Arial"/>
-              <a:buChar char="•"/>
-              <a:defRPr sz="1800" kern="1200">
-                <a:solidFill>
-                  <a:schemeClr val="tx1"/>
-                </a:solidFill>
-                <a:latin typeface="+mn-lt"/>
-                <a:ea typeface="+mn-lt"/>
-                <a:cs typeface="+mn-lt"/>
-              </a:defRPr>
-            </a:lvl9pPr>
-          </a:lstStyle>
-          <a:p>
-            <a:pPr algn="l">
-              <a:defRPr sz="2175">
-                <a:solidFill>
-                  <a:srgbClr val="000000"/>
-                </a:solidFill>
-                <a:latin typeface="Calibri"/>
-                <a:ea typeface="Calibri"/>
-                <a:cs typeface="Calibri"/>
-              </a:defRPr>
-            </a:pPr>
-            <a:r>
-              <a:rPr sz="2175">
-                <a:solidFill>
-                  <a:srgbClr val="000000"/>
-                </a:solidFill>
-                <a:latin typeface="Calibri"/>
-                <a:ea typeface="Calibri"/>
-                <a:cs typeface="Calibri"/>
-              </a:rPr>
-              <a:t>withIssuer() informa qual aplicação emitiu o token.</a:t>
-            </a:r>
+          <a:bodyPr/>
+          <a:lstStyle/>
+          <a:p>
+            <a:r>
+              <a:rPr lang="pt-BR" dirty="0" err="1"/>
+              <a:t>JWT.create</a:t>
+            </a:r>
+            <a:r>
+              <a:rPr lang="pt-BR" dirty="0"/>
+              <a:t>() inicia a construção de um novo JWT.</a:t>
+            </a:r>
+          </a:p>
+          <a:p>
+            <a:endParaRPr lang="pt-BR" dirty="0"/>
           </a:p>
         </p:txBody>
       </p:sp>
@@ -5038,8 +4144,8 @@
         </p:nvSpPr>
         <p:spPr>
           <a:xfrm>
-            <a:off x="857250" y="2762250"/>
-            <a:ext cx="10477500" cy="1809750"/>
+            <a:off x="2136000" y="3165901"/>
+            <a:ext cx="7920000" cy="1231780"/>
           </a:xfrm>
           <a:prstGeom prst="roundRect">
             <a:avLst>
@@ -5079,8 +4185,8 @@
         </p:nvSpPr>
         <p:spPr>
           <a:xfrm>
-            <a:off x="1143000" y="3190875"/>
-            <a:ext cx="10001250" cy="2865120"/>
+            <a:off x="2524916" y="3539802"/>
+            <a:ext cx="3515264" cy="483978"/>
           </a:xfrm>
           <a:prstGeom prst="rect">
             <a:avLst/>
@@ -5103,103 +4209,275 @@
               </a:defRPr>
             </a:pPr>
             <a:r>
-              <a:rPr sz="2400">
-                <a:solidFill>
-                  <a:srgbClr val="D4D4D4"/>
-                </a:solidFill>
-                <a:latin typeface="Consolas"/>
-                <a:ea typeface="Consolas"/>
-                <a:cs typeface="Consolas"/>
-              </a:rPr>
-              <a:t>.withIssuer("API Dentista")</a:t>
-            </a:r>
-          </a:p>
-        </p:txBody>
-      </p:sp>
-      <p:sp>
-        <p:nvSpPr>
-          <p:cNvPr id="12" name="Retângulo 11">
-            <a:extLst>
-              <a:ext uri="{FF2B5EF4-FFF2-40B4-BE49-F238E27FC236}">
-                <a16:creationId xmlns:a16="http://schemas.microsoft.com/office/drawing/2014/main" id="{08150B8E-0180-493E-A1C9-2DA4ED1F47D4}"/>
-              </a:ext>
-            </a:extLst>
-          </p:cNvPr>
-          <p:cNvSpPr>
-            <a:spLocks noGrp="1"/>
+              <a:rPr sz="2400" dirty="0">
+                <a:solidFill>
+                  <a:srgbClr val="D4D4D4"/>
+                </a:solidFill>
+                <a:latin typeface="Consolas"/>
+                <a:ea typeface="Consolas"/>
+                <a:cs typeface="Consolas"/>
+              </a:rPr>
+              <a:t>return </a:t>
+            </a:r>
+            <a:r>
+              <a:rPr sz="2400" dirty="0" err="1">
+                <a:solidFill>
+                  <a:srgbClr val="D4D4D4"/>
+                </a:solidFill>
+                <a:latin typeface="Consolas"/>
+                <a:ea typeface="Consolas"/>
+                <a:cs typeface="Consolas"/>
+              </a:rPr>
+              <a:t>JWT.create</a:t>
+            </a:r>
+            <a:r>
+              <a:rPr sz="2400" dirty="0">
+                <a:solidFill>
+                  <a:srgbClr val="D4D4D4"/>
+                </a:solidFill>
+                <a:latin typeface="Consolas"/>
+                <a:ea typeface="Consolas"/>
+                <a:cs typeface="Consolas"/>
+              </a:rPr>
+              <a:t>()</a:t>
+            </a:r>
+          </a:p>
+        </p:txBody>
+      </p:sp>
+      <p:sp>
+        <p:nvSpPr>
+          <p:cNvPr id="5" name="Espaço Reservado para Conteúdo 2">
+            <a:extLst>
+              <a:ext uri="{FF2B5EF4-FFF2-40B4-BE49-F238E27FC236}">
+                <a16:creationId xmlns:a16="http://schemas.microsoft.com/office/drawing/2014/main" id="{CF26C6E5-B2F8-A0C9-1E0C-A5C01DEE8ADC}"/>
+              </a:ext>
+            </a:extLst>
+          </p:cNvPr>
+          <p:cNvSpPr txBox="1">
+            <a:spLocks/>
           </p:cNvSpPr>
           <p:nvPr/>
         </p:nvSpPr>
         <p:spPr>
           <a:xfrm>
-            <a:off x="685800" y="4905375"/>
-            <a:ext cx="10820400" cy="1333500"/>
+            <a:off x="611289" y="5027417"/>
+            <a:ext cx="11007306" cy="1231780"/>
           </a:xfrm>
           <a:prstGeom prst="rect">
             <a:avLst/>
           </a:prstGeom>
-          <a:noFill/>
-          <a:ln w="0">
-            <a:noFill/>
-          </a:ln>
         </p:spPr>
         <p:txBody>
-          <a:bodyPr>
-            <a:noAutofit/>
-          </a:bodyPr>
-          <a:lstStyle/>
-          <a:p>
-            <a:pPr algn="l">
-              <a:defRPr sz="2100">
-                <a:solidFill>
-                  <a:srgbClr val="000000"/>
-                </a:solidFill>
-                <a:latin typeface="Calibri"/>
-                <a:ea typeface="Calibri"/>
-                <a:cs typeface="Calibri"/>
-              </a:defRPr>
-            </a:pPr>
-            <a:r>
-              <a:rPr sz="2100">
-                <a:solidFill>
-                  <a:srgbClr val="000000"/>
-                </a:solidFill>
-                <a:latin typeface="Calibri"/>
-                <a:ea typeface="Calibri"/>
-                <a:cs typeface="Calibri"/>
-              </a:rPr>
-              <a:t>Neste exemplo, o emissor é “API Dentista”.</a:t>
-            </a:r>
-          </a:p>
-          <a:p>
-            <a:pPr algn="l">
-              <a:defRPr sz="2100">
-                <a:solidFill>
-                  <a:srgbClr val="000000"/>
-                </a:solidFill>
-                <a:latin typeface="Calibri"/>
-                <a:ea typeface="Calibri"/>
-                <a:cs typeface="Calibri"/>
-              </a:defRPr>
-            </a:pPr>
-            <a:r>
-              <a:rPr sz="2100">
-                <a:solidFill>
-                  <a:srgbClr val="000000"/>
-                </a:solidFill>
-                <a:latin typeface="Calibri"/>
-                <a:ea typeface="Calibri"/>
-                <a:cs typeface="Calibri"/>
-              </a:rPr>
-              <a:t>Essa informação fica no campo iss do payload.</a:t>
-            </a:r>
+          <a:bodyPr/>
+          <a:lstStyle>
+            <a:lvl1pPr marL="0" indent="0" algn="just" defTabSz="914400" rtl="0" eaLnBrk="1" latinLnBrk="0" hangingPunct="1">
+              <a:lnSpc>
+                <a:spcPct val="150000"/>
+              </a:lnSpc>
+              <a:spcBef>
+                <a:spcPts val="0"/>
+              </a:spcBef>
+              <a:buFont typeface="Arial" panose="020B0604020202020204" pitchFamily="34" charset="0"/>
+              <a:buNone/>
+              <a:defRPr sz="2000" kern="1200">
+                <a:solidFill>
+                  <a:schemeClr val="tx1"/>
+                </a:solidFill>
+                <a:latin typeface="Times New Roman" panose="02020603050405020304" pitchFamily="18" charset="0"/>
+                <a:ea typeface="+mn-ea"/>
+                <a:cs typeface="Times New Roman" panose="02020603050405020304" pitchFamily="18" charset="0"/>
+              </a:defRPr>
+            </a:lvl1pPr>
+            <a:lvl2pPr marL="457200" indent="0" algn="just" defTabSz="914400" rtl="0" eaLnBrk="1" latinLnBrk="0" hangingPunct="1">
+              <a:lnSpc>
+                <a:spcPct val="150000"/>
+              </a:lnSpc>
+              <a:spcBef>
+                <a:spcPts val="0"/>
+              </a:spcBef>
+              <a:buFont typeface="Arial" panose="020B0604020202020204" pitchFamily="34" charset="0"/>
+              <a:buNone/>
+              <a:defRPr sz="1600" kern="1200">
+                <a:solidFill>
+                  <a:schemeClr val="tx1"/>
+                </a:solidFill>
+                <a:latin typeface="Times New Roman" panose="02020603050405020304" pitchFamily="18" charset="0"/>
+                <a:ea typeface="+mn-ea"/>
+                <a:cs typeface="Times New Roman" panose="02020603050405020304" pitchFamily="18" charset="0"/>
+              </a:defRPr>
+            </a:lvl2pPr>
+            <a:lvl3pPr marL="914400" indent="0" algn="just" defTabSz="914400" rtl="0" eaLnBrk="1" latinLnBrk="0" hangingPunct="1">
+              <a:lnSpc>
+                <a:spcPct val="150000"/>
+              </a:lnSpc>
+              <a:spcBef>
+                <a:spcPts val="0"/>
+              </a:spcBef>
+              <a:buFont typeface="Arial" panose="020B0604020202020204" pitchFamily="34" charset="0"/>
+              <a:buNone/>
+              <a:defRPr sz="1400" kern="1200">
+                <a:solidFill>
+                  <a:schemeClr val="tx1"/>
+                </a:solidFill>
+                <a:latin typeface="Times New Roman" panose="02020603050405020304" pitchFamily="18" charset="0"/>
+                <a:ea typeface="+mn-ea"/>
+                <a:cs typeface="Times New Roman" panose="02020603050405020304" pitchFamily="18" charset="0"/>
+              </a:defRPr>
+            </a:lvl3pPr>
+            <a:lvl4pPr marL="1371600" indent="0" algn="just" defTabSz="914400" rtl="0" eaLnBrk="1" latinLnBrk="0" hangingPunct="1">
+              <a:lnSpc>
+                <a:spcPct val="150000"/>
+              </a:lnSpc>
+              <a:spcBef>
+                <a:spcPts val="0"/>
+              </a:spcBef>
+              <a:buFont typeface="Arial" panose="020B0604020202020204" pitchFamily="34" charset="0"/>
+              <a:buNone/>
+              <a:defRPr sz="1200" kern="1200">
+                <a:solidFill>
+                  <a:schemeClr val="tx1"/>
+                </a:solidFill>
+                <a:latin typeface="Times New Roman" panose="02020603050405020304" pitchFamily="18" charset="0"/>
+                <a:ea typeface="+mn-ea"/>
+                <a:cs typeface="Times New Roman" panose="02020603050405020304" pitchFamily="18" charset="0"/>
+              </a:defRPr>
+            </a:lvl4pPr>
+            <a:lvl5pPr marL="1828800" indent="0" algn="just" defTabSz="914400" rtl="0" eaLnBrk="1" latinLnBrk="0" hangingPunct="1">
+              <a:lnSpc>
+                <a:spcPct val="150000"/>
+              </a:lnSpc>
+              <a:spcBef>
+                <a:spcPts val="0"/>
+              </a:spcBef>
+              <a:buFont typeface="Arial" panose="020B0604020202020204" pitchFamily="34" charset="0"/>
+              <a:buNone/>
+              <a:defRPr sz="1000" kern="1200">
+                <a:solidFill>
+                  <a:schemeClr val="tx1"/>
+                </a:solidFill>
+                <a:latin typeface="Times New Roman" panose="02020603050405020304" pitchFamily="18" charset="0"/>
+                <a:ea typeface="+mn-ea"/>
+                <a:cs typeface="Times New Roman" panose="02020603050405020304" pitchFamily="18" charset="0"/>
+              </a:defRPr>
+            </a:lvl5pPr>
+            <a:lvl6pPr marL="2514600" indent="-228600" algn="l" defTabSz="914400" rtl="0" eaLnBrk="1" latinLnBrk="0" hangingPunct="1">
+              <a:lnSpc>
+                <a:spcPct val="90000"/>
+              </a:lnSpc>
+              <a:spcBef>
+                <a:spcPts val="500"/>
+              </a:spcBef>
+              <a:buFont typeface="Arial" panose="020B0604020202020204" pitchFamily="34" charset="0"/>
+              <a:buChar char="•"/>
+              <a:defRPr sz="1800" kern="1200">
+                <a:solidFill>
+                  <a:schemeClr val="tx1"/>
+                </a:solidFill>
+                <a:latin typeface="+mn-lt"/>
+                <a:ea typeface="+mn-ea"/>
+                <a:cs typeface="+mn-cs"/>
+              </a:defRPr>
+            </a:lvl6pPr>
+            <a:lvl7pPr marL="2971800" indent="-228600" algn="l" defTabSz="914400" rtl="0" eaLnBrk="1" latinLnBrk="0" hangingPunct="1">
+              <a:lnSpc>
+                <a:spcPct val="90000"/>
+              </a:lnSpc>
+              <a:spcBef>
+                <a:spcPts val="500"/>
+              </a:spcBef>
+              <a:buFont typeface="Arial" panose="020B0604020202020204" pitchFamily="34" charset="0"/>
+              <a:buChar char="•"/>
+              <a:defRPr sz="1800" kern="1200">
+                <a:solidFill>
+                  <a:schemeClr val="tx1"/>
+                </a:solidFill>
+                <a:latin typeface="+mn-lt"/>
+                <a:ea typeface="+mn-ea"/>
+                <a:cs typeface="+mn-cs"/>
+              </a:defRPr>
+            </a:lvl7pPr>
+            <a:lvl8pPr marL="3429000" indent="-228600" algn="l" defTabSz="914400" rtl="0" eaLnBrk="1" latinLnBrk="0" hangingPunct="1">
+              <a:lnSpc>
+                <a:spcPct val="90000"/>
+              </a:lnSpc>
+              <a:spcBef>
+                <a:spcPts val="500"/>
+              </a:spcBef>
+              <a:buFont typeface="Arial" panose="020B0604020202020204" pitchFamily="34" charset="0"/>
+              <a:buChar char="•"/>
+              <a:defRPr sz="1800" kern="1200">
+                <a:solidFill>
+                  <a:schemeClr val="tx1"/>
+                </a:solidFill>
+                <a:latin typeface="+mn-lt"/>
+                <a:ea typeface="+mn-ea"/>
+                <a:cs typeface="+mn-cs"/>
+              </a:defRPr>
+            </a:lvl8pPr>
+            <a:lvl9pPr marL="3886200" indent="-228600" algn="l" defTabSz="914400" rtl="0" eaLnBrk="1" latinLnBrk="0" hangingPunct="1">
+              <a:lnSpc>
+                <a:spcPct val="90000"/>
+              </a:lnSpc>
+              <a:spcBef>
+                <a:spcPts val="500"/>
+              </a:spcBef>
+              <a:buFont typeface="Arial" panose="020B0604020202020204" pitchFamily="34" charset="0"/>
+              <a:buChar char="•"/>
+              <a:defRPr sz="1800" kern="1200">
+                <a:solidFill>
+                  <a:schemeClr val="tx1"/>
+                </a:solidFill>
+                <a:latin typeface="+mn-lt"/>
+                <a:ea typeface="+mn-ea"/>
+                <a:cs typeface="+mn-cs"/>
+              </a:defRPr>
+            </a:lvl9pPr>
+          </a:lstStyle>
+          <a:p>
+            <a:r>
+              <a:rPr lang="pt-BR" dirty="0"/>
+              <a:t>Os métodos seguintes adicionam informações ao token.</a:t>
+            </a:r>
+          </a:p>
+          <a:p>
+            <a:r>
+              <a:rPr lang="pt-BR" dirty="0"/>
+              <a:t>O </a:t>
+            </a:r>
+            <a:r>
+              <a:rPr lang="pt-BR" dirty="0" err="1"/>
+              <a:t>return</a:t>
+            </a:r>
+            <a:r>
+              <a:rPr lang="pt-BR" dirty="0"/>
+              <a:t> devolverá a </a:t>
+            </a:r>
+            <a:r>
+              <a:rPr lang="pt-BR" dirty="0" err="1"/>
+              <a:t>String</a:t>
+            </a:r>
+            <a:r>
+              <a:rPr lang="pt-BR" dirty="0"/>
+              <a:t> produzida por </a:t>
+            </a:r>
+            <a:r>
+              <a:rPr lang="pt-BR" dirty="0" err="1"/>
+              <a:t>sign</a:t>
+            </a:r>
+            <a:r>
+              <a:rPr lang="pt-BR" dirty="0"/>
+              <a:t>().</a:t>
+            </a:r>
+          </a:p>
+          <a:p>
+            <a:endParaRPr lang="pt-BR" dirty="0"/>
           </a:p>
         </p:txBody>
       </p:sp>
     </p:spTree>
     <p:extLst>
       <p:ext uri="{BB962C8B-B14F-4D97-AF65-F5344CB8AC3E}">
-        <p14:creationId xmlns:p14="http://schemas.microsoft.com/office/powerpoint/2010/main" val="3203962773"/>
+        <p14:creationId xmlns:p14="http://schemas.microsoft.com/office/powerpoint/2010/main" val="195478241"/>
       </p:ext>
     </p:extLst>
   </p:cSld>
@@ -5231,7 +4509,7 @@
           <p:cNvPr id="2" name="Título 1">
             <a:extLst>
               <a:ext uri="{FF2B5EF4-FFF2-40B4-BE49-F238E27FC236}">
-                <a16:creationId xmlns:a16="http://schemas.microsoft.com/office/drawing/2014/main" id="{8738858E-69E2-8A32-4D8D-61A4750C2960}"/>
+                <a16:creationId xmlns:a16="http://schemas.microsoft.com/office/drawing/2014/main" id="{C78D1E0F-7C9A-1115-FAEF-E8CDF7898A30}"/>
               </a:ext>
             </a:extLst>
           </p:cNvPr>
@@ -5244,248 +4522,275 @@
         </p:nvSpPr>
         <p:spPr/>
         <p:txBody>
-          <a:bodyPr>
-            <a:noAutofit/>
-          </a:bodyPr>
+          <a:bodyPr/>
           <a:lstStyle/>
           <a:p>
-            <a:pPr>
-              <a:defRPr sz="3000">
-                <a:solidFill>
-                  <a:srgbClr val="000000"/>
-                </a:solidFill>
-                <a:latin typeface="Calibri Light"/>
-                <a:ea typeface="Calibri Light"/>
-                <a:cs typeface="Calibri Light"/>
-              </a:defRPr>
-            </a:pPr>
-            <a:r>
-              <a:rPr sz="3000">
-                <a:solidFill>
-                  <a:srgbClr val="000000"/>
-                </a:solidFill>
-                <a:latin typeface="Calibri Light"/>
-                <a:ea typeface="Calibri Light"/>
-                <a:cs typeface="Calibri Light"/>
-              </a:rPr>
-              <a:t>Identificação do usuário</a:t>
-            </a:r>
-          </a:p>
-        </p:txBody>
-      </p:sp>
-      <p:sp>
-        <p:nvSpPr>
-          <p:cNvPr id="6" name="Espaço Reservado para Conteúdo 5">
-            <a:extLst>
-              <a:ext uri="{FF2B5EF4-FFF2-40B4-BE49-F238E27FC236}">
-                <a16:creationId xmlns:a16="http://schemas.microsoft.com/office/drawing/2014/main" id="{B24F9431-18D8-4DC9-B9CC-1BCF1A71C18D}"/>
+            <a:r>
+              <a:rPr lang="pt-BR" dirty="0"/>
+              <a:t>Emissor do token</a:t>
+            </a:r>
+          </a:p>
+        </p:txBody>
+      </p:sp>
+      <p:sp>
+        <p:nvSpPr>
+          <p:cNvPr id="3" name="Espaço Reservado para Conteúdo 2">
+            <a:extLst>
+              <a:ext uri="{FF2B5EF4-FFF2-40B4-BE49-F238E27FC236}">
+                <a16:creationId xmlns:a16="http://schemas.microsoft.com/office/drawing/2014/main" id="{7088FAE8-497E-1AF8-668D-A9E2EA87FC3E}"/>
               </a:ext>
             </a:extLst>
           </p:cNvPr>
           <p:cNvSpPr>
             <a:spLocks noGrp="1"/>
           </p:cNvSpPr>
-          <p:nvPr/>
+          <p:nvPr>
+            <p:ph idx="1"/>
+          </p:nvPr>
         </p:nvSpPr>
         <p:spPr>
           <a:xfrm>
-            <a:off x="685800" y="1809750"/>
-            <a:ext cx="10820400" cy="809625"/>
+            <a:off x="592347" y="1844675"/>
+            <a:ext cx="11007306" cy="743250"/>
+          </a:xfrm>
+        </p:spPr>
+        <p:txBody>
+          <a:bodyPr/>
+          <a:lstStyle/>
+          <a:p>
+            <a:r>
+              <a:rPr lang="pt-BR" dirty="0" err="1"/>
+              <a:t>withIssuer</a:t>
+            </a:r>
+            <a:r>
+              <a:rPr lang="pt-BR" dirty="0"/>
+              <a:t>() informa qual aplicação emitiu o token.</a:t>
+            </a:r>
+          </a:p>
+          <a:p>
+            <a:endParaRPr lang="pt-BR" dirty="0"/>
+          </a:p>
+        </p:txBody>
+      </p:sp>
+      <p:sp>
+        <p:nvSpPr>
+          <p:cNvPr id="8" name="Espaço Reservado para Conteúdo 2">
+            <a:extLst>
+              <a:ext uri="{FF2B5EF4-FFF2-40B4-BE49-F238E27FC236}">
+                <a16:creationId xmlns:a16="http://schemas.microsoft.com/office/drawing/2014/main" id="{1CE3781C-77C6-7AB2-70B8-B0B7A9C7EC56}"/>
+              </a:ext>
+            </a:extLst>
+          </p:cNvPr>
+          <p:cNvSpPr txBox="1">
+            <a:spLocks/>
+          </p:cNvSpPr>
+          <p:nvPr/>
+        </p:nvSpPr>
+        <p:spPr>
+          <a:xfrm>
+            <a:off x="592347" y="5007692"/>
+            <a:ext cx="11007306" cy="1186073"/>
           </a:xfrm>
           <a:prstGeom prst="rect">
             <a:avLst/>
           </a:prstGeom>
         </p:spPr>
         <p:txBody>
-          <a:bodyPr>
-            <a:noAutofit/>
-          </a:bodyPr>
+          <a:bodyPr/>
           <a:lstStyle>
-            <a:lvl1pPr marL="0" indent="0" algn="just" defTabSz="914400">
+            <a:lvl1pPr marL="0" indent="0" algn="just" defTabSz="914400" rtl="0" eaLnBrk="1" latinLnBrk="0" hangingPunct="1">
               <a:lnSpc>
                 <a:spcPct val="150000"/>
               </a:lnSpc>
               <a:spcBef>
                 <a:spcPts val="0"/>
               </a:spcBef>
-              <a:buFont typeface="Arial"/>
+              <a:buFont typeface="Arial" panose="020B0604020202020204" pitchFamily="34" charset="0"/>
               <a:buNone/>
               <a:defRPr sz="2000" kern="1200">
                 <a:solidFill>
                   <a:schemeClr val="tx1"/>
                 </a:solidFill>
-                <a:latin typeface="Times New Roman"/>
-                <a:ea typeface="Times New Roman"/>
-                <a:cs typeface="Times New Roman"/>
+                <a:latin typeface="Times New Roman" panose="02020603050405020304" pitchFamily="18" charset="0"/>
+                <a:ea typeface="+mn-ea"/>
+                <a:cs typeface="Times New Roman" panose="02020603050405020304" pitchFamily="18" charset="0"/>
               </a:defRPr>
             </a:lvl1pPr>
-            <a:lvl2pPr marL="457200" indent="0" algn="just" defTabSz="914400">
+            <a:lvl2pPr marL="457200" indent="0" algn="just" defTabSz="914400" rtl="0" eaLnBrk="1" latinLnBrk="0" hangingPunct="1">
               <a:lnSpc>
                 <a:spcPct val="150000"/>
               </a:lnSpc>
               <a:spcBef>
                 <a:spcPts val="0"/>
               </a:spcBef>
-              <a:buFont typeface="Arial"/>
+              <a:buFont typeface="Arial" panose="020B0604020202020204" pitchFamily="34" charset="0"/>
               <a:buNone/>
               <a:defRPr sz="1600" kern="1200">
                 <a:solidFill>
                   <a:schemeClr val="tx1"/>
                 </a:solidFill>
-                <a:latin typeface="Times New Roman"/>
-                <a:ea typeface="Times New Roman"/>
-                <a:cs typeface="Times New Roman"/>
+                <a:latin typeface="Times New Roman" panose="02020603050405020304" pitchFamily="18" charset="0"/>
+                <a:ea typeface="+mn-ea"/>
+                <a:cs typeface="Times New Roman" panose="02020603050405020304" pitchFamily="18" charset="0"/>
               </a:defRPr>
             </a:lvl2pPr>
-            <a:lvl3pPr marL="914400" indent="0" algn="just" defTabSz="914400">
+            <a:lvl3pPr marL="914400" indent="0" algn="just" defTabSz="914400" rtl="0" eaLnBrk="1" latinLnBrk="0" hangingPunct="1">
               <a:lnSpc>
                 <a:spcPct val="150000"/>
               </a:lnSpc>
               <a:spcBef>
                 <a:spcPts val="0"/>
               </a:spcBef>
-              <a:buFont typeface="Arial"/>
+              <a:buFont typeface="Arial" panose="020B0604020202020204" pitchFamily="34" charset="0"/>
               <a:buNone/>
               <a:defRPr sz="1400" kern="1200">
                 <a:solidFill>
                   <a:schemeClr val="tx1"/>
                 </a:solidFill>
-                <a:latin typeface="Times New Roman"/>
-                <a:ea typeface="Times New Roman"/>
-                <a:cs typeface="Times New Roman"/>
+                <a:latin typeface="Times New Roman" panose="02020603050405020304" pitchFamily="18" charset="0"/>
+                <a:ea typeface="+mn-ea"/>
+                <a:cs typeface="Times New Roman" panose="02020603050405020304" pitchFamily="18" charset="0"/>
               </a:defRPr>
             </a:lvl3pPr>
-            <a:lvl4pPr marL="1371600" indent="0" algn="just" defTabSz="914400">
+            <a:lvl4pPr marL="1371600" indent="0" algn="just" defTabSz="914400" rtl="0" eaLnBrk="1" latinLnBrk="0" hangingPunct="1">
               <a:lnSpc>
                 <a:spcPct val="150000"/>
               </a:lnSpc>
               <a:spcBef>
                 <a:spcPts val="0"/>
               </a:spcBef>
-              <a:buFont typeface="Arial"/>
+              <a:buFont typeface="Arial" panose="020B0604020202020204" pitchFamily="34" charset="0"/>
               <a:buNone/>
               <a:defRPr sz="1200" kern="1200">
                 <a:solidFill>
                   <a:schemeClr val="tx1"/>
                 </a:solidFill>
-                <a:latin typeface="Times New Roman"/>
-                <a:ea typeface="Times New Roman"/>
-                <a:cs typeface="Times New Roman"/>
+                <a:latin typeface="Times New Roman" panose="02020603050405020304" pitchFamily="18" charset="0"/>
+                <a:ea typeface="+mn-ea"/>
+                <a:cs typeface="Times New Roman" panose="02020603050405020304" pitchFamily="18" charset="0"/>
               </a:defRPr>
             </a:lvl4pPr>
-            <a:lvl5pPr marL="1828800" indent="0" algn="just" defTabSz="914400">
+            <a:lvl5pPr marL="1828800" indent="0" algn="just" defTabSz="914400" rtl="0" eaLnBrk="1" latinLnBrk="0" hangingPunct="1">
               <a:lnSpc>
                 <a:spcPct val="150000"/>
               </a:lnSpc>
               <a:spcBef>
                 <a:spcPts val="0"/>
               </a:spcBef>
-              <a:buFont typeface="Arial"/>
+              <a:buFont typeface="Arial" panose="020B0604020202020204" pitchFamily="34" charset="0"/>
               <a:buNone/>
               <a:defRPr sz="1000" kern="1200">
                 <a:solidFill>
                   <a:schemeClr val="tx1"/>
                 </a:solidFill>
-                <a:latin typeface="Times New Roman"/>
-                <a:ea typeface="Times New Roman"/>
-                <a:cs typeface="Times New Roman"/>
+                <a:latin typeface="Times New Roman" panose="02020603050405020304" pitchFamily="18" charset="0"/>
+                <a:ea typeface="+mn-ea"/>
+                <a:cs typeface="Times New Roman" panose="02020603050405020304" pitchFamily="18" charset="0"/>
               </a:defRPr>
             </a:lvl5pPr>
-            <a:lvl6pPr marL="2514600" indent="-228600" algn="l" defTabSz="914400">
+            <a:lvl6pPr marL="2514600" indent="-228600" algn="l" defTabSz="914400" rtl="0" eaLnBrk="1" latinLnBrk="0" hangingPunct="1">
               <a:lnSpc>
                 <a:spcPct val="90000"/>
               </a:lnSpc>
               <a:spcBef>
                 <a:spcPts val="500"/>
               </a:spcBef>
-              <a:buFont typeface="Arial"/>
+              <a:buFont typeface="Arial" panose="020B0604020202020204" pitchFamily="34" charset="0"/>
               <a:buChar char="•"/>
               <a:defRPr sz="1800" kern="1200">
                 <a:solidFill>
                   <a:schemeClr val="tx1"/>
                 </a:solidFill>
                 <a:latin typeface="+mn-lt"/>
-                <a:ea typeface="+mn-lt"/>
-                <a:cs typeface="+mn-lt"/>
+                <a:ea typeface="+mn-ea"/>
+                <a:cs typeface="+mn-cs"/>
               </a:defRPr>
             </a:lvl6pPr>
-            <a:lvl7pPr marL="2971800" indent="-228600" algn="l" defTabSz="914400">
+            <a:lvl7pPr marL="2971800" indent="-228600" algn="l" defTabSz="914400" rtl="0" eaLnBrk="1" latinLnBrk="0" hangingPunct="1">
               <a:lnSpc>
                 <a:spcPct val="90000"/>
               </a:lnSpc>
               <a:spcBef>
                 <a:spcPts val="500"/>
               </a:spcBef>
-              <a:buFont typeface="Arial"/>
+              <a:buFont typeface="Arial" panose="020B0604020202020204" pitchFamily="34" charset="0"/>
               <a:buChar char="•"/>
               <a:defRPr sz="1800" kern="1200">
                 <a:solidFill>
                   <a:schemeClr val="tx1"/>
                 </a:solidFill>
                 <a:latin typeface="+mn-lt"/>
-                <a:ea typeface="+mn-lt"/>
-                <a:cs typeface="+mn-lt"/>
+                <a:ea typeface="+mn-ea"/>
+                <a:cs typeface="+mn-cs"/>
               </a:defRPr>
             </a:lvl7pPr>
-            <a:lvl8pPr marL="3429000" indent="-228600" algn="l" defTabSz="914400">
+            <a:lvl8pPr marL="3429000" indent="-228600" algn="l" defTabSz="914400" rtl="0" eaLnBrk="1" latinLnBrk="0" hangingPunct="1">
               <a:lnSpc>
                 <a:spcPct val="90000"/>
               </a:lnSpc>
               <a:spcBef>
                 <a:spcPts val="500"/>
               </a:spcBef>
-              <a:buFont typeface="Arial"/>
+              <a:buFont typeface="Arial" panose="020B0604020202020204" pitchFamily="34" charset="0"/>
               <a:buChar char="•"/>
               <a:defRPr sz="1800" kern="1200">
                 <a:solidFill>
                   <a:schemeClr val="tx1"/>
                 </a:solidFill>
                 <a:latin typeface="+mn-lt"/>
-                <a:ea typeface="+mn-lt"/>
-                <a:cs typeface="+mn-lt"/>
+                <a:ea typeface="+mn-ea"/>
+                <a:cs typeface="+mn-cs"/>
               </a:defRPr>
             </a:lvl8pPr>
-            <a:lvl9pPr marL="3886200" indent="-228600" algn="l" defTabSz="914400">
+            <a:lvl9pPr marL="3886200" indent="-228600" algn="l" defTabSz="914400" rtl="0" eaLnBrk="1" latinLnBrk="0" hangingPunct="1">
               <a:lnSpc>
                 <a:spcPct val="90000"/>
               </a:lnSpc>
               <a:spcBef>
                 <a:spcPts val="500"/>
               </a:spcBef>
-              <a:buFont typeface="Arial"/>
+              <a:buFont typeface="Arial" panose="020B0604020202020204" pitchFamily="34" charset="0"/>
               <a:buChar char="•"/>
               <a:defRPr sz="1800" kern="1200">
                 <a:solidFill>
                   <a:schemeClr val="tx1"/>
                 </a:solidFill>
                 <a:latin typeface="+mn-lt"/>
-                <a:ea typeface="+mn-lt"/>
-                <a:cs typeface="+mn-lt"/>
+                <a:ea typeface="+mn-ea"/>
+                <a:cs typeface="+mn-cs"/>
               </a:defRPr>
             </a:lvl9pPr>
           </a:lstStyle>
           <a:p>
-            <a:pPr algn="l">
-              <a:defRPr sz="2175">
-                <a:solidFill>
-                  <a:srgbClr val="000000"/>
-                </a:solidFill>
-                <a:latin typeface="Calibri"/>
-                <a:ea typeface="Calibri"/>
-                <a:cs typeface="Calibri"/>
-              </a:defRPr>
-            </a:pPr>
-            <a:r>
-              <a:rPr sz="2175">
-                <a:solidFill>
-                  <a:srgbClr val="000000"/>
-                </a:solidFill>
-                <a:latin typeface="Calibri"/>
-                <a:ea typeface="Calibri"/>
-                <a:cs typeface="Calibri"/>
-              </a:rPr>
-              <a:t>withSubject() define a quem o token pertence.</a:t>
-            </a:r>
+            <a:r>
+              <a:rPr lang="pt-BR" dirty="0"/>
+              <a:t>Neste exemplo, o emissor é “API Dentista”.</a:t>
+            </a:r>
+          </a:p>
+          <a:p>
+            <a:r>
+              <a:rPr lang="pt-BR" dirty="0"/>
+              <a:t>Essa informação fica no campo </a:t>
+            </a:r>
+            <a:r>
+              <a:rPr lang="pt-BR" dirty="0" err="1"/>
+              <a:t>iss</a:t>
+            </a:r>
+            <a:r>
+              <a:rPr lang="pt-BR" dirty="0"/>
+              <a:t> do </a:t>
+            </a:r>
+            <a:r>
+              <a:rPr lang="pt-BR" dirty="0" err="1"/>
+              <a:t>payload</a:t>
+            </a:r>
+            <a:r>
+              <a:rPr lang="pt-BR" dirty="0"/>
+              <a:t>.</a:t>
+            </a:r>
+          </a:p>
+          <a:p>
+            <a:endParaRPr lang="pt-BR" dirty="0"/>
           </a:p>
         </p:txBody>
       </p:sp>
@@ -5505,8 +4810,8 @@
         </p:nvSpPr>
         <p:spPr>
           <a:xfrm>
-            <a:off x="857250" y="2762250"/>
-            <a:ext cx="10477500" cy="1809750"/>
+            <a:off x="2136000" y="3129607"/>
+            <a:ext cx="7920000" cy="1333500"/>
           </a:xfrm>
           <a:prstGeom prst="roundRect">
             <a:avLst>
@@ -5532,7 +4837,7 @@
       </p:sp>
       <p:sp>
         <p:nvSpPr>
-          <p:cNvPr id="4" name="Retângulo 3">
+          <p:cNvPr id="9" name="Retângulo 8">
             <a:extLst>
               <a:ext uri="{FF2B5EF4-FFF2-40B4-BE49-F238E27FC236}">
                 <a16:creationId xmlns:a16="http://schemas.microsoft.com/office/drawing/2014/main" id="{3CE8AC7A-3364-4E97-BC2E-25CF018F1E04}"/>
@@ -5546,8 +4851,8 @@
         </p:nvSpPr>
         <p:spPr>
           <a:xfrm>
-            <a:off x="1143000" y="3190875"/>
-            <a:ext cx="10001250" cy="2865120"/>
+            <a:off x="2421750" y="3532802"/>
+            <a:ext cx="4774721" cy="527110"/>
           </a:xfrm>
           <a:prstGeom prst="rect">
             <a:avLst/>
@@ -5570,95 +4875,59 @@
               </a:defRPr>
             </a:pPr>
             <a:r>
-              <a:rPr sz="2400">
-                <a:solidFill>
-                  <a:srgbClr val="D4D4D4"/>
-                </a:solidFill>
-                <a:latin typeface="Consolas"/>
-                <a:ea typeface="Consolas"/>
-                <a:cs typeface="Consolas"/>
-              </a:rPr>
-              <a:t>.withSubject(usuario.getLogin())</a:t>
-            </a:r>
-          </a:p>
-        </p:txBody>
-      </p:sp>
-      <p:sp>
-        <p:nvSpPr>
-          <p:cNvPr id="12" name="Retângulo 11">
-            <a:extLst>
-              <a:ext uri="{FF2B5EF4-FFF2-40B4-BE49-F238E27FC236}">
-                <a16:creationId xmlns:a16="http://schemas.microsoft.com/office/drawing/2014/main" id="{11847D07-BDBE-48C0-9AAE-576037B5A37D}"/>
-              </a:ext>
-            </a:extLst>
-          </p:cNvPr>
-          <p:cNvSpPr>
-            <a:spLocks noGrp="1"/>
-          </p:cNvSpPr>
-          <p:nvPr/>
-        </p:nvSpPr>
-        <p:spPr>
-          <a:xfrm>
-            <a:off x="685800" y="4905375"/>
-            <a:ext cx="10820400" cy="1333500"/>
-          </a:xfrm>
-          <a:prstGeom prst="rect">
-            <a:avLst/>
-          </a:prstGeom>
-          <a:noFill/>
-          <a:ln w="0">
-            <a:noFill/>
-          </a:ln>
-        </p:spPr>
-        <p:txBody>
-          <a:bodyPr>
-            <a:noAutofit/>
-          </a:bodyPr>
-          <a:lstStyle/>
-          <a:p>
-            <a:pPr algn="l">
-              <a:defRPr sz="2100">
-                <a:solidFill>
-                  <a:srgbClr val="000000"/>
-                </a:solidFill>
-                <a:latin typeface="Calibri"/>
-                <a:ea typeface="Calibri"/>
-                <a:cs typeface="Calibri"/>
-              </a:defRPr>
-            </a:pPr>
-            <a:r>
-              <a:rPr sz="2100">
-                <a:solidFill>
-                  <a:srgbClr val="000000"/>
-                </a:solidFill>
-                <a:latin typeface="Calibri"/>
-                <a:ea typeface="Calibri"/>
-                <a:cs typeface="Calibri"/>
-              </a:rPr>
-              <a:t>getLogin() obtém o login do usuário recebido.</a:t>
-            </a:r>
-          </a:p>
-          <a:p>
-            <a:pPr algn="l">
-              <a:defRPr sz="2100">
-                <a:solidFill>
-                  <a:srgbClr val="000000"/>
-                </a:solidFill>
-                <a:latin typeface="Calibri"/>
-                <a:ea typeface="Calibri"/>
-                <a:cs typeface="Calibri"/>
-              </a:defRPr>
-            </a:pPr>
-            <a:r>
-              <a:rPr sz="2100">
-                <a:solidFill>
-                  <a:srgbClr val="000000"/>
-                </a:solidFill>
-                <a:latin typeface="Calibri"/>
-                <a:ea typeface="Calibri"/>
-                <a:cs typeface="Calibri"/>
-              </a:rPr>
-              <a:t>O valor fica no campo sub do payload.</a:t>
+              <a:rPr sz="2400" dirty="0">
+                <a:solidFill>
+                  <a:srgbClr val="D4D4D4"/>
+                </a:solidFill>
+                <a:latin typeface="Consolas"/>
+                <a:ea typeface="Consolas"/>
+                <a:cs typeface="Consolas"/>
+              </a:rPr>
+              <a:t>.</a:t>
+            </a:r>
+            <a:r>
+              <a:rPr sz="2400" dirty="0" err="1">
+                <a:solidFill>
+                  <a:srgbClr val="D4D4D4"/>
+                </a:solidFill>
+                <a:latin typeface="Consolas"/>
+                <a:ea typeface="Consolas"/>
+                <a:cs typeface="Consolas"/>
+              </a:rPr>
+              <a:t>withIssuer</a:t>
+            </a:r>
+            <a:r>
+              <a:rPr sz="2400" dirty="0">
+                <a:solidFill>
+                  <a:srgbClr val="D4D4D4"/>
+                </a:solidFill>
+                <a:latin typeface="Consolas"/>
+                <a:ea typeface="Consolas"/>
+                <a:cs typeface="Consolas"/>
+              </a:rPr>
+              <a:t>("API </a:t>
+            </a:r>
+            <a:r>
+              <a:rPr sz="2400" dirty="0" err="1">
+                <a:solidFill>
+                  <a:srgbClr val="D4D4D4"/>
+                </a:solidFill>
+                <a:latin typeface="Consolas"/>
+                <a:ea typeface="Consolas"/>
+                <a:cs typeface="Consolas"/>
+              </a:rPr>
+              <a:t>Dentista</a:t>
+            </a:r>
+            <a:r>
+              <a:rPr sz="2400" dirty="0">
+                <a:solidFill>
+                  <a:srgbClr val="D4D4D4"/>
+                </a:solidFill>
+                <a:latin typeface="Consolas"/>
+                <a:ea typeface="Consolas"/>
+                <a:cs typeface="Consolas"/>
+              </a:rPr>
+              <a:t>")</a:t>
             </a:r>
           </a:p>
         </p:txBody>
@@ -5666,7 +4935,7 @@
     </p:spTree>
     <p:extLst>
       <p:ext uri="{BB962C8B-B14F-4D97-AF65-F5344CB8AC3E}">
-        <p14:creationId xmlns:p14="http://schemas.microsoft.com/office/powerpoint/2010/main" val="260205575"/>
+        <p14:creationId xmlns:p14="http://schemas.microsoft.com/office/powerpoint/2010/main" val="556909017"/>
       </p:ext>
     </p:extLst>
   </p:cSld>
@@ -5698,7 +4967,7 @@
           <p:cNvPr id="2" name="Título 1">
             <a:extLst>
               <a:ext uri="{FF2B5EF4-FFF2-40B4-BE49-F238E27FC236}">
-                <a16:creationId xmlns:a16="http://schemas.microsoft.com/office/drawing/2014/main" id="{8738858E-69E2-8A32-4D8D-61A4750C2960}"/>
+                <a16:creationId xmlns:a16="http://schemas.microsoft.com/office/drawing/2014/main" id="{AEC9E559-6899-88CB-0B87-B93E617E9723}"/>
               </a:ext>
             </a:extLst>
           </p:cNvPr>
@@ -5711,247 +4980,264 @@
         </p:nvSpPr>
         <p:spPr/>
         <p:txBody>
-          <a:bodyPr>
-            <a:noAutofit/>
-          </a:bodyPr>
+          <a:bodyPr/>
           <a:lstStyle/>
           <a:p>
-            <a:pPr>
-              <a:defRPr sz="3000">
-                <a:solidFill>
-                  <a:srgbClr val="000000"/>
-                </a:solidFill>
-                <a:latin typeface="Calibri Light"/>
-                <a:ea typeface="Calibri Light"/>
-                <a:cs typeface="Calibri Light"/>
-              </a:defRPr>
-            </a:pPr>
-            <a:r>
-              <a:rPr sz="3000">
-                <a:solidFill>
-                  <a:srgbClr val="000000"/>
-                </a:solidFill>
-                <a:latin typeface="Calibri Light"/>
-                <a:ea typeface="Calibri Light"/>
-                <a:cs typeface="Calibri Light"/>
-              </a:rPr>
-              <a:t>Prazo de validade</a:t>
-            </a:r>
-          </a:p>
-        </p:txBody>
-      </p:sp>
-      <p:sp>
-        <p:nvSpPr>
-          <p:cNvPr id="6" name="Espaço Reservado para Conteúdo 5">
-            <a:extLst>
-              <a:ext uri="{FF2B5EF4-FFF2-40B4-BE49-F238E27FC236}">
-                <a16:creationId xmlns:a16="http://schemas.microsoft.com/office/drawing/2014/main" id="{B24F9431-18D8-4DC9-B9CC-1BCF1A71C18D}"/>
+            <a:r>
+              <a:rPr lang="pt-BR" dirty="0"/>
+              <a:t>Identificação do usuário</a:t>
+            </a:r>
+          </a:p>
+        </p:txBody>
+      </p:sp>
+      <p:sp>
+        <p:nvSpPr>
+          <p:cNvPr id="3" name="Espaço Reservado para Conteúdo 2">
+            <a:extLst>
+              <a:ext uri="{FF2B5EF4-FFF2-40B4-BE49-F238E27FC236}">
+                <a16:creationId xmlns:a16="http://schemas.microsoft.com/office/drawing/2014/main" id="{AD12824D-84D1-C700-B078-813FD2C689E1}"/>
               </a:ext>
             </a:extLst>
           </p:cNvPr>
           <p:cNvSpPr>
             <a:spLocks noGrp="1"/>
           </p:cNvSpPr>
-          <p:nvPr/>
+          <p:nvPr>
+            <p:ph idx="1"/>
+          </p:nvPr>
         </p:nvSpPr>
         <p:spPr>
           <a:xfrm>
-            <a:off x="685800" y="1809750"/>
-            <a:ext cx="10820400" cy="809625"/>
+            <a:off x="592347" y="1844675"/>
+            <a:ext cx="11007306" cy="734623"/>
+          </a:xfrm>
+        </p:spPr>
+        <p:txBody>
+          <a:bodyPr/>
+          <a:lstStyle/>
+          <a:p>
+            <a:r>
+              <a:rPr lang="pt-BR" dirty="0" err="1"/>
+              <a:t>withSubject</a:t>
+            </a:r>
+            <a:r>
+              <a:rPr lang="pt-BR" dirty="0"/>
+              <a:t>() define a quem o token pertence.</a:t>
+            </a:r>
+          </a:p>
+        </p:txBody>
+      </p:sp>
+      <p:sp>
+        <p:nvSpPr>
+          <p:cNvPr id="4" name="Espaço Reservado para Conteúdo 2">
+            <a:extLst>
+              <a:ext uri="{FF2B5EF4-FFF2-40B4-BE49-F238E27FC236}">
+                <a16:creationId xmlns:a16="http://schemas.microsoft.com/office/drawing/2014/main" id="{EBCCE279-0BB7-A5C6-F0B3-36648C52FFCD}"/>
+              </a:ext>
+            </a:extLst>
+          </p:cNvPr>
+          <p:cNvSpPr txBox="1">
+            <a:spLocks/>
+          </p:cNvSpPr>
+          <p:nvPr/>
+        </p:nvSpPr>
+        <p:spPr>
+          <a:xfrm>
+            <a:off x="592347" y="4852419"/>
+            <a:ext cx="11007306" cy="1151161"/>
           </a:xfrm>
           <a:prstGeom prst="rect">
             <a:avLst/>
           </a:prstGeom>
         </p:spPr>
         <p:txBody>
-          <a:bodyPr>
-            <a:noAutofit/>
-          </a:bodyPr>
+          <a:bodyPr/>
           <a:lstStyle>
-            <a:lvl1pPr marL="0" indent="0" algn="just" defTabSz="914400">
+            <a:lvl1pPr marL="0" indent="0" algn="just" defTabSz="914400" rtl="0" eaLnBrk="1" latinLnBrk="0" hangingPunct="1">
               <a:lnSpc>
                 <a:spcPct val="150000"/>
               </a:lnSpc>
               <a:spcBef>
                 <a:spcPts val="0"/>
               </a:spcBef>
-              <a:buFont typeface="Arial"/>
+              <a:buFont typeface="Arial" panose="020B0604020202020204" pitchFamily="34" charset="0"/>
               <a:buNone/>
               <a:defRPr sz="2000" kern="1200">
                 <a:solidFill>
                   <a:schemeClr val="tx1"/>
                 </a:solidFill>
-                <a:latin typeface="Times New Roman"/>
-                <a:ea typeface="Times New Roman"/>
-                <a:cs typeface="Times New Roman"/>
+                <a:latin typeface="Times New Roman" panose="02020603050405020304" pitchFamily="18" charset="0"/>
+                <a:ea typeface="+mn-ea"/>
+                <a:cs typeface="Times New Roman" panose="02020603050405020304" pitchFamily="18" charset="0"/>
               </a:defRPr>
             </a:lvl1pPr>
-            <a:lvl2pPr marL="457200" indent="0" algn="just" defTabSz="914400">
+            <a:lvl2pPr marL="457200" indent="0" algn="just" defTabSz="914400" rtl="0" eaLnBrk="1" latinLnBrk="0" hangingPunct="1">
               <a:lnSpc>
                 <a:spcPct val="150000"/>
               </a:lnSpc>
               <a:spcBef>
                 <a:spcPts val="0"/>
               </a:spcBef>
-              <a:buFont typeface="Arial"/>
+              <a:buFont typeface="Arial" panose="020B0604020202020204" pitchFamily="34" charset="0"/>
               <a:buNone/>
               <a:defRPr sz="1600" kern="1200">
                 <a:solidFill>
                   <a:schemeClr val="tx1"/>
                 </a:solidFill>
-                <a:latin typeface="Times New Roman"/>
-                <a:ea typeface="Times New Roman"/>
-                <a:cs typeface="Times New Roman"/>
+                <a:latin typeface="Times New Roman" panose="02020603050405020304" pitchFamily="18" charset="0"/>
+                <a:ea typeface="+mn-ea"/>
+                <a:cs typeface="Times New Roman" panose="02020603050405020304" pitchFamily="18" charset="0"/>
               </a:defRPr>
             </a:lvl2pPr>
-            <a:lvl3pPr marL="914400" indent="0" algn="just" defTabSz="914400">
+            <a:lvl3pPr marL="914400" indent="0" algn="just" defTabSz="914400" rtl="0" eaLnBrk="1" latinLnBrk="0" hangingPunct="1">
               <a:lnSpc>
                 <a:spcPct val="150000"/>
               </a:lnSpc>
               <a:spcBef>
                 <a:spcPts val="0"/>
               </a:spcBef>
-              <a:buFont typeface="Arial"/>
+              <a:buFont typeface="Arial" panose="020B0604020202020204" pitchFamily="34" charset="0"/>
               <a:buNone/>
               <a:defRPr sz="1400" kern="1200">
                 <a:solidFill>
                   <a:schemeClr val="tx1"/>
                 </a:solidFill>
-                <a:latin typeface="Times New Roman"/>
-                <a:ea typeface="Times New Roman"/>
-                <a:cs typeface="Times New Roman"/>
+                <a:latin typeface="Times New Roman" panose="02020603050405020304" pitchFamily="18" charset="0"/>
+                <a:ea typeface="+mn-ea"/>
+                <a:cs typeface="Times New Roman" panose="02020603050405020304" pitchFamily="18" charset="0"/>
               </a:defRPr>
             </a:lvl3pPr>
-            <a:lvl4pPr marL="1371600" indent="0" algn="just" defTabSz="914400">
+            <a:lvl4pPr marL="1371600" indent="0" algn="just" defTabSz="914400" rtl="0" eaLnBrk="1" latinLnBrk="0" hangingPunct="1">
               <a:lnSpc>
                 <a:spcPct val="150000"/>
               </a:lnSpc>
               <a:spcBef>
                 <a:spcPts val="0"/>
               </a:spcBef>
-              <a:buFont typeface="Arial"/>
+              <a:buFont typeface="Arial" panose="020B0604020202020204" pitchFamily="34" charset="0"/>
               <a:buNone/>
               <a:defRPr sz="1200" kern="1200">
                 <a:solidFill>
                   <a:schemeClr val="tx1"/>
                 </a:solidFill>
-                <a:latin typeface="Times New Roman"/>
-                <a:ea typeface="Times New Roman"/>
-                <a:cs typeface="Times New Roman"/>
+                <a:latin typeface="Times New Roman" panose="02020603050405020304" pitchFamily="18" charset="0"/>
+                <a:ea typeface="+mn-ea"/>
+                <a:cs typeface="Times New Roman" panose="02020603050405020304" pitchFamily="18" charset="0"/>
               </a:defRPr>
             </a:lvl4pPr>
-            <a:lvl5pPr marL="1828800" indent="0" algn="just" defTabSz="914400">
+            <a:lvl5pPr marL="1828800" indent="0" algn="just" defTabSz="914400" rtl="0" eaLnBrk="1" latinLnBrk="0" hangingPunct="1">
               <a:lnSpc>
                 <a:spcPct val="150000"/>
               </a:lnSpc>
               <a:spcBef>
                 <a:spcPts val="0"/>
               </a:spcBef>
-              <a:buFont typeface="Arial"/>
+              <a:buFont typeface="Arial" panose="020B0604020202020204" pitchFamily="34" charset="0"/>
               <a:buNone/>
               <a:defRPr sz="1000" kern="1200">
                 <a:solidFill>
                   <a:schemeClr val="tx1"/>
                 </a:solidFill>
-                <a:latin typeface="Times New Roman"/>
-                <a:ea typeface="Times New Roman"/>
-                <a:cs typeface="Times New Roman"/>
+                <a:latin typeface="Times New Roman" panose="02020603050405020304" pitchFamily="18" charset="0"/>
+                <a:ea typeface="+mn-ea"/>
+                <a:cs typeface="Times New Roman" panose="02020603050405020304" pitchFamily="18" charset="0"/>
               </a:defRPr>
             </a:lvl5pPr>
-            <a:lvl6pPr marL="2514600" indent="-228600" algn="l" defTabSz="914400">
+            <a:lvl6pPr marL="2514600" indent="-228600" algn="l" defTabSz="914400" rtl="0" eaLnBrk="1" latinLnBrk="0" hangingPunct="1">
               <a:lnSpc>
                 <a:spcPct val="90000"/>
               </a:lnSpc>
               <a:spcBef>
                 <a:spcPts val="500"/>
               </a:spcBef>
-              <a:buFont typeface="Arial"/>
+              <a:buFont typeface="Arial" panose="020B0604020202020204" pitchFamily="34" charset="0"/>
               <a:buChar char="•"/>
               <a:defRPr sz="1800" kern="1200">
                 <a:solidFill>
                   <a:schemeClr val="tx1"/>
                 </a:solidFill>
                 <a:latin typeface="+mn-lt"/>
-                <a:ea typeface="+mn-lt"/>
-                <a:cs typeface="+mn-lt"/>
+                <a:ea typeface="+mn-ea"/>
+                <a:cs typeface="+mn-cs"/>
               </a:defRPr>
             </a:lvl6pPr>
-            <a:lvl7pPr marL="2971800" indent="-228600" algn="l" defTabSz="914400">
+            <a:lvl7pPr marL="2971800" indent="-228600" algn="l" defTabSz="914400" rtl="0" eaLnBrk="1" latinLnBrk="0" hangingPunct="1">
               <a:lnSpc>
                 <a:spcPct val="90000"/>
               </a:lnSpc>
               <a:spcBef>
                 <a:spcPts val="500"/>
               </a:spcBef>
-              <a:buFont typeface="Arial"/>
+              <a:buFont typeface="Arial" panose="020B0604020202020204" pitchFamily="34" charset="0"/>
               <a:buChar char="•"/>
               <a:defRPr sz="1800" kern="1200">
                 <a:solidFill>
                   <a:schemeClr val="tx1"/>
                 </a:solidFill>
                 <a:latin typeface="+mn-lt"/>
-                <a:ea typeface="+mn-lt"/>
-                <a:cs typeface="+mn-lt"/>
+                <a:ea typeface="+mn-ea"/>
+                <a:cs typeface="+mn-cs"/>
               </a:defRPr>
             </a:lvl7pPr>
-            <a:lvl8pPr marL="3429000" indent="-228600" algn="l" defTabSz="914400">
+            <a:lvl8pPr marL="3429000" indent="-228600" algn="l" defTabSz="914400" rtl="0" eaLnBrk="1" latinLnBrk="0" hangingPunct="1">
               <a:lnSpc>
                 <a:spcPct val="90000"/>
               </a:lnSpc>
               <a:spcBef>
                 <a:spcPts val="500"/>
               </a:spcBef>
-              <a:buFont typeface="Arial"/>
+              <a:buFont typeface="Arial" panose="020B0604020202020204" pitchFamily="34" charset="0"/>
               <a:buChar char="•"/>
               <a:defRPr sz="1800" kern="1200">
                 <a:solidFill>
                   <a:schemeClr val="tx1"/>
                 </a:solidFill>
                 <a:latin typeface="+mn-lt"/>
-                <a:ea typeface="+mn-lt"/>
-                <a:cs typeface="+mn-lt"/>
+                <a:ea typeface="+mn-ea"/>
+                <a:cs typeface="+mn-cs"/>
               </a:defRPr>
             </a:lvl8pPr>
-            <a:lvl9pPr marL="3886200" indent="-228600" algn="l" defTabSz="914400">
+            <a:lvl9pPr marL="3886200" indent="-228600" algn="l" defTabSz="914400" rtl="0" eaLnBrk="1" latinLnBrk="0" hangingPunct="1">
               <a:lnSpc>
                 <a:spcPct val="90000"/>
               </a:lnSpc>
               <a:spcBef>
                 <a:spcPts val="500"/>
               </a:spcBef>
-              <a:buFont typeface="Arial"/>
+              <a:buFont typeface="Arial" panose="020B0604020202020204" pitchFamily="34" charset="0"/>
               <a:buChar char="•"/>
               <a:defRPr sz="1800" kern="1200">
                 <a:solidFill>
                   <a:schemeClr val="tx1"/>
                 </a:solidFill>
                 <a:latin typeface="+mn-lt"/>
-                <a:ea typeface="+mn-lt"/>
-                <a:cs typeface="+mn-lt"/>
+                <a:ea typeface="+mn-ea"/>
+                <a:cs typeface="+mn-cs"/>
               </a:defRPr>
             </a:lvl9pPr>
           </a:lstStyle>
           <a:p>
-            <a:pPr algn="l">
-              <a:defRPr sz="2175">
-                <a:solidFill>
-                  <a:srgbClr val="000000"/>
-                </a:solidFill>
-                <a:latin typeface="Calibri"/>
-                <a:ea typeface="Calibri"/>
-                <a:cs typeface="Calibri"/>
-              </a:defRPr>
-            </a:pPr>
-            <a:r>
-              <a:rPr sz="2175">
-                <a:solidFill>
-                  <a:srgbClr val="000000"/>
-                </a:solidFill>
-                <a:latin typeface="Calibri"/>
-                <a:ea typeface="Calibri"/>
-                <a:cs typeface="Calibri"/>
-              </a:rPr>
-              <a:t>withExpiresAt() registra o momento de expiração do token.</a:t>
+            <a:r>
+              <a:rPr lang="pt-BR" dirty="0" err="1"/>
+              <a:t>getLogin</a:t>
+            </a:r>
+            <a:r>
+              <a:rPr lang="pt-BR" dirty="0"/>
+              <a:t>() obtém o login do usuário recebido.</a:t>
+            </a:r>
+          </a:p>
+          <a:p>
+            <a:r>
+              <a:rPr lang="pt-BR" dirty="0"/>
+              <a:t>O valor fica no campo sub do </a:t>
+            </a:r>
+            <a:r>
+              <a:rPr lang="pt-BR" dirty="0" err="1"/>
+              <a:t>payload</a:t>
+            </a:r>
+            <a:r>
+              <a:rPr lang="pt-BR" dirty="0"/>
+              <a:t>.</a:t>
             </a:r>
           </a:p>
         </p:txBody>
@@ -5972,8 +5258,8 @@
         </p:nvSpPr>
         <p:spPr>
           <a:xfrm>
-            <a:off x="857250" y="2762250"/>
-            <a:ext cx="10477500" cy="1809750"/>
+            <a:off x="1961431" y="3049108"/>
+            <a:ext cx="7920000" cy="1333500"/>
           </a:xfrm>
           <a:prstGeom prst="roundRect">
             <a:avLst>
@@ -5999,7 +5285,7 @@
       </p:sp>
       <p:sp>
         <p:nvSpPr>
-          <p:cNvPr id="4" name="Retângulo 3">
+          <p:cNvPr id="5" name="Retângulo 4">
             <a:extLst>
               <a:ext uri="{FF2B5EF4-FFF2-40B4-BE49-F238E27FC236}">
                 <a16:creationId xmlns:a16="http://schemas.microsoft.com/office/drawing/2014/main" id="{3CE8AC7A-3364-4E97-BC2E-25CF018F1E04}"/>
@@ -6013,8 +5299,8 @@
         </p:nvSpPr>
         <p:spPr>
           <a:xfrm>
-            <a:off x="1143000" y="3190875"/>
-            <a:ext cx="10001250" cy="2865120"/>
+            <a:off x="2247181" y="3409171"/>
+            <a:ext cx="5680494" cy="613374"/>
           </a:xfrm>
           <a:prstGeom prst="rect">
             <a:avLst/>
@@ -6037,95 +5323,59 @@
               </a:defRPr>
             </a:pPr>
             <a:r>
-              <a:rPr sz="2400">
-                <a:solidFill>
-                  <a:srgbClr val="D4D4D4"/>
-                </a:solidFill>
-                <a:latin typeface="Consolas"/>
-                <a:ea typeface="Consolas"/>
-                <a:cs typeface="Consolas"/>
-              </a:rPr>
-              <a:t>.withExpiresAt(dataExpiracao())</a:t>
-            </a:r>
-          </a:p>
-        </p:txBody>
-      </p:sp>
-      <p:sp>
-        <p:nvSpPr>
-          <p:cNvPr id="12" name="Retângulo 11">
-            <a:extLst>
-              <a:ext uri="{FF2B5EF4-FFF2-40B4-BE49-F238E27FC236}">
-                <a16:creationId xmlns:a16="http://schemas.microsoft.com/office/drawing/2014/main" id="{7B71F0EF-64D6-450C-8CA3-A9510514A359}"/>
-              </a:ext>
-            </a:extLst>
-          </p:cNvPr>
-          <p:cNvSpPr>
-            <a:spLocks noGrp="1"/>
-          </p:cNvSpPr>
-          <p:nvPr/>
-        </p:nvSpPr>
-        <p:spPr>
-          <a:xfrm>
-            <a:off x="685800" y="4905375"/>
-            <a:ext cx="10820400" cy="1333500"/>
-          </a:xfrm>
-          <a:prstGeom prst="rect">
-            <a:avLst/>
-          </a:prstGeom>
-          <a:noFill/>
-          <a:ln w="0">
-            <a:noFill/>
-          </a:ln>
-        </p:spPr>
-        <p:txBody>
-          <a:bodyPr>
-            <a:noAutofit/>
-          </a:bodyPr>
-          <a:lstStyle/>
-          <a:p>
-            <a:pPr algn="l">
-              <a:defRPr sz="2100">
-                <a:solidFill>
-                  <a:srgbClr val="000000"/>
-                </a:solidFill>
-                <a:latin typeface="Calibri"/>
-                <a:ea typeface="Calibri"/>
-                <a:cs typeface="Calibri"/>
-              </a:defRPr>
-            </a:pPr>
-            <a:r>
-              <a:rPr sz="2100">
-                <a:solidFill>
-                  <a:srgbClr val="000000"/>
-                </a:solidFill>
-                <a:latin typeface="Calibri"/>
-                <a:ea typeface="Calibri"/>
-                <a:cs typeface="Calibri"/>
-              </a:rPr>
-              <a:t>dataExpiracao() é um método criado por nós para calcular esse momento.</a:t>
-            </a:r>
-          </a:p>
-          <a:p>
-            <a:pPr algn="l">
-              <a:defRPr sz="2100">
-                <a:solidFill>
-                  <a:srgbClr val="000000"/>
-                </a:solidFill>
-                <a:latin typeface="Calibri"/>
-                <a:ea typeface="Calibri"/>
-                <a:cs typeface="Calibri"/>
-              </a:defRPr>
-            </a:pPr>
-            <a:r>
-              <a:rPr sz="2100">
-                <a:solidFill>
-                  <a:srgbClr val="000000"/>
-                </a:solidFill>
-                <a:latin typeface="Calibri"/>
-                <a:ea typeface="Calibri"/>
-                <a:cs typeface="Calibri"/>
-              </a:rPr>
-              <a:t>A API deve verificar a expiração ao validar o token.</a:t>
+              <a:rPr sz="2400" dirty="0">
+                <a:solidFill>
+                  <a:srgbClr val="D4D4D4"/>
+                </a:solidFill>
+                <a:latin typeface="Consolas"/>
+                <a:ea typeface="Consolas"/>
+                <a:cs typeface="Consolas"/>
+              </a:rPr>
+              <a:t>.</a:t>
+            </a:r>
+            <a:r>
+              <a:rPr sz="2400" dirty="0" err="1">
+                <a:solidFill>
+                  <a:srgbClr val="D4D4D4"/>
+                </a:solidFill>
+                <a:latin typeface="Consolas"/>
+                <a:ea typeface="Consolas"/>
+                <a:cs typeface="Consolas"/>
+              </a:rPr>
+              <a:t>withSubject</a:t>
+            </a:r>
+            <a:r>
+              <a:rPr sz="2400" dirty="0">
+                <a:solidFill>
+                  <a:srgbClr val="D4D4D4"/>
+                </a:solidFill>
+                <a:latin typeface="Consolas"/>
+                <a:ea typeface="Consolas"/>
+                <a:cs typeface="Consolas"/>
+              </a:rPr>
+              <a:t>(</a:t>
+            </a:r>
+            <a:r>
+              <a:rPr sz="2400" dirty="0" err="1">
+                <a:solidFill>
+                  <a:srgbClr val="D4D4D4"/>
+                </a:solidFill>
+                <a:latin typeface="Consolas"/>
+                <a:ea typeface="Consolas"/>
+                <a:cs typeface="Consolas"/>
+              </a:rPr>
+              <a:t>usuario.getLogin</a:t>
+            </a:r>
+            <a:r>
+              <a:rPr sz="2400" dirty="0">
+                <a:solidFill>
+                  <a:srgbClr val="D4D4D4"/>
+                </a:solidFill>
+                <a:latin typeface="Consolas"/>
+                <a:ea typeface="Consolas"/>
+                <a:cs typeface="Consolas"/>
+              </a:rPr>
+              <a:t>())</a:t>
             </a:r>
           </a:p>
         </p:txBody>
@@ -6133,7 +5383,7 @@
     </p:spTree>
     <p:extLst>
       <p:ext uri="{BB962C8B-B14F-4D97-AF65-F5344CB8AC3E}">
-        <p14:creationId xmlns:p14="http://schemas.microsoft.com/office/powerpoint/2010/main" val="679006063"/>
+        <p14:creationId xmlns:p14="http://schemas.microsoft.com/office/powerpoint/2010/main" val="3553245431"/>
       </p:ext>
     </p:extLst>
   </p:cSld>
@@ -6165,7 +5415,7 @@
           <p:cNvPr id="2" name="Título 1">
             <a:extLst>
               <a:ext uri="{FF2B5EF4-FFF2-40B4-BE49-F238E27FC236}">
-                <a16:creationId xmlns:a16="http://schemas.microsoft.com/office/drawing/2014/main" id="{8738858E-69E2-8A32-4D8D-61A4750C2960}"/>
+                <a16:creationId xmlns:a16="http://schemas.microsoft.com/office/drawing/2014/main" id="{D5EC0288-989F-97CF-147C-FC72C99C90B3}"/>
               </a:ext>
             </a:extLst>
           </p:cNvPr>
@@ -6178,248 +5428,263 @@
         </p:nvSpPr>
         <p:spPr/>
         <p:txBody>
-          <a:bodyPr>
-            <a:noAutofit/>
-          </a:bodyPr>
+          <a:bodyPr/>
           <a:lstStyle/>
           <a:p>
-            <a:pPr>
-              <a:defRPr sz="3000">
-                <a:solidFill>
-                  <a:srgbClr val="000000"/>
-                </a:solidFill>
-                <a:latin typeface="Calibri Light"/>
-                <a:ea typeface="Calibri Light"/>
-                <a:cs typeface="Calibri Light"/>
-              </a:defRPr>
-            </a:pPr>
-            <a:r>
-              <a:rPr sz="3000">
-                <a:solidFill>
-                  <a:srgbClr val="000000"/>
-                </a:solidFill>
-                <a:latin typeface="Calibri Light"/>
-                <a:ea typeface="Calibri Light"/>
-                <a:cs typeface="Calibri Light"/>
-              </a:rPr>
-              <a:t>Assinatura e geração do JWT</a:t>
-            </a:r>
-          </a:p>
-        </p:txBody>
-      </p:sp>
-      <p:sp>
-        <p:nvSpPr>
-          <p:cNvPr id="6" name="Espaço Reservado para Conteúdo 5">
-            <a:extLst>
-              <a:ext uri="{FF2B5EF4-FFF2-40B4-BE49-F238E27FC236}">
-                <a16:creationId xmlns:a16="http://schemas.microsoft.com/office/drawing/2014/main" id="{B24F9431-18D8-4DC9-B9CC-1BCF1A71C18D}"/>
+            <a:r>
+              <a:rPr lang="pt-BR" dirty="0"/>
+              <a:t>Prazo de validade</a:t>
+            </a:r>
+          </a:p>
+        </p:txBody>
+      </p:sp>
+      <p:sp>
+        <p:nvSpPr>
+          <p:cNvPr id="3" name="Espaço Reservado para Conteúdo 2">
+            <a:extLst>
+              <a:ext uri="{FF2B5EF4-FFF2-40B4-BE49-F238E27FC236}">
+                <a16:creationId xmlns:a16="http://schemas.microsoft.com/office/drawing/2014/main" id="{69FAE0A2-0454-3FE8-2109-D8CADC22308C}"/>
               </a:ext>
             </a:extLst>
           </p:cNvPr>
           <p:cNvSpPr>
             <a:spLocks noGrp="1"/>
           </p:cNvSpPr>
-          <p:nvPr/>
+          <p:nvPr>
+            <p:ph idx="1"/>
+          </p:nvPr>
         </p:nvSpPr>
         <p:spPr>
           <a:xfrm>
-            <a:off x="685800" y="1809750"/>
-            <a:ext cx="10820400" cy="809625"/>
+            <a:off x="592347" y="1844675"/>
+            <a:ext cx="11007306" cy="743250"/>
+          </a:xfrm>
+        </p:spPr>
+        <p:txBody>
+          <a:bodyPr/>
+          <a:lstStyle/>
+          <a:p>
+            <a:r>
+              <a:rPr lang="pt-BR" dirty="0" err="1"/>
+              <a:t>withExpiresAt</a:t>
+            </a:r>
+            <a:r>
+              <a:rPr lang="pt-BR" dirty="0"/>
+              <a:t>() registra o momento de expiração do token.</a:t>
+            </a:r>
+          </a:p>
+          <a:p>
+            <a:endParaRPr lang="pt-BR" dirty="0"/>
+          </a:p>
+        </p:txBody>
+      </p:sp>
+      <p:sp>
+        <p:nvSpPr>
+          <p:cNvPr id="4" name="Espaço Reservado para Conteúdo 2">
+            <a:extLst>
+              <a:ext uri="{FF2B5EF4-FFF2-40B4-BE49-F238E27FC236}">
+                <a16:creationId xmlns:a16="http://schemas.microsoft.com/office/drawing/2014/main" id="{05CFACAE-584D-9D92-721D-6887045CA489}"/>
+              </a:ext>
+            </a:extLst>
+          </p:cNvPr>
+          <p:cNvSpPr txBox="1">
+            <a:spLocks/>
+          </p:cNvSpPr>
+          <p:nvPr/>
+        </p:nvSpPr>
+        <p:spPr>
+          <a:xfrm>
+            <a:off x="592347" y="4894443"/>
+            <a:ext cx="11007306" cy="1151567"/>
           </a:xfrm>
           <a:prstGeom prst="rect">
             <a:avLst/>
           </a:prstGeom>
         </p:spPr>
         <p:txBody>
-          <a:bodyPr>
-            <a:noAutofit/>
-          </a:bodyPr>
+          <a:bodyPr/>
           <a:lstStyle>
-            <a:lvl1pPr marL="0" indent="0" algn="just" defTabSz="914400">
+            <a:lvl1pPr marL="0" indent="0" algn="just" defTabSz="914400" rtl="0" eaLnBrk="1" latinLnBrk="0" hangingPunct="1">
               <a:lnSpc>
                 <a:spcPct val="150000"/>
               </a:lnSpc>
               <a:spcBef>
                 <a:spcPts val="0"/>
               </a:spcBef>
-              <a:buFont typeface="Arial"/>
+              <a:buFont typeface="Arial" panose="020B0604020202020204" pitchFamily="34" charset="0"/>
               <a:buNone/>
               <a:defRPr sz="2000" kern="1200">
                 <a:solidFill>
                   <a:schemeClr val="tx1"/>
                 </a:solidFill>
-                <a:latin typeface="Times New Roman"/>
-                <a:ea typeface="Times New Roman"/>
-                <a:cs typeface="Times New Roman"/>
+                <a:latin typeface="Times New Roman" panose="02020603050405020304" pitchFamily="18" charset="0"/>
+                <a:ea typeface="+mn-ea"/>
+                <a:cs typeface="Times New Roman" panose="02020603050405020304" pitchFamily="18" charset="0"/>
               </a:defRPr>
             </a:lvl1pPr>
-            <a:lvl2pPr marL="457200" indent="0" algn="just" defTabSz="914400">
+            <a:lvl2pPr marL="457200" indent="0" algn="just" defTabSz="914400" rtl="0" eaLnBrk="1" latinLnBrk="0" hangingPunct="1">
               <a:lnSpc>
                 <a:spcPct val="150000"/>
               </a:lnSpc>
               <a:spcBef>
                 <a:spcPts val="0"/>
               </a:spcBef>
-              <a:buFont typeface="Arial"/>
+              <a:buFont typeface="Arial" panose="020B0604020202020204" pitchFamily="34" charset="0"/>
               <a:buNone/>
               <a:defRPr sz="1600" kern="1200">
                 <a:solidFill>
                   <a:schemeClr val="tx1"/>
                 </a:solidFill>
-                <a:latin typeface="Times New Roman"/>
-                <a:ea typeface="Times New Roman"/>
-                <a:cs typeface="Times New Roman"/>
+                <a:latin typeface="Times New Roman" panose="02020603050405020304" pitchFamily="18" charset="0"/>
+                <a:ea typeface="+mn-ea"/>
+                <a:cs typeface="Times New Roman" panose="02020603050405020304" pitchFamily="18" charset="0"/>
               </a:defRPr>
             </a:lvl2pPr>
-            <a:lvl3pPr marL="914400" indent="0" algn="just" defTabSz="914400">
+            <a:lvl3pPr marL="914400" indent="0" algn="just" defTabSz="914400" rtl="0" eaLnBrk="1" latinLnBrk="0" hangingPunct="1">
               <a:lnSpc>
                 <a:spcPct val="150000"/>
               </a:lnSpc>
               <a:spcBef>
                 <a:spcPts val="0"/>
               </a:spcBef>
-              <a:buFont typeface="Arial"/>
+              <a:buFont typeface="Arial" panose="020B0604020202020204" pitchFamily="34" charset="0"/>
               <a:buNone/>
               <a:defRPr sz="1400" kern="1200">
                 <a:solidFill>
                   <a:schemeClr val="tx1"/>
                 </a:solidFill>
-                <a:latin typeface="Times New Roman"/>
-                <a:ea typeface="Times New Roman"/>
-                <a:cs typeface="Times New Roman"/>
+                <a:latin typeface="Times New Roman" panose="02020603050405020304" pitchFamily="18" charset="0"/>
+                <a:ea typeface="+mn-ea"/>
+                <a:cs typeface="Times New Roman" panose="02020603050405020304" pitchFamily="18" charset="0"/>
               </a:defRPr>
             </a:lvl3pPr>
-            <a:lvl4pPr marL="1371600" indent="0" algn="just" defTabSz="914400">
+            <a:lvl4pPr marL="1371600" indent="0" algn="just" defTabSz="914400" rtl="0" eaLnBrk="1" latinLnBrk="0" hangingPunct="1">
               <a:lnSpc>
                 <a:spcPct val="150000"/>
               </a:lnSpc>
               <a:spcBef>
                 <a:spcPts val="0"/>
               </a:spcBef>
-              <a:buFont typeface="Arial"/>
+              <a:buFont typeface="Arial" panose="020B0604020202020204" pitchFamily="34" charset="0"/>
               <a:buNone/>
               <a:defRPr sz="1200" kern="1200">
                 <a:solidFill>
                   <a:schemeClr val="tx1"/>
                 </a:solidFill>
-                <a:latin typeface="Times New Roman"/>
-                <a:ea typeface="Times New Roman"/>
-                <a:cs typeface="Times New Roman"/>
+                <a:latin typeface="Times New Roman" panose="02020603050405020304" pitchFamily="18" charset="0"/>
+                <a:ea typeface="+mn-ea"/>
+                <a:cs typeface="Times New Roman" panose="02020603050405020304" pitchFamily="18" charset="0"/>
               </a:defRPr>
             </a:lvl4pPr>
-            <a:lvl5pPr marL="1828800" indent="0" algn="just" defTabSz="914400">
+            <a:lvl5pPr marL="1828800" indent="0" algn="just" defTabSz="914400" rtl="0" eaLnBrk="1" latinLnBrk="0" hangingPunct="1">
               <a:lnSpc>
                 <a:spcPct val="150000"/>
               </a:lnSpc>
               <a:spcBef>
                 <a:spcPts val="0"/>
               </a:spcBef>
-              <a:buFont typeface="Arial"/>
+              <a:buFont typeface="Arial" panose="020B0604020202020204" pitchFamily="34" charset="0"/>
               <a:buNone/>
               <a:defRPr sz="1000" kern="1200">
                 <a:solidFill>
                   <a:schemeClr val="tx1"/>
                 </a:solidFill>
-                <a:latin typeface="Times New Roman"/>
-                <a:ea typeface="Times New Roman"/>
-                <a:cs typeface="Times New Roman"/>
+                <a:latin typeface="Times New Roman" panose="02020603050405020304" pitchFamily="18" charset="0"/>
+                <a:ea typeface="+mn-ea"/>
+                <a:cs typeface="Times New Roman" panose="02020603050405020304" pitchFamily="18" charset="0"/>
               </a:defRPr>
             </a:lvl5pPr>
-            <a:lvl6pPr marL="2514600" indent="-228600" algn="l" defTabSz="914400">
+            <a:lvl6pPr marL="2514600" indent="-228600" algn="l" defTabSz="914400" rtl="0" eaLnBrk="1" latinLnBrk="0" hangingPunct="1">
               <a:lnSpc>
                 <a:spcPct val="90000"/>
               </a:lnSpc>
               <a:spcBef>
                 <a:spcPts val="500"/>
               </a:spcBef>
-              <a:buFont typeface="Arial"/>
+              <a:buFont typeface="Arial" panose="020B0604020202020204" pitchFamily="34" charset="0"/>
               <a:buChar char="•"/>
               <a:defRPr sz="1800" kern="1200">
                 <a:solidFill>
                   <a:schemeClr val="tx1"/>
                 </a:solidFill>
                 <a:latin typeface="+mn-lt"/>
-                <a:ea typeface="+mn-lt"/>
-                <a:cs typeface="+mn-lt"/>
+                <a:ea typeface="+mn-ea"/>
+                <a:cs typeface="+mn-cs"/>
               </a:defRPr>
             </a:lvl6pPr>
-            <a:lvl7pPr marL="2971800" indent="-228600" algn="l" defTabSz="914400">
+            <a:lvl7pPr marL="2971800" indent="-228600" algn="l" defTabSz="914400" rtl="0" eaLnBrk="1" latinLnBrk="0" hangingPunct="1">
               <a:lnSpc>
                 <a:spcPct val="90000"/>
               </a:lnSpc>
               <a:spcBef>
                 <a:spcPts val="500"/>
               </a:spcBef>
-              <a:buFont typeface="Arial"/>
+              <a:buFont typeface="Arial" panose="020B0604020202020204" pitchFamily="34" charset="0"/>
               <a:buChar char="•"/>
               <a:defRPr sz="1800" kern="1200">
                 <a:solidFill>
                   <a:schemeClr val="tx1"/>
                 </a:solidFill>
                 <a:latin typeface="+mn-lt"/>
-                <a:ea typeface="+mn-lt"/>
-                <a:cs typeface="+mn-lt"/>
+                <a:ea typeface="+mn-ea"/>
+                <a:cs typeface="+mn-cs"/>
               </a:defRPr>
             </a:lvl7pPr>
-            <a:lvl8pPr marL="3429000" indent="-228600" algn="l" defTabSz="914400">
+            <a:lvl8pPr marL="3429000" indent="-228600" algn="l" defTabSz="914400" rtl="0" eaLnBrk="1" latinLnBrk="0" hangingPunct="1">
               <a:lnSpc>
                 <a:spcPct val="90000"/>
               </a:lnSpc>
               <a:spcBef>
                 <a:spcPts val="500"/>
               </a:spcBef>
-              <a:buFont typeface="Arial"/>
+              <a:buFont typeface="Arial" panose="020B0604020202020204" pitchFamily="34" charset="0"/>
               <a:buChar char="•"/>
               <a:defRPr sz="1800" kern="1200">
                 <a:solidFill>
                   <a:schemeClr val="tx1"/>
                 </a:solidFill>
                 <a:latin typeface="+mn-lt"/>
-                <a:ea typeface="+mn-lt"/>
-                <a:cs typeface="+mn-lt"/>
+                <a:ea typeface="+mn-ea"/>
+                <a:cs typeface="+mn-cs"/>
               </a:defRPr>
             </a:lvl8pPr>
-            <a:lvl9pPr marL="3886200" indent="-228600" algn="l" defTabSz="914400">
+            <a:lvl9pPr marL="3886200" indent="-228600" algn="l" defTabSz="914400" rtl="0" eaLnBrk="1" latinLnBrk="0" hangingPunct="1">
               <a:lnSpc>
                 <a:spcPct val="90000"/>
               </a:lnSpc>
               <a:spcBef>
                 <a:spcPts val="500"/>
               </a:spcBef>
-              <a:buFont typeface="Arial"/>
+              <a:buFont typeface="Arial" panose="020B0604020202020204" pitchFamily="34" charset="0"/>
               <a:buChar char="•"/>
               <a:defRPr sz="1800" kern="1200">
                 <a:solidFill>
                   <a:schemeClr val="tx1"/>
                 </a:solidFill>
                 <a:latin typeface="+mn-lt"/>
-                <a:ea typeface="+mn-lt"/>
-                <a:cs typeface="+mn-lt"/>
+                <a:ea typeface="+mn-ea"/>
+                <a:cs typeface="+mn-cs"/>
               </a:defRPr>
             </a:lvl9pPr>
           </a:lstStyle>
           <a:p>
-            <a:pPr algn="l">
-              <a:defRPr sz="2175">
-                <a:solidFill>
-                  <a:srgbClr val="000000"/>
-                </a:solidFill>
-                <a:latin typeface="Calibri"/>
-                <a:ea typeface="Calibri"/>
-                <a:cs typeface="Calibri"/>
-              </a:defRPr>
-            </a:pPr>
-            <a:r>
-              <a:rPr sz="2175">
-                <a:solidFill>
-                  <a:srgbClr val="000000"/>
-                </a:solidFill>
-                <a:latin typeface="Calibri"/>
-                <a:ea typeface="Calibri"/>
-                <a:cs typeface="Calibri"/>
-              </a:rPr>
-              <a:t>sign() usa o algoritmo e a chave definidos para assinar o token.</a:t>
-            </a:r>
+            <a:r>
+              <a:rPr lang="pt-BR" dirty="0" err="1"/>
+              <a:t>dataExpiracao</a:t>
+            </a:r>
+            <a:r>
+              <a:rPr lang="pt-BR" dirty="0"/>
+              <a:t>() é um método criado por nós para calcular esse momento.</a:t>
+            </a:r>
+          </a:p>
+          <a:p>
+            <a:r>
+              <a:rPr lang="pt-BR" dirty="0"/>
+              <a:t>A API deve verificar a expiração ao validar o token.</a:t>
+            </a:r>
+          </a:p>
+          <a:p>
+            <a:endParaRPr lang="pt-BR" dirty="0"/>
           </a:p>
         </p:txBody>
       </p:sp>
@@ -6439,8 +5704,8 @@
         </p:nvSpPr>
         <p:spPr>
           <a:xfrm>
-            <a:off x="857250" y="2762250"/>
-            <a:ext cx="10477500" cy="1809750"/>
+            <a:off x="2136000" y="3129607"/>
+            <a:ext cx="7920000" cy="1223154"/>
           </a:xfrm>
           <a:prstGeom prst="roundRect">
             <a:avLst>
@@ -6466,7 +5731,7 @@
       </p:sp>
       <p:sp>
         <p:nvSpPr>
-          <p:cNvPr id="4" name="Retângulo 3">
+          <p:cNvPr id="5" name="Retângulo 4">
             <a:extLst>
               <a:ext uri="{FF2B5EF4-FFF2-40B4-BE49-F238E27FC236}">
                 <a16:creationId xmlns:a16="http://schemas.microsoft.com/office/drawing/2014/main" id="{3CE8AC7A-3364-4E97-BC2E-25CF018F1E04}"/>
@@ -6480,8 +5745,8 @@
         </p:nvSpPr>
         <p:spPr>
           <a:xfrm>
-            <a:off x="1143000" y="3190875"/>
-            <a:ext cx="10001250" cy="2865120"/>
+            <a:off x="2428335" y="3434497"/>
+            <a:ext cx="5404449" cy="613374"/>
           </a:xfrm>
           <a:prstGeom prst="rect">
             <a:avLst/>
@@ -6504,95 +5769,59 @@
               </a:defRPr>
             </a:pPr>
             <a:r>
-              <a:rPr sz="2400">
-                <a:solidFill>
-                  <a:srgbClr val="D4D4D4"/>
-                </a:solidFill>
-                <a:latin typeface="Consolas"/>
-                <a:ea typeface="Consolas"/>
-                <a:cs typeface="Consolas"/>
-              </a:rPr>
-              <a:t>.sign(algoritmo);</a:t>
-            </a:r>
-          </a:p>
-        </p:txBody>
-      </p:sp>
-      <p:sp>
-        <p:nvSpPr>
-          <p:cNvPr id="12" name="Retângulo 11">
-            <a:extLst>
-              <a:ext uri="{FF2B5EF4-FFF2-40B4-BE49-F238E27FC236}">
-                <a16:creationId xmlns:a16="http://schemas.microsoft.com/office/drawing/2014/main" id="{F61CFA94-872C-4FD1-AE0A-00CFAFC57244}"/>
-              </a:ext>
-            </a:extLst>
-          </p:cNvPr>
-          <p:cNvSpPr>
-            <a:spLocks noGrp="1"/>
-          </p:cNvSpPr>
-          <p:nvPr/>
-        </p:nvSpPr>
-        <p:spPr>
-          <a:xfrm>
-            <a:off x="685800" y="4905375"/>
-            <a:ext cx="10820400" cy="1333500"/>
-          </a:xfrm>
-          <a:prstGeom prst="rect">
-            <a:avLst/>
-          </a:prstGeom>
-          <a:noFill/>
-          <a:ln w="0">
-            <a:noFill/>
-          </a:ln>
-        </p:spPr>
-        <p:txBody>
-          <a:bodyPr>
-            <a:noAutofit/>
-          </a:bodyPr>
-          <a:lstStyle/>
-          <a:p>
-            <a:pPr algn="l">
-              <a:defRPr sz="2100">
-                <a:solidFill>
-                  <a:srgbClr val="000000"/>
-                </a:solidFill>
-                <a:latin typeface="Calibri"/>
-                <a:ea typeface="Calibri"/>
-                <a:cs typeface="Calibri"/>
-              </a:defRPr>
-            </a:pPr>
-            <a:r>
-              <a:rPr sz="2100">
-                <a:solidFill>
-                  <a:srgbClr val="000000"/>
-                </a:solidFill>
-                <a:latin typeface="Calibri"/>
-                <a:ea typeface="Calibri"/>
-                <a:cs typeface="Calibri"/>
-              </a:rPr>
-              <a:t>Esse método gera a String final do JWT.</a:t>
-            </a:r>
-          </a:p>
-          <a:p>
-            <a:pPr algn="l">
-              <a:defRPr sz="2100">
-                <a:solidFill>
-                  <a:srgbClr val="000000"/>
-                </a:solidFill>
-                <a:latin typeface="Calibri"/>
-                <a:ea typeface="Calibri"/>
-                <a:cs typeface="Calibri"/>
-              </a:defRPr>
-            </a:pPr>
-            <a:r>
-              <a:rPr sz="2100">
-                <a:solidFill>
-                  <a:srgbClr val="000000"/>
-                </a:solidFill>
-                <a:latin typeface="Calibri"/>
-                <a:ea typeface="Calibri"/>
-                <a:cs typeface="Calibri"/>
-              </a:rPr>
-              <a:t>A assinatura permite detectar alterações, mas não esconde o conteúdo.</a:t>
+              <a:rPr sz="2400" dirty="0">
+                <a:solidFill>
+                  <a:srgbClr val="D4D4D4"/>
+                </a:solidFill>
+                <a:latin typeface="Consolas"/>
+                <a:ea typeface="Consolas"/>
+                <a:cs typeface="Consolas"/>
+              </a:rPr>
+              <a:t>.</a:t>
+            </a:r>
+            <a:r>
+              <a:rPr sz="2400" dirty="0" err="1">
+                <a:solidFill>
+                  <a:srgbClr val="D4D4D4"/>
+                </a:solidFill>
+                <a:latin typeface="Consolas"/>
+                <a:ea typeface="Consolas"/>
+                <a:cs typeface="Consolas"/>
+              </a:rPr>
+              <a:t>withExpiresAt</a:t>
+            </a:r>
+            <a:r>
+              <a:rPr sz="2400" dirty="0">
+                <a:solidFill>
+                  <a:srgbClr val="D4D4D4"/>
+                </a:solidFill>
+                <a:latin typeface="Consolas"/>
+                <a:ea typeface="Consolas"/>
+                <a:cs typeface="Consolas"/>
+              </a:rPr>
+              <a:t>(</a:t>
+            </a:r>
+            <a:r>
+              <a:rPr sz="2400" dirty="0" err="1">
+                <a:solidFill>
+                  <a:srgbClr val="D4D4D4"/>
+                </a:solidFill>
+                <a:latin typeface="Consolas"/>
+                <a:ea typeface="Consolas"/>
+                <a:cs typeface="Consolas"/>
+              </a:rPr>
+              <a:t>dataExpiracao</a:t>
+            </a:r>
+            <a:r>
+              <a:rPr sz="2400" dirty="0">
+                <a:solidFill>
+                  <a:srgbClr val="D4D4D4"/>
+                </a:solidFill>
+                <a:latin typeface="Consolas"/>
+                <a:ea typeface="Consolas"/>
+                <a:cs typeface="Consolas"/>
+              </a:rPr>
+              <a:t>())</a:t>
             </a:r>
           </a:p>
         </p:txBody>
@@ -6600,7 +5829,7 @@
     </p:spTree>
     <p:extLst>
       <p:ext uri="{BB962C8B-B14F-4D97-AF65-F5344CB8AC3E}">
-        <p14:creationId xmlns:p14="http://schemas.microsoft.com/office/powerpoint/2010/main" val="2376732815"/>
+        <p14:creationId xmlns:p14="http://schemas.microsoft.com/office/powerpoint/2010/main" val="3103222657"/>
       </p:ext>
     </p:extLst>
   </p:cSld>
@@ -6632,7 +5861,7 @@
           <p:cNvPr id="2" name="Título 1">
             <a:extLst>
               <a:ext uri="{FF2B5EF4-FFF2-40B4-BE49-F238E27FC236}">
-                <a16:creationId xmlns:a16="http://schemas.microsoft.com/office/drawing/2014/main" id="{8738858E-69E2-8A32-4D8D-61A4750C2960}"/>
+                <a16:creationId xmlns:a16="http://schemas.microsoft.com/office/drawing/2014/main" id="{F4F607B4-5EE2-D5E4-24AB-B31F724EB657}"/>
               </a:ext>
             </a:extLst>
           </p:cNvPr>
@@ -6645,248 +5874,53 @@
         </p:nvSpPr>
         <p:spPr/>
         <p:txBody>
-          <a:bodyPr>
-            <a:noAutofit/>
-          </a:bodyPr>
+          <a:bodyPr/>
           <a:lstStyle/>
           <a:p>
-            <a:pPr>
-              <a:defRPr sz="3000">
-                <a:solidFill>
-                  <a:srgbClr val="000000"/>
-                </a:solidFill>
-                <a:latin typeface="Calibri Light"/>
-                <a:ea typeface="Calibri Light"/>
-                <a:cs typeface="Calibri Light"/>
-              </a:defRPr>
-            </a:pPr>
-            <a:r>
-              <a:rPr sz="3000">
-                <a:solidFill>
-                  <a:srgbClr val="000000"/>
-                </a:solidFill>
-                <a:latin typeface="Calibri Light"/>
-                <a:ea typeface="Calibri Light"/>
-                <a:cs typeface="Calibri Light"/>
-              </a:rPr>
-              <a:t>Tratamento de falhas</a:t>
-            </a:r>
-          </a:p>
-        </p:txBody>
-      </p:sp>
-      <p:sp>
-        <p:nvSpPr>
-          <p:cNvPr id="6" name="Espaço Reservado para Conteúdo 5">
-            <a:extLst>
-              <a:ext uri="{FF2B5EF4-FFF2-40B4-BE49-F238E27FC236}">
-                <a16:creationId xmlns:a16="http://schemas.microsoft.com/office/drawing/2014/main" id="{B24F9431-18D8-4DC9-B9CC-1BCF1A71C18D}"/>
+            <a:r>
+              <a:rPr lang="pt-BR" dirty="0"/>
+              <a:t>Assinatura e geração do JWT</a:t>
+            </a:r>
+          </a:p>
+        </p:txBody>
+      </p:sp>
+      <p:sp>
+        <p:nvSpPr>
+          <p:cNvPr id="3" name="Espaço Reservado para Conteúdo 2">
+            <a:extLst>
+              <a:ext uri="{FF2B5EF4-FFF2-40B4-BE49-F238E27FC236}">
+                <a16:creationId xmlns:a16="http://schemas.microsoft.com/office/drawing/2014/main" id="{03E28F67-DB22-C007-2ED1-9EA25BC13A8D}"/>
               </a:ext>
             </a:extLst>
           </p:cNvPr>
           <p:cNvSpPr>
             <a:spLocks noGrp="1"/>
           </p:cNvSpPr>
-          <p:nvPr/>
+          <p:nvPr>
+            <p:ph idx="1"/>
+          </p:nvPr>
         </p:nvSpPr>
         <p:spPr>
           <a:xfrm>
-            <a:off x="685800" y="1809750"/>
-            <a:ext cx="10820400" cy="809625"/>
+            <a:off x="592347" y="1844676"/>
+            <a:ext cx="11007306" cy="622480"/>
           </a:xfrm>
-          <a:prstGeom prst="rect">
-            <a:avLst/>
-          </a:prstGeom>
         </p:spPr>
         <p:txBody>
-          <a:bodyPr>
-            <a:noAutofit/>
-          </a:bodyPr>
-          <a:lstStyle>
-            <a:lvl1pPr marL="0" indent="0" algn="just" defTabSz="914400">
-              <a:lnSpc>
-                <a:spcPct val="150000"/>
-              </a:lnSpc>
-              <a:spcBef>
-                <a:spcPts val="0"/>
-              </a:spcBef>
-              <a:buFont typeface="Arial"/>
-              <a:buNone/>
-              <a:defRPr sz="2000" kern="1200">
-                <a:solidFill>
-                  <a:schemeClr val="tx1"/>
-                </a:solidFill>
-                <a:latin typeface="Times New Roman"/>
-                <a:ea typeface="Times New Roman"/>
-                <a:cs typeface="Times New Roman"/>
-              </a:defRPr>
-            </a:lvl1pPr>
-            <a:lvl2pPr marL="457200" indent="0" algn="just" defTabSz="914400">
-              <a:lnSpc>
-                <a:spcPct val="150000"/>
-              </a:lnSpc>
-              <a:spcBef>
-                <a:spcPts val="0"/>
-              </a:spcBef>
-              <a:buFont typeface="Arial"/>
-              <a:buNone/>
-              <a:defRPr sz="1600" kern="1200">
-                <a:solidFill>
-                  <a:schemeClr val="tx1"/>
-                </a:solidFill>
-                <a:latin typeface="Times New Roman"/>
-                <a:ea typeface="Times New Roman"/>
-                <a:cs typeface="Times New Roman"/>
-              </a:defRPr>
-            </a:lvl2pPr>
-            <a:lvl3pPr marL="914400" indent="0" algn="just" defTabSz="914400">
-              <a:lnSpc>
-                <a:spcPct val="150000"/>
-              </a:lnSpc>
-              <a:spcBef>
-                <a:spcPts val="0"/>
-              </a:spcBef>
-              <a:buFont typeface="Arial"/>
-              <a:buNone/>
-              <a:defRPr sz="1400" kern="1200">
-                <a:solidFill>
-                  <a:schemeClr val="tx1"/>
-                </a:solidFill>
-                <a:latin typeface="Times New Roman"/>
-                <a:ea typeface="Times New Roman"/>
-                <a:cs typeface="Times New Roman"/>
-              </a:defRPr>
-            </a:lvl3pPr>
-            <a:lvl4pPr marL="1371600" indent="0" algn="just" defTabSz="914400">
-              <a:lnSpc>
-                <a:spcPct val="150000"/>
-              </a:lnSpc>
-              <a:spcBef>
-                <a:spcPts val="0"/>
-              </a:spcBef>
-              <a:buFont typeface="Arial"/>
-              <a:buNone/>
-              <a:defRPr sz="1200" kern="1200">
-                <a:solidFill>
-                  <a:schemeClr val="tx1"/>
-                </a:solidFill>
-                <a:latin typeface="Times New Roman"/>
-                <a:ea typeface="Times New Roman"/>
-                <a:cs typeface="Times New Roman"/>
-              </a:defRPr>
-            </a:lvl4pPr>
-            <a:lvl5pPr marL="1828800" indent="0" algn="just" defTabSz="914400">
-              <a:lnSpc>
-                <a:spcPct val="150000"/>
-              </a:lnSpc>
-              <a:spcBef>
-                <a:spcPts val="0"/>
-              </a:spcBef>
-              <a:buFont typeface="Arial"/>
-              <a:buNone/>
-              <a:defRPr sz="1000" kern="1200">
-                <a:solidFill>
-                  <a:schemeClr val="tx1"/>
-                </a:solidFill>
-                <a:latin typeface="Times New Roman"/>
-                <a:ea typeface="Times New Roman"/>
-                <a:cs typeface="Times New Roman"/>
-              </a:defRPr>
-            </a:lvl5pPr>
-            <a:lvl6pPr marL="2514600" indent="-228600" algn="l" defTabSz="914400">
-              <a:lnSpc>
-                <a:spcPct val="90000"/>
-              </a:lnSpc>
-              <a:spcBef>
-                <a:spcPts val="500"/>
-              </a:spcBef>
-              <a:buFont typeface="Arial"/>
-              <a:buChar char="•"/>
-              <a:defRPr sz="1800" kern="1200">
-                <a:solidFill>
-                  <a:schemeClr val="tx1"/>
-                </a:solidFill>
-                <a:latin typeface="+mn-lt"/>
-                <a:ea typeface="+mn-lt"/>
-                <a:cs typeface="+mn-lt"/>
-              </a:defRPr>
-            </a:lvl6pPr>
-            <a:lvl7pPr marL="2971800" indent="-228600" algn="l" defTabSz="914400">
-              <a:lnSpc>
-                <a:spcPct val="90000"/>
-              </a:lnSpc>
-              <a:spcBef>
-                <a:spcPts val="500"/>
-              </a:spcBef>
-              <a:buFont typeface="Arial"/>
-              <a:buChar char="•"/>
-              <a:defRPr sz="1800" kern="1200">
-                <a:solidFill>
-                  <a:schemeClr val="tx1"/>
-                </a:solidFill>
-                <a:latin typeface="+mn-lt"/>
-                <a:ea typeface="+mn-lt"/>
-                <a:cs typeface="+mn-lt"/>
-              </a:defRPr>
-            </a:lvl7pPr>
-            <a:lvl8pPr marL="3429000" indent="-228600" algn="l" defTabSz="914400">
-              <a:lnSpc>
-                <a:spcPct val="90000"/>
-              </a:lnSpc>
-              <a:spcBef>
-                <a:spcPts val="500"/>
-              </a:spcBef>
-              <a:buFont typeface="Arial"/>
-              <a:buChar char="•"/>
-              <a:defRPr sz="1800" kern="1200">
-                <a:solidFill>
-                  <a:schemeClr val="tx1"/>
-                </a:solidFill>
-                <a:latin typeface="+mn-lt"/>
-                <a:ea typeface="+mn-lt"/>
-                <a:cs typeface="+mn-lt"/>
-              </a:defRPr>
-            </a:lvl8pPr>
-            <a:lvl9pPr marL="3886200" indent="-228600" algn="l" defTabSz="914400">
-              <a:lnSpc>
-                <a:spcPct val="90000"/>
-              </a:lnSpc>
-              <a:spcBef>
-                <a:spcPts val="500"/>
-              </a:spcBef>
-              <a:buFont typeface="Arial"/>
-              <a:buChar char="•"/>
-              <a:defRPr sz="1800" kern="1200">
-                <a:solidFill>
-                  <a:schemeClr val="tx1"/>
-                </a:solidFill>
-                <a:latin typeface="+mn-lt"/>
-                <a:ea typeface="+mn-lt"/>
-                <a:cs typeface="+mn-lt"/>
-              </a:defRPr>
-            </a:lvl9pPr>
-          </a:lstStyle>
-          <a:p>
-            <a:pPr algn="l">
-              <a:defRPr sz="2175">
-                <a:solidFill>
-                  <a:srgbClr val="000000"/>
-                </a:solidFill>
-                <a:latin typeface="Calibri"/>
-                <a:ea typeface="Calibri"/>
-                <a:cs typeface="Calibri"/>
-              </a:defRPr>
-            </a:pPr>
-            <a:r>
-              <a:rPr sz="2175">
-                <a:solidFill>
-                  <a:srgbClr val="000000"/>
-                </a:solidFill>
-                <a:latin typeface="Calibri"/>
-                <a:ea typeface="Calibri"/>
-                <a:cs typeface="Calibri"/>
-              </a:rPr>
-              <a:t>O catch captura JWTCreationException durante a criação do token.</a:t>
-            </a:r>
+          <a:bodyPr/>
+          <a:lstStyle/>
+          <a:p>
+            <a:r>
+              <a:rPr lang="pt-BR" dirty="0" err="1"/>
+              <a:t>sign</a:t>
+            </a:r>
+            <a:r>
+              <a:rPr lang="pt-BR" dirty="0"/>
+              <a:t>() usa o algoritmo e a chave definidos para assinar o token.</a:t>
+            </a:r>
+          </a:p>
+          <a:p>
+            <a:endParaRPr lang="pt-BR" dirty="0"/>
           </a:p>
         </p:txBody>
       </p:sp>
@@ -6906,8 +5940,8 @@
         </p:nvSpPr>
         <p:spPr>
           <a:xfrm>
-            <a:off x="857250" y="2762250"/>
-            <a:ext cx="10477500" cy="1809750"/>
+            <a:off x="2136000" y="3120074"/>
+            <a:ext cx="7920000" cy="1035889"/>
           </a:xfrm>
           <a:prstGeom prst="roundRect">
             <a:avLst>
@@ -6947,8 +5981,8 @@
         </p:nvSpPr>
         <p:spPr>
           <a:xfrm>
-            <a:off x="1143000" y="3000375"/>
-            <a:ext cx="10001250" cy="2865120"/>
+            <a:off x="4377187" y="3370150"/>
+            <a:ext cx="3437626" cy="535736"/>
           </a:xfrm>
           <a:prstGeom prst="rect">
             <a:avLst/>
@@ -6961,7 +5995,7 @@
           <a:lstStyle/>
           <a:p>
             <a:pPr algn="l">
-              <a:defRPr sz="2025">
+              <a:defRPr sz="2400">
                 <a:solidFill>
                   <a:srgbClr val="D4D4D4"/>
                 </a:solidFill>
@@ -6971,172 +6005,259 @@
               </a:defRPr>
             </a:pPr>
             <a:r>
-              <a:rPr sz="2025">
-                <a:solidFill>
-                  <a:srgbClr val="D4D4D4"/>
-                </a:solidFill>
-                <a:latin typeface="Consolas"/>
-                <a:ea typeface="Consolas"/>
-                <a:cs typeface="Consolas"/>
-              </a:rPr>
-              <a:t>catch (JWTCreationException exception) {</a:t>
-            </a:r>
-          </a:p>
-          <a:p>
-            <a:pPr algn="l">
-              <a:defRPr sz="2025">
-                <a:solidFill>
-                  <a:srgbClr val="D4D4D4"/>
-                </a:solidFill>
-                <a:latin typeface="Consolas"/>
-                <a:ea typeface="Consolas"/>
-                <a:cs typeface="Consolas"/>
-              </a:defRPr>
-            </a:pPr>
-            <a:r>
-              <a:rPr sz="2025">
-                <a:solidFill>
-                  <a:srgbClr val="D4D4D4"/>
-                </a:solidFill>
-                <a:latin typeface="Consolas"/>
-                <a:ea typeface="Consolas"/>
-                <a:cs typeface="Consolas"/>
-              </a:rPr>
-              <a:t>    throw new RuntimeException(</a:t>
-            </a:r>
-          </a:p>
-          <a:p>
-            <a:pPr algn="l">
-              <a:defRPr sz="2025">
-                <a:solidFill>
-                  <a:srgbClr val="D4D4D4"/>
-                </a:solidFill>
-                <a:latin typeface="Consolas"/>
-                <a:ea typeface="Consolas"/>
-                <a:cs typeface="Consolas"/>
-              </a:defRPr>
-            </a:pPr>
-            <a:r>
-              <a:rPr sz="2025">
-                <a:solidFill>
-                  <a:srgbClr val="D4D4D4"/>
-                </a:solidFill>
-                <a:latin typeface="Consolas"/>
-                <a:ea typeface="Consolas"/>
-                <a:cs typeface="Consolas"/>
-              </a:rPr>
-              <a:t>        "Erro ao gerar o token", exception);</a:t>
-            </a:r>
-          </a:p>
-          <a:p>
-            <a:pPr algn="l">
-              <a:defRPr sz="2025">
-                <a:solidFill>
-                  <a:srgbClr val="D4D4D4"/>
-                </a:solidFill>
-                <a:latin typeface="Consolas"/>
-                <a:ea typeface="Consolas"/>
-                <a:cs typeface="Consolas"/>
-              </a:defRPr>
-            </a:pPr>
-            <a:r>
-              <a:rPr sz="2025">
-                <a:solidFill>
-                  <a:srgbClr val="D4D4D4"/>
-                </a:solidFill>
-                <a:latin typeface="Consolas"/>
-                <a:ea typeface="Consolas"/>
-                <a:cs typeface="Consolas"/>
-              </a:rPr>
-              <a:t>}</a:t>
-            </a:r>
-          </a:p>
-        </p:txBody>
-      </p:sp>
-      <p:sp>
-        <p:nvSpPr>
-          <p:cNvPr id="12" name="Retângulo 11">
-            <a:extLst>
-              <a:ext uri="{FF2B5EF4-FFF2-40B4-BE49-F238E27FC236}">
-                <a16:creationId xmlns:a16="http://schemas.microsoft.com/office/drawing/2014/main" id="{C8AD5881-C2D8-42B9-B25B-797E0EEAD040}"/>
-              </a:ext>
-            </a:extLst>
-          </p:cNvPr>
-          <p:cNvSpPr>
-            <a:spLocks noGrp="1"/>
+              <a:rPr sz="2400" dirty="0">
+                <a:solidFill>
+                  <a:srgbClr val="D4D4D4"/>
+                </a:solidFill>
+                <a:latin typeface="Consolas"/>
+                <a:ea typeface="Consolas"/>
+                <a:cs typeface="Consolas"/>
+              </a:rPr>
+              <a:t>.sign(</a:t>
+            </a:r>
+            <a:r>
+              <a:rPr sz="2400" dirty="0" err="1">
+                <a:solidFill>
+                  <a:srgbClr val="D4D4D4"/>
+                </a:solidFill>
+                <a:latin typeface="Consolas"/>
+                <a:ea typeface="Consolas"/>
+                <a:cs typeface="Consolas"/>
+              </a:rPr>
+              <a:t>algoritmo</a:t>
+            </a:r>
+            <a:r>
+              <a:rPr sz="2400" dirty="0">
+                <a:solidFill>
+                  <a:srgbClr val="D4D4D4"/>
+                </a:solidFill>
+                <a:latin typeface="Consolas"/>
+                <a:ea typeface="Consolas"/>
+                <a:cs typeface="Consolas"/>
+              </a:rPr>
+              <a:t>);</a:t>
+            </a:r>
+          </a:p>
+        </p:txBody>
+      </p:sp>
+      <p:sp>
+        <p:nvSpPr>
+          <p:cNvPr id="5" name="Espaço Reservado para Conteúdo 2">
+            <a:extLst>
+              <a:ext uri="{FF2B5EF4-FFF2-40B4-BE49-F238E27FC236}">
+                <a16:creationId xmlns:a16="http://schemas.microsoft.com/office/drawing/2014/main" id="{54539B01-62ED-F785-0E82-0E174A5B8864}"/>
+              </a:ext>
+            </a:extLst>
+          </p:cNvPr>
+          <p:cNvSpPr txBox="1">
+            <a:spLocks/>
           </p:cNvSpPr>
           <p:nvPr/>
         </p:nvSpPr>
         <p:spPr>
           <a:xfrm>
-            <a:off x="685800" y="4905375"/>
-            <a:ext cx="10820400" cy="1333500"/>
+            <a:off x="592347" y="4808882"/>
+            <a:ext cx="11007306" cy="1194698"/>
           </a:xfrm>
           <a:prstGeom prst="rect">
             <a:avLst/>
           </a:prstGeom>
-          <a:noFill/>
-          <a:ln w="0">
-            <a:noFill/>
-          </a:ln>
         </p:spPr>
         <p:txBody>
-          <a:bodyPr>
-            <a:noAutofit/>
-          </a:bodyPr>
-          <a:lstStyle/>
-          <a:p>
-            <a:pPr algn="l">
-              <a:defRPr sz="2100">
-                <a:solidFill>
-                  <a:srgbClr val="000000"/>
-                </a:solidFill>
-                <a:latin typeface="Calibri"/>
-                <a:ea typeface="Calibri"/>
-                <a:cs typeface="Calibri"/>
-              </a:defRPr>
-            </a:pPr>
-            <a:r>
-              <a:rPr sz="2100">
-                <a:solidFill>
-                  <a:srgbClr val="000000"/>
-                </a:solidFill>
-                <a:latin typeface="Calibri"/>
-                <a:ea typeface="Calibri"/>
-                <a:cs typeface="Calibri"/>
-              </a:rPr>
-              <a:t>RuntimeException informa a falha ao código que chamou o método.</a:t>
-            </a:r>
-          </a:p>
-          <a:p>
-            <a:pPr algn="l">
-              <a:defRPr sz="2100">
-                <a:solidFill>
-                  <a:srgbClr val="000000"/>
-                </a:solidFill>
-                <a:latin typeface="Calibri"/>
-                <a:ea typeface="Calibri"/>
-                <a:cs typeface="Calibri"/>
-              </a:defRPr>
-            </a:pPr>
-            <a:r>
-              <a:rPr sz="2100">
-                <a:solidFill>
-                  <a:srgbClr val="000000"/>
-                </a:solidFill>
-                <a:latin typeface="Calibri"/>
-                <a:ea typeface="Calibri"/>
-                <a:cs typeface="Calibri"/>
-              </a:rPr>
-              <a:t>exception preserva a causa original do erro.</a:t>
-            </a:r>
+          <a:bodyPr/>
+          <a:lstStyle>
+            <a:lvl1pPr marL="0" indent="0" algn="just" defTabSz="914400" rtl="0" eaLnBrk="1" latinLnBrk="0" hangingPunct="1">
+              <a:lnSpc>
+                <a:spcPct val="150000"/>
+              </a:lnSpc>
+              <a:spcBef>
+                <a:spcPts val="0"/>
+              </a:spcBef>
+              <a:buFont typeface="Arial" panose="020B0604020202020204" pitchFamily="34" charset="0"/>
+              <a:buNone/>
+              <a:defRPr sz="2000" kern="1200">
+                <a:solidFill>
+                  <a:schemeClr val="tx1"/>
+                </a:solidFill>
+                <a:latin typeface="Times New Roman" panose="02020603050405020304" pitchFamily="18" charset="0"/>
+                <a:ea typeface="+mn-ea"/>
+                <a:cs typeface="Times New Roman" panose="02020603050405020304" pitchFamily="18" charset="0"/>
+              </a:defRPr>
+            </a:lvl1pPr>
+            <a:lvl2pPr marL="457200" indent="0" algn="just" defTabSz="914400" rtl="0" eaLnBrk="1" latinLnBrk="0" hangingPunct="1">
+              <a:lnSpc>
+                <a:spcPct val="150000"/>
+              </a:lnSpc>
+              <a:spcBef>
+                <a:spcPts val="0"/>
+              </a:spcBef>
+              <a:buFont typeface="Arial" panose="020B0604020202020204" pitchFamily="34" charset="0"/>
+              <a:buNone/>
+              <a:defRPr sz="1600" kern="1200">
+                <a:solidFill>
+                  <a:schemeClr val="tx1"/>
+                </a:solidFill>
+                <a:latin typeface="Times New Roman" panose="02020603050405020304" pitchFamily="18" charset="0"/>
+                <a:ea typeface="+mn-ea"/>
+                <a:cs typeface="Times New Roman" panose="02020603050405020304" pitchFamily="18" charset="0"/>
+              </a:defRPr>
+            </a:lvl2pPr>
+            <a:lvl3pPr marL="914400" indent="0" algn="just" defTabSz="914400" rtl="0" eaLnBrk="1" latinLnBrk="0" hangingPunct="1">
+              <a:lnSpc>
+                <a:spcPct val="150000"/>
+              </a:lnSpc>
+              <a:spcBef>
+                <a:spcPts val="0"/>
+              </a:spcBef>
+              <a:buFont typeface="Arial" panose="020B0604020202020204" pitchFamily="34" charset="0"/>
+              <a:buNone/>
+              <a:defRPr sz="1400" kern="1200">
+                <a:solidFill>
+                  <a:schemeClr val="tx1"/>
+                </a:solidFill>
+                <a:latin typeface="Times New Roman" panose="02020603050405020304" pitchFamily="18" charset="0"/>
+                <a:ea typeface="+mn-ea"/>
+                <a:cs typeface="Times New Roman" panose="02020603050405020304" pitchFamily="18" charset="0"/>
+              </a:defRPr>
+            </a:lvl3pPr>
+            <a:lvl4pPr marL="1371600" indent="0" algn="just" defTabSz="914400" rtl="0" eaLnBrk="1" latinLnBrk="0" hangingPunct="1">
+              <a:lnSpc>
+                <a:spcPct val="150000"/>
+              </a:lnSpc>
+              <a:spcBef>
+                <a:spcPts val="0"/>
+              </a:spcBef>
+              <a:buFont typeface="Arial" panose="020B0604020202020204" pitchFamily="34" charset="0"/>
+              <a:buNone/>
+              <a:defRPr sz="1200" kern="1200">
+                <a:solidFill>
+                  <a:schemeClr val="tx1"/>
+                </a:solidFill>
+                <a:latin typeface="Times New Roman" panose="02020603050405020304" pitchFamily="18" charset="0"/>
+                <a:ea typeface="+mn-ea"/>
+                <a:cs typeface="Times New Roman" panose="02020603050405020304" pitchFamily="18" charset="0"/>
+              </a:defRPr>
+            </a:lvl4pPr>
+            <a:lvl5pPr marL="1828800" indent="0" algn="just" defTabSz="914400" rtl="0" eaLnBrk="1" latinLnBrk="0" hangingPunct="1">
+              <a:lnSpc>
+                <a:spcPct val="150000"/>
+              </a:lnSpc>
+              <a:spcBef>
+                <a:spcPts val="0"/>
+              </a:spcBef>
+              <a:buFont typeface="Arial" panose="020B0604020202020204" pitchFamily="34" charset="0"/>
+              <a:buNone/>
+              <a:defRPr sz="1000" kern="1200">
+                <a:solidFill>
+                  <a:schemeClr val="tx1"/>
+                </a:solidFill>
+                <a:latin typeface="Times New Roman" panose="02020603050405020304" pitchFamily="18" charset="0"/>
+                <a:ea typeface="+mn-ea"/>
+                <a:cs typeface="Times New Roman" panose="02020603050405020304" pitchFamily="18" charset="0"/>
+              </a:defRPr>
+            </a:lvl5pPr>
+            <a:lvl6pPr marL="2514600" indent="-228600" algn="l" defTabSz="914400" rtl="0" eaLnBrk="1" latinLnBrk="0" hangingPunct="1">
+              <a:lnSpc>
+                <a:spcPct val="90000"/>
+              </a:lnSpc>
+              <a:spcBef>
+                <a:spcPts val="500"/>
+              </a:spcBef>
+              <a:buFont typeface="Arial" panose="020B0604020202020204" pitchFamily="34" charset="0"/>
+              <a:buChar char="•"/>
+              <a:defRPr sz="1800" kern="1200">
+                <a:solidFill>
+                  <a:schemeClr val="tx1"/>
+                </a:solidFill>
+                <a:latin typeface="+mn-lt"/>
+                <a:ea typeface="+mn-ea"/>
+                <a:cs typeface="+mn-cs"/>
+              </a:defRPr>
+            </a:lvl6pPr>
+            <a:lvl7pPr marL="2971800" indent="-228600" algn="l" defTabSz="914400" rtl="0" eaLnBrk="1" latinLnBrk="0" hangingPunct="1">
+              <a:lnSpc>
+                <a:spcPct val="90000"/>
+              </a:lnSpc>
+              <a:spcBef>
+                <a:spcPts val="500"/>
+              </a:spcBef>
+              <a:buFont typeface="Arial" panose="020B0604020202020204" pitchFamily="34" charset="0"/>
+              <a:buChar char="•"/>
+              <a:defRPr sz="1800" kern="1200">
+                <a:solidFill>
+                  <a:schemeClr val="tx1"/>
+                </a:solidFill>
+                <a:latin typeface="+mn-lt"/>
+                <a:ea typeface="+mn-ea"/>
+                <a:cs typeface="+mn-cs"/>
+              </a:defRPr>
+            </a:lvl7pPr>
+            <a:lvl8pPr marL="3429000" indent="-228600" algn="l" defTabSz="914400" rtl="0" eaLnBrk="1" latinLnBrk="0" hangingPunct="1">
+              <a:lnSpc>
+                <a:spcPct val="90000"/>
+              </a:lnSpc>
+              <a:spcBef>
+                <a:spcPts val="500"/>
+              </a:spcBef>
+              <a:buFont typeface="Arial" panose="020B0604020202020204" pitchFamily="34" charset="0"/>
+              <a:buChar char="•"/>
+              <a:defRPr sz="1800" kern="1200">
+                <a:solidFill>
+                  <a:schemeClr val="tx1"/>
+                </a:solidFill>
+                <a:latin typeface="+mn-lt"/>
+                <a:ea typeface="+mn-ea"/>
+                <a:cs typeface="+mn-cs"/>
+              </a:defRPr>
+            </a:lvl8pPr>
+            <a:lvl9pPr marL="3886200" indent="-228600" algn="l" defTabSz="914400" rtl="0" eaLnBrk="1" latinLnBrk="0" hangingPunct="1">
+              <a:lnSpc>
+                <a:spcPct val="90000"/>
+              </a:lnSpc>
+              <a:spcBef>
+                <a:spcPts val="500"/>
+              </a:spcBef>
+              <a:buFont typeface="Arial" panose="020B0604020202020204" pitchFamily="34" charset="0"/>
+              <a:buChar char="•"/>
+              <a:defRPr sz="1800" kern="1200">
+                <a:solidFill>
+                  <a:schemeClr val="tx1"/>
+                </a:solidFill>
+                <a:latin typeface="+mn-lt"/>
+                <a:ea typeface="+mn-ea"/>
+                <a:cs typeface="+mn-cs"/>
+              </a:defRPr>
+            </a:lvl9pPr>
+          </a:lstStyle>
+          <a:p>
+            <a:r>
+              <a:rPr lang="pt-BR" dirty="0"/>
+              <a:t>Esse método gera a </a:t>
+            </a:r>
+            <a:r>
+              <a:rPr lang="pt-BR" dirty="0" err="1"/>
+              <a:t>String</a:t>
+            </a:r>
+            <a:r>
+              <a:rPr lang="pt-BR" dirty="0"/>
+              <a:t> final do JWT.</a:t>
+            </a:r>
+          </a:p>
+          <a:p>
+            <a:r>
+              <a:rPr lang="pt-BR" dirty="0"/>
+              <a:t>A assinatura permite detectar alterações, mas não esconde o conteúdo.</a:t>
+            </a:r>
+          </a:p>
+          <a:p>
+            <a:endParaRPr lang="pt-BR" dirty="0"/>
           </a:p>
         </p:txBody>
       </p:sp>
     </p:spTree>
     <p:extLst>
       <p:ext uri="{BB962C8B-B14F-4D97-AF65-F5344CB8AC3E}">
-        <p14:creationId xmlns:p14="http://schemas.microsoft.com/office/powerpoint/2010/main" val="2946787222"/>
+        <p14:creationId xmlns:p14="http://schemas.microsoft.com/office/powerpoint/2010/main" val="1649699647"/>
       </p:ext>
     </p:extLst>
   </p:cSld>
@@ -7168,7 +6289,7 @@
           <p:cNvPr id="2" name="Título 1">
             <a:extLst>
               <a:ext uri="{FF2B5EF4-FFF2-40B4-BE49-F238E27FC236}">
-                <a16:creationId xmlns:a16="http://schemas.microsoft.com/office/drawing/2014/main" id="{8738858E-69E2-8A32-4D8D-61A4750C2960}"/>
+                <a16:creationId xmlns:a16="http://schemas.microsoft.com/office/drawing/2014/main" id="{E7535210-2104-B5E9-6275-D12DED95B290}"/>
               </a:ext>
             </a:extLst>
           </p:cNvPr>
@@ -7181,247 +6302,59 @@
         </p:nvSpPr>
         <p:spPr/>
         <p:txBody>
-          <a:bodyPr>
-            <a:noAutofit/>
-          </a:bodyPr>
+          <a:bodyPr/>
           <a:lstStyle/>
           <a:p>
-            <a:pPr>
-              <a:defRPr sz="3000">
-                <a:solidFill>
-                  <a:srgbClr val="000000"/>
-                </a:solidFill>
-                <a:latin typeface="Calibri Light"/>
-                <a:ea typeface="Calibri Light"/>
-                <a:cs typeface="Calibri Light"/>
-              </a:defRPr>
-            </a:pPr>
-            <a:r>
-              <a:rPr sz="3000">
-                <a:solidFill>
-                  <a:srgbClr val="000000"/>
-                </a:solidFill>
-                <a:latin typeface="Calibri Light"/>
-                <a:ea typeface="Calibri Light"/>
-                <a:cs typeface="Calibri Light"/>
-              </a:rPr>
-              <a:t>Resultado da geração</a:t>
-            </a:r>
-          </a:p>
-        </p:txBody>
-      </p:sp>
-      <p:sp>
-        <p:nvSpPr>
-          <p:cNvPr id="6" name="Espaço Reservado para Conteúdo 5">
-            <a:extLst>
-              <a:ext uri="{FF2B5EF4-FFF2-40B4-BE49-F238E27FC236}">
-                <a16:creationId xmlns:a16="http://schemas.microsoft.com/office/drawing/2014/main" id="{B24F9431-18D8-4DC9-B9CC-1BCF1A71C18D}"/>
+            <a:r>
+              <a:rPr lang="pt-BR" dirty="0"/>
+              <a:t>Tratamento de falhas</a:t>
+            </a:r>
+          </a:p>
+        </p:txBody>
+      </p:sp>
+      <p:sp>
+        <p:nvSpPr>
+          <p:cNvPr id="3" name="Espaço Reservado para Conteúdo 2">
+            <a:extLst>
+              <a:ext uri="{FF2B5EF4-FFF2-40B4-BE49-F238E27FC236}">
+                <a16:creationId xmlns:a16="http://schemas.microsoft.com/office/drawing/2014/main" id="{A0339BFE-E94A-2D05-1B28-A4DA2606EDC2}"/>
               </a:ext>
             </a:extLst>
           </p:cNvPr>
           <p:cNvSpPr>
             <a:spLocks noGrp="1"/>
           </p:cNvSpPr>
-          <p:nvPr/>
+          <p:nvPr>
+            <p:ph idx="1"/>
+          </p:nvPr>
         </p:nvSpPr>
         <p:spPr>
           <a:xfrm>
-            <a:off x="685800" y="1809750"/>
-            <a:ext cx="10820400" cy="809625"/>
+            <a:off x="744747" y="5036448"/>
+            <a:ext cx="11007306" cy="1140065"/>
           </a:xfrm>
-          <a:prstGeom prst="rect">
-            <a:avLst/>
-          </a:prstGeom>
         </p:spPr>
         <p:txBody>
-          <a:bodyPr>
-            <a:noAutofit/>
-          </a:bodyPr>
-          <a:lstStyle>
-            <a:lvl1pPr marL="0" indent="0" algn="just" defTabSz="914400">
-              <a:lnSpc>
-                <a:spcPct val="150000"/>
-              </a:lnSpc>
-              <a:spcBef>
-                <a:spcPts val="0"/>
-              </a:spcBef>
-              <a:buFont typeface="Arial"/>
-              <a:buNone/>
-              <a:defRPr sz="2000" kern="1200">
-                <a:solidFill>
-                  <a:schemeClr val="tx1"/>
-                </a:solidFill>
-                <a:latin typeface="Times New Roman"/>
-                <a:ea typeface="Times New Roman"/>
-                <a:cs typeface="Times New Roman"/>
-              </a:defRPr>
-            </a:lvl1pPr>
-            <a:lvl2pPr marL="457200" indent="0" algn="just" defTabSz="914400">
-              <a:lnSpc>
-                <a:spcPct val="150000"/>
-              </a:lnSpc>
-              <a:spcBef>
-                <a:spcPts val="0"/>
-              </a:spcBef>
-              <a:buFont typeface="Arial"/>
-              <a:buNone/>
-              <a:defRPr sz="1600" kern="1200">
-                <a:solidFill>
-                  <a:schemeClr val="tx1"/>
-                </a:solidFill>
-                <a:latin typeface="Times New Roman"/>
-                <a:ea typeface="Times New Roman"/>
-                <a:cs typeface="Times New Roman"/>
-              </a:defRPr>
-            </a:lvl2pPr>
-            <a:lvl3pPr marL="914400" indent="0" algn="just" defTabSz="914400">
-              <a:lnSpc>
-                <a:spcPct val="150000"/>
-              </a:lnSpc>
-              <a:spcBef>
-                <a:spcPts val="0"/>
-              </a:spcBef>
-              <a:buFont typeface="Arial"/>
-              <a:buNone/>
-              <a:defRPr sz="1400" kern="1200">
-                <a:solidFill>
-                  <a:schemeClr val="tx1"/>
-                </a:solidFill>
-                <a:latin typeface="Times New Roman"/>
-                <a:ea typeface="Times New Roman"/>
-                <a:cs typeface="Times New Roman"/>
-              </a:defRPr>
-            </a:lvl3pPr>
-            <a:lvl4pPr marL="1371600" indent="0" algn="just" defTabSz="914400">
-              <a:lnSpc>
-                <a:spcPct val="150000"/>
-              </a:lnSpc>
-              <a:spcBef>
-                <a:spcPts val="0"/>
-              </a:spcBef>
-              <a:buFont typeface="Arial"/>
-              <a:buNone/>
-              <a:defRPr sz="1200" kern="1200">
-                <a:solidFill>
-                  <a:schemeClr val="tx1"/>
-                </a:solidFill>
-                <a:latin typeface="Times New Roman"/>
-                <a:ea typeface="Times New Roman"/>
-                <a:cs typeface="Times New Roman"/>
-              </a:defRPr>
-            </a:lvl4pPr>
-            <a:lvl5pPr marL="1828800" indent="0" algn="just" defTabSz="914400">
-              <a:lnSpc>
-                <a:spcPct val="150000"/>
-              </a:lnSpc>
-              <a:spcBef>
-                <a:spcPts val="0"/>
-              </a:spcBef>
-              <a:buFont typeface="Arial"/>
-              <a:buNone/>
-              <a:defRPr sz="1000" kern="1200">
-                <a:solidFill>
-                  <a:schemeClr val="tx1"/>
-                </a:solidFill>
-                <a:latin typeface="Times New Roman"/>
-                <a:ea typeface="Times New Roman"/>
-                <a:cs typeface="Times New Roman"/>
-              </a:defRPr>
-            </a:lvl5pPr>
-            <a:lvl6pPr marL="2514600" indent="-228600" algn="l" defTabSz="914400">
-              <a:lnSpc>
-                <a:spcPct val="90000"/>
-              </a:lnSpc>
-              <a:spcBef>
-                <a:spcPts val="500"/>
-              </a:spcBef>
-              <a:buFont typeface="Arial"/>
-              <a:buChar char="•"/>
-              <a:defRPr sz="1800" kern="1200">
-                <a:solidFill>
-                  <a:schemeClr val="tx1"/>
-                </a:solidFill>
-                <a:latin typeface="+mn-lt"/>
-                <a:ea typeface="+mn-lt"/>
-                <a:cs typeface="+mn-lt"/>
-              </a:defRPr>
-            </a:lvl6pPr>
-            <a:lvl7pPr marL="2971800" indent="-228600" algn="l" defTabSz="914400">
-              <a:lnSpc>
-                <a:spcPct val="90000"/>
-              </a:lnSpc>
-              <a:spcBef>
-                <a:spcPts val="500"/>
-              </a:spcBef>
-              <a:buFont typeface="Arial"/>
-              <a:buChar char="•"/>
-              <a:defRPr sz="1800" kern="1200">
-                <a:solidFill>
-                  <a:schemeClr val="tx1"/>
-                </a:solidFill>
-                <a:latin typeface="+mn-lt"/>
-                <a:ea typeface="+mn-lt"/>
-                <a:cs typeface="+mn-lt"/>
-              </a:defRPr>
-            </a:lvl7pPr>
-            <a:lvl8pPr marL="3429000" indent="-228600" algn="l" defTabSz="914400">
-              <a:lnSpc>
-                <a:spcPct val="90000"/>
-              </a:lnSpc>
-              <a:spcBef>
-                <a:spcPts val="500"/>
-              </a:spcBef>
-              <a:buFont typeface="Arial"/>
-              <a:buChar char="•"/>
-              <a:defRPr sz="1800" kern="1200">
-                <a:solidFill>
-                  <a:schemeClr val="tx1"/>
-                </a:solidFill>
-                <a:latin typeface="+mn-lt"/>
-                <a:ea typeface="+mn-lt"/>
-                <a:cs typeface="+mn-lt"/>
-              </a:defRPr>
-            </a:lvl8pPr>
-            <a:lvl9pPr marL="3886200" indent="-228600" algn="l" defTabSz="914400">
-              <a:lnSpc>
-                <a:spcPct val="90000"/>
-              </a:lnSpc>
-              <a:spcBef>
-                <a:spcPts val="500"/>
-              </a:spcBef>
-              <a:buFont typeface="Arial"/>
-              <a:buChar char="•"/>
-              <a:defRPr sz="1800" kern="1200">
-                <a:solidFill>
-                  <a:schemeClr val="tx1"/>
-                </a:solidFill>
-                <a:latin typeface="+mn-lt"/>
-                <a:ea typeface="+mn-lt"/>
-                <a:cs typeface="+mn-lt"/>
-              </a:defRPr>
-            </a:lvl9pPr>
-          </a:lstStyle>
-          <a:p>
-            <a:pPr algn="l">
-              <a:defRPr sz="2175">
-                <a:solidFill>
-                  <a:srgbClr val="000000"/>
-                </a:solidFill>
-                <a:latin typeface="Calibri"/>
-                <a:ea typeface="Calibri"/>
-                <a:cs typeface="Calibri"/>
-              </a:defRPr>
-            </a:pPr>
-            <a:r>
-              <a:rPr sz="2175">
-                <a:solidFill>
-                  <a:srgbClr val="000000"/>
-                </a:solidFill>
-                <a:latin typeface="Calibri"/>
-                <a:ea typeface="Calibri"/>
-                <a:cs typeface="Calibri"/>
-              </a:rPr>
-              <a:t>Ao final, gerarToken() retorna uma String com três partes.</a:t>
+          <a:bodyPr/>
+          <a:lstStyle/>
+          <a:p>
+            <a:r>
+              <a:rPr lang="pt-BR" dirty="0" err="1"/>
+              <a:t>RuntimeException</a:t>
+            </a:r>
+            <a:r>
+              <a:rPr lang="pt-BR" dirty="0"/>
+              <a:t> informa a falha ao código que chamou o método.</a:t>
+            </a:r>
+          </a:p>
+          <a:p>
+            <a:r>
+              <a:rPr lang="pt-BR" dirty="0" err="1"/>
+              <a:t>exception</a:t>
+            </a:r>
+            <a:r>
+              <a:rPr lang="pt-BR" dirty="0"/>
+              <a:t> preserva a causa original do erro.</a:t>
             </a:r>
           </a:p>
         </p:txBody>
@@ -7442,8 +6375,8 @@
         </p:nvSpPr>
         <p:spPr>
           <a:xfrm>
-            <a:off x="857250" y="2762250"/>
-            <a:ext cx="10477500" cy="1809750"/>
+            <a:off x="2136000" y="2834676"/>
+            <a:ext cx="7920000" cy="1809750"/>
           </a:xfrm>
           <a:prstGeom prst="roundRect">
             <a:avLst>
@@ -7483,8 +6416,8 @@
         </p:nvSpPr>
         <p:spPr>
           <a:xfrm>
-            <a:off x="1143000" y="3190875"/>
-            <a:ext cx="10001250" cy="2865120"/>
+            <a:off x="2500942" y="3052943"/>
+            <a:ext cx="7190117" cy="1373217"/>
           </a:xfrm>
           <a:prstGeom prst="rect">
             <a:avLst/>
@@ -7497,7 +6430,7 @@
           <a:lstStyle/>
           <a:p>
             <a:pPr algn="l">
-              <a:defRPr sz="2400">
+              <a:defRPr sz="2025">
                 <a:solidFill>
                   <a:srgbClr val="D4D4D4"/>
                 </a:solidFill>
@@ -7507,103 +6440,1974 @@
               </a:defRPr>
             </a:pPr>
             <a:r>
-              <a:rPr sz="2400">
-                <a:solidFill>
-                  <a:srgbClr val="D4D4D4"/>
-                </a:solidFill>
-                <a:latin typeface="Consolas"/>
-                <a:ea typeface="Consolas"/>
-                <a:cs typeface="Consolas"/>
-              </a:rPr>
-              <a:t>header.payload.assinatura</a:t>
-            </a:r>
-          </a:p>
-        </p:txBody>
-      </p:sp>
-      <p:sp>
-        <p:nvSpPr>
-          <p:cNvPr id="12" name="Retângulo 11">
-            <a:extLst>
-              <a:ext uri="{FF2B5EF4-FFF2-40B4-BE49-F238E27FC236}">
-                <a16:creationId xmlns:a16="http://schemas.microsoft.com/office/drawing/2014/main" id="{B99E4F5A-80B5-4FCC-A324-04FBF17B8E3C}"/>
-              </a:ext>
-            </a:extLst>
-          </p:cNvPr>
-          <p:cNvSpPr>
-            <a:spLocks noGrp="1"/>
+              <a:rPr sz="2025">
+                <a:solidFill>
+                  <a:srgbClr val="D4D4D4"/>
+                </a:solidFill>
+                <a:latin typeface="Consolas"/>
+                <a:ea typeface="Consolas"/>
+                <a:cs typeface="Consolas"/>
+              </a:rPr>
+              <a:t>catch (JWTCreationException exception) {</a:t>
+            </a:r>
+          </a:p>
+          <a:p>
+            <a:pPr algn="l">
+              <a:defRPr sz="2025">
+                <a:solidFill>
+                  <a:srgbClr val="D4D4D4"/>
+                </a:solidFill>
+                <a:latin typeface="Consolas"/>
+                <a:ea typeface="Consolas"/>
+                <a:cs typeface="Consolas"/>
+              </a:defRPr>
+            </a:pPr>
+            <a:r>
+              <a:rPr sz="2025">
+                <a:solidFill>
+                  <a:srgbClr val="D4D4D4"/>
+                </a:solidFill>
+                <a:latin typeface="Consolas"/>
+                <a:ea typeface="Consolas"/>
+                <a:cs typeface="Consolas"/>
+              </a:rPr>
+              <a:t>    throw new RuntimeException(</a:t>
+            </a:r>
+          </a:p>
+          <a:p>
+            <a:pPr algn="l">
+              <a:defRPr sz="2025">
+                <a:solidFill>
+                  <a:srgbClr val="D4D4D4"/>
+                </a:solidFill>
+                <a:latin typeface="Consolas"/>
+                <a:ea typeface="Consolas"/>
+                <a:cs typeface="Consolas"/>
+              </a:defRPr>
+            </a:pPr>
+            <a:r>
+              <a:rPr sz="2025">
+                <a:solidFill>
+                  <a:srgbClr val="D4D4D4"/>
+                </a:solidFill>
+                <a:latin typeface="Consolas"/>
+                <a:ea typeface="Consolas"/>
+                <a:cs typeface="Consolas"/>
+              </a:rPr>
+              <a:t>        "Erro ao gerar o token", exception);</a:t>
+            </a:r>
+          </a:p>
+          <a:p>
+            <a:pPr algn="l">
+              <a:defRPr sz="2025">
+                <a:solidFill>
+                  <a:srgbClr val="D4D4D4"/>
+                </a:solidFill>
+                <a:latin typeface="Consolas"/>
+                <a:ea typeface="Consolas"/>
+                <a:cs typeface="Consolas"/>
+              </a:defRPr>
+            </a:pPr>
+            <a:r>
+              <a:rPr sz="2025">
+                <a:solidFill>
+                  <a:srgbClr val="D4D4D4"/>
+                </a:solidFill>
+                <a:latin typeface="Consolas"/>
+                <a:ea typeface="Consolas"/>
+                <a:cs typeface="Consolas"/>
+              </a:rPr>
+              <a:t>}</a:t>
+            </a:r>
+          </a:p>
+        </p:txBody>
+      </p:sp>
+      <p:sp>
+        <p:nvSpPr>
+          <p:cNvPr id="5" name="Espaço Reservado para Conteúdo 2">
+            <a:extLst>
+              <a:ext uri="{FF2B5EF4-FFF2-40B4-BE49-F238E27FC236}">
+                <a16:creationId xmlns:a16="http://schemas.microsoft.com/office/drawing/2014/main" id="{E50220C7-3DF3-0C51-AB5A-CD414DA05382}"/>
+              </a:ext>
+            </a:extLst>
+          </p:cNvPr>
+          <p:cNvSpPr txBox="1">
+            <a:spLocks/>
           </p:cNvSpPr>
           <p:nvPr/>
         </p:nvSpPr>
         <p:spPr>
           <a:xfrm>
-            <a:off x="685800" y="4905375"/>
-            <a:ext cx="10820400" cy="1333500"/>
+            <a:off x="744747" y="1997075"/>
+            <a:ext cx="11007306" cy="700117"/>
           </a:xfrm>
           <a:prstGeom prst="rect">
             <a:avLst/>
           </a:prstGeom>
-          <a:noFill/>
-          <a:ln w="0">
-            <a:noFill/>
+        </p:spPr>
+        <p:txBody>
+          <a:bodyPr/>
+          <a:lstStyle>
+            <a:lvl1pPr marL="0" indent="0" algn="just" defTabSz="914400" rtl="0" eaLnBrk="1" latinLnBrk="0" hangingPunct="1">
+              <a:lnSpc>
+                <a:spcPct val="150000"/>
+              </a:lnSpc>
+              <a:spcBef>
+                <a:spcPts val="0"/>
+              </a:spcBef>
+              <a:buFont typeface="Arial" panose="020B0604020202020204" pitchFamily="34" charset="0"/>
+              <a:buNone/>
+              <a:defRPr sz="2000" kern="1200">
+                <a:solidFill>
+                  <a:schemeClr val="tx1"/>
+                </a:solidFill>
+                <a:latin typeface="Times New Roman" panose="02020603050405020304" pitchFamily="18" charset="0"/>
+                <a:ea typeface="+mn-ea"/>
+                <a:cs typeface="Times New Roman" panose="02020603050405020304" pitchFamily="18" charset="0"/>
+              </a:defRPr>
+            </a:lvl1pPr>
+            <a:lvl2pPr marL="457200" indent="0" algn="just" defTabSz="914400" rtl="0" eaLnBrk="1" latinLnBrk="0" hangingPunct="1">
+              <a:lnSpc>
+                <a:spcPct val="150000"/>
+              </a:lnSpc>
+              <a:spcBef>
+                <a:spcPts val="0"/>
+              </a:spcBef>
+              <a:buFont typeface="Arial" panose="020B0604020202020204" pitchFamily="34" charset="0"/>
+              <a:buNone/>
+              <a:defRPr sz="1600" kern="1200">
+                <a:solidFill>
+                  <a:schemeClr val="tx1"/>
+                </a:solidFill>
+                <a:latin typeface="Times New Roman" panose="02020603050405020304" pitchFamily="18" charset="0"/>
+                <a:ea typeface="+mn-ea"/>
+                <a:cs typeface="Times New Roman" panose="02020603050405020304" pitchFamily="18" charset="0"/>
+              </a:defRPr>
+            </a:lvl2pPr>
+            <a:lvl3pPr marL="914400" indent="0" algn="just" defTabSz="914400" rtl="0" eaLnBrk="1" latinLnBrk="0" hangingPunct="1">
+              <a:lnSpc>
+                <a:spcPct val="150000"/>
+              </a:lnSpc>
+              <a:spcBef>
+                <a:spcPts val="0"/>
+              </a:spcBef>
+              <a:buFont typeface="Arial" panose="020B0604020202020204" pitchFamily="34" charset="0"/>
+              <a:buNone/>
+              <a:defRPr sz="1400" kern="1200">
+                <a:solidFill>
+                  <a:schemeClr val="tx1"/>
+                </a:solidFill>
+                <a:latin typeface="Times New Roman" panose="02020603050405020304" pitchFamily="18" charset="0"/>
+                <a:ea typeface="+mn-ea"/>
+                <a:cs typeface="Times New Roman" panose="02020603050405020304" pitchFamily="18" charset="0"/>
+              </a:defRPr>
+            </a:lvl3pPr>
+            <a:lvl4pPr marL="1371600" indent="0" algn="just" defTabSz="914400" rtl="0" eaLnBrk="1" latinLnBrk="0" hangingPunct="1">
+              <a:lnSpc>
+                <a:spcPct val="150000"/>
+              </a:lnSpc>
+              <a:spcBef>
+                <a:spcPts val="0"/>
+              </a:spcBef>
+              <a:buFont typeface="Arial" panose="020B0604020202020204" pitchFamily="34" charset="0"/>
+              <a:buNone/>
+              <a:defRPr sz="1200" kern="1200">
+                <a:solidFill>
+                  <a:schemeClr val="tx1"/>
+                </a:solidFill>
+                <a:latin typeface="Times New Roman" panose="02020603050405020304" pitchFamily="18" charset="0"/>
+                <a:ea typeface="+mn-ea"/>
+                <a:cs typeface="Times New Roman" panose="02020603050405020304" pitchFamily="18" charset="0"/>
+              </a:defRPr>
+            </a:lvl4pPr>
+            <a:lvl5pPr marL="1828800" indent="0" algn="just" defTabSz="914400" rtl="0" eaLnBrk="1" latinLnBrk="0" hangingPunct="1">
+              <a:lnSpc>
+                <a:spcPct val="150000"/>
+              </a:lnSpc>
+              <a:spcBef>
+                <a:spcPts val="0"/>
+              </a:spcBef>
+              <a:buFont typeface="Arial" panose="020B0604020202020204" pitchFamily="34" charset="0"/>
+              <a:buNone/>
+              <a:defRPr sz="1000" kern="1200">
+                <a:solidFill>
+                  <a:schemeClr val="tx1"/>
+                </a:solidFill>
+                <a:latin typeface="Times New Roman" panose="02020603050405020304" pitchFamily="18" charset="0"/>
+                <a:ea typeface="+mn-ea"/>
+                <a:cs typeface="Times New Roman" panose="02020603050405020304" pitchFamily="18" charset="0"/>
+              </a:defRPr>
+            </a:lvl5pPr>
+            <a:lvl6pPr marL="2514600" indent="-228600" algn="l" defTabSz="914400" rtl="0" eaLnBrk="1" latinLnBrk="0" hangingPunct="1">
+              <a:lnSpc>
+                <a:spcPct val="90000"/>
+              </a:lnSpc>
+              <a:spcBef>
+                <a:spcPts val="500"/>
+              </a:spcBef>
+              <a:buFont typeface="Arial" panose="020B0604020202020204" pitchFamily="34" charset="0"/>
+              <a:buChar char="•"/>
+              <a:defRPr sz="1800" kern="1200">
+                <a:solidFill>
+                  <a:schemeClr val="tx1"/>
+                </a:solidFill>
+                <a:latin typeface="+mn-lt"/>
+                <a:ea typeface="+mn-ea"/>
+                <a:cs typeface="+mn-cs"/>
+              </a:defRPr>
+            </a:lvl6pPr>
+            <a:lvl7pPr marL="2971800" indent="-228600" algn="l" defTabSz="914400" rtl="0" eaLnBrk="1" latinLnBrk="0" hangingPunct="1">
+              <a:lnSpc>
+                <a:spcPct val="90000"/>
+              </a:lnSpc>
+              <a:spcBef>
+                <a:spcPts val="500"/>
+              </a:spcBef>
+              <a:buFont typeface="Arial" panose="020B0604020202020204" pitchFamily="34" charset="0"/>
+              <a:buChar char="•"/>
+              <a:defRPr sz="1800" kern="1200">
+                <a:solidFill>
+                  <a:schemeClr val="tx1"/>
+                </a:solidFill>
+                <a:latin typeface="+mn-lt"/>
+                <a:ea typeface="+mn-ea"/>
+                <a:cs typeface="+mn-cs"/>
+              </a:defRPr>
+            </a:lvl7pPr>
+            <a:lvl8pPr marL="3429000" indent="-228600" algn="l" defTabSz="914400" rtl="0" eaLnBrk="1" latinLnBrk="0" hangingPunct="1">
+              <a:lnSpc>
+                <a:spcPct val="90000"/>
+              </a:lnSpc>
+              <a:spcBef>
+                <a:spcPts val="500"/>
+              </a:spcBef>
+              <a:buFont typeface="Arial" panose="020B0604020202020204" pitchFamily="34" charset="0"/>
+              <a:buChar char="•"/>
+              <a:defRPr sz="1800" kern="1200">
+                <a:solidFill>
+                  <a:schemeClr val="tx1"/>
+                </a:solidFill>
+                <a:latin typeface="+mn-lt"/>
+                <a:ea typeface="+mn-ea"/>
+                <a:cs typeface="+mn-cs"/>
+              </a:defRPr>
+            </a:lvl8pPr>
+            <a:lvl9pPr marL="3886200" indent="-228600" algn="l" defTabSz="914400" rtl="0" eaLnBrk="1" latinLnBrk="0" hangingPunct="1">
+              <a:lnSpc>
+                <a:spcPct val="90000"/>
+              </a:lnSpc>
+              <a:spcBef>
+                <a:spcPts val="500"/>
+              </a:spcBef>
+              <a:buFont typeface="Arial" panose="020B0604020202020204" pitchFamily="34" charset="0"/>
+              <a:buChar char="•"/>
+              <a:defRPr sz="1800" kern="1200">
+                <a:solidFill>
+                  <a:schemeClr val="tx1"/>
+                </a:solidFill>
+                <a:latin typeface="+mn-lt"/>
+                <a:ea typeface="+mn-ea"/>
+                <a:cs typeface="+mn-cs"/>
+              </a:defRPr>
+            </a:lvl9pPr>
+          </a:lstStyle>
+          <a:p>
+            <a:r>
+              <a:rPr lang="pt-BR"/>
+              <a:t>O catch captura JWTCreationException durante a criação do token.</a:t>
+            </a:r>
+            <a:endParaRPr lang="pt-BR" dirty="0"/>
+          </a:p>
+        </p:txBody>
+      </p:sp>
+    </p:spTree>
+    <p:extLst>
+      <p:ext uri="{BB962C8B-B14F-4D97-AF65-F5344CB8AC3E}">
+        <p14:creationId xmlns:p14="http://schemas.microsoft.com/office/powerpoint/2010/main" val="1808293615"/>
+      </p:ext>
+    </p:extLst>
+  </p:cSld>
+  <p:clrMapOvr>
+    <a:masterClrMapping/>
+  </p:clrMapOvr>
+</p:sld>
+</file>
+
+<file path=ppt/slides/slide17.xml><?xml version="1.0" encoding="utf-8"?>
+<p:sld xmlns:a="http://schemas.openxmlformats.org/drawingml/2006/main" xmlns:r="http://schemas.openxmlformats.org/officeDocument/2006/relationships" xmlns:p="http://schemas.openxmlformats.org/presentationml/2006/main">
+  <p:cSld>
+    <p:spTree>
+      <p:nvGrpSpPr>
+        <p:cNvPr id="1" name=""/>
+        <p:cNvGrpSpPr/>
+        <p:nvPr/>
+      </p:nvGrpSpPr>
+      <p:grpSpPr>
+        <a:xfrm>
+          <a:off x="0" y="0"/>
+          <a:ext cx="0" cy="0"/>
+          <a:chOff x="0" y="0"/>
+          <a:chExt cx="0" cy="0"/>
+        </a:xfrm>
+      </p:grpSpPr>
+      <p:sp>
+        <p:nvSpPr>
+          <p:cNvPr id="2" name="Título 1">
+            <a:extLst>
+              <a:ext uri="{FF2B5EF4-FFF2-40B4-BE49-F238E27FC236}">
+                <a16:creationId xmlns:a16="http://schemas.microsoft.com/office/drawing/2014/main" id="{1DEDD820-2586-026C-E615-729B25A8FBAB}"/>
+              </a:ext>
+            </a:extLst>
+          </p:cNvPr>
+          <p:cNvSpPr>
+            <a:spLocks noGrp="1"/>
+          </p:cNvSpPr>
+          <p:nvPr>
+            <p:ph type="title"/>
+          </p:nvPr>
+        </p:nvSpPr>
+        <p:spPr/>
+        <p:txBody>
+          <a:bodyPr/>
+          <a:lstStyle/>
+          <a:p>
+            <a:r>
+              <a:rPr lang="pt-BR" dirty="0"/>
+              <a:t>Resultado da geração</a:t>
+            </a:r>
+          </a:p>
+        </p:txBody>
+      </p:sp>
+      <p:sp>
+        <p:nvSpPr>
+          <p:cNvPr id="3" name="Espaço Reservado para Conteúdo 2">
+            <a:extLst>
+              <a:ext uri="{FF2B5EF4-FFF2-40B4-BE49-F238E27FC236}">
+                <a16:creationId xmlns:a16="http://schemas.microsoft.com/office/drawing/2014/main" id="{A3D5CFBE-D260-DEBE-162F-3135C4902222}"/>
+              </a:ext>
+            </a:extLst>
+          </p:cNvPr>
+          <p:cNvSpPr>
+            <a:spLocks noGrp="1"/>
+          </p:cNvSpPr>
+          <p:nvPr>
+            <p:ph idx="1"/>
+          </p:nvPr>
+        </p:nvSpPr>
+        <p:spPr>
+          <a:xfrm>
+            <a:off x="592347" y="1844675"/>
+            <a:ext cx="11007306" cy="691491"/>
+          </a:xfrm>
+        </p:spPr>
+        <p:txBody>
+          <a:bodyPr/>
+          <a:lstStyle/>
+          <a:p>
+            <a:r>
+              <a:rPr lang="pt-BR" dirty="0"/>
+              <a:t>Ao final, </a:t>
+            </a:r>
+            <a:r>
+              <a:rPr lang="pt-BR" dirty="0" err="1"/>
+              <a:t>gerarToken</a:t>
+            </a:r>
+            <a:r>
+              <a:rPr lang="pt-BR" dirty="0"/>
+              <a:t>() retorna uma </a:t>
+            </a:r>
+            <a:r>
+              <a:rPr lang="pt-BR" dirty="0" err="1"/>
+              <a:t>String</a:t>
+            </a:r>
+            <a:r>
+              <a:rPr lang="pt-BR" dirty="0"/>
+              <a:t> com três partes.</a:t>
+            </a:r>
+          </a:p>
+          <a:p>
+            <a:endParaRPr lang="pt-BR" dirty="0"/>
+          </a:p>
+        </p:txBody>
+      </p:sp>
+      <p:sp>
+        <p:nvSpPr>
+          <p:cNvPr id="11" name="Shape 20">
+            <a:extLst>
+              <a:ext uri="{FF2B5EF4-FFF2-40B4-BE49-F238E27FC236}">
+                <a16:creationId xmlns:a16="http://schemas.microsoft.com/office/drawing/2014/main" id="{EE383B37-7310-4563-9BC8-B173B5286B0D}"/>
+              </a:ext>
+            </a:extLst>
+          </p:cNvPr>
+          <p:cNvSpPr>
+            <a:spLocks noGrp="1"/>
+          </p:cNvSpPr>
+          <p:nvPr/>
+        </p:nvSpPr>
+        <p:spPr>
+          <a:xfrm>
+            <a:off x="2136000" y="3124559"/>
+            <a:ext cx="7920000" cy="1223154"/>
+          </a:xfrm>
+          <a:prstGeom prst="roundRect">
+            <a:avLst>
+              <a:gd name="adj" fmla="val 8081"/>
+            </a:avLst>
+          </a:prstGeom>
+          <a:solidFill>
+            <a:srgbClr val="1E1E1E"/>
+          </a:solidFill>
+          <a:ln>
+            <a:solidFill>
+              <a:srgbClr val="1E1E1E"/>
+            </a:solidFill>
           </a:ln>
         </p:spPr>
         <p:txBody>
-          <a:bodyPr>
+          <a:bodyPr/>
+          <a:lstStyle/>
+          <a:p>
+            <a:endParaRPr/>
+          </a:p>
+        </p:txBody>
+      </p:sp>
+      <p:sp>
+        <p:nvSpPr>
+          <p:cNvPr id="4" name="Retângulo 3">
+            <a:extLst>
+              <a:ext uri="{FF2B5EF4-FFF2-40B4-BE49-F238E27FC236}">
+                <a16:creationId xmlns:a16="http://schemas.microsoft.com/office/drawing/2014/main" id="{3CE8AC7A-3364-4E97-BC2E-25CF018F1E04}"/>
+              </a:ext>
+            </a:extLst>
+          </p:cNvPr>
+          <p:cNvSpPr>
+            <a:spLocks noGrp="1"/>
+          </p:cNvSpPr>
+          <p:nvPr/>
+        </p:nvSpPr>
+        <p:spPr>
+          <a:xfrm>
+            <a:off x="3730206" y="3468268"/>
+            <a:ext cx="4731589" cy="535736"/>
+          </a:xfrm>
+          <a:prstGeom prst="rect">
+            <a:avLst/>
+          </a:prstGeom>
+        </p:spPr>
+        <p:txBody>
+          <a:bodyPr wrap="square">
             <a:noAutofit/>
           </a:bodyPr>
           <a:lstStyle/>
           <a:p>
             <a:pPr algn="l">
-              <a:defRPr sz="2100">
-                <a:solidFill>
-                  <a:srgbClr val="000000"/>
-                </a:solidFill>
-                <a:latin typeface="Calibri"/>
-                <a:ea typeface="Calibri"/>
-                <a:cs typeface="Calibri"/>
+              <a:defRPr sz="2400">
+                <a:solidFill>
+                  <a:srgbClr val="D4D4D4"/>
+                </a:solidFill>
+                <a:latin typeface="Consolas"/>
+                <a:ea typeface="Consolas"/>
+                <a:cs typeface="Consolas"/>
               </a:defRPr>
             </a:pPr>
             <a:r>
-              <a:rPr sz="2100">
-                <a:solidFill>
-                  <a:srgbClr val="000000"/>
-                </a:solidFill>
-                <a:latin typeface="Calibri"/>
-                <a:ea typeface="Calibri"/>
-                <a:cs typeface="Calibri"/>
-              </a:rPr>
-              <a:t>O controller recebe essa String e pode devolvê-la na resposta do login.</a:t>
-            </a:r>
-          </a:p>
-          <a:p>
-            <a:pPr algn="l">
-              <a:defRPr sz="2100">
-                <a:solidFill>
-                  <a:srgbClr val="000000"/>
-                </a:solidFill>
-                <a:latin typeface="Calibri"/>
-                <a:ea typeface="Calibri"/>
-                <a:cs typeface="Calibri"/>
-              </a:defRPr>
-            </a:pPr>
-            <a:r>
-              <a:rPr sz="2100">
-                <a:solidFill>
-                  <a:srgbClr val="000000"/>
-                </a:solidFill>
-                <a:latin typeface="Calibri"/>
-                <a:ea typeface="Calibri"/>
-                <a:cs typeface="Calibri"/>
-              </a:rPr>
+              <a:rPr sz="2400" dirty="0" err="1">
+                <a:solidFill>
+                  <a:srgbClr val="D4D4D4"/>
+                </a:solidFill>
+                <a:latin typeface="Consolas"/>
+                <a:ea typeface="Consolas"/>
+                <a:cs typeface="Consolas"/>
+              </a:rPr>
+              <a:t>header.payload.assinatura</a:t>
+            </a:r>
+            <a:endParaRPr sz="2400" dirty="0">
+              <a:solidFill>
+                <a:srgbClr val="D4D4D4"/>
+              </a:solidFill>
+              <a:latin typeface="Consolas"/>
+              <a:ea typeface="Consolas"/>
+              <a:cs typeface="Consolas"/>
+            </a:endParaRPr>
+          </a:p>
+        </p:txBody>
+      </p:sp>
+      <p:sp>
+        <p:nvSpPr>
+          <p:cNvPr id="5" name="Espaço Reservado para Conteúdo 2">
+            <a:extLst>
+              <a:ext uri="{FF2B5EF4-FFF2-40B4-BE49-F238E27FC236}">
+                <a16:creationId xmlns:a16="http://schemas.microsoft.com/office/drawing/2014/main" id="{1A9E8C90-0EDA-90E3-170D-C456F86218C8}"/>
+              </a:ext>
+            </a:extLst>
+          </p:cNvPr>
+          <p:cNvSpPr txBox="1">
+            <a:spLocks/>
+          </p:cNvSpPr>
+          <p:nvPr/>
+        </p:nvSpPr>
+        <p:spPr>
+          <a:xfrm>
+            <a:off x="592347" y="4936106"/>
+            <a:ext cx="11007306" cy="1367226"/>
+          </a:xfrm>
+          <a:prstGeom prst="rect">
+            <a:avLst/>
+          </a:prstGeom>
+        </p:spPr>
+        <p:txBody>
+          <a:bodyPr/>
+          <a:lstStyle>
+            <a:lvl1pPr marL="0" indent="0" algn="just" defTabSz="914400" rtl="0" eaLnBrk="1" latinLnBrk="0" hangingPunct="1">
+              <a:lnSpc>
+                <a:spcPct val="150000"/>
+              </a:lnSpc>
+              <a:spcBef>
+                <a:spcPts val="0"/>
+              </a:spcBef>
+              <a:buFont typeface="Arial" panose="020B0604020202020204" pitchFamily="34" charset="0"/>
+              <a:buNone/>
+              <a:defRPr sz="2000" kern="1200">
+                <a:solidFill>
+                  <a:schemeClr val="tx1"/>
+                </a:solidFill>
+                <a:latin typeface="Times New Roman" panose="02020603050405020304" pitchFamily="18" charset="0"/>
+                <a:ea typeface="+mn-ea"/>
+                <a:cs typeface="Times New Roman" panose="02020603050405020304" pitchFamily="18" charset="0"/>
+              </a:defRPr>
+            </a:lvl1pPr>
+            <a:lvl2pPr marL="457200" indent="0" algn="just" defTabSz="914400" rtl="0" eaLnBrk="1" latinLnBrk="0" hangingPunct="1">
+              <a:lnSpc>
+                <a:spcPct val="150000"/>
+              </a:lnSpc>
+              <a:spcBef>
+                <a:spcPts val="0"/>
+              </a:spcBef>
+              <a:buFont typeface="Arial" panose="020B0604020202020204" pitchFamily="34" charset="0"/>
+              <a:buNone/>
+              <a:defRPr sz="1600" kern="1200">
+                <a:solidFill>
+                  <a:schemeClr val="tx1"/>
+                </a:solidFill>
+                <a:latin typeface="Times New Roman" panose="02020603050405020304" pitchFamily="18" charset="0"/>
+                <a:ea typeface="+mn-ea"/>
+                <a:cs typeface="Times New Roman" panose="02020603050405020304" pitchFamily="18" charset="0"/>
+              </a:defRPr>
+            </a:lvl2pPr>
+            <a:lvl3pPr marL="914400" indent="0" algn="just" defTabSz="914400" rtl="0" eaLnBrk="1" latinLnBrk="0" hangingPunct="1">
+              <a:lnSpc>
+                <a:spcPct val="150000"/>
+              </a:lnSpc>
+              <a:spcBef>
+                <a:spcPts val="0"/>
+              </a:spcBef>
+              <a:buFont typeface="Arial" panose="020B0604020202020204" pitchFamily="34" charset="0"/>
+              <a:buNone/>
+              <a:defRPr sz="1400" kern="1200">
+                <a:solidFill>
+                  <a:schemeClr val="tx1"/>
+                </a:solidFill>
+                <a:latin typeface="Times New Roman" panose="02020603050405020304" pitchFamily="18" charset="0"/>
+                <a:ea typeface="+mn-ea"/>
+                <a:cs typeface="Times New Roman" panose="02020603050405020304" pitchFamily="18" charset="0"/>
+              </a:defRPr>
+            </a:lvl3pPr>
+            <a:lvl4pPr marL="1371600" indent="0" algn="just" defTabSz="914400" rtl="0" eaLnBrk="1" latinLnBrk="0" hangingPunct="1">
+              <a:lnSpc>
+                <a:spcPct val="150000"/>
+              </a:lnSpc>
+              <a:spcBef>
+                <a:spcPts val="0"/>
+              </a:spcBef>
+              <a:buFont typeface="Arial" panose="020B0604020202020204" pitchFamily="34" charset="0"/>
+              <a:buNone/>
+              <a:defRPr sz="1200" kern="1200">
+                <a:solidFill>
+                  <a:schemeClr val="tx1"/>
+                </a:solidFill>
+                <a:latin typeface="Times New Roman" panose="02020603050405020304" pitchFamily="18" charset="0"/>
+                <a:ea typeface="+mn-ea"/>
+                <a:cs typeface="Times New Roman" panose="02020603050405020304" pitchFamily="18" charset="0"/>
+              </a:defRPr>
+            </a:lvl4pPr>
+            <a:lvl5pPr marL="1828800" indent="0" algn="just" defTabSz="914400" rtl="0" eaLnBrk="1" latinLnBrk="0" hangingPunct="1">
+              <a:lnSpc>
+                <a:spcPct val="150000"/>
+              </a:lnSpc>
+              <a:spcBef>
+                <a:spcPts val="0"/>
+              </a:spcBef>
+              <a:buFont typeface="Arial" panose="020B0604020202020204" pitchFamily="34" charset="0"/>
+              <a:buNone/>
+              <a:defRPr sz="1000" kern="1200">
+                <a:solidFill>
+                  <a:schemeClr val="tx1"/>
+                </a:solidFill>
+                <a:latin typeface="Times New Roman" panose="02020603050405020304" pitchFamily="18" charset="0"/>
+                <a:ea typeface="+mn-ea"/>
+                <a:cs typeface="Times New Roman" panose="02020603050405020304" pitchFamily="18" charset="0"/>
+              </a:defRPr>
+            </a:lvl5pPr>
+            <a:lvl6pPr marL="2514600" indent="-228600" algn="l" defTabSz="914400" rtl="0" eaLnBrk="1" latinLnBrk="0" hangingPunct="1">
+              <a:lnSpc>
+                <a:spcPct val="90000"/>
+              </a:lnSpc>
+              <a:spcBef>
+                <a:spcPts val="500"/>
+              </a:spcBef>
+              <a:buFont typeface="Arial" panose="020B0604020202020204" pitchFamily="34" charset="0"/>
+              <a:buChar char="•"/>
+              <a:defRPr sz="1800" kern="1200">
+                <a:solidFill>
+                  <a:schemeClr val="tx1"/>
+                </a:solidFill>
+                <a:latin typeface="+mn-lt"/>
+                <a:ea typeface="+mn-ea"/>
+                <a:cs typeface="+mn-cs"/>
+              </a:defRPr>
+            </a:lvl6pPr>
+            <a:lvl7pPr marL="2971800" indent="-228600" algn="l" defTabSz="914400" rtl="0" eaLnBrk="1" latinLnBrk="0" hangingPunct="1">
+              <a:lnSpc>
+                <a:spcPct val="90000"/>
+              </a:lnSpc>
+              <a:spcBef>
+                <a:spcPts val="500"/>
+              </a:spcBef>
+              <a:buFont typeface="Arial" panose="020B0604020202020204" pitchFamily="34" charset="0"/>
+              <a:buChar char="•"/>
+              <a:defRPr sz="1800" kern="1200">
+                <a:solidFill>
+                  <a:schemeClr val="tx1"/>
+                </a:solidFill>
+                <a:latin typeface="+mn-lt"/>
+                <a:ea typeface="+mn-ea"/>
+                <a:cs typeface="+mn-cs"/>
+              </a:defRPr>
+            </a:lvl7pPr>
+            <a:lvl8pPr marL="3429000" indent="-228600" algn="l" defTabSz="914400" rtl="0" eaLnBrk="1" latinLnBrk="0" hangingPunct="1">
+              <a:lnSpc>
+                <a:spcPct val="90000"/>
+              </a:lnSpc>
+              <a:spcBef>
+                <a:spcPts val="500"/>
+              </a:spcBef>
+              <a:buFont typeface="Arial" panose="020B0604020202020204" pitchFamily="34" charset="0"/>
+              <a:buChar char="•"/>
+              <a:defRPr sz="1800" kern="1200">
+                <a:solidFill>
+                  <a:schemeClr val="tx1"/>
+                </a:solidFill>
+                <a:latin typeface="+mn-lt"/>
+                <a:ea typeface="+mn-ea"/>
+                <a:cs typeface="+mn-cs"/>
+              </a:defRPr>
+            </a:lvl8pPr>
+            <a:lvl9pPr marL="3886200" indent="-228600" algn="l" defTabSz="914400" rtl="0" eaLnBrk="1" latinLnBrk="0" hangingPunct="1">
+              <a:lnSpc>
+                <a:spcPct val="90000"/>
+              </a:lnSpc>
+              <a:spcBef>
+                <a:spcPts val="500"/>
+              </a:spcBef>
+              <a:buFont typeface="Arial" panose="020B0604020202020204" pitchFamily="34" charset="0"/>
+              <a:buChar char="•"/>
+              <a:defRPr sz="1800" kern="1200">
+                <a:solidFill>
+                  <a:schemeClr val="tx1"/>
+                </a:solidFill>
+                <a:latin typeface="+mn-lt"/>
+                <a:ea typeface="+mn-ea"/>
+                <a:cs typeface="+mn-cs"/>
+              </a:defRPr>
+            </a:lvl9pPr>
+          </a:lstStyle>
+          <a:p>
+            <a:r>
+              <a:rPr lang="pt-BR" dirty="0"/>
+              <a:t>O </a:t>
+            </a:r>
+            <a:r>
+              <a:rPr lang="pt-BR" dirty="0" err="1"/>
+              <a:t>controller</a:t>
+            </a:r>
+            <a:r>
+              <a:rPr lang="pt-BR" dirty="0"/>
+              <a:t> recebe essa </a:t>
+            </a:r>
+            <a:r>
+              <a:rPr lang="pt-BR" dirty="0" err="1"/>
+              <a:t>String</a:t>
+            </a:r>
+            <a:r>
+              <a:rPr lang="pt-BR" dirty="0"/>
+              <a:t> e pode devolvê-la na resposta do login.</a:t>
+            </a:r>
+          </a:p>
+          <a:p>
+            <a:r>
+              <a:rPr lang="pt-BR" dirty="0"/>
               <a:t>Nas próximas requisições, a API precisará validar o token.</a:t>
             </a:r>
+          </a:p>
+          <a:p>
+            <a:endParaRPr lang="pt-BR" dirty="0"/>
           </a:p>
         </p:txBody>
       </p:sp>
     </p:spTree>
     <p:extLst>
       <p:ext uri="{BB962C8B-B14F-4D97-AF65-F5344CB8AC3E}">
-        <p14:creationId xmlns:p14="http://schemas.microsoft.com/office/powerpoint/2010/main" val="3254454883"/>
+        <p14:creationId xmlns:p14="http://schemas.microsoft.com/office/powerpoint/2010/main" val="2007768558"/>
+      </p:ext>
+    </p:extLst>
+  </p:cSld>
+  <p:clrMapOvr>
+    <a:masterClrMapping/>
+  </p:clrMapOvr>
+</p:sld>
+</file>
+
+<file path=ppt/slides/slide18.xml><?xml version="1.0" encoding="utf-8"?>
+<p:sld xmlns:a="http://schemas.openxmlformats.org/drawingml/2006/main" xmlns:r="http://schemas.openxmlformats.org/officeDocument/2006/relationships" xmlns:p="http://schemas.openxmlformats.org/presentationml/2006/main">
+  <p:cSld>
+    <p:spTree>
+      <p:nvGrpSpPr>
+        <p:cNvPr id="1" name=""/>
+        <p:cNvGrpSpPr/>
+        <p:nvPr/>
+      </p:nvGrpSpPr>
+      <p:grpSpPr>
+        <a:xfrm>
+          <a:off x="0" y="0"/>
+          <a:ext cx="0" cy="0"/>
+          <a:chOff x="0" y="0"/>
+          <a:chExt cx="0" cy="0"/>
+        </a:xfrm>
+      </p:grpSpPr>
+      <p:sp>
+        <p:nvSpPr>
+          <p:cNvPr id="2" name="Título 1">
+            <a:extLst>
+              <a:ext uri="{FF2B5EF4-FFF2-40B4-BE49-F238E27FC236}">
+                <a16:creationId xmlns:a16="http://schemas.microsoft.com/office/drawing/2014/main" id="{13D8B747-4C67-5760-0DEA-22D19C7E4152}"/>
+              </a:ext>
+            </a:extLst>
+          </p:cNvPr>
+          <p:cNvSpPr>
+            <a:spLocks noGrp="1"/>
+          </p:cNvSpPr>
+          <p:nvPr>
+            <p:ph type="title"/>
+          </p:nvPr>
+        </p:nvSpPr>
+        <p:spPr/>
+        <p:txBody>
+          <a:bodyPr/>
+          <a:lstStyle/>
+          <a:p>
+            <a:r>
+              <a:rPr lang="pt-BR" dirty="0"/>
+              <a:t>Definindo o prazo de validade do token JWT</a:t>
+            </a:r>
+            <a:br>
+              <a:rPr lang="pt-BR" dirty="0"/>
+            </a:br>
+            <a:endParaRPr lang="pt-BR" dirty="0"/>
+          </a:p>
+        </p:txBody>
+      </p:sp>
+      <p:sp>
+        <p:nvSpPr>
+          <p:cNvPr id="3" name="Espaço Reservado para Conteúdo 2">
+            <a:extLst>
+              <a:ext uri="{FF2B5EF4-FFF2-40B4-BE49-F238E27FC236}">
+                <a16:creationId xmlns:a16="http://schemas.microsoft.com/office/drawing/2014/main" id="{AA6ED090-9A5D-5DBE-012C-38E83FB2287A}"/>
+              </a:ext>
+            </a:extLst>
+          </p:cNvPr>
+          <p:cNvSpPr>
+            <a:spLocks noGrp="1"/>
+          </p:cNvSpPr>
+          <p:nvPr>
+            <p:ph idx="1"/>
+          </p:nvPr>
+        </p:nvSpPr>
+        <p:spPr>
+          <a:xfrm>
+            <a:off x="592347" y="1844676"/>
+            <a:ext cx="11007306" cy="850900"/>
+          </a:xfrm>
+        </p:spPr>
+        <p:txBody>
+          <a:bodyPr/>
+          <a:lstStyle/>
+          <a:p>
+            <a:r>
+              <a:rPr lang="pt-BR" sz="1600" dirty="0"/>
+              <a:t>O </a:t>
+            </a:r>
+            <a:r>
+              <a:rPr lang="pt-BR" sz="1600" b="1" dirty="0"/>
+              <a:t>Instant</a:t>
+            </a:r>
+            <a:r>
+              <a:rPr lang="pt-BR" sz="1600" dirty="0"/>
+              <a:t> representa um momento exato na linha do tempo, com data e hora, com referência em UTC. Nesse método, ele indica quando o token vai expirar.</a:t>
+            </a:r>
+          </a:p>
+        </p:txBody>
+      </p:sp>
+      <p:sp>
+        <p:nvSpPr>
+          <p:cNvPr id="4" name="Shape 20">
+            <a:extLst>
+              <a:ext uri="{FF2B5EF4-FFF2-40B4-BE49-F238E27FC236}">
+                <a16:creationId xmlns:a16="http://schemas.microsoft.com/office/drawing/2014/main" id="{C713F90A-98C3-7128-5A9E-BF37EA3E68DE}"/>
+              </a:ext>
+            </a:extLst>
+          </p:cNvPr>
+          <p:cNvSpPr>
+            <a:spLocks noGrp="1"/>
+          </p:cNvSpPr>
+          <p:nvPr/>
+        </p:nvSpPr>
+        <p:spPr>
+          <a:xfrm>
+            <a:off x="670766" y="3035540"/>
+            <a:ext cx="10850468" cy="1439084"/>
+          </a:xfrm>
+          <a:prstGeom prst="roundRect">
+            <a:avLst>
+              <a:gd name="adj" fmla="val 8081"/>
+            </a:avLst>
+          </a:prstGeom>
+          <a:solidFill>
+            <a:srgbClr val="1E1E1E"/>
+          </a:solidFill>
+          <a:ln>
+            <a:solidFill>
+              <a:srgbClr val="1E1E1E"/>
+            </a:solidFill>
+          </a:ln>
+        </p:spPr>
+        <p:txBody>
+          <a:bodyPr/>
+          <a:lstStyle/>
+          <a:p>
+            <a:endParaRPr/>
+          </a:p>
+        </p:txBody>
+      </p:sp>
+      <p:sp>
+        <p:nvSpPr>
+          <p:cNvPr id="5" name="Retângulo 4">
+            <a:extLst>
+              <a:ext uri="{FF2B5EF4-FFF2-40B4-BE49-F238E27FC236}">
+                <a16:creationId xmlns:a16="http://schemas.microsoft.com/office/drawing/2014/main" id="{2552454E-3A28-F68C-53BA-B985DB79007C}"/>
+              </a:ext>
+            </a:extLst>
+          </p:cNvPr>
+          <p:cNvSpPr>
+            <a:spLocks noGrp="1"/>
+          </p:cNvSpPr>
+          <p:nvPr/>
+        </p:nvSpPr>
+        <p:spPr>
+          <a:xfrm>
+            <a:off x="1169509" y="3284628"/>
+            <a:ext cx="9852983" cy="940909"/>
+          </a:xfrm>
+          <a:prstGeom prst="rect">
+            <a:avLst/>
+          </a:prstGeom>
+        </p:spPr>
+        <p:txBody>
+          <a:bodyPr wrap="square">
+            <a:noAutofit/>
+          </a:bodyPr>
+          <a:lstStyle/>
+          <a:p>
+            <a:pPr algn="l">
+              <a:defRPr sz="2400">
+                <a:solidFill>
+                  <a:srgbClr val="D4D4D4"/>
+                </a:solidFill>
+                <a:latin typeface="Consolas"/>
+                <a:ea typeface="Consolas"/>
+                <a:cs typeface="Consolas"/>
+              </a:defRPr>
+            </a:pPr>
+            <a:r>
+              <a:rPr lang="pt-BR" sz="1600" dirty="0" err="1">
+                <a:solidFill>
+                  <a:srgbClr val="B07857"/>
+                </a:solidFill>
+                <a:latin typeface="Consolas"/>
+                <a:ea typeface="Consolas"/>
+                <a:cs typeface="Consolas"/>
+              </a:rPr>
+              <a:t>private</a:t>
+            </a:r>
+            <a:r>
+              <a:rPr lang="pt-BR" sz="1600" dirty="0">
+                <a:solidFill>
+                  <a:srgbClr val="D4D4D4"/>
+                </a:solidFill>
+                <a:latin typeface="Consolas"/>
+                <a:ea typeface="Consolas"/>
+                <a:cs typeface="Consolas"/>
+              </a:rPr>
+              <a:t> Instant </a:t>
+            </a:r>
+            <a:r>
+              <a:rPr lang="pt-BR" sz="1600" dirty="0" err="1">
+                <a:solidFill>
+                  <a:srgbClr val="4D97DA"/>
+                </a:solidFill>
+                <a:latin typeface="Consolas"/>
+                <a:ea typeface="Consolas"/>
+                <a:cs typeface="Consolas"/>
+              </a:rPr>
+              <a:t>dataExpiracao</a:t>
+            </a:r>
+            <a:r>
+              <a:rPr lang="pt-BR" sz="1600" dirty="0">
+                <a:solidFill>
+                  <a:srgbClr val="D4D4D4"/>
+                </a:solidFill>
+                <a:latin typeface="Consolas"/>
+                <a:ea typeface="Consolas"/>
+                <a:cs typeface="Consolas"/>
+              </a:rPr>
+              <a:t>() {</a:t>
+            </a:r>
+          </a:p>
+          <a:p>
+            <a:pPr algn="l">
+              <a:defRPr sz="2400">
+                <a:solidFill>
+                  <a:srgbClr val="D4D4D4"/>
+                </a:solidFill>
+                <a:latin typeface="Consolas"/>
+                <a:ea typeface="Consolas"/>
+                <a:cs typeface="Consolas"/>
+              </a:defRPr>
+            </a:pPr>
+            <a:r>
+              <a:rPr lang="pt-BR" sz="1600" dirty="0">
+                <a:solidFill>
+                  <a:srgbClr val="D4D4D4"/>
+                </a:solidFill>
+                <a:latin typeface="Consolas"/>
+                <a:ea typeface="Consolas"/>
+                <a:cs typeface="Consolas"/>
+              </a:rPr>
+              <a:t>        </a:t>
+            </a:r>
+            <a:r>
+              <a:rPr lang="pt-BR" sz="1600" dirty="0" err="1">
+                <a:solidFill>
+                  <a:srgbClr val="B07857"/>
+                </a:solidFill>
+                <a:latin typeface="Consolas"/>
+              </a:rPr>
+              <a:t>return</a:t>
+            </a:r>
+            <a:r>
+              <a:rPr lang="pt-BR" sz="1600" dirty="0">
+                <a:solidFill>
+                  <a:srgbClr val="D4D4D4"/>
+                </a:solidFill>
+                <a:latin typeface="Consolas"/>
+                <a:ea typeface="Consolas"/>
+                <a:cs typeface="Consolas"/>
+              </a:rPr>
+              <a:t> </a:t>
+            </a:r>
+            <a:r>
+              <a:rPr lang="pt-BR" sz="1600" dirty="0" err="1">
+                <a:solidFill>
+                  <a:srgbClr val="D4D4D4"/>
+                </a:solidFill>
+                <a:latin typeface="Consolas"/>
+                <a:ea typeface="Consolas"/>
+                <a:cs typeface="Consolas"/>
+              </a:rPr>
+              <a:t>LocalDateTime.now</a:t>
+            </a:r>
+            <a:r>
+              <a:rPr lang="pt-BR" sz="1600" dirty="0">
+                <a:solidFill>
+                  <a:srgbClr val="D4D4D4"/>
+                </a:solidFill>
+                <a:latin typeface="Consolas"/>
+                <a:ea typeface="Consolas"/>
+                <a:cs typeface="Consolas"/>
+              </a:rPr>
+              <a:t>().</a:t>
+            </a:r>
+            <a:r>
+              <a:rPr lang="pt-BR" sz="1600" dirty="0" err="1">
+                <a:solidFill>
+                  <a:srgbClr val="D4D4D4"/>
+                </a:solidFill>
+                <a:latin typeface="Consolas"/>
+                <a:ea typeface="Consolas"/>
+                <a:cs typeface="Consolas"/>
+              </a:rPr>
+              <a:t>plusHours</a:t>
+            </a:r>
+            <a:r>
+              <a:rPr lang="pt-BR" sz="1600" dirty="0">
+                <a:solidFill>
+                  <a:srgbClr val="D4D4D4"/>
+                </a:solidFill>
+                <a:latin typeface="Consolas"/>
+                <a:ea typeface="Consolas"/>
+                <a:cs typeface="Consolas"/>
+              </a:rPr>
+              <a:t>(2).</a:t>
+            </a:r>
+            <a:r>
+              <a:rPr lang="pt-BR" sz="1600" dirty="0" err="1">
+                <a:solidFill>
+                  <a:srgbClr val="D4D4D4"/>
+                </a:solidFill>
+                <a:latin typeface="Consolas"/>
+                <a:ea typeface="Consolas"/>
+                <a:cs typeface="Consolas"/>
+              </a:rPr>
+              <a:t>toInstant</a:t>
+            </a:r>
+            <a:r>
+              <a:rPr lang="pt-BR" sz="1600" dirty="0">
+                <a:solidFill>
+                  <a:srgbClr val="D4D4D4"/>
+                </a:solidFill>
+                <a:latin typeface="Consolas"/>
+                <a:ea typeface="Consolas"/>
+                <a:cs typeface="Consolas"/>
+              </a:rPr>
+              <a:t>(</a:t>
+            </a:r>
+            <a:r>
+              <a:rPr lang="pt-BR" sz="1600" dirty="0" err="1">
+                <a:solidFill>
+                  <a:srgbClr val="D4D4D4"/>
+                </a:solidFill>
+                <a:latin typeface="Consolas"/>
+                <a:ea typeface="Consolas"/>
+                <a:cs typeface="Consolas"/>
+              </a:rPr>
+              <a:t>ZoneOffset.of</a:t>
+            </a:r>
+            <a:r>
+              <a:rPr lang="pt-BR" sz="1600" dirty="0">
+                <a:solidFill>
+                  <a:srgbClr val="D4D4D4"/>
+                </a:solidFill>
+                <a:latin typeface="Consolas"/>
+                <a:ea typeface="Consolas"/>
+                <a:cs typeface="Consolas"/>
+              </a:rPr>
+              <a:t>(</a:t>
+            </a:r>
+            <a:r>
+              <a:rPr lang="pt-BR" sz="1600" dirty="0">
+                <a:solidFill>
+                  <a:srgbClr val="548453"/>
+                </a:solidFill>
+                <a:latin typeface="Consolas"/>
+                <a:ea typeface="Consolas"/>
+                <a:cs typeface="Consolas"/>
+              </a:rPr>
+              <a:t>"-03:00"</a:t>
+            </a:r>
+            <a:r>
+              <a:rPr lang="pt-BR" sz="1600" dirty="0">
+                <a:solidFill>
+                  <a:srgbClr val="D4D4D4"/>
+                </a:solidFill>
+                <a:latin typeface="Consolas"/>
+                <a:ea typeface="Consolas"/>
+                <a:cs typeface="Consolas"/>
+              </a:rPr>
+              <a:t>));</a:t>
+            </a:r>
+          </a:p>
+          <a:p>
+            <a:pPr algn="l">
+              <a:defRPr sz="2400">
+                <a:solidFill>
+                  <a:srgbClr val="D4D4D4"/>
+                </a:solidFill>
+                <a:latin typeface="Consolas"/>
+                <a:ea typeface="Consolas"/>
+                <a:cs typeface="Consolas"/>
+              </a:defRPr>
+            </a:pPr>
+            <a:r>
+              <a:rPr lang="pt-BR" sz="1600" dirty="0">
+                <a:solidFill>
+                  <a:srgbClr val="D4D4D4"/>
+                </a:solidFill>
+                <a:latin typeface="Consolas"/>
+                <a:ea typeface="Consolas"/>
+                <a:cs typeface="Consolas"/>
+              </a:rPr>
+              <a:t>}</a:t>
+            </a:r>
+            <a:endParaRPr sz="1600" dirty="0">
+              <a:solidFill>
+                <a:srgbClr val="D4D4D4"/>
+              </a:solidFill>
+              <a:latin typeface="Consolas"/>
+              <a:ea typeface="Consolas"/>
+              <a:cs typeface="Consolas"/>
+            </a:endParaRPr>
+          </a:p>
+        </p:txBody>
+      </p:sp>
+      <p:sp>
+        <p:nvSpPr>
+          <p:cNvPr id="8" name="Espaço Reservado para Conteúdo 2">
+            <a:extLst>
+              <a:ext uri="{FF2B5EF4-FFF2-40B4-BE49-F238E27FC236}">
+                <a16:creationId xmlns:a16="http://schemas.microsoft.com/office/drawing/2014/main" id="{004E5172-6B42-B52D-5026-5A4169E1EF4B}"/>
+              </a:ext>
+            </a:extLst>
+          </p:cNvPr>
+          <p:cNvSpPr txBox="1">
+            <a:spLocks/>
+          </p:cNvSpPr>
+          <p:nvPr/>
+        </p:nvSpPr>
+        <p:spPr>
+          <a:xfrm>
+            <a:off x="592347" y="4814589"/>
+            <a:ext cx="11007306" cy="1633836"/>
+          </a:xfrm>
+          <a:prstGeom prst="rect">
+            <a:avLst/>
+          </a:prstGeom>
+        </p:spPr>
+        <p:txBody>
+          <a:bodyPr/>
+          <a:lstStyle>
+            <a:lvl1pPr marL="0" indent="0" algn="just" defTabSz="914400" rtl="0" eaLnBrk="1" latinLnBrk="0" hangingPunct="1">
+              <a:lnSpc>
+                <a:spcPct val="150000"/>
+              </a:lnSpc>
+              <a:spcBef>
+                <a:spcPts val="0"/>
+              </a:spcBef>
+              <a:buFont typeface="Arial" panose="020B0604020202020204" pitchFamily="34" charset="0"/>
+              <a:buNone/>
+              <a:defRPr sz="2000" kern="1200">
+                <a:solidFill>
+                  <a:schemeClr val="tx1"/>
+                </a:solidFill>
+                <a:latin typeface="Times New Roman" panose="02020603050405020304" pitchFamily="18" charset="0"/>
+                <a:ea typeface="+mn-ea"/>
+                <a:cs typeface="Times New Roman" panose="02020603050405020304" pitchFamily="18" charset="0"/>
+              </a:defRPr>
+            </a:lvl1pPr>
+            <a:lvl2pPr marL="457200" indent="0" algn="just" defTabSz="914400" rtl="0" eaLnBrk="1" latinLnBrk="0" hangingPunct="1">
+              <a:lnSpc>
+                <a:spcPct val="150000"/>
+              </a:lnSpc>
+              <a:spcBef>
+                <a:spcPts val="0"/>
+              </a:spcBef>
+              <a:buFont typeface="Arial" panose="020B0604020202020204" pitchFamily="34" charset="0"/>
+              <a:buNone/>
+              <a:defRPr sz="1600" kern="1200">
+                <a:solidFill>
+                  <a:schemeClr val="tx1"/>
+                </a:solidFill>
+                <a:latin typeface="Times New Roman" panose="02020603050405020304" pitchFamily="18" charset="0"/>
+                <a:ea typeface="+mn-ea"/>
+                <a:cs typeface="Times New Roman" panose="02020603050405020304" pitchFamily="18" charset="0"/>
+              </a:defRPr>
+            </a:lvl2pPr>
+            <a:lvl3pPr marL="914400" indent="0" algn="just" defTabSz="914400" rtl="0" eaLnBrk="1" latinLnBrk="0" hangingPunct="1">
+              <a:lnSpc>
+                <a:spcPct val="150000"/>
+              </a:lnSpc>
+              <a:spcBef>
+                <a:spcPts val="0"/>
+              </a:spcBef>
+              <a:buFont typeface="Arial" panose="020B0604020202020204" pitchFamily="34" charset="0"/>
+              <a:buNone/>
+              <a:defRPr sz="1400" kern="1200">
+                <a:solidFill>
+                  <a:schemeClr val="tx1"/>
+                </a:solidFill>
+                <a:latin typeface="Times New Roman" panose="02020603050405020304" pitchFamily="18" charset="0"/>
+                <a:ea typeface="+mn-ea"/>
+                <a:cs typeface="Times New Roman" panose="02020603050405020304" pitchFamily="18" charset="0"/>
+              </a:defRPr>
+            </a:lvl3pPr>
+            <a:lvl4pPr marL="1371600" indent="0" algn="just" defTabSz="914400" rtl="0" eaLnBrk="1" latinLnBrk="0" hangingPunct="1">
+              <a:lnSpc>
+                <a:spcPct val="150000"/>
+              </a:lnSpc>
+              <a:spcBef>
+                <a:spcPts val="0"/>
+              </a:spcBef>
+              <a:buFont typeface="Arial" panose="020B0604020202020204" pitchFamily="34" charset="0"/>
+              <a:buNone/>
+              <a:defRPr sz="1200" kern="1200">
+                <a:solidFill>
+                  <a:schemeClr val="tx1"/>
+                </a:solidFill>
+                <a:latin typeface="Times New Roman" panose="02020603050405020304" pitchFamily="18" charset="0"/>
+                <a:ea typeface="+mn-ea"/>
+                <a:cs typeface="Times New Roman" panose="02020603050405020304" pitchFamily="18" charset="0"/>
+              </a:defRPr>
+            </a:lvl4pPr>
+            <a:lvl5pPr marL="1828800" indent="0" algn="just" defTabSz="914400" rtl="0" eaLnBrk="1" latinLnBrk="0" hangingPunct="1">
+              <a:lnSpc>
+                <a:spcPct val="150000"/>
+              </a:lnSpc>
+              <a:spcBef>
+                <a:spcPts val="0"/>
+              </a:spcBef>
+              <a:buFont typeface="Arial" panose="020B0604020202020204" pitchFamily="34" charset="0"/>
+              <a:buNone/>
+              <a:defRPr sz="1000" kern="1200">
+                <a:solidFill>
+                  <a:schemeClr val="tx1"/>
+                </a:solidFill>
+                <a:latin typeface="Times New Roman" panose="02020603050405020304" pitchFamily="18" charset="0"/>
+                <a:ea typeface="+mn-ea"/>
+                <a:cs typeface="Times New Roman" panose="02020603050405020304" pitchFamily="18" charset="0"/>
+              </a:defRPr>
+            </a:lvl5pPr>
+            <a:lvl6pPr marL="2514600" indent="-228600" algn="l" defTabSz="914400" rtl="0" eaLnBrk="1" latinLnBrk="0" hangingPunct="1">
+              <a:lnSpc>
+                <a:spcPct val="90000"/>
+              </a:lnSpc>
+              <a:spcBef>
+                <a:spcPts val="500"/>
+              </a:spcBef>
+              <a:buFont typeface="Arial" panose="020B0604020202020204" pitchFamily="34" charset="0"/>
+              <a:buChar char="•"/>
+              <a:defRPr sz="1800" kern="1200">
+                <a:solidFill>
+                  <a:schemeClr val="tx1"/>
+                </a:solidFill>
+                <a:latin typeface="+mn-lt"/>
+                <a:ea typeface="+mn-ea"/>
+                <a:cs typeface="+mn-cs"/>
+              </a:defRPr>
+            </a:lvl6pPr>
+            <a:lvl7pPr marL="2971800" indent="-228600" algn="l" defTabSz="914400" rtl="0" eaLnBrk="1" latinLnBrk="0" hangingPunct="1">
+              <a:lnSpc>
+                <a:spcPct val="90000"/>
+              </a:lnSpc>
+              <a:spcBef>
+                <a:spcPts val="500"/>
+              </a:spcBef>
+              <a:buFont typeface="Arial" panose="020B0604020202020204" pitchFamily="34" charset="0"/>
+              <a:buChar char="•"/>
+              <a:defRPr sz="1800" kern="1200">
+                <a:solidFill>
+                  <a:schemeClr val="tx1"/>
+                </a:solidFill>
+                <a:latin typeface="+mn-lt"/>
+                <a:ea typeface="+mn-ea"/>
+                <a:cs typeface="+mn-cs"/>
+              </a:defRPr>
+            </a:lvl7pPr>
+            <a:lvl8pPr marL="3429000" indent="-228600" algn="l" defTabSz="914400" rtl="0" eaLnBrk="1" latinLnBrk="0" hangingPunct="1">
+              <a:lnSpc>
+                <a:spcPct val="90000"/>
+              </a:lnSpc>
+              <a:spcBef>
+                <a:spcPts val="500"/>
+              </a:spcBef>
+              <a:buFont typeface="Arial" panose="020B0604020202020204" pitchFamily="34" charset="0"/>
+              <a:buChar char="•"/>
+              <a:defRPr sz="1800" kern="1200">
+                <a:solidFill>
+                  <a:schemeClr val="tx1"/>
+                </a:solidFill>
+                <a:latin typeface="+mn-lt"/>
+                <a:ea typeface="+mn-ea"/>
+                <a:cs typeface="+mn-cs"/>
+              </a:defRPr>
+            </a:lvl8pPr>
+            <a:lvl9pPr marL="3886200" indent="-228600" algn="l" defTabSz="914400" rtl="0" eaLnBrk="1" latinLnBrk="0" hangingPunct="1">
+              <a:lnSpc>
+                <a:spcPct val="90000"/>
+              </a:lnSpc>
+              <a:spcBef>
+                <a:spcPts val="500"/>
+              </a:spcBef>
+              <a:buFont typeface="Arial" panose="020B0604020202020204" pitchFamily="34" charset="0"/>
+              <a:buChar char="•"/>
+              <a:defRPr sz="1800" kern="1200">
+                <a:solidFill>
+                  <a:schemeClr val="tx1"/>
+                </a:solidFill>
+                <a:latin typeface="+mn-lt"/>
+                <a:ea typeface="+mn-ea"/>
+                <a:cs typeface="+mn-cs"/>
+              </a:defRPr>
+            </a:lvl9pPr>
+          </a:lstStyle>
+          <a:p>
+            <a:r>
+              <a:rPr lang="pt-BR" sz="1600" b="1" dirty="0" err="1"/>
+              <a:t>LocalDateTime.now</a:t>
+            </a:r>
+            <a:r>
+              <a:rPr lang="pt-BR" sz="1600" b="1" dirty="0"/>
+              <a:t>() </a:t>
+            </a:r>
+            <a:r>
+              <a:rPr lang="pt-BR" sz="1600" dirty="0"/>
+              <a:t>— Obtém a data e a hora atuais do servidor, sem guardar o fuso horário.</a:t>
+            </a:r>
+          </a:p>
+          <a:p>
+            <a:r>
+              <a:rPr lang="pt-BR" sz="1600" b="1" dirty="0"/>
+              <a:t>.</a:t>
+            </a:r>
+            <a:r>
+              <a:rPr lang="pt-BR" sz="1600" b="1" dirty="0" err="1"/>
+              <a:t>plusHours</a:t>
+            </a:r>
+            <a:r>
+              <a:rPr lang="pt-BR" sz="1600" b="1" dirty="0"/>
+              <a:t>(2) </a:t>
+            </a:r>
+            <a:r>
+              <a:rPr lang="pt-BR" sz="1600" dirty="0"/>
+              <a:t>— Adiciona duas horas a esse horário.</a:t>
+            </a:r>
+          </a:p>
+          <a:p>
+            <a:r>
+              <a:rPr lang="pt-BR" sz="1600" b="1" dirty="0"/>
+              <a:t>.</a:t>
+            </a:r>
+            <a:r>
+              <a:rPr lang="pt-BR" sz="1600" b="1" dirty="0" err="1"/>
+              <a:t>ZoneOffset.of</a:t>
+            </a:r>
+            <a:r>
+              <a:rPr lang="pt-BR" sz="1600" b="1" dirty="0"/>
+              <a:t>("-03:00") </a:t>
+            </a:r>
+            <a:r>
+              <a:rPr lang="pt-BR" sz="1600" dirty="0"/>
+              <a:t>— Define o deslocamento de três horas atrás do UTC.</a:t>
+            </a:r>
+          </a:p>
+          <a:p>
+            <a:r>
+              <a:rPr lang="pt-BR" sz="1600" b="1" dirty="0"/>
+              <a:t>.</a:t>
+            </a:r>
+            <a:r>
+              <a:rPr lang="pt-BR" sz="1600" b="1" dirty="0" err="1"/>
+              <a:t>toInstant</a:t>
+            </a:r>
+            <a:r>
+              <a:rPr lang="pt-BR" sz="1600" b="1" dirty="0"/>
+              <a:t>(...) </a:t>
+            </a:r>
+            <a:r>
+              <a:rPr lang="pt-BR" sz="1600" dirty="0"/>
+              <a:t>— Converte a data e a hora em um instante UTC, considerando o deslocamento</a:t>
+            </a:r>
+          </a:p>
+        </p:txBody>
+      </p:sp>
+    </p:spTree>
+    <p:extLst>
+      <p:ext uri="{BB962C8B-B14F-4D97-AF65-F5344CB8AC3E}">
+        <p14:creationId xmlns:p14="http://schemas.microsoft.com/office/powerpoint/2010/main" val="1221550026"/>
+      </p:ext>
+    </p:extLst>
+  </p:cSld>
+  <p:clrMapOvr>
+    <a:masterClrMapping/>
+  </p:clrMapOvr>
+</p:sld>
+</file>
+
+<file path=ppt/slides/slide19.xml><?xml version="1.0" encoding="utf-8"?>
+<p:sld xmlns:a="http://schemas.openxmlformats.org/drawingml/2006/main" xmlns:r="http://schemas.openxmlformats.org/officeDocument/2006/relationships" xmlns:p="http://schemas.openxmlformats.org/presentationml/2006/main">
+  <p:cSld>
+    <p:spTree>
+      <p:nvGrpSpPr>
+        <p:cNvPr id="1" name="">
+          <a:extLst>
+            <a:ext uri="{FF2B5EF4-FFF2-40B4-BE49-F238E27FC236}">
+              <a16:creationId xmlns:a16="http://schemas.microsoft.com/office/drawing/2014/main" id="{325AFD3B-ED66-6B94-311D-32E12429BCA1}"/>
+            </a:ext>
+          </a:extLst>
+        </p:cNvPr>
+        <p:cNvGrpSpPr/>
+        <p:nvPr/>
+      </p:nvGrpSpPr>
+      <p:grpSpPr>
+        <a:xfrm>
+          <a:off x="0" y="0"/>
+          <a:ext cx="0" cy="0"/>
+          <a:chOff x="0" y="0"/>
+          <a:chExt cx="0" cy="0"/>
+        </a:xfrm>
+      </p:grpSpPr>
+      <p:sp>
+        <p:nvSpPr>
+          <p:cNvPr id="2" name="Título 1">
+            <a:extLst>
+              <a:ext uri="{FF2B5EF4-FFF2-40B4-BE49-F238E27FC236}">
+                <a16:creationId xmlns:a16="http://schemas.microsoft.com/office/drawing/2014/main" id="{D3F38EBC-B715-E031-137F-A5D22F76B1EF}"/>
+              </a:ext>
+            </a:extLst>
+          </p:cNvPr>
+          <p:cNvSpPr>
+            <a:spLocks noGrp="1"/>
+          </p:cNvSpPr>
+          <p:nvPr>
+            <p:ph type="title"/>
+          </p:nvPr>
+        </p:nvSpPr>
+        <p:spPr/>
+        <p:txBody>
+          <a:bodyPr/>
+          <a:lstStyle/>
+          <a:p>
+            <a:r>
+              <a:rPr lang="pt-BR" dirty="0"/>
+              <a:t>Definindo o prazo de validade do token JWT</a:t>
+            </a:r>
+            <a:br>
+              <a:rPr lang="pt-BR" dirty="0"/>
+            </a:br>
+            <a:endParaRPr lang="pt-BR" dirty="0"/>
+          </a:p>
+        </p:txBody>
+      </p:sp>
+      <p:sp>
+        <p:nvSpPr>
+          <p:cNvPr id="3" name="Espaço Reservado para Conteúdo 2">
+            <a:extLst>
+              <a:ext uri="{FF2B5EF4-FFF2-40B4-BE49-F238E27FC236}">
+                <a16:creationId xmlns:a16="http://schemas.microsoft.com/office/drawing/2014/main" id="{B125CBB8-BD99-3B03-8223-96AA95B97EF1}"/>
+              </a:ext>
+            </a:extLst>
+          </p:cNvPr>
+          <p:cNvSpPr>
+            <a:spLocks noGrp="1"/>
+          </p:cNvSpPr>
+          <p:nvPr>
+            <p:ph idx="1"/>
+          </p:nvPr>
+        </p:nvSpPr>
+        <p:spPr>
+          <a:xfrm>
+            <a:off x="592347" y="1844676"/>
+            <a:ext cx="11007306" cy="850900"/>
+          </a:xfrm>
+        </p:spPr>
+        <p:txBody>
+          <a:bodyPr/>
+          <a:lstStyle/>
+          <a:p>
+            <a:r>
+              <a:rPr lang="pt-BR" sz="1600" dirty="0"/>
+              <a:t>O </a:t>
+            </a:r>
+            <a:r>
+              <a:rPr lang="pt-BR" sz="1600" b="1" dirty="0"/>
+              <a:t>Instant</a:t>
+            </a:r>
+            <a:r>
+              <a:rPr lang="pt-BR" sz="1600" dirty="0"/>
+              <a:t> representa um momento exato na linha do tempo, com data e hora, com referência em UTC. Nesse método, ele indica quando o token vai expirar.</a:t>
+            </a:r>
+          </a:p>
+        </p:txBody>
+      </p:sp>
+      <p:sp>
+        <p:nvSpPr>
+          <p:cNvPr id="4" name="Shape 20">
+            <a:extLst>
+              <a:ext uri="{FF2B5EF4-FFF2-40B4-BE49-F238E27FC236}">
+                <a16:creationId xmlns:a16="http://schemas.microsoft.com/office/drawing/2014/main" id="{28FBDC35-6754-8147-78FD-E9E9AE1D7026}"/>
+              </a:ext>
+            </a:extLst>
+          </p:cNvPr>
+          <p:cNvSpPr>
+            <a:spLocks noGrp="1"/>
+          </p:cNvSpPr>
+          <p:nvPr/>
+        </p:nvSpPr>
+        <p:spPr>
+          <a:xfrm>
+            <a:off x="670766" y="3219152"/>
+            <a:ext cx="10850468" cy="1439084"/>
+          </a:xfrm>
+          <a:prstGeom prst="roundRect">
+            <a:avLst>
+              <a:gd name="adj" fmla="val 8081"/>
+            </a:avLst>
+          </a:prstGeom>
+          <a:solidFill>
+            <a:srgbClr val="1E1E1E"/>
+          </a:solidFill>
+          <a:ln>
+            <a:solidFill>
+              <a:srgbClr val="1E1E1E"/>
+            </a:solidFill>
+          </a:ln>
+        </p:spPr>
+        <p:txBody>
+          <a:bodyPr/>
+          <a:lstStyle/>
+          <a:p>
+            <a:endParaRPr/>
+          </a:p>
+        </p:txBody>
+      </p:sp>
+      <p:sp>
+        <p:nvSpPr>
+          <p:cNvPr id="5" name="Retângulo 4">
+            <a:extLst>
+              <a:ext uri="{FF2B5EF4-FFF2-40B4-BE49-F238E27FC236}">
+                <a16:creationId xmlns:a16="http://schemas.microsoft.com/office/drawing/2014/main" id="{58F805B7-DA1B-AA5F-39BC-907A71376424}"/>
+              </a:ext>
+            </a:extLst>
+          </p:cNvPr>
+          <p:cNvSpPr>
+            <a:spLocks noGrp="1"/>
+          </p:cNvSpPr>
+          <p:nvPr/>
+        </p:nvSpPr>
+        <p:spPr>
+          <a:xfrm>
+            <a:off x="1169509" y="3468240"/>
+            <a:ext cx="9852983" cy="940909"/>
+          </a:xfrm>
+          <a:prstGeom prst="rect">
+            <a:avLst/>
+          </a:prstGeom>
+        </p:spPr>
+        <p:txBody>
+          <a:bodyPr wrap="square">
+            <a:noAutofit/>
+          </a:bodyPr>
+          <a:lstStyle/>
+          <a:p>
+            <a:pPr algn="l">
+              <a:defRPr sz="2400">
+                <a:solidFill>
+                  <a:srgbClr val="D4D4D4"/>
+                </a:solidFill>
+                <a:latin typeface="Consolas"/>
+                <a:ea typeface="Consolas"/>
+                <a:cs typeface="Consolas"/>
+              </a:defRPr>
+            </a:pPr>
+            <a:r>
+              <a:rPr lang="pt-BR" sz="1600" dirty="0" err="1">
+                <a:solidFill>
+                  <a:srgbClr val="B07857"/>
+                </a:solidFill>
+                <a:latin typeface="Consolas"/>
+                <a:ea typeface="Consolas"/>
+                <a:cs typeface="Consolas"/>
+              </a:rPr>
+              <a:t>private</a:t>
+            </a:r>
+            <a:r>
+              <a:rPr lang="pt-BR" sz="1600" dirty="0">
+                <a:solidFill>
+                  <a:srgbClr val="D4D4D4"/>
+                </a:solidFill>
+                <a:latin typeface="Consolas"/>
+                <a:ea typeface="Consolas"/>
+                <a:cs typeface="Consolas"/>
+              </a:rPr>
+              <a:t> Instant </a:t>
+            </a:r>
+            <a:r>
+              <a:rPr lang="pt-BR" sz="1600" dirty="0" err="1">
+                <a:solidFill>
+                  <a:srgbClr val="4D97DA"/>
+                </a:solidFill>
+                <a:latin typeface="Consolas"/>
+                <a:ea typeface="Consolas"/>
+                <a:cs typeface="Consolas"/>
+              </a:rPr>
+              <a:t>dataExpiracao</a:t>
+            </a:r>
+            <a:r>
+              <a:rPr lang="pt-BR" sz="1600" dirty="0">
+                <a:solidFill>
+                  <a:srgbClr val="D4D4D4"/>
+                </a:solidFill>
+                <a:latin typeface="Consolas"/>
+                <a:ea typeface="Consolas"/>
+                <a:cs typeface="Consolas"/>
+              </a:rPr>
+              <a:t>() {</a:t>
+            </a:r>
+          </a:p>
+          <a:p>
+            <a:pPr algn="l">
+              <a:defRPr sz="2400">
+                <a:solidFill>
+                  <a:srgbClr val="D4D4D4"/>
+                </a:solidFill>
+                <a:latin typeface="Consolas"/>
+                <a:ea typeface="Consolas"/>
+                <a:cs typeface="Consolas"/>
+              </a:defRPr>
+            </a:pPr>
+            <a:r>
+              <a:rPr lang="pt-BR" sz="1600" dirty="0">
+                <a:solidFill>
+                  <a:srgbClr val="D4D4D4"/>
+                </a:solidFill>
+                <a:latin typeface="Consolas"/>
+                <a:ea typeface="Consolas"/>
+                <a:cs typeface="Consolas"/>
+              </a:rPr>
+              <a:t>        </a:t>
+            </a:r>
+            <a:r>
+              <a:rPr lang="pt-BR" sz="1600" dirty="0" err="1">
+                <a:solidFill>
+                  <a:srgbClr val="B07857"/>
+                </a:solidFill>
+                <a:latin typeface="Consolas"/>
+              </a:rPr>
+              <a:t>return</a:t>
+            </a:r>
+            <a:r>
+              <a:rPr lang="pt-BR" sz="1600" dirty="0">
+                <a:solidFill>
+                  <a:srgbClr val="D4D4D4"/>
+                </a:solidFill>
+                <a:latin typeface="Consolas"/>
+                <a:ea typeface="Consolas"/>
+                <a:cs typeface="Consolas"/>
+              </a:rPr>
+              <a:t> </a:t>
+            </a:r>
+            <a:r>
+              <a:rPr lang="pt-BR" sz="1600" dirty="0" err="1">
+                <a:solidFill>
+                  <a:srgbClr val="D4D4D4"/>
+                </a:solidFill>
+                <a:latin typeface="Consolas"/>
+                <a:ea typeface="Consolas"/>
+                <a:cs typeface="Consolas"/>
+              </a:rPr>
+              <a:t>Instant.now</a:t>
+            </a:r>
+            <a:r>
+              <a:rPr lang="pt-BR" sz="1600" dirty="0">
+                <a:solidFill>
+                  <a:srgbClr val="D4D4D4"/>
+                </a:solidFill>
+                <a:latin typeface="Consolas"/>
+                <a:ea typeface="Consolas"/>
+                <a:cs typeface="Consolas"/>
+              </a:rPr>
+              <a:t>().</a:t>
+            </a:r>
+            <a:r>
+              <a:rPr lang="pt-BR" sz="1600" dirty="0" err="1">
+                <a:solidFill>
+                  <a:srgbClr val="D4D4D4"/>
+                </a:solidFill>
+                <a:latin typeface="Consolas"/>
+                <a:ea typeface="Consolas"/>
+                <a:cs typeface="Consolas"/>
+              </a:rPr>
+              <a:t>plusSeconds</a:t>
+            </a:r>
+            <a:r>
+              <a:rPr lang="pt-BR" sz="1600" dirty="0">
+                <a:solidFill>
+                  <a:srgbClr val="D4D4D4"/>
+                </a:solidFill>
+                <a:latin typeface="Consolas"/>
+                <a:ea typeface="Consolas"/>
+                <a:cs typeface="Consolas"/>
+              </a:rPr>
+              <a:t>(7200);</a:t>
+            </a:r>
+          </a:p>
+          <a:p>
+            <a:pPr algn="l">
+              <a:defRPr sz="2400">
+                <a:solidFill>
+                  <a:srgbClr val="D4D4D4"/>
+                </a:solidFill>
+                <a:latin typeface="Consolas"/>
+                <a:ea typeface="Consolas"/>
+                <a:cs typeface="Consolas"/>
+              </a:defRPr>
+            </a:pPr>
+            <a:r>
+              <a:rPr lang="pt-BR" sz="1600" dirty="0">
+                <a:solidFill>
+                  <a:srgbClr val="D4D4D4"/>
+                </a:solidFill>
+                <a:latin typeface="Consolas"/>
+                <a:ea typeface="Consolas"/>
+                <a:cs typeface="Consolas"/>
+              </a:rPr>
+              <a:t>}</a:t>
+            </a:r>
+            <a:endParaRPr sz="1600" dirty="0">
+              <a:solidFill>
+                <a:srgbClr val="D4D4D4"/>
+              </a:solidFill>
+              <a:latin typeface="Consolas"/>
+              <a:ea typeface="Consolas"/>
+              <a:cs typeface="Consolas"/>
+            </a:endParaRPr>
+          </a:p>
+        </p:txBody>
+      </p:sp>
+      <p:sp>
+        <p:nvSpPr>
+          <p:cNvPr id="8" name="Espaço Reservado para Conteúdo 2">
+            <a:extLst>
+              <a:ext uri="{FF2B5EF4-FFF2-40B4-BE49-F238E27FC236}">
+                <a16:creationId xmlns:a16="http://schemas.microsoft.com/office/drawing/2014/main" id="{A8CFB04C-D926-CAAE-DAC2-331011ED45F0}"/>
+              </a:ext>
+            </a:extLst>
+          </p:cNvPr>
+          <p:cNvSpPr txBox="1">
+            <a:spLocks/>
+          </p:cNvSpPr>
+          <p:nvPr/>
+        </p:nvSpPr>
+        <p:spPr>
+          <a:xfrm>
+            <a:off x="592347" y="5181812"/>
+            <a:ext cx="11007306" cy="986136"/>
+          </a:xfrm>
+          <a:prstGeom prst="rect">
+            <a:avLst/>
+          </a:prstGeom>
+        </p:spPr>
+        <p:txBody>
+          <a:bodyPr/>
+          <a:lstStyle>
+            <a:lvl1pPr marL="0" indent="0" algn="just" defTabSz="914400" rtl="0" eaLnBrk="1" latinLnBrk="0" hangingPunct="1">
+              <a:lnSpc>
+                <a:spcPct val="150000"/>
+              </a:lnSpc>
+              <a:spcBef>
+                <a:spcPts val="0"/>
+              </a:spcBef>
+              <a:buFont typeface="Arial" panose="020B0604020202020204" pitchFamily="34" charset="0"/>
+              <a:buNone/>
+              <a:defRPr sz="2000" kern="1200">
+                <a:solidFill>
+                  <a:schemeClr val="tx1"/>
+                </a:solidFill>
+                <a:latin typeface="Times New Roman" panose="02020603050405020304" pitchFamily="18" charset="0"/>
+                <a:ea typeface="+mn-ea"/>
+                <a:cs typeface="Times New Roman" panose="02020603050405020304" pitchFamily="18" charset="0"/>
+              </a:defRPr>
+            </a:lvl1pPr>
+            <a:lvl2pPr marL="457200" indent="0" algn="just" defTabSz="914400" rtl="0" eaLnBrk="1" latinLnBrk="0" hangingPunct="1">
+              <a:lnSpc>
+                <a:spcPct val="150000"/>
+              </a:lnSpc>
+              <a:spcBef>
+                <a:spcPts val="0"/>
+              </a:spcBef>
+              <a:buFont typeface="Arial" panose="020B0604020202020204" pitchFamily="34" charset="0"/>
+              <a:buNone/>
+              <a:defRPr sz="1600" kern="1200">
+                <a:solidFill>
+                  <a:schemeClr val="tx1"/>
+                </a:solidFill>
+                <a:latin typeface="Times New Roman" panose="02020603050405020304" pitchFamily="18" charset="0"/>
+                <a:ea typeface="+mn-ea"/>
+                <a:cs typeface="Times New Roman" panose="02020603050405020304" pitchFamily="18" charset="0"/>
+              </a:defRPr>
+            </a:lvl2pPr>
+            <a:lvl3pPr marL="914400" indent="0" algn="just" defTabSz="914400" rtl="0" eaLnBrk="1" latinLnBrk="0" hangingPunct="1">
+              <a:lnSpc>
+                <a:spcPct val="150000"/>
+              </a:lnSpc>
+              <a:spcBef>
+                <a:spcPts val="0"/>
+              </a:spcBef>
+              <a:buFont typeface="Arial" panose="020B0604020202020204" pitchFamily="34" charset="0"/>
+              <a:buNone/>
+              <a:defRPr sz="1400" kern="1200">
+                <a:solidFill>
+                  <a:schemeClr val="tx1"/>
+                </a:solidFill>
+                <a:latin typeface="Times New Roman" panose="02020603050405020304" pitchFamily="18" charset="0"/>
+                <a:ea typeface="+mn-ea"/>
+                <a:cs typeface="Times New Roman" panose="02020603050405020304" pitchFamily="18" charset="0"/>
+              </a:defRPr>
+            </a:lvl3pPr>
+            <a:lvl4pPr marL="1371600" indent="0" algn="just" defTabSz="914400" rtl="0" eaLnBrk="1" latinLnBrk="0" hangingPunct="1">
+              <a:lnSpc>
+                <a:spcPct val="150000"/>
+              </a:lnSpc>
+              <a:spcBef>
+                <a:spcPts val="0"/>
+              </a:spcBef>
+              <a:buFont typeface="Arial" panose="020B0604020202020204" pitchFamily="34" charset="0"/>
+              <a:buNone/>
+              <a:defRPr sz="1200" kern="1200">
+                <a:solidFill>
+                  <a:schemeClr val="tx1"/>
+                </a:solidFill>
+                <a:latin typeface="Times New Roman" panose="02020603050405020304" pitchFamily="18" charset="0"/>
+                <a:ea typeface="+mn-ea"/>
+                <a:cs typeface="Times New Roman" panose="02020603050405020304" pitchFamily="18" charset="0"/>
+              </a:defRPr>
+            </a:lvl4pPr>
+            <a:lvl5pPr marL="1828800" indent="0" algn="just" defTabSz="914400" rtl="0" eaLnBrk="1" latinLnBrk="0" hangingPunct="1">
+              <a:lnSpc>
+                <a:spcPct val="150000"/>
+              </a:lnSpc>
+              <a:spcBef>
+                <a:spcPts val="0"/>
+              </a:spcBef>
+              <a:buFont typeface="Arial" panose="020B0604020202020204" pitchFamily="34" charset="0"/>
+              <a:buNone/>
+              <a:defRPr sz="1000" kern="1200">
+                <a:solidFill>
+                  <a:schemeClr val="tx1"/>
+                </a:solidFill>
+                <a:latin typeface="Times New Roman" panose="02020603050405020304" pitchFamily="18" charset="0"/>
+                <a:ea typeface="+mn-ea"/>
+                <a:cs typeface="Times New Roman" panose="02020603050405020304" pitchFamily="18" charset="0"/>
+              </a:defRPr>
+            </a:lvl5pPr>
+            <a:lvl6pPr marL="2514600" indent="-228600" algn="l" defTabSz="914400" rtl="0" eaLnBrk="1" latinLnBrk="0" hangingPunct="1">
+              <a:lnSpc>
+                <a:spcPct val="90000"/>
+              </a:lnSpc>
+              <a:spcBef>
+                <a:spcPts val="500"/>
+              </a:spcBef>
+              <a:buFont typeface="Arial" panose="020B0604020202020204" pitchFamily="34" charset="0"/>
+              <a:buChar char="•"/>
+              <a:defRPr sz="1800" kern="1200">
+                <a:solidFill>
+                  <a:schemeClr val="tx1"/>
+                </a:solidFill>
+                <a:latin typeface="+mn-lt"/>
+                <a:ea typeface="+mn-ea"/>
+                <a:cs typeface="+mn-cs"/>
+              </a:defRPr>
+            </a:lvl6pPr>
+            <a:lvl7pPr marL="2971800" indent="-228600" algn="l" defTabSz="914400" rtl="0" eaLnBrk="1" latinLnBrk="0" hangingPunct="1">
+              <a:lnSpc>
+                <a:spcPct val="90000"/>
+              </a:lnSpc>
+              <a:spcBef>
+                <a:spcPts val="500"/>
+              </a:spcBef>
+              <a:buFont typeface="Arial" panose="020B0604020202020204" pitchFamily="34" charset="0"/>
+              <a:buChar char="•"/>
+              <a:defRPr sz="1800" kern="1200">
+                <a:solidFill>
+                  <a:schemeClr val="tx1"/>
+                </a:solidFill>
+                <a:latin typeface="+mn-lt"/>
+                <a:ea typeface="+mn-ea"/>
+                <a:cs typeface="+mn-cs"/>
+              </a:defRPr>
+            </a:lvl7pPr>
+            <a:lvl8pPr marL="3429000" indent="-228600" algn="l" defTabSz="914400" rtl="0" eaLnBrk="1" latinLnBrk="0" hangingPunct="1">
+              <a:lnSpc>
+                <a:spcPct val="90000"/>
+              </a:lnSpc>
+              <a:spcBef>
+                <a:spcPts val="500"/>
+              </a:spcBef>
+              <a:buFont typeface="Arial" panose="020B0604020202020204" pitchFamily="34" charset="0"/>
+              <a:buChar char="•"/>
+              <a:defRPr sz="1800" kern="1200">
+                <a:solidFill>
+                  <a:schemeClr val="tx1"/>
+                </a:solidFill>
+                <a:latin typeface="+mn-lt"/>
+                <a:ea typeface="+mn-ea"/>
+                <a:cs typeface="+mn-cs"/>
+              </a:defRPr>
+            </a:lvl8pPr>
+            <a:lvl9pPr marL="3886200" indent="-228600" algn="l" defTabSz="914400" rtl="0" eaLnBrk="1" latinLnBrk="0" hangingPunct="1">
+              <a:lnSpc>
+                <a:spcPct val="90000"/>
+              </a:lnSpc>
+              <a:spcBef>
+                <a:spcPts val="500"/>
+              </a:spcBef>
+              <a:buFont typeface="Arial" panose="020B0604020202020204" pitchFamily="34" charset="0"/>
+              <a:buChar char="•"/>
+              <a:defRPr sz="1800" kern="1200">
+                <a:solidFill>
+                  <a:schemeClr val="tx1"/>
+                </a:solidFill>
+                <a:latin typeface="+mn-lt"/>
+                <a:ea typeface="+mn-ea"/>
+                <a:cs typeface="+mn-cs"/>
+              </a:defRPr>
+            </a:lvl9pPr>
+          </a:lstStyle>
+          <a:p>
+            <a:r>
+              <a:rPr lang="pt-BR" sz="1600" b="1" dirty="0" err="1"/>
+              <a:t>Instant.now</a:t>
+            </a:r>
+            <a:r>
+              <a:rPr lang="pt-BR" sz="1600" b="1" dirty="0"/>
+              <a:t>() — </a:t>
+            </a:r>
+            <a:r>
+              <a:rPr lang="pt-BR" sz="1600" dirty="0"/>
+              <a:t>Obtém o momento atual, com referência em UTC.</a:t>
+            </a:r>
+          </a:p>
+          <a:p>
+            <a:r>
+              <a:rPr lang="pt-BR" sz="1600" b="1" dirty="0"/>
+              <a:t>.</a:t>
+            </a:r>
+            <a:r>
+              <a:rPr lang="pt-BR" sz="1600" b="1" dirty="0" err="1"/>
+              <a:t>plusSeconds</a:t>
+            </a:r>
+            <a:r>
+              <a:rPr lang="pt-BR" sz="1600" b="1" dirty="0"/>
+              <a:t>(7200) — </a:t>
+            </a:r>
+            <a:r>
+              <a:rPr lang="pt-BR" sz="1600" dirty="0"/>
+              <a:t>Retorna um novo instante com 7.200 segundos (2 horas) adicionados.</a:t>
+            </a:r>
+          </a:p>
+        </p:txBody>
+      </p:sp>
+    </p:spTree>
+    <p:extLst>
+      <p:ext uri="{BB962C8B-B14F-4D97-AF65-F5344CB8AC3E}">
+        <p14:creationId xmlns:p14="http://schemas.microsoft.com/office/powerpoint/2010/main" val="885890085"/>
       </p:ext>
     </p:extLst>
   </p:cSld>
@@ -7806,6 +8610,372 @@
     <p:extLst>
       <p:ext uri="{BB962C8B-B14F-4D97-AF65-F5344CB8AC3E}">
         <p14:creationId xmlns:p14="http://schemas.microsoft.com/office/powerpoint/2010/main" val="3891646628"/>
+      </p:ext>
+    </p:extLst>
+  </p:cSld>
+  <p:clrMapOvr>
+    <a:masterClrMapping/>
+  </p:clrMapOvr>
+</p:sld>
+</file>
+
+<file path=ppt/slides/slide20.xml><?xml version="1.0" encoding="utf-8"?>
+<p:sld xmlns:a="http://schemas.openxmlformats.org/drawingml/2006/main" xmlns:r="http://schemas.openxmlformats.org/officeDocument/2006/relationships" xmlns:p="http://schemas.openxmlformats.org/presentationml/2006/main">
+  <p:cSld>
+    <p:spTree>
+      <p:nvGrpSpPr>
+        <p:cNvPr id="1" name=""/>
+        <p:cNvGrpSpPr/>
+        <p:nvPr/>
+      </p:nvGrpSpPr>
+      <p:grpSpPr>
+        <a:xfrm>
+          <a:off x="0" y="0"/>
+          <a:ext cx="0" cy="0"/>
+          <a:chOff x="0" y="0"/>
+          <a:chExt cx="0" cy="0"/>
+        </a:xfrm>
+      </p:grpSpPr>
+      <p:sp>
+        <p:nvSpPr>
+          <p:cNvPr id="2" name="Título 1">
+            <a:extLst>
+              <a:ext uri="{FF2B5EF4-FFF2-40B4-BE49-F238E27FC236}">
+                <a16:creationId xmlns:a16="http://schemas.microsoft.com/office/drawing/2014/main" id="{2D6B7E92-BBA3-7E8C-4ACC-78BD04FA0D67}"/>
+              </a:ext>
+            </a:extLst>
+          </p:cNvPr>
+          <p:cNvSpPr>
+            <a:spLocks noGrp="1"/>
+          </p:cNvSpPr>
+          <p:nvPr>
+            <p:ph type="title"/>
+          </p:nvPr>
+        </p:nvSpPr>
+        <p:spPr/>
+        <p:txBody>
+          <a:bodyPr/>
+          <a:lstStyle/>
+          <a:p>
+            <a:r>
+              <a:rPr lang="pt-BR" dirty="0"/>
+              <a:t>Recuperando o usuário autenticado para gerar o JWT</a:t>
+            </a:r>
+          </a:p>
+        </p:txBody>
+      </p:sp>
+      <p:sp>
+        <p:nvSpPr>
+          <p:cNvPr id="3" name="Espaço Reservado para Conteúdo 2">
+            <a:extLst>
+              <a:ext uri="{FF2B5EF4-FFF2-40B4-BE49-F238E27FC236}">
+                <a16:creationId xmlns:a16="http://schemas.microsoft.com/office/drawing/2014/main" id="{A0877F17-7921-4D37-B6EB-F1A2E4E71BAF}"/>
+              </a:ext>
+            </a:extLst>
+          </p:cNvPr>
+          <p:cNvSpPr>
+            <a:spLocks noGrp="1"/>
+          </p:cNvSpPr>
+          <p:nvPr>
+            <p:ph idx="1"/>
+          </p:nvPr>
+        </p:nvSpPr>
+        <p:spPr>
+          <a:xfrm>
+            <a:off x="592347" y="1844675"/>
+            <a:ext cx="11007306" cy="1584325"/>
+          </a:xfrm>
+        </p:spPr>
+        <p:txBody>
+          <a:bodyPr/>
+          <a:lstStyle/>
+          <a:p>
+            <a:r>
+              <a:rPr lang="pt-BR" dirty="0"/>
+              <a:t>O método </a:t>
+            </a:r>
+            <a:r>
+              <a:rPr lang="pt-BR" b="1" dirty="0" err="1"/>
+              <a:t>authenticate</a:t>
+            </a:r>
+            <a:r>
+              <a:rPr lang="pt-BR" b="1" dirty="0"/>
+              <a:t>()</a:t>
+            </a:r>
+            <a:r>
+              <a:rPr lang="pt-BR" dirty="0"/>
+              <a:t> retorna o resultado da autenticação. Para gerar o JWT, usamos </a:t>
+            </a:r>
+            <a:r>
+              <a:rPr lang="pt-BR" b="1" dirty="0" err="1"/>
+              <a:t>getPrincipal</a:t>
+            </a:r>
+            <a:r>
+              <a:rPr lang="pt-BR" b="1" dirty="0"/>
+              <a:t>()</a:t>
+            </a:r>
+            <a:r>
+              <a:rPr lang="pt-BR" dirty="0"/>
+              <a:t> para recuperar o usuário autenticado e fazemos o </a:t>
+            </a:r>
+            <a:r>
+              <a:rPr lang="pt-BR" b="1" dirty="0" err="1"/>
+              <a:t>cast</a:t>
+            </a:r>
+            <a:r>
+              <a:rPr lang="pt-BR" b="1" dirty="0"/>
+              <a:t> para </a:t>
+            </a:r>
+            <a:r>
+              <a:rPr lang="pt-BR" b="1" dirty="0" err="1"/>
+              <a:t>Usuario</a:t>
+            </a:r>
+            <a:r>
+              <a:rPr lang="pt-BR" dirty="0"/>
+              <a:t>, tipo esperado pelo método </a:t>
+            </a:r>
+            <a:r>
+              <a:rPr lang="pt-BR" b="1" dirty="0" err="1"/>
+              <a:t>gerarToken</a:t>
+            </a:r>
+            <a:r>
+              <a:rPr lang="pt-BR" b="1" dirty="0"/>
+              <a:t>()</a:t>
+            </a:r>
+            <a:r>
+              <a:rPr lang="pt-BR" dirty="0"/>
+              <a:t>.</a:t>
+            </a:r>
+          </a:p>
+        </p:txBody>
+      </p:sp>
+      <p:sp>
+        <p:nvSpPr>
+          <p:cNvPr id="4" name="Shape 20">
+            <a:extLst>
+              <a:ext uri="{FF2B5EF4-FFF2-40B4-BE49-F238E27FC236}">
+                <a16:creationId xmlns:a16="http://schemas.microsoft.com/office/drawing/2014/main" id="{8D268882-3BE3-3D6E-5088-1DCF5F2678C9}"/>
+              </a:ext>
+            </a:extLst>
+          </p:cNvPr>
+          <p:cNvSpPr>
+            <a:spLocks noGrp="1"/>
+          </p:cNvSpPr>
+          <p:nvPr/>
+        </p:nvSpPr>
+        <p:spPr>
+          <a:xfrm>
+            <a:off x="749185" y="3537294"/>
+            <a:ext cx="10850468" cy="866775"/>
+          </a:xfrm>
+          <a:prstGeom prst="roundRect">
+            <a:avLst>
+              <a:gd name="adj" fmla="val 8081"/>
+            </a:avLst>
+          </a:prstGeom>
+          <a:solidFill>
+            <a:srgbClr val="1E1E1E"/>
+          </a:solidFill>
+          <a:ln>
+            <a:solidFill>
+              <a:srgbClr val="1E1E1E"/>
+            </a:solidFill>
+          </a:ln>
+        </p:spPr>
+        <p:txBody>
+          <a:bodyPr/>
+          <a:lstStyle/>
+          <a:p>
+            <a:endParaRPr dirty="0"/>
+          </a:p>
+        </p:txBody>
+      </p:sp>
+      <p:sp>
+        <p:nvSpPr>
+          <p:cNvPr id="5" name="Retângulo 4">
+            <a:extLst>
+              <a:ext uri="{FF2B5EF4-FFF2-40B4-BE49-F238E27FC236}">
+                <a16:creationId xmlns:a16="http://schemas.microsoft.com/office/drawing/2014/main" id="{881DA0D7-03F3-8047-D4EB-E71CB186A515}"/>
+              </a:ext>
+            </a:extLst>
+          </p:cNvPr>
+          <p:cNvSpPr>
+            <a:spLocks noGrp="1"/>
+          </p:cNvSpPr>
+          <p:nvPr/>
+        </p:nvSpPr>
+        <p:spPr>
+          <a:xfrm>
+            <a:off x="1247928" y="3738037"/>
+            <a:ext cx="9852983" cy="465288"/>
+          </a:xfrm>
+          <a:prstGeom prst="rect">
+            <a:avLst/>
+          </a:prstGeom>
+        </p:spPr>
+        <p:txBody>
+          <a:bodyPr wrap="square">
+            <a:noAutofit/>
+          </a:bodyPr>
+          <a:lstStyle/>
+          <a:p>
+            <a:pPr algn="l">
+              <a:defRPr sz="2400">
+                <a:solidFill>
+                  <a:srgbClr val="D4D4D4"/>
+                </a:solidFill>
+                <a:latin typeface="Consolas"/>
+                <a:ea typeface="Consolas"/>
+                <a:cs typeface="Consolas"/>
+              </a:defRPr>
+            </a:pPr>
+            <a:r>
+              <a:rPr lang="pt-BR" sz="1600" dirty="0">
+                <a:solidFill>
+                  <a:schemeClr val="bg1"/>
+                </a:solidFill>
+                <a:latin typeface="Consolas"/>
+                <a:ea typeface="Consolas"/>
+                <a:cs typeface="Consolas"/>
+              </a:rPr>
+              <a:t> </a:t>
+            </a:r>
+            <a:r>
+              <a:rPr lang="pt-BR" sz="1600" dirty="0">
+                <a:solidFill>
+                  <a:srgbClr val="B87958"/>
+                </a:solidFill>
+                <a:latin typeface="Consolas"/>
+                <a:ea typeface="Consolas"/>
+                <a:cs typeface="Consolas"/>
+              </a:rPr>
+              <a:t>var</a:t>
+            </a:r>
+            <a:r>
+              <a:rPr lang="pt-BR" sz="1600" dirty="0">
+                <a:solidFill>
+                  <a:schemeClr val="bg1"/>
+                </a:solidFill>
+                <a:latin typeface="Consolas"/>
+                <a:ea typeface="Consolas"/>
+                <a:cs typeface="Consolas"/>
+              </a:rPr>
+              <a:t> </a:t>
+            </a:r>
+            <a:r>
+              <a:rPr lang="pt-BR" sz="1600" dirty="0" err="1">
+                <a:solidFill>
+                  <a:schemeClr val="bg1"/>
+                </a:solidFill>
+                <a:latin typeface="Consolas"/>
+                <a:ea typeface="Consolas"/>
+                <a:cs typeface="Consolas"/>
+              </a:rPr>
+              <a:t>tokenJWT</a:t>
+            </a:r>
+            <a:r>
+              <a:rPr lang="pt-BR" sz="1600" dirty="0">
+                <a:solidFill>
+                  <a:schemeClr val="bg1"/>
+                </a:solidFill>
+                <a:latin typeface="Consolas"/>
+                <a:ea typeface="Consolas"/>
+                <a:cs typeface="Consolas"/>
+              </a:rPr>
+              <a:t> = </a:t>
+            </a:r>
+            <a:r>
+              <a:rPr lang="pt-BR" sz="1600" dirty="0" err="1">
+                <a:solidFill>
+                  <a:srgbClr val="C77DB9"/>
+                </a:solidFill>
+                <a:latin typeface="Consolas"/>
+                <a:ea typeface="Consolas"/>
+                <a:cs typeface="Consolas"/>
+              </a:rPr>
+              <a:t>tokenService</a:t>
+            </a:r>
+            <a:r>
+              <a:rPr lang="pt-BR" sz="1600" dirty="0" err="1">
+                <a:solidFill>
+                  <a:schemeClr val="bg1"/>
+                </a:solidFill>
+                <a:latin typeface="Consolas"/>
+                <a:ea typeface="Consolas"/>
+                <a:cs typeface="Consolas"/>
+              </a:rPr>
+              <a:t>.gerarToken</a:t>
+            </a:r>
+            <a:r>
+              <a:rPr lang="pt-BR" sz="1600" dirty="0">
+                <a:solidFill>
+                  <a:schemeClr val="bg1"/>
+                </a:solidFill>
+                <a:latin typeface="Consolas"/>
+                <a:ea typeface="Consolas"/>
+                <a:cs typeface="Consolas"/>
+              </a:rPr>
+              <a:t>((</a:t>
+            </a:r>
+            <a:r>
+              <a:rPr lang="pt-BR" sz="1600" dirty="0" err="1">
+                <a:solidFill>
+                  <a:schemeClr val="bg1"/>
+                </a:solidFill>
+                <a:latin typeface="Consolas"/>
+                <a:ea typeface="Consolas"/>
+                <a:cs typeface="Consolas"/>
+              </a:rPr>
+              <a:t>Usuario</a:t>
+            </a:r>
+            <a:r>
+              <a:rPr lang="pt-BR" sz="1600" dirty="0">
+                <a:solidFill>
+                  <a:schemeClr val="bg1"/>
+                </a:solidFill>
+                <a:latin typeface="Consolas"/>
+                <a:ea typeface="Consolas"/>
+                <a:cs typeface="Consolas"/>
+              </a:rPr>
+              <a:t>) </a:t>
+            </a:r>
+            <a:r>
+              <a:rPr lang="pt-BR" sz="1600" dirty="0" err="1">
+                <a:solidFill>
+                  <a:schemeClr val="bg1"/>
+                </a:solidFill>
+                <a:latin typeface="Consolas"/>
+                <a:ea typeface="Consolas"/>
+                <a:cs typeface="Consolas"/>
+              </a:rPr>
+              <a:t>authenticaon.getPrincipal</a:t>
+            </a:r>
+            <a:r>
+              <a:rPr lang="pt-BR" sz="1600" dirty="0">
+                <a:solidFill>
+                  <a:schemeClr val="bg1"/>
+                </a:solidFill>
+                <a:latin typeface="Consolas"/>
+                <a:ea typeface="Consolas"/>
+                <a:cs typeface="Consolas"/>
+              </a:rPr>
+              <a:t>());</a:t>
+            </a:r>
+            <a:endParaRPr sz="1600" dirty="0">
+              <a:solidFill>
+                <a:schemeClr val="bg1"/>
+              </a:solidFill>
+              <a:latin typeface="Consolas"/>
+              <a:ea typeface="Consolas"/>
+              <a:cs typeface="Consolas"/>
+            </a:endParaRPr>
+          </a:p>
+        </p:txBody>
+      </p:sp>
+    </p:spTree>
+    <p:extLst>
+      <p:ext uri="{BB962C8B-B14F-4D97-AF65-F5344CB8AC3E}">
+        <p14:creationId xmlns:p14="http://schemas.microsoft.com/office/powerpoint/2010/main" val="806004229"/>
       </p:ext>
     </p:extLst>
   </p:cSld>
@@ -9524,8 +10694,8 @@
         </p:nvSpPr>
         <p:spPr>
           <a:xfrm>
-            <a:off x="8270315" y="2297737"/>
-            <a:ext cx="1223697" cy="404274"/>
+            <a:off x="7973732" y="2297737"/>
+            <a:ext cx="1816862" cy="404274"/>
           </a:xfrm>
           <a:prstGeom prst="rect">
             <a:avLst/>
@@ -9548,13 +10718,13 @@
               </a:defRPr>
             </a:pPr>
             <a:r>
-              <a:rPr lang="pt-BR" b="1" dirty="0" err="1">
+              <a:rPr lang="pt-BR" b="1" dirty="0">
                 <a:solidFill>
                   <a:srgbClr val="0C945D"/>
                 </a:solidFill>
                 <a:latin typeface="Consolas" panose="020B0609020204030204" pitchFamily="49" charset="0"/>
               </a:rPr>
-              <a:t>Secret</a:t>
+              <a:t>Assinatura</a:t>
             </a:r>
             <a:endParaRPr b="1" dirty="0">
               <a:solidFill>
@@ -9647,18 +10817,11 @@
               </a:lnSpc>
             </a:pPr>
             <a:r>
-              <a:rPr lang="pt-BR" b="1" dirty="0" err="1">
-                <a:latin typeface="Times New Roman" panose="02020603050405020304" pitchFamily="18" charset="0"/>
-                <a:cs typeface="Times New Roman" panose="02020603050405020304" pitchFamily="18" charset="0"/>
-              </a:rPr>
-              <a:t>secret</a:t>
-            </a:r>
-            <a:r>
               <a:rPr lang="pt-BR" b="1" dirty="0">
                 <a:latin typeface="Times New Roman" panose="02020603050405020304" pitchFamily="18" charset="0"/>
                 <a:cs typeface="Times New Roman" panose="02020603050405020304" pitchFamily="18" charset="0"/>
               </a:rPr>
-              <a:t> —</a:t>
+              <a:t>Assinatura —</a:t>
             </a:r>
             <a:r>
               <a:rPr lang="pt-BR" dirty="0">
@@ -10543,7 +11706,7 @@
           <p:cNvPr id="2" name="Título 1">
             <a:extLst>
               <a:ext uri="{FF2B5EF4-FFF2-40B4-BE49-F238E27FC236}">
-                <a16:creationId xmlns:a16="http://schemas.microsoft.com/office/drawing/2014/main" id="{9F21BCB6-ABC5-FFF3-ABBA-068DA6F83378}"/>
+                <a16:creationId xmlns:a16="http://schemas.microsoft.com/office/drawing/2014/main" id="{5518A9D4-F52E-85F4-D81C-F432B68284E1}"/>
               </a:ext>
             </a:extLst>
           </p:cNvPr>
@@ -10561,7 +11724,7 @@
           <a:p>
             <a:r>
               <a:rPr lang="pt-BR" dirty="0"/>
-              <a:t>Entrada e retorno do método</a:t>
+              <a:t>HMAC256</a:t>
             </a:r>
           </a:p>
         </p:txBody>
@@ -10571,7 +11734,7 @@
           <p:cNvPr id="3" name="Espaço Reservado para Conteúdo 2">
             <a:extLst>
               <a:ext uri="{FF2B5EF4-FFF2-40B4-BE49-F238E27FC236}">
-                <a16:creationId xmlns:a16="http://schemas.microsoft.com/office/drawing/2014/main" id="{5E2F937E-4CCE-8FBC-AF07-8E087A74A18D}"/>
+                <a16:creationId xmlns:a16="http://schemas.microsoft.com/office/drawing/2014/main" id="{9EC520C4-45A9-3A63-E593-02467DAC8A6D}"/>
               </a:ext>
             </a:extLst>
           </p:cNvPr>
@@ -10582,261 +11745,112 @@
             <p:ph idx="1"/>
           </p:nvPr>
         </p:nvSpPr>
-        <p:spPr>
-          <a:xfrm>
-            <a:off x="592347" y="1844675"/>
-            <a:ext cx="11007306" cy="818314"/>
-          </a:xfrm>
-        </p:spPr>
+        <p:spPr/>
         <p:txBody>
           <a:bodyPr/>
           <a:lstStyle/>
           <a:p>
             <a:r>
+              <a:rPr lang="pt-BR" b="1" dirty="0"/>
+              <a:t>HMAC256</a:t>
+            </a:r>
+            <a:r>
               <a:rPr lang="pt-BR" dirty="0"/>
-              <a:t>O parâmetro usuario fornece os dados de quem acabou de fazer login.</a:t>
-            </a:r>
-          </a:p>
-        </p:txBody>
-      </p:sp>
-      <p:sp>
-        <p:nvSpPr>
-          <p:cNvPr id="11" name="Shape 20">
-            <a:extLst>
-              <a:ext uri="{FF2B5EF4-FFF2-40B4-BE49-F238E27FC236}">
-                <a16:creationId xmlns:a16="http://schemas.microsoft.com/office/drawing/2014/main" id="{EE383B37-7310-4563-9BC8-B173B5286B0D}"/>
-              </a:ext>
-            </a:extLst>
-          </p:cNvPr>
-          <p:cNvSpPr>
-            <a:spLocks noGrp="1"/>
-          </p:cNvSpPr>
-          <p:nvPr/>
-        </p:nvSpPr>
-        <p:spPr>
-          <a:xfrm>
-            <a:off x="2120294" y="2994862"/>
-            <a:ext cx="7951412" cy="1200150"/>
-          </a:xfrm>
-          <a:prstGeom prst="roundRect">
-            <a:avLst>
-              <a:gd name="adj" fmla="val 8081"/>
-            </a:avLst>
-          </a:prstGeom>
-          <a:solidFill>
-            <a:srgbClr val="1E1E1E"/>
-          </a:solidFill>
-          <a:ln>
-            <a:solidFill>
-              <a:srgbClr val="1E1E1E"/>
-            </a:solidFill>
-          </a:ln>
-        </p:spPr>
-        <p:txBody>
-          <a:bodyPr/>
-          <a:lstStyle/>
-          <a:p>
-            <a:endParaRPr/>
-          </a:p>
-        </p:txBody>
-      </p:sp>
-      <p:sp>
-        <p:nvSpPr>
-          <p:cNvPr id="4" name="Retângulo 3">
-            <a:extLst>
-              <a:ext uri="{FF2B5EF4-FFF2-40B4-BE49-F238E27FC236}">
-                <a16:creationId xmlns:a16="http://schemas.microsoft.com/office/drawing/2014/main" id="{3CE8AC7A-3364-4E97-BC2E-25CF018F1E04}"/>
-              </a:ext>
-            </a:extLst>
-          </p:cNvPr>
-          <p:cNvSpPr>
-            <a:spLocks noGrp="1"/>
-          </p:cNvSpPr>
-          <p:nvPr/>
-        </p:nvSpPr>
-        <p:spPr>
-          <a:xfrm>
-            <a:off x="2777290" y="3370527"/>
-            <a:ext cx="6637421" cy="436117"/>
-          </a:xfrm>
-          <a:prstGeom prst="rect">
-            <a:avLst/>
-          </a:prstGeom>
-        </p:spPr>
-        <p:txBody>
-          <a:bodyPr wrap="square">
-            <a:noAutofit/>
-          </a:bodyPr>
-          <a:lstStyle/>
-          <a:p>
-            <a:pPr algn="l">
-              <a:defRPr sz="2250">
-                <a:solidFill>
-                  <a:srgbClr val="D4D4D4"/>
-                </a:solidFill>
-                <a:latin typeface="Consolas"/>
-                <a:ea typeface="Consolas"/>
-                <a:cs typeface="Consolas"/>
-              </a:defRPr>
+              <a:t> é um método que configura o algoritmo </a:t>
+            </a:r>
+            <a:r>
+              <a:rPr lang="pt-BR" b="1" dirty="0"/>
+              <a:t>HMAC com SHA-256</a:t>
+            </a:r>
+            <a:r>
+              <a:rPr lang="pt-BR" dirty="0"/>
+              <a:t> e a </a:t>
+            </a:r>
+            <a:r>
+              <a:rPr lang="pt-BR" b="1" dirty="0"/>
+              <a:t>chave secreta</a:t>
+            </a:r>
+            <a:r>
+              <a:rPr lang="pt-BR" dirty="0"/>
+              <a:t> usada na assinatura do JWT. Essa assinatura permite verificar se o token foi gerado por quem conhece a chave e se seu conteúdo foi alterado.</a:t>
+            </a:r>
+          </a:p>
+          <a:p>
+            <a:endParaRPr lang="pt-BR" dirty="0"/>
+          </a:p>
+          <a:p>
+            <a:r>
+              <a:rPr lang="pt-BR" b="1" dirty="0"/>
+              <a:t>SHA-256 é uma função de </a:t>
+            </a:r>
+            <a:r>
+              <a:rPr lang="pt-BR" b="1" dirty="0" err="1"/>
+              <a:t>hash</a:t>
+            </a:r>
+            <a:r>
+              <a:rPr lang="pt-BR" b="1" dirty="0"/>
+              <a:t>:</a:t>
+            </a:r>
+            <a:r>
+              <a:rPr lang="pt-BR" dirty="0"/>
+              <a:t> recebe dados e gera um resultado de tamanho fixo, com </a:t>
+            </a:r>
+            <a:r>
+              <a:rPr lang="pt-BR" b="1" dirty="0"/>
+              <a:t>256 bits</a:t>
+            </a:r>
+            <a:r>
+              <a:rPr lang="pt-BR" dirty="0"/>
+              <a:t>, como uma “impressão digital” desses dados.</a:t>
+            </a:r>
+          </a:p>
+          <a:p>
+            <a:pPr marL="742950" lvl="1" indent="-285750">
+              <a:buFont typeface="Arial" panose="020B0604020202020204" pitchFamily="34" charset="0"/>
+              <a:buChar char="•"/>
             </a:pPr>
             <a:r>
-              <a:rPr sz="2250" dirty="0">
-                <a:solidFill>
-                  <a:srgbClr val="D4D4D4"/>
-                </a:solidFill>
-                <a:latin typeface="Consolas"/>
-                <a:ea typeface="Consolas"/>
-                <a:cs typeface="Consolas"/>
-              </a:rPr>
-              <a:t>public String </a:t>
-            </a:r>
-            <a:r>
-              <a:rPr sz="2250" dirty="0" err="1">
-                <a:solidFill>
-                  <a:srgbClr val="D4D4D4"/>
-                </a:solidFill>
-                <a:latin typeface="Consolas"/>
-                <a:ea typeface="Consolas"/>
-                <a:cs typeface="Consolas"/>
-              </a:rPr>
-              <a:t>gerarToken</a:t>
-            </a:r>
-            <a:r>
-              <a:rPr sz="2250" dirty="0">
-                <a:solidFill>
-                  <a:srgbClr val="D4D4D4"/>
-                </a:solidFill>
-                <a:latin typeface="Consolas"/>
-                <a:ea typeface="Consolas"/>
-                <a:cs typeface="Consolas"/>
-              </a:rPr>
-              <a:t>(Usuario usuario)</a:t>
-            </a:r>
-          </a:p>
-        </p:txBody>
-      </p:sp>
-      <p:sp>
-        <p:nvSpPr>
-          <p:cNvPr id="6" name="CaixaDeTexto 5">
-            <a:extLst>
-              <a:ext uri="{FF2B5EF4-FFF2-40B4-BE49-F238E27FC236}">
-                <a16:creationId xmlns:a16="http://schemas.microsoft.com/office/drawing/2014/main" id="{FAC7D119-8438-9E7D-368E-5849E4072D73}"/>
-              </a:ext>
-            </a:extLst>
-          </p:cNvPr>
-          <p:cNvSpPr txBox="1"/>
-          <p:nvPr/>
-        </p:nvSpPr>
-        <p:spPr>
-          <a:xfrm>
-            <a:off x="592347" y="4998804"/>
-            <a:ext cx="6112042" cy="873572"/>
-          </a:xfrm>
-          <a:prstGeom prst="rect">
-            <a:avLst/>
-          </a:prstGeom>
-          <a:noFill/>
-        </p:spPr>
-        <p:txBody>
-          <a:bodyPr wrap="square">
-            <a:spAutoFit/>
-          </a:bodyPr>
-          <a:lstStyle/>
-          <a:p>
-            <a:pPr algn="l">
-              <a:lnSpc>
-                <a:spcPct val="150000"/>
-              </a:lnSpc>
-              <a:defRPr sz="2100">
-                <a:solidFill>
-                  <a:srgbClr val="000000"/>
-                </a:solidFill>
-                <a:latin typeface="Calibri"/>
-                <a:ea typeface="Calibri"/>
-                <a:cs typeface="Calibri"/>
-              </a:defRPr>
+              <a:rPr lang="pt-BR" dirty="0"/>
+              <a:t>Os mesmos dados sempre geram o mesmo resultado.</a:t>
+            </a:r>
+          </a:p>
+          <a:p>
+            <a:pPr marL="742950" lvl="1" indent="-285750">
+              <a:buFont typeface="Arial" panose="020B0604020202020204" pitchFamily="34" charset="0"/>
+              <a:buChar char="•"/>
             </a:pPr>
             <a:r>
-              <a:rPr lang="pt-BR" sz="1800" dirty="0">
-                <a:solidFill>
-                  <a:srgbClr val="000000"/>
-                </a:solidFill>
-                <a:latin typeface="Times New Roman" panose="02020603050405020304" pitchFamily="18" charset="0"/>
-                <a:ea typeface="Calibri"/>
-                <a:cs typeface="Times New Roman" panose="02020603050405020304" pitchFamily="18" charset="0"/>
-              </a:rPr>
-              <a:t>Usuario </a:t>
-            </a:r>
-            <a:r>
-              <a:rPr lang="pt-BR" sz="1800" dirty="0" err="1">
-                <a:solidFill>
-                  <a:srgbClr val="000000"/>
-                </a:solidFill>
-                <a:latin typeface="Times New Roman" panose="02020603050405020304" pitchFamily="18" charset="0"/>
-                <a:ea typeface="Calibri"/>
-                <a:cs typeface="Times New Roman" panose="02020603050405020304" pitchFamily="18" charset="0"/>
-              </a:rPr>
-              <a:t>usuario</a:t>
-            </a:r>
-            <a:r>
-              <a:rPr lang="pt-BR" sz="1800" dirty="0">
-                <a:solidFill>
-                  <a:srgbClr val="000000"/>
-                </a:solidFill>
-                <a:latin typeface="Times New Roman" panose="02020603050405020304" pitchFamily="18" charset="0"/>
-                <a:ea typeface="Calibri"/>
-                <a:cs typeface="Times New Roman" panose="02020603050405020304" pitchFamily="18" charset="0"/>
-              </a:rPr>
-              <a:t>: objeto recebido.</a:t>
-            </a:r>
-          </a:p>
-          <a:p>
-            <a:pPr algn="l">
-              <a:lnSpc>
-                <a:spcPct val="150000"/>
-              </a:lnSpc>
-              <a:defRPr sz="2100">
-                <a:solidFill>
-                  <a:srgbClr val="000000"/>
-                </a:solidFill>
-                <a:latin typeface="Calibri"/>
-                <a:ea typeface="Calibri"/>
-                <a:cs typeface="Calibri"/>
-              </a:defRPr>
+              <a:rPr lang="pt-BR" dirty="0"/>
+              <a:t>Uma pequena alteração nos dados muda o resultado.</a:t>
+            </a:r>
+          </a:p>
+          <a:p>
+            <a:pPr marL="742950" lvl="1" indent="-285750">
+              <a:buFont typeface="Arial" panose="020B0604020202020204" pitchFamily="34" charset="0"/>
+              <a:buChar char="•"/>
             </a:pPr>
             <a:r>
-              <a:rPr lang="pt-BR" sz="1800" dirty="0" err="1">
-                <a:solidFill>
-                  <a:srgbClr val="000000"/>
-                </a:solidFill>
-                <a:latin typeface="Times New Roman" panose="02020603050405020304" pitchFamily="18" charset="0"/>
-                <a:ea typeface="Calibri"/>
-                <a:cs typeface="Times New Roman" panose="02020603050405020304" pitchFamily="18" charset="0"/>
-              </a:rPr>
-              <a:t>String</a:t>
-            </a:r>
-            <a:r>
-              <a:rPr lang="pt-BR" sz="1800" dirty="0">
-                <a:solidFill>
-                  <a:srgbClr val="000000"/>
-                </a:solidFill>
-                <a:latin typeface="Times New Roman" panose="02020603050405020304" pitchFamily="18" charset="0"/>
-                <a:ea typeface="Calibri"/>
-                <a:cs typeface="Times New Roman" panose="02020603050405020304" pitchFamily="18" charset="0"/>
-              </a:rPr>
-              <a:t>: tipo do token devolvido pelo método</a:t>
-            </a:r>
-            <a:endParaRPr lang="pt-BR" dirty="0">
-              <a:latin typeface="Times New Roman" panose="02020603050405020304" pitchFamily="18" charset="0"/>
-              <a:cs typeface="Times New Roman" panose="02020603050405020304" pitchFamily="18" charset="0"/>
-            </a:endParaRPr>
+              <a:rPr lang="pt-BR" dirty="0"/>
+              <a:t>Não existe uma operação de “descriptografar” o </a:t>
+            </a:r>
+            <a:r>
+              <a:rPr lang="pt-BR" dirty="0" err="1"/>
+              <a:t>hash</a:t>
+            </a:r>
+            <a:r>
+              <a:rPr lang="pt-BR" dirty="0"/>
+              <a:t> para recuperar os dados originais.</a:t>
+            </a:r>
+          </a:p>
+          <a:p>
+            <a:endParaRPr lang="pt-BR" dirty="0"/>
           </a:p>
         </p:txBody>
       </p:sp>
     </p:spTree>
     <p:extLst>
       <p:ext uri="{BB962C8B-B14F-4D97-AF65-F5344CB8AC3E}">
-        <p14:creationId xmlns:p14="http://schemas.microsoft.com/office/powerpoint/2010/main" val="884196848"/>
+        <p14:creationId xmlns:p14="http://schemas.microsoft.com/office/powerpoint/2010/main" val="2856161835"/>
       </p:ext>
     </p:extLst>
   </p:cSld>
@@ -10868,7 +11882,7 @@
           <p:cNvPr id="2" name="Título 1">
             <a:extLst>
               <a:ext uri="{FF2B5EF4-FFF2-40B4-BE49-F238E27FC236}">
-                <a16:creationId xmlns:a16="http://schemas.microsoft.com/office/drawing/2014/main" id="{8738858E-69E2-8A32-4D8D-61A4750C2960}"/>
+                <a16:creationId xmlns:a16="http://schemas.microsoft.com/office/drawing/2014/main" id="{9F21BCB6-ABC5-FFF3-ABBA-068DA6F83378}"/>
               </a:ext>
             </a:extLst>
           </p:cNvPr>
@@ -10881,247 +11895,45 @@
         </p:nvSpPr>
         <p:spPr/>
         <p:txBody>
-          <a:bodyPr>
-            <a:noAutofit/>
-          </a:bodyPr>
+          <a:bodyPr/>
           <a:lstStyle/>
           <a:p>
-            <a:pPr>
-              <a:defRPr sz="3000">
-                <a:solidFill>
-                  <a:srgbClr val="000000"/>
-                </a:solidFill>
-                <a:latin typeface="Calibri Light"/>
-                <a:ea typeface="Calibri Light"/>
-                <a:cs typeface="Calibri Light"/>
-              </a:defRPr>
-            </a:pPr>
-            <a:r>
-              <a:rPr sz="3000">
-                <a:solidFill>
-                  <a:srgbClr val="000000"/>
-                </a:solidFill>
-                <a:latin typeface="Calibri Light"/>
-                <a:ea typeface="Calibri Light"/>
-                <a:cs typeface="Calibri Light"/>
-              </a:rPr>
-              <a:t>Algoritmo e chave secreta</a:t>
-            </a:r>
-          </a:p>
-        </p:txBody>
-      </p:sp>
-      <p:sp>
-        <p:nvSpPr>
-          <p:cNvPr id="6" name="Espaço Reservado para Conteúdo 5">
-            <a:extLst>
-              <a:ext uri="{FF2B5EF4-FFF2-40B4-BE49-F238E27FC236}">
-                <a16:creationId xmlns:a16="http://schemas.microsoft.com/office/drawing/2014/main" id="{B24F9431-18D8-4DC9-B9CC-1BCF1A71C18D}"/>
+            <a:r>
+              <a:rPr lang="pt-BR" dirty="0"/>
+              <a:t>Entrada e retorno do método</a:t>
+            </a:r>
+          </a:p>
+        </p:txBody>
+      </p:sp>
+      <p:sp>
+        <p:nvSpPr>
+          <p:cNvPr id="3" name="Espaço Reservado para Conteúdo 2">
+            <a:extLst>
+              <a:ext uri="{FF2B5EF4-FFF2-40B4-BE49-F238E27FC236}">
+                <a16:creationId xmlns:a16="http://schemas.microsoft.com/office/drawing/2014/main" id="{5E2F937E-4CCE-8FBC-AF07-8E087A74A18D}"/>
               </a:ext>
             </a:extLst>
           </p:cNvPr>
           <p:cNvSpPr>
             <a:spLocks noGrp="1"/>
           </p:cNvSpPr>
-          <p:nvPr/>
+          <p:nvPr>
+            <p:ph idx="1"/>
+          </p:nvPr>
         </p:nvSpPr>
         <p:spPr>
           <a:xfrm>
-            <a:off x="685800" y="1809750"/>
-            <a:ext cx="10820400" cy="809625"/>
+            <a:off x="592347" y="1844675"/>
+            <a:ext cx="11007306" cy="818314"/>
           </a:xfrm>
-          <a:prstGeom prst="rect">
-            <a:avLst/>
-          </a:prstGeom>
         </p:spPr>
         <p:txBody>
-          <a:bodyPr>
-            <a:noAutofit/>
-          </a:bodyPr>
-          <a:lstStyle>
-            <a:lvl1pPr marL="0" indent="0" algn="just" defTabSz="914400">
-              <a:lnSpc>
-                <a:spcPct val="150000"/>
-              </a:lnSpc>
-              <a:spcBef>
-                <a:spcPts val="0"/>
-              </a:spcBef>
-              <a:buFont typeface="Arial"/>
-              <a:buNone/>
-              <a:defRPr sz="2000" kern="1200">
-                <a:solidFill>
-                  <a:schemeClr val="tx1"/>
-                </a:solidFill>
-                <a:latin typeface="Times New Roman"/>
-                <a:ea typeface="Times New Roman"/>
-                <a:cs typeface="Times New Roman"/>
-              </a:defRPr>
-            </a:lvl1pPr>
-            <a:lvl2pPr marL="457200" indent="0" algn="just" defTabSz="914400">
-              <a:lnSpc>
-                <a:spcPct val="150000"/>
-              </a:lnSpc>
-              <a:spcBef>
-                <a:spcPts val="0"/>
-              </a:spcBef>
-              <a:buFont typeface="Arial"/>
-              <a:buNone/>
-              <a:defRPr sz="1600" kern="1200">
-                <a:solidFill>
-                  <a:schemeClr val="tx1"/>
-                </a:solidFill>
-                <a:latin typeface="Times New Roman"/>
-                <a:ea typeface="Times New Roman"/>
-                <a:cs typeface="Times New Roman"/>
-              </a:defRPr>
-            </a:lvl2pPr>
-            <a:lvl3pPr marL="914400" indent="0" algn="just" defTabSz="914400">
-              <a:lnSpc>
-                <a:spcPct val="150000"/>
-              </a:lnSpc>
-              <a:spcBef>
-                <a:spcPts val="0"/>
-              </a:spcBef>
-              <a:buFont typeface="Arial"/>
-              <a:buNone/>
-              <a:defRPr sz="1400" kern="1200">
-                <a:solidFill>
-                  <a:schemeClr val="tx1"/>
-                </a:solidFill>
-                <a:latin typeface="Times New Roman"/>
-                <a:ea typeface="Times New Roman"/>
-                <a:cs typeface="Times New Roman"/>
-              </a:defRPr>
-            </a:lvl3pPr>
-            <a:lvl4pPr marL="1371600" indent="0" algn="just" defTabSz="914400">
-              <a:lnSpc>
-                <a:spcPct val="150000"/>
-              </a:lnSpc>
-              <a:spcBef>
-                <a:spcPts val="0"/>
-              </a:spcBef>
-              <a:buFont typeface="Arial"/>
-              <a:buNone/>
-              <a:defRPr sz="1200" kern="1200">
-                <a:solidFill>
-                  <a:schemeClr val="tx1"/>
-                </a:solidFill>
-                <a:latin typeface="Times New Roman"/>
-                <a:ea typeface="Times New Roman"/>
-                <a:cs typeface="Times New Roman"/>
-              </a:defRPr>
-            </a:lvl4pPr>
-            <a:lvl5pPr marL="1828800" indent="0" algn="just" defTabSz="914400">
-              <a:lnSpc>
-                <a:spcPct val="150000"/>
-              </a:lnSpc>
-              <a:spcBef>
-                <a:spcPts val="0"/>
-              </a:spcBef>
-              <a:buFont typeface="Arial"/>
-              <a:buNone/>
-              <a:defRPr sz="1000" kern="1200">
-                <a:solidFill>
-                  <a:schemeClr val="tx1"/>
-                </a:solidFill>
-                <a:latin typeface="Times New Roman"/>
-                <a:ea typeface="Times New Roman"/>
-                <a:cs typeface="Times New Roman"/>
-              </a:defRPr>
-            </a:lvl5pPr>
-            <a:lvl6pPr marL="2514600" indent="-228600" algn="l" defTabSz="914400">
-              <a:lnSpc>
-                <a:spcPct val="90000"/>
-              </a:lnSpc>
-              <a:spcBef>
-                <a:spcPts val="500"/>
-              </a:spcBef>
-              <a:buFont typeface="Arial"/>
-              <a:buChar char="•"/>
-              <a:defRPr sz="1800" kern="1200">
-                <a:solidFill>
-                  <a:schemeClr val="tx1"/>
-                </a:solidFill>
-                <a:latin typeface="+mn-lt"/>
-                <a:ea typeface="+mn-lt"/>
-                <a:cs typeface="+mn-lt"/>
-              </a:defRPr>
-            </a:lvl6pPr>
-            <a:lvl7pPr marL="2971800" indent="-228600" algn="l" defTabSz="914400">
-              <a:lnSpc>
-                <a:spcPct val="90000"/>
-              </a:lnSpc>
-              <a:spcBef>
-                <a:spcPts val="500"/>
-              </a:spcBef>
-              <a:buFont typeface="Arial"/>
-              <a:buChar char="•"/>
-              <a:defRPr sz="1800" kern="1200">
-                <a:solidFill>
-                  <a:schemeClr val="tx1"/>
-                </a:solidFill>
-                <a:latin typeface="+mn-lt"/>
-                <a:ea typeface="+mn-lt"/>
-                <a:cs typeface="+mn-lt"/>
-              </a:defRPr>
-            </a:lvl7pPr>
-            <a:lvl8pPr marL="3429000" indent="-228600" algn="l" defTabSz="914400">
-              <a:lnSpc>
-                <a:spcPct val="90000"/>
-              </a:lnSpc>
-              <a:spcBef>
-                <a:spcPts val="500"/>
-              </a:spcBef>
-              <a:buFont typeface="Arial"/>
-              <a:buChar char="•"/>
-              <a:defRPr sz="1800" kern="1200">
-                <a:solidFill>
-                  <a:schemeClr val="tx1"/>
-                </a:solidFill>
-                <a:latin typeface="+mn-lt"/>
-                <a:ea typeface="+mn-lt"/>
-                <a:cs typeface="+mn-lt"/>
-              </a:defRPr>
-            </a:lvl8pPr>
-            <a:lvl9pPr marL="3886200" indent="-228600" algn="l" defTabSz="914400">
-              <a:lnSpc>
-                <a:spcPct val="90000"/>
-              </a:lnSpc>
-              <a:spcBef>
-                <a:spcPts val="500"/>
-              </a:spcBef>
-              <a:buFont typeface="Arial"/>
-              <a:buChar char="•"/>
-              <a:defRPr sz="1800" kern="1200">
-                <a:solidFill>
-                  <a:schemeClr val="tx1"/>
-                </a:solidFill>
-                <a:latin typeface="+mn-lt"/>
-                <a:ea typeface="+mn-lt"/>
-                <a:cs typeface="+mn-lt"/>
-              </a:defRPr>
-            </a:lvl9pPr>
-          </a:lstStyle>
-          <a:p>
-            <a:pPr algn="l">
-              <a:defRPr sz="2175">
-                <a:solidFill>
-                  <a:srgbClr val="000000"/>
-                </a:solidFill>
-                <a:latin typeface="Calibri"/>
-                <a:ea typeface="Calibri"/>
-                <a:cs typeface="Calibri"/>
-              </a:defRPr>
-            </a:pPr>
-            <a:r>
-              <a:rPr sz="2175">
-                <a:solidFill>
-                  <a:srgbClr val="000000"/>
-                </a:solidFill>
-                <a:latin typeface="Calibri"/>
-                <a:ea typeface="Calibri"/>
-                <a:cs typeface="Calibri"/>
-              </a:rPr>
-              <a:t>HMAC256 define a assinatura HMAC com SHA-256.</a:t>
+          <a:bodyPr/>
+          <a:lstStyle/>
+          <a:p>
+            <a:r>
+              <a:rPr lang="pt-BR" dirty="0"/>
+              <a:t>O parâmetro usuario fornece os dados de quem acabou de fazer login.</a:t>
             </a:r>
           </a:p>
         </p:txBody>
@@ -11142,8 +11954,8 @@
         </p:nvSpPr>
         <p:spPr>
           <a:xfrm>
-            <a:off x="857250" y="2762250"/>
-            <a:ext cx="10477500" cy="1809750"/>
+            <a:off x="2136000" y="2994862"/>
+            <a:ext cx="7920000" cy="1200150"/>
           </a:xfrm>
           <a:prstGeom prst="roundRect">
             <a:avLst>
@@ -11183,8 +11995,8 @@
         </p:nvSpPr>
         <p:spPr>
           <a:xfrm>
-            <a:off x="1143000" y="3190875"/>
-            <a:ext cx="10001250" cy="2865120"/>
+            <a:off x="2777290" y="3370527"/>
+            <a:ext cx="6637421" cy="436117"/>
           </a:xfrm>
           <a:prstGeom prst="rect">
             <a:avLst/>
@@ -11197,7 +12009,7 @@
           <a:lstStyle/>
           <a:p>
             <a:pPr algn="l">
-              <a:defRPr sz="2100">
+              <a:defRPr sz="2250">
                 <a:solidFill>
                   <a:srgbClr val="D4D4D4"/>
                 </a:solidFill>
@@ -11207,53 +12019,73 @@
               </a:defRPr>
             </a:pPr>
             <a:r>
-              <a:rPr sz="2100">
-                <a:solidFill>
-                  <a:srgbClr val="D4D4D4"/>
-                </a:solidFill>
-                <a:latin typeface="Consolas"/>
-                <a:ea typeface="Consolas"/>
-                <a:cs typeface="Consolas"/>
-              </a:rPr>
-              <a:t>var algoritmo = Algorithm.HMAC256("12345678");</a:t>
-            </a:r>
-          </a:p>
-        </p:txBody>
-      </p:sp>
-      <p:sp>
-        <p:nvSpPr>
-          <p:cNvPr id="12" name="Retângulo 11">
-            <a:extLst>
-              <a:ext uri="{FF2B5EF4-FFF2-40B4-BE49-F238E27FC236}">
-                <a16:creationId xmlns:a16="http://schemas.microsoft.com/office/drawing/2014/main" id="{EC256F9A-320F-4308-970B-73CC74DE163B}"/>
-              </a:ext>
-            </a:extLst>
-          </p:cNvPr>
-          <p:cNvSpPr>
-            <a:spLocks noGrp="1"/>
-          </p:cNvSpPr>
+              <a:rPr sz="2250" dirty="0">
+                <a:solidFill>
+                  <a:srgbClr val="D4D4D4"/>
+                </a:solidFill>
+                <a:latin typeface="Consolas"/>
+                <a:ea typeface="Consolas"/>
+                <a:cs typeface="Consolas"/>
+              </a:rPr>
+              <a:t>public String </a:t>
+            </a:r>
+            <a:r>
+              <a:rPr sz="2250" dirty="0" err="1">
+                <a:solidFill>
+                  <a:srgbClr val="D4D4D4"/>
+                </a:solidFill>
+                <a:latin typeface="Consolas"/>
+                <a:ea typeface="Consolas"/>
+                <a:cs typeface="Consolas"/>
+              </a:rPr>
+              <a:t>gerarToken</a:t>
+            </a:r>
+            <a:r>
+              <a:rPr sz="2250" dirty="0">
+                <a:solidFill>
+                  <a:srgbClr val="D4D4D4"/>
+                </a:solidFill>
+                <a:latin typeface="Consolas"/>
+                <a:ea typeface="Consolas"/>
+                <a:cs typeface="Consolas"/>
+              </a:rPr>
+              <a:t>(Usuario usuario)</a:t>
+            </a:r>
+          </a:p>
+        </p:txBody>
+      </p:sp>
+      <p:sp>
+        <p:nvSpPr>
+          <p:cNvPr id="6" name="CaixaDeTexto 5">
+            <a:extLst>
+              <a:ext uri="{FF2B5EF4-FFF2-40B4-BE49-F238E27FC236}">
+                <a16:creationId xmlns:a16="http://schemas.microsoft.com/office/drawing/2014/main" id="{FAC7D119-8438-9E7D-368E-5849E4072D73}"/>
+              </a:ext>
+            </a:extLst>
+          </p:cNvPr>
+          <p:cNvSpPr txBox="1"/>
           <p:nvPr/>
         </p:nvSpPr>
         <p:spPr>
           <a:xfrm>
-            <a:off x="685800" y="4905375"/>
-            <a:ext cx="10820400" cy="1333500"/>
+            <a:off x="592347" y="4998804"/>
+            <a:ext cx="6112042" cy="873572"/>
           </a:xfrm>
           <a:prstGeom prst="rect">
             <a:avLst/>
           </a:prstGeom>
           <a:noFill/>
-          <a:ln w="0">
-            <a:noFill/>
-          </a:ln>
         </p:spPr>
         <p:txBody>
-          <a:bodyPr>
-            <a:noAutofit/>
+          <a:bodyPr wrap="square">
+            <a:spAutoFit/>
           </a:bodyPr>
           <a:lstStyle/>
           <a:p>
             <a:pPr algn="l">
+              <a:lnSpc>
+                <a:spcPct val="150000"/>
+              </a:lnSpc>
               <a:defRPr sz="2100">
                 <a:solidFill>
                   <a:srgbClr val="000000"/>
@@ -11264,244 +12096,86 @@
               </a:defRPr>
             </a:pPr>
             <a:r>
-              <a:rPr sz="2100" dirty="0">
+              <a:rPr lang="pt-BR" sz="1800" dirty="0">
+                <a:solidFill>
+                  <a:srgbClr val="000000"/>
+                </a:solidFill>
+                <a:latin typeface="Times New Roman" panose="02020603050405020304" pitchFamily="18" charset="0"/>
+                <a:ea typeface="Calibri"/>
+                <a:cs typeface="Times New Roman" panose="02020603050405020304" pitchFamily="18" charset="0"/>
+              </a:rPr>
+              <a:t>Usuario </a:t>
+            </a:r>
+            <a:r>
+              <a:rPr lang="pt-BR" sz="1800" dirty="0" err="1">
+                <a:solidFill>
+                  <a:srgbClr val="000000"/>
+                </a:solidFill>
+                <a:latin typeface="Times New Roman" panose="02020603050405020304" pitchFamily="18" charset="0"/>
+                <a:ea typeface="Calibri"/>
+                <a:cs typeface="Times New Roman" panose="02020603050405020304" pitchFamily="18" charset="0"/>
+              </a:rPr>
+              <a:t>usuario</a:t>
+            </a:r>
+            <a:r>
+              <a:rPr lang="pt-BR" sz="1800" dirty="0">
+                <a:solidFill>
+                  <a:srgbClr val="000000"/>
+                </a:solidFill>
+                <a:latin typeface="Times New Roman" panose="02020603050405020304" pitchFamily="18" charset="0"/>
+                <a:ea typeface="Calibri"/>
+                <a:cs typeface="Times New Roman" panose="02020603050405020304" pitchFamily="18" charset="0"/>
+              </a:rPr>
+              <a:t>: objeto recebido.</a:t>
+            </a:r>
+          </a:p>
+          <a:p>
+            <a:pPr algn="l">
+              <a:lnSpc>
+                <a:spcPct val="150000"/>
+              </a:lnSpc>
+              <a:defRPr sz="2100">
                 <a:solidFill>
                   <a:srgbClr val="000000"/>
                 </a:solidFill>
                 <a:latin typeface="Calibri"/>
                 <a:ea typeface="Calibri"/>
                 <a:cs typeface="Calibri"/>
-              </a:rPr>
-              <a:t>A </a:t>
-            </a:r>
-            <a:r>
-              <a:rPr sz="2100" dirty="0" err="1">
+              </a:defRPr>
+            </a:pPr>
+            <a:r>
+              <a:rPr lang="pt-BR" sz="1800" dirty="0" err="1">
                 <a:solidFill>
                   <a:srgbClr val="000000"/>
                 </a:solidFill>
-                <a:latin typeface="Calibri"/>
+                <a:latin typeface="Times New Roman" panose="02020603050405020304" pitchFamily="18" charset="0"/>
                 <a:ea typeface="Calibri"/>
-                <a:cs typeface="Calibri"/>
-              </a:rPr>
-              <a:t>chave</a:t>
-            </a:r>
-            <a:r>
-              <a:rPr sz="2100" dirty="0">
+                <a:cs typeface="Times New Roman" panose="02020603050405020304" pitchFamily="18" charset="0"/>
+              </a:rPr>
+              <a:t>String</a:t>
+            </a:r>
+            <a:r>
+              <a:rPr lang="pt-BR" sz="1800" dirty="0">
                 <a:solidFill>
                   <a:srgbClr val="000000"/>
                 </a:solidFill>
-                <a:latin typeface="Calibri"/>
+                <a:latin typeface="Times New Roman" panose="02020603050405020304" pitchFamily="18" charset="0"/>
                 <a:ea typeface="Calibri"/>
-                <a:cs typeface="Calibri"/>
-              </a:rPr>
-              <a:t> secreta </a:t>
-            </a:r>
-            <a:r>
-              <a:rPr sz="2100" dirty="0" err="1">
-                <a:solidFill>
-                  <a:srgbClr val="000000"/>
-                </a:solidFill>
-                <a:latin typeface="Calibri"/>
-                <a:ea typeface="Calibri"/>
-                <a:cs typeface="Calibri"/>
-              </a:rPr>
-              <a:t>participa</a:t>
-            </a:r>
-            <a:r>
-              <a:rPr sz="2100" dirty="0">
-                <a:solidFill>
-                  <a:srgbClr val="000000"/>
-                </a:solidFill>
-                <a:latin typeface="Calibri"/>
-                <a:ea typeface="Calibri"/>
-                <a:cs typeface="Calibri"/>
-              </a:rPr>
-              <a:t> da </a:t>
-            </a:r>
-            <a:r>
-              <a:rPr sz="2100" dirty="0" err="1">
-                <a:solidFill>
-                  <a:srgbClr val="000000"/>
-                </a:solidFill>
-                <a:latin typeface="Calibri"/>
-                <a:ea typeface="Calibri"/>
-                <a:cs typeface="Calibri"/>
-              </a:rPr>
-              <a:t>assinatura</a:t>
-            </a:r>
-            <a:r>
-              <a:rPr sz="2100" dirty="0">
-                <a:solidFill>
-                  <a:srgbClr val="000000"/>
-                </a:solidFill>
-                <a:latin typeface="Calibri"/>
-                <a:ea typeface="Calibri"/>
-                <a:cs typeface="Calibri"/>
-              </a:rPr>
-              <a:t> e da </a:t>
-            </a:r>
-            <a:r>
-              <a:rPr sz="2100" dirty="0" err="1">
-                <a:solidFill>
-                  <a:srgbClr val="000000"/>
-                </a:solidFill>
-                <a:latin typeface="Calibri"/>
-                <a:ea typeface="Calibri"/>
-                <a:cs typeface="Calibri"/>
-              </a:rPr>
-              <a:t>verificação</a:t>
-            </a:r>
-            <a:r>
-              <a:rPr sz="2100" dirty="0">
-                <a:solidFill>
-                  <a:srgbClr val="000000"/>
-                </a:solidFill>
-                <a:latin typeface="Calibri"/>
-                <a:ea typeface="Calibri"/>
-                <a:cs typeface="Calibri"/>
-              </a:rPr>
-              <a:t>.</a:t>
-            </a:r>
-          </a:p>
-          <a:p>
-            <a:pPr algn="l">
-              <a:defRPr sz="2100">
-                <a:solidFill>
-                  <a:srgbClr val="000000"/>
-                </a:solidFill>
-                <a:latin typeface="Calibri"/>
-                <a:ea typeface="Calibri"/>
-                <a:cs typeface="Calibri"/>
-              </a:defRPr>
-            </a:pPr>
-            <a:r>
-              <a:rPr sz="2100" dirty="0">
-                <a:solidFill>
-                  <a:srgbClr val="000000"/>
-                </a:solidFill>
-                <a:latin typeface="Calibri"/>
-                <a:ea typeface="Calibri"/>
-                <a:cs typeface="Calibri"/>
-              </a:rPr>
-              <a:t>“12345678” é </a:t>
-            </a:r>
-            <a:r>
-              <a:rPr sz="2100" dirty="0" err="1">
-                <a:solidFill>
-                  <a:srgbClr val="000000"/>
-                </a:solidFill>
-                <a:latin typeface="Calibri"/>
-                <a:ea typeface="Calibri"/>
-                <a:cs typeface="Calibri"/>
-              </a:rPr>
-              <a:t>didática</a:t>
-            </a:r>
-            <a:r>
-              <a:rPr sz="2100" dirty="0">
-                <a:solidFill>
-                  <a:srgbClr val="000000"/>
-                </a:solidFill>
-                <a:latin typeface="Calibri"/>
-                <a:ea typeface="Calibri"/>
-                <a:cs typeface="Calibri"/>
-              </a:rPr>
-              <a:t>. Em </a:t>
-            </a:r>
-            <a:r>
-              <a:rPr sz="2100" dirty="0" err="1">
-                <a:solidFill>
-                  <a:srgbClr val="000000"/>
-                </a:solidFill>
-                <a:latin typeface="Calibri"/>
-                <a:ea typeface="Calibri"/>
-                <a:cs typeface="Calibri"/>
-              </a:rPr>
-              <a:t>produção</a:t>
-            </a:r>
-            <a:r>
-              <a:rPr sz="2100" dirty="0">
-                <a:solidFill>
-                  <a:srgbClr val="000000"/>
-                </a:solidFill>
-                <a:latin typeface="Calibri"/>
-                <a:ea typeface="Calibri"/>
-                <a:cs typeface="Calibri"/>
-              </a:rPr>
-              <a:t>, use </a:t>
-            </a:r>
-            <a:r>
-              <a:rPr sz="2100" dirty="0" err="1">
-                <a:solidFill>
-                  <a:srgbClr val="000000"/>
-                </a:solidFill>
-                <a:latin typeface="Calibri"/>
-                <a:ea typeface="Calibri"/>
-                <a:cs typeface="Calibri"/>
-              </a:rPr>
-              <a:t>uma</a:t>
-            </a:r>
-            <a:r>
-              <a:rPr sz="2100" dirty="0">
-                <a:solidFill>
-                  <a:srgbClr val="000000"/>
-                </a:solidFill>
-                <a:latin typeface="Calibri"/>
-                <a:ea typeface="Calibri"/>
-                <a:cs typeface="Calibri"/>
-              </a:rPr>
-              <a:t> </a:t>
-            </a:r>
-            <a:r>
-              <a:rPr sz="2100" dirty="0" err="1">
-                <a:solidFill>
-                  <a:srgbClr val="000000"/>
-                </a:solidFill>
-                <a:latin typeface="Calibri"/>
-                <a:ea typeface="Calibri"/>
-                <a:cs typeface="Calibri"/>
-              </a:rPr>
-              <a:t>chave</a:t>
-            </a:r>
-            <a:r>
-              <a:rPr sz="2100" dirty="0">
-                <a:solidFill>
-                  <a:srgbClr val="000000"/>
-                </a:solidFill>
-                <a:latin typeface="Calibri"/>
-                <a:ea typeface="Calibri"/>
-                <a:cs typeface="Calibri"/>
-              </a:rPr>
-              <a:t> forte fora do </a:t>
-            </a:r>
-            <a:r>
-              <a:rPr sz="2100" dirty="0" err="1">
-                <a:solidFill>
-                  <a:srgbClr val="000000"/>
-                </a:solidFill>
-                <a:latin typeface="Calibri"/>
-                <a:ea typeface="Calibri"/>
-                <a:cs typeface="Calibri"/>
-              </a:rPr>
-              <a:t>código</a:t>
-            </a:r>
-            <a:r>
-              <a:rPr sz="2100" dirty="0">
-                <a:solidFill>
-                  <a:srgbClr val="000000"/>
-                </a:solidFill>
-                <a:latin typeface="Calibri"/>
-                <a:ea typeface="Calibri"/>
-                <a:cs typeface="Calibri"/>
-              </a:rPr>
-              <a:t>.</a:t>
-            </a:r>
+                <a:cs typeface="Times New Roman" panose="02020603050405020304" pitchFamily="18" charset="0"/>
+              </a:rPr>
+              <a:t>: tipo do token devolvido pelo método</a:t>
+            </a:r>
+            <a:endParaRPr lang="pt-BR" dirty="0">
+              <a:latin typeface="Times New Roman" panose="02020603050405020304" pitchFamily="18" charset="0"/>
+              <a:cs typeface="Times New Roman" panose="02020603050405020304" pitchFamily="18" charset="0"/>
+            </a:endParaRPr>
           </a:p>
         </p:txBody>
       </p:sp>
     </p:spTree>
     <p:extLst>
       <p:ext uri="{BB962C8B-B14F-4D97-AF65-F5344CB8AC3E}">
-        <p14:creationId xmlns:p14="http://schemas.microsoft.com/office/powerpoint/2010/main" val="760294497"/>
+        <p14:creationId xmlns:p14="http://schemas.microsoft.com/office/powerpoint/2010/main" val="884196848"/>
       </p:ext>
     </p:extLst>
   </p:cSld>
